--- a/2_semester/kursovaya/result/6_presentaciya.pptx
+++ b/2_semester/kursovaya/result/6_presentaciya.pptx
@@ -80,7 +80,18 @@
                 <a:uFillTx/>
                 <a:latin typeface="Calibri"/>
               </a:rPr>
-              <a:t>Click to move the slide</a:t>
+              <a:t>Click to move </a:t>
+            </a:r>
+            <a:r>
+              <a:rPr lang="en-US" sz="1800" b="0" u="none" strike="noStrike">
+                <a:solidFill>
+                  <a:schemeClr val="dk1"/>
+                </a:solidFill>
+                <a:effectLst/>
+                <a:uFillTx/>
+                <a:latin typeface="Calibri"/>
+              </a:rPr>
+              <a:t>the slide</a:t>
             </a:r>
             <a:endParaRPr lang="en-US" sz="1800" b="0" u="none" strike="noStrike">
               <a:solidFill>
@@ -133,7 +144,73 @@
                 <a:uFillTx/>
                 <a:latin typeface="Arial"/>
               </a:rPr>
-              <a:t>Click to edit the notes format</a:t>
+              <a:t>Click </a:t>
+            </a:r>
+            <a:r>
+              <a:rPr lang="en-US" sz="2000" b="0" u="none" strike="noStrike">
+                <a:solidFill>
+                  <a:srgbClr val="000000"/>
+                </a:solidFill>
+                <a:effectLst/>
+                <a:uFillTx/>
+                <a:latin typeface="Arial"/>
+              </a:rPr>
+              <a:t>to </a:t>
+            </a:r>
+            <a:r>
+              <a:rPr lang="en-US" sz="2000" b="0" u="none" strike="noStrike">
+                <a:solidFill>
+                  <a:srgbClr val="000000"/>
+                </a:solidFill>
+                <a:effectLst/>
+                <a:uFillTx/>
+                <a:latin typeface="Arial"/>
+              </a:rPr>
+              <a:t>edit </a:t>
+            </a:r>
+            <a:r>
+              <a:rPr lang="en-US" sz="2000" b="0" u="none" strike="noStrike">
+                <a:solidFill>
+                  <a:srgbClr val="000000"/>
+                </a:solidFill>
+                <a:effectLst/>
+                <a:uFillTx/>
+                <a:latin typeface="Arial"/>
+              </a:rPr>
+              <a:t>the </a:t>
+            </a:r>
+            <a:r>
+              <a:rPr lang="en-US" sz="2000" b="0" u="none" strike="noStrike">
+                <a:solidFill>
+                  <a:srgbClr val="000000"/>
+                </a:solidFill>
+                <a:effectLst/>
+                <a:uFillTx/>
+                <a:latin typeface="Arial"/>
+              </a:rPr>
+              <a:t>notes </a:t>
+            </a:r>
+            <a:r>
+              <a:rPr lang="en-US" sz="2000" b="0" u="none" strike="noStrike">
+                <a:solidFill>
+                  <a:srgbClr val="000000"/>
+                </a:solidFill>
+                <a:effectLst/>
+                <a:uFillTx/>
+                <a:latin typeface="Arial"/>
+              </a:rPr>
+              <a:t>form</a:t>
+            </a:r>
+            <a:r>
+              <a:rPr lang="en-US" sz="2000" b="0" u="none" strike="noStrike">
+                <a:solidFill>
+                  <a:srgbClr val="000000"/>
+                </a:solidFill>
+                <a:effectLst/>
+                <a:uFillTx/>
+                <a:latin typeface="Arial"/>
+              </a:rPr>
+              <a:t>at</a:t>
             </a:r>
             <a:endParaRPr lang="en-US" sz="2000" b="0" u="none" strike="noStrike">
               <a:solidFill>
@@ -375,7 +452,7 @@
             <a:pPr indent="0" algn="r">
               <a:buNone/>
             </a:pPr>
-            <a:fld id="{2EC66FD2-975F-4F5A-9B69-1D6B9CE608F6}" type="slidenum">
+            <a:fld id="{1FE5DCC3-78E1-40BE-B627-2CC617C8BE50}" type="slidenum">
               <a:rPr lang="en-US" sz="1400" b="0" u="none" strike="noStrike">
                 <a:solidFill>
                   <a:srgbClr val="000000"/>
@@ -433,7 +510,7 @@
         <p:spPr>
           <a:xfrm>
             <a:off x="685800" y="1143000"/>
-            <a:ext cx="5486040" cy="3085920"/>
+            <a:ext cx="5485680" cy="3085560"/>
           </a:xfrm>
           <a:prstGeom prst="rect">
             <a:avLst/>
@@ -456,7 +533,7 @@
         <p:spPr>
           <a:xfrm>
             <a:off x="685800" y="4400640"/>
-            <a:ext cx="5486040" cy="3600000"/>
+            <a:ext cx="5485680" cy="3599640"/>
           </a:xfrm>
           <a:prstGeom prst="rect">
             <a:avLst/>
@@ -476,6 +553,9 @@
                 <a:spcPct val="100000"/>
               </a:lnSpc>
               <a:buNone/>
+              <a:tabLst>
+                <a:tab pos="0" algn="l"/>
+              </a:tabLst>
             </a:pPr>
             <a:r>
               <a:rPr lang="en-US" sz="1200" b="0" u="none" strike="noStrike">
@@ -503,6 +583,9 @@
                 <a:spcPct val="100000"/>
               </a:lnSpc>
               <a:buNone/>
+              <a:tabLst>
+                <a:tab pos="0" algn="l"/>
+              </a:tabLst>
             </a:pPr>
             <a:endParaRPr lang="en-US" sz="1200" b="0" u="none" strike="noStrike">
               <a:solidFill>
@@ -519,6 +602,9 @@
                 <a:spcPct val="100000"/>
               </a:lnSpc>
               <a:buNone/>
+              <a:tabLst>
+                <a:tab pos="0" algn="l"/>
+              </a:tabLst>
             </a:pPr>
             <a:r>
               <a:rPr lang="en-US" sz="1200" b="0" u="none" strike="noStrike">
@@ -555,7 +641,7 @@
         <p:spPr>
           <a:xfrm>
             <a:off x="3884760" y="8685360"/>
-            <a:ext cx="2971440" cy="458280"/>
+            <a:ext cx="2971080" cy="457920"/>
           </a:xfrm>
           <a:prstGeom prst="rect">
             <a:avLst/>
@@ -575,6 +661,9 @@
                 <a:spcPct val="100000"/>
               </a:lnSpc>
               <a:buNone/>
+              <a:tabLst>
+                <a:tab pos="0" algn="l"/>
+              </a:tabLst>
               <a:defRPr lang="en-US" sz="1200" b="0" u="none" strike="noStrike">
                 <a:solidFill>
                   <a:schemeClr val="dk1"/>
@@ -592,8 +681,11 @@
                 <a:spcPct val="100000"/>
               </a:lnSpc>
               <a:buNone/>
-            </a:pPr>
-            <a:fld id="{E28C36E0-0932-4872-BE35-6FEB776E3CCC}" type="slidenum">
+              <a:tabLst>
+                <a:tab pos="0" algn="l"/>
+              </a:tabLst>
+            </a:pPr>
+            <a:fld id="{70BC7FA5-7C20-440A-9B52-49D9E4268F6D}" type="slidenum">
               <a:rPr lang="en-US" sz="1200" b="0" u="none" strike="noStrike">
                 <a:solidFill>
                   <a:schemeClr val="dk1"/>
@@ -603,7 +695,7 @@
                 <a:latin typeface="+mn-lt"/>
                 <a:ea typeface="+mn-ea"/>
               </a:rPr>
-              <a:t>&lt;number&gt;</a:t>
+              <a:t>1</a:t>
             </a:fld>
             <a:endParaRPr lang="en-US" sz="1200" b="0" u="none" strike="noStrike">
               <a:solidFill>
@@ -651,7 +743,7 @@
         <p:spPr>
           <a:xfrm>
             <a:off x="685800" y="1143000"/>
-            <a:ext cx="5486040" cy="3085920"/>
+            <a:ext cx="5485680" cy="3085560"/>
           </a:xfrm>
           <a:prstGeom prst="rect">
             <a:avLst/>
@@ -674,7 +766,7 @@
         <p:spPr>
           <a:xfrm>
             <a:off x="685800" y="4400640"/>
-            <a:ext cx="5486040" cy="3600000"/>
+            <a:ext cx="5485680" cy="3599640"/>
           </a:xfrm>
           <a:prstGeom prst="rect">
             <a:avLst/>
@@ -694,6 +786,9 @@
                 <a:spcPct val="100000"/>
               </a:lnSpc>
               <a:buNone/>
+              <a:tabLst>
+                <a:tab pos="0" algn="l"/>
+              </a:tabLst>
             </a:pPr>
             <a:r>
               <a:rPr lang="en-US" sz="1200" b="0" u="none" strike="noStrike">
@@ -721,6 +816,9 @@
                 <a:spcPct val="100000"/>
               </a:lnSpc>
               <a:buNone/>
+              <a:tabLst>
+                <a:tab pos="0" algn="l"/>
+              </a:tabLst>
             </a:pPr>
             <a:endParaRPr lang="en-US" sz="1200" b="0" u="none" strike="noStrike">
               <a:solidFill>
@@ -737,6 +835,9 @@
                 <a:spcPct val="100000"/>
               </a:lnSpc>
               <a:buNone/>
+              <a:tabLst>
+                <a:tab pos="0" algn="l"/>
+              </a:tabLst>
             </a:pPr>
             <a:r>
               <a:rPr lang="en-US" sz="1200" b="0" u="none" strike="noStrike">
@@ -764,6 +865,9 @@
                 <a:spcPct val="100000"/>
               </a:lnSpc>
               <a:buNone/>
+              <a:tabLst>
+                <a:tab pos="0" algn="l"/>
+              </a:tabLst>
             </a:pPr>
             <a:endParaRPr lang="en-US" sz="1200" b="0" u="none" strike="noStrike">
               <a:solidFill>
@@ -780,6 +884,9 @@
                 <a:spcPct val="100000"/>
               </a:lnSpc>
               <a:buNone/>
+              <a:tabLst>
+                <a:tab pos="0" algn="l"/>
+              </a:tabLst>
             </a:pPr>
             <a:r>
               <a:rPr lang="en-US" sz="1200" b="0" u="none" strike="noStrike">
@@ -807,6 +914,9 @@
                 <a:spcPct val="100000"/>
               </a:lnSpc>
               <a:buNone/>
+              <a:tabLst>
+                <a:tab pos="0" algn="l"/>
+              </a:tabLst>
             </a:pPr>
             <a:endParaRPr lang="en-US" sz="1200" b="0" u="none" strike="noStrike">
               <a:solidFill>
@@ -823,6 +933,9 @@
                 <a:spcPct val="100000"/>
               </a:lnSpc>
               <a:buNone/>
+              <a:tabLst>
+                <a:tab pos="0" algn="l"/>
+              </a:tabLst>
             </a:pPr>
             <a:r>
               <a:rPr lang="en-US" sz="1200" b="0" u="none" strike="noStrike">
@@ -850,6 +963,9 @@
                 <a:spcPct val="100000"/>
               </a:lnSpc>
               <a:buNone/>
+              <a:tabLst>
+                <a:tab pos="0" algn="l"/>
+              </a:tabLst>
             </a:pPr>
             <a:endParaRPr lang="en-US" sz="1200" b="0" u="none" strike="noStrike">
               <a:solidFill>
@@ -866,6 +982,9 @@
                 <a:spcPct val="100000"/>
               </a:lnSpc>
               <a:buNone/>
+              <a:tabLst>
+                <a:tab pos="0" algn="l"/>
+              </a:tabLst>
             </a:pPr>
             <a:r>
               <a:rPr lang="en-US" sz="1200" b="0" u="none" strike="noStrike">
@@ -893,6 +1012,9 @@
                 <a:spcPct val="100000"/>
               </a:lnSpc>
               <a:buNone/>
+              <a:tabLst>
+                <a:tab pos="0" algn="l"/>
+              </a:tabLst>
             </a:pPr>
             <a:endParaRPr lang="en-US" sz="1200" b="0" u="none" strike="noStrike">
               <a:solidFill>
@@ -909,6 +1031,9 @@
                 <a:spcPct val="100000"/>
               </a:lnSpc>
               <a:buNone/>
+              <a:tabLst>
+                <a:tab pos="0" algn="l"/>
+              </a:tabLst>
             </a:pPr>
             <a:r>
               <a:rPr lang="en-US" sz="1200" b="0" u="none" strike="noStrike">
@@ -945,7 +1070,7 @@
         <p:spPr>
           <a:xfrm>
             <a:off x="3884760" y="8685360"/>
-            <a:ext cx="2971440" cy="458280"/>
+            <a:ext cx="2971080" cy="457920"/>
           </a:xfrm>
           <a:prstGeom prst="rect">
             <a:avLst/>
@@ -965,6 +1090,9 @@
                 <a:spcPct val="100000"/>
               </a:lnSpc>
               <a:buNone/>
+              <a:tabLst>
+                <a:tab pos="0" algn="l"/>
+              </a:tabLst>
               <a:defRPr lang="en-US" sz="1200" b="0" u="none" strike="noStrike">
                 <a:solidFill>
                   <a:schemeClr val="dk1"/>
@@ -982,8 +1110,11 @@
                 <a:spcPct val="100000"/>
               </a:lnSpc>
               <a:buNone/>
-            </a:pPr>
-            <a:fld id="{B5499990-79EC-46B6-AFFD-E82D3827C5EF}" type="slidenum">
+              <a:tabLst>
+                <a:tab pos="0" algn="l"/>
+              </a:tabLst>
+            </a:pPr>
+            <a:fld id="{5C65B9B0-4DB7-43AD-82AA-7A547FD4499E}" type="slidenum">
               <a:rPr lang="en-US" sz="1200" b="0" u="none" strike="noStrike">
                 <a:solidFill>
                   <a:schemeClr val="dk1"/>
@@ -993,7 +1124,7 @@
                 <a:latin typeface="+mn-lt"/>
                 <a:ea typeface="+mn-ea"/>
               </a:rPr>
-              <a:t>&lt;number&gt;</a:t>
+              <a:t>1</a:t>
             </a:fld>
             <a:endParaRPr lang="en-US" sz="1200" b="0" u="none" strike="noStrike">
               <a:solidFill>
@@ -1041,7 +1172,7 @@
         <p:spPr>
           <a:xfrm>
             <a:off x="685800" y="1143000"/>
-            <a:ext cx="5486040" cy="3085920"/>
+            <a:ext cx="5485680" cy="3085560"/>
           </a:xfrm>
           <a:prstGeom prst="rect">
             <a:avLst/>
@@ -1064,7 +1195,7 @@
         <p:spPr>
           <a:xfrm>
             <a:off x="685800" y="4400640"/>
-            <a:ext cx="5486040" cy="3600000"/>
+            <a:ext cx="5485680" cy="3599640"/>
           </a:xfrm>
           <a:prstGeom prst="rect">
             <a:avLst/>
@@ -1084,6 +1215,9 @@
                 <a:spcPct val="100000"/>
               </a:lnSpc>
               <a:buNone/>
+              <a:tabLst>
+                <a:tab pos="0" algn="l"/>
+              </a:tabLst>
             </a:pPr>
             <a:r>
               <a:rPr lang="en-US" sz="1200" b="0" u="none" strike="noStrike">
@@ -1111,6 +1245,9 @@
                 <a:spcPct val="100000"/>
               </a:lnSpc>
               <a:buNone/>
+              <a:tabLst>
+                <a:tab pos="0" algn="l"/>
+              </a:tabLst>
             </a:pPr>
             <a:endParaRPr lang="en-US" sz="1200" b="0" u="none" strike="noStrike">
               <a:solidFill>
@@ -1127,6 +1264,9 @@
                 <a:spcPct val="100000"/>
               </a:lnSpc>
               <a:buNone/>
+              <a:tabLst>
+                <a:tab pos="0" algn="l"/>
+              </a:tabLst>
             </a:pPr>
             <a:r>
               <a:rPr lang="en-US" sz="1200" b="0" u="none" strike="noStrike">
@@ -1154,6 +1294,9 @@
                 <a:spcPct val="100000"/>
               </a:lnSpc>
               <a:buNone/>
+              <a:tabLst>
+                <a:tab pos="0" algn="l"/>
+              </a:tabLst>
             </a:pPr>
             <a:endParaRPr lang="en-US" sz="1200" b="0" u="none" strike="noStrike">
               <a:solidFill>
@@ -1170,6 +1313,9 @@
                 <a:spcPct val="100000"/>
               </a:lnSpc>
               <a:buNone/>
+              <a:tabLst>
+                <a:tab pos="0" algn="l"/>
+              </a:tabLst>
             </a:pPr>
             <a:r>
               <a:rPr lang="en-US" sz="1200" b="0" u="none" strike="noStrike">
@@ -1197,6 +1343,9 @@
                 <a:spcPct val="100000"/>
               </a:lnSpc>
               <a:buNone/>
+              <a:tabLst>
+                <a:tab pos="0" algn="l"/>
+              </a:tabLst>
             </a:pPr>
             <a:endParaRPr lang="en-US" sz="1200" b="0" u="none" strike="noStrike">
               <a:solidFill>
@@ -1213,6 +1362,9 @@
                 <a:spcPct val="100000"/>
               </a:lnSpc>
               <a:buNone/>
+              <a:tabLst>
+                <a:tab pos="0" algn="l"/>
+              </a:tabLst>
             </a:pPr>
             <a:r>
               <a:rPr lang="en-US" sz="1200" b="0" u="none" strike="noStrike">
@@ -1249,7 +1401,7 @@
         <p:spPr>
           <a:xfrm>
             <a:off x="3884760" y="8685360"/>
-            <a:ext cx="2971440" cy="458280"/>
+            <a:ext cx="2971080" cy="457920"/>
           </a:xfrm>
           <a:prstGeom prst="rect">
             <a:avLst/>
@@ -1269,6 +1421,9 @@
                 <a:spcPct val="100000"/>
               </a:lnSpc>
               <a:buNone/>
+              <a:tabLst>
+                <a:tab pos="0" algn="l"/>
+              </a:tabLst>
               <a:defRPr lang="en-US" sz="1200" b="0" u="none" strike="noStrike">
                 <a:solidFill>
                   <a:schemeClr val="dk1"/>
@@ -1286,8 +1441,11 @@
                 <a:spcPct val="100000"/>
               </a:lnSpc>
               <a:buNone/>
-            </a:pPr>
-            <a:fld id="{B917B1FE-FD14-4D70-912A-ED7722B81BA1}" type="slidenum">
+              <a:tabLst>
+                <a:tab pos="0" algn="l"/>
+              </a:tabLst>
+            </a:pPr>
+            <a:fld id="{2704402E-4880-4A46-AF59-A3F7542E4447}" type="slidenum">
               <a:rPr lang="en-US" sz="1200" b="0" u="none" strike="noStrike">
                 <a:solidFill>
                   <a:schemeClr val="dk1"/>
@@ -1297,7 +1455,7 @@
                 <a:latin typeface="+mn-lt"/>
                 <a:ea typeface="+mn-ea"/>
               </a:rPr>
-              <a:t>&lt;number&gt;</a:t>
+              <a:t>1</a:t>
             </a:fld>
             <a:endParaRPr lang="en-US" sz="1200" b="0" u="none" strike="noStrike">
               <a:solidFill>
@@ -1345,7 +1503,7 @@
         <p:spPr>
           <a:xfrm>
             <a:off x="685800" y="1143000"/>
-            <a:ext cx="5486040" cy="3085920"/>
+            <a:ext cx="5485680" cy="3085560"/>
           </a:xfrm>
           <a:prstGeom prst="rect">
             <a:avLst/>
@@ -1368,7 +1526,7 @@
         <p:spPr>
           <a:xfrm>
             <a:off x="685800" y="4400640"/>
-            <a:ext cx="5486040" cy="3600000"/>
+            <a:ext cx="5485680" cy="3599640"/>
           </a:xfrm>
           <a:prstGeom prst="rect">
             <a:avLst/>
@@ -1388,6 +1546,9 @@
                 <a:spcPct val="100000"/>
               </a:lnSpc>
               <a:buNone/>
+              <a:tabLst>
+                <a:tab pos="0" algn="l"/>
+              </a:tabLst>
             </a:pPr>
             <a:r>
               <a:rPr lang="en-US" sz="1200" b="0" u="none" strike="noStrike">
@@ -1415,6 +1576,9 @@
                 <a:spcPct val="100000"/>
               </a:lnSpc>
               <a:buNone/>
+              <a:tabLst>
+                <a:tab pos="0" algn="l"/>
+              </a:tabLst>
             </a:pPr>
             <a:endParaRPr lang="en-US" sz="1200" b="0" u="none" strike="noStrike">
               <a:solidFill>
@@ -1431,6 +1595,9 @@
                 <a:spcPct val="100000"/>
               </a:lnSpc>
               <a:buNone/>
+              <a:tabLst>
+                <a:tab pos="0" algn="l"/>
+              </a:tabLst>
             </a:pPr>
             <a:r>
               <a:rPr lang="en-US" sz="1200" b="0" u="none" strike="noStrike">
@@ -1458,6 +1625,9 @@
                 <a:spcPct val="100000"/>
               </a:lnSpc>
               <a:buNone/>
+              <a:tabLst>
+                <a:tab pos="0" algn="l"/>
+              </a:tabLst>
             </a:pPr>
             <a:endParaRPr lang="en-US" sz="1200" b="0" u="none" strike="noStrike">
               <a:solidFill>
@@ -1474,6 +1644,9 @@
                 <a:spcPct val="100000"/>
               </a:lnSpc>
               <a:buNone/>
+              <a:tabLst>
+                <a:tab pos="0" algn="l"/>
+              </a:tabLst>
             </a:pPr>
             <a:r>
               <a:rPr lang="en-US" sz="1200" b="0" u="none" strike="noStrike">
@@ -1501,6 +1674,9 @@
                 <a:spcPct val="100000"/>
               </a:lnSpc>
               <a:buNone/>
+              <a:tabLst>
+                <a:tab pos="0" algn="l"/>
+              </a:tabLst>
             </a:pPr>
             <a:endParaRPr lang="en-US" sz="1200" b="0" u="none" strike="noStrike">
               <a:solidFill>
@@ -1517,6 +1693,9 @@
                 <a:spcPct val="100000"/>
               </a:lnSpc>
               <a:buNone/>
+              <a:tabLst>
+                <a:tab pos="0" algn="l"/>
+              </a:tabLst>
             </a:pPr>
             <a:r>
               <a:rPr lang="en-US" sz="1200" b="0" u="none" strike="noStrike">
@@ -1544,6 +1723,9 @@
                 <a:spcPct val="100000"/>
               </a:lnSpc>
               <a:buNone/>
+              <a:tabLst>
+                <a:tab pos="0" algn="l"/>
+              </a:tabLst>
             </a:pPr>
             <a:endParaRPr lang="en-US" sz="1200" b="0" u="none" strike="noStrike">
               <a:solidFill>
@@ -1560,6 +1742,9 @@
                 <a:spcPct val="100000"/>
               </a:lnSpc>
               <a:buNone/>
+              <a:tabLst>
+                <a:tab pos="0" algn="l"/>
+              </a:tabLst>
             </a:pPr>
             <a:r>
               <a:rPr lang="en-US" sz="1200" b="0" u="none" strike="noStrike">
@@ -1587,6 +1772,9 @@
                 <a:spcPct val="100000"/>
               </a:lnSpc>
               <a:buNone/>
+              <a:tabLst>
+                <a:tab pos="0" algn="l"/>
+              </a:tabLst>
             </a:pPr>
             <a:endParaRPr lang="en-US" sz="1200" b="0" u="none" strike="noStrike">
               <a:solidFill>
@@ -1603,6 +1791,9 @@
                 <a:spcPct val="100000"/>
               </a:lnSpc>
               <a:buNone/>
+              <a:tabLst>
+                <a:tab pos="0" algn="l"/>
+              </a:tabLst>
             </a:pPr>
             <a:r>
               <a:rPr lang="en-US" sz="1200" b="0" u="none" strike="noStrike">
@@ -1630,6 +1821,9 @@
                 <a:spcPct val="100000"/>
               </a:lnSpc>
               <a:buNone/>
+              <a:tabLst>
+                <a:tab pos="0" algn="l"/>
+              </a:tabLst>
             </a:pPr>
             <a:endParaRPr lang="en-US" sz="1200" b="0" u="none" strike="noStrike">
               <a:solidFill>
@@ -1646,6 +1840,9 @@
                 <a:spcPct val="100000"/>
               </a:lnSpc>
               <a:buNone/>
+              <a:tabLst>
+                <a:tab pos="0" algn="l"/>
+              </a:tabLst>
             </a:pPr>
             <a:r>
               <a:rPr lang="en-US" sz="1200" b="0" u="none" strike="noStrike">
@@ -1682,7 +1879,7 @@
         <p:spPr>
           <a:xfrm>
             <a:off x="3884760" y="8685360"/>
-            <a:ext cx="2971440" cy="458280"/>
+            <a:ext cx="2971080" cy="457920"/>
           </a:xfrm>
           <a:prstGeom prst="rect">
             <a:avLst/>
@@ -1702,6 +1899,9 @@
                 <a:spcPct val="100000"/>
               </a:lnSpc>
               <a:buNone/>
+              <a:tabLst>
+                <a:tab pos="0" algn="l"/>
+              </a:tabLst>
               <a:defRPr lang="en-US" sz="1200" b="0" u="none" strike="noStrike">
                 <a:solidFill>
                   <a:schemeClr val="dk1"/>
@@ -1719,8 +1919,11 @@
                 <a:spcPct val="100000"/>
               </a:lnSpc>
               <a:buNone/>
-            </a:pPr>
-            <a:fld id="{D0138018-7196-4617-A470-5CC4F50DE884}" type="slidenum">
+              <a:tabLst>
+                <a:tab pos="0" algn="l"/>
+              </a:tabLst>
+            </a:pPr>
+            <a:fld id="{88255411-EA09-48A6-85EE-8F43EFBB904E}" type="slidenum">
               <a:rPr lang="en-US" sz="1200" b="0" u="none" strike="noStrike">
                 <a:solidFill>
                   <a:schemeClr val="dk1"/>
@@ -1730,7 +1933,7 @@
                 <a:latin typeface="+mn-lt"/>
                 <a:ea typeface="+mn-ea"/>
               </a:rPr>
-              <a:t>&lt;number&gt;</a:t>
+              <a:t>1</a:t>
             </a:fld>
             <a:endParaRPr lang="en-US" sz="1200" b="0" u="none" strike="noStrike">
               <a:solidFill>
@@ -1778,7 +1981,7 @@
         <p:spPr>
           <a:xfrm>
             <a:off x="685800" y="1143000"/>
-            <a:ext cx="5486040" cy="3085920"/>
+            <a:ext cx="5485680" cy="3085560"/>
           </a:xfrm>
           <a:prstGeom prst="rect">
             <a:avLst/>
@@ -1801,7 +2004,7 @@
         <p:spPr>
           <a:xfrm>
             <a:off x="685800" y="4400640"/>
-            <a:ext cx="5486040" cy="3600000"/>
+            <a:ext cx="5485680" cy="3599640"/>
           </a:xfrm>
           <a:prstGeom prst="rect">
             <a:avLst/>
@@ -1821,6 +2024,9 @@
                 <a:spcPct val="100000"/>
               </a:lnSpc>
               <a:buNone/>
+              <a:tabLst>
+                <a:tab pos="0" algn="l"/>
+              </a:tabLst>
             </a:pPr>
             <a:r>
               <a:rPr lang="en-US" sz="1200" b="0" u="none" strike="noStrike">
@@ -1848,6 +2054,9 @@
                 <a:spcPct val="100000"/>
               </a:lnSpc>
               <a:buNone/>
+              <a:tabLst>
+                <a:tab pos="0" algn="l"/>
+              </a:tabLst>
             </a:pPr>
             <a:endParaRPr lang="en-US" sz="1200" b="0" u="none" strike="noStrike">
               <a:solidFill>
@@ -1864,6 +2073,9 @@
                 <a:spcPct val="100000"/>
               </a:lnSpc>
               <a:buNone/>
+              <a:tabLst>
+                <a:tab pos="0" algn="l"/>
+              </a:tabLst>
             </a:pPr>
             <a:r>
               <a:rPr lang="en-US" sz="1200" b="0" u="none" strike="noStrike">
@@ -1891,6 +2103,9 @@
                 <a:spcPct val="100000"/>
               </a:lnSpc>
               <a:buNone/>
+              <a:tabLst>
+                <a:tab pos="0" algn="l"/>
+              </a:tabLst>
             </a:pPr>
             <a:endParaRPr lang="en-US" sz="1200" b="0" u="none" strike="noStrike">
               <a:solidFill>
@@ -1907,6 +2122,9 @@
                 <a:spcPct val="100000"/>
               </a:lnSpc>
               <a:buNone/>
+              <a:tabLst>
+                <a:tab pos="0" algn="l"/>
+              </a:tabLst>
             </a:pPr>
             <a:r>
               <a:rPr lang="en-US" sz="1200" b="0" u="none" strike="noStrike">
@@ -1934,6 +2152,9 @@
                 <a:spcPct val="100000"/>
               </a:lnSpc>
               <a:buNone/>
+              <a:tabLst>
+                <a:tab pos="0" algn="l"/>
+              </a:tabLst>
             </a:pPr>
             <a:endParaRPr lang="en-US" sz="1200" b="0" u="none" strike="noStrike">
               <a:solidFill>
@@ -1950,6 +2171,9 @@
                 <a:spcPct val="100000"/>
               </a:lnSpc>
               <a:buNone/>
+              <a:tabLst>
+                <a:tab pos="0" algn="l"/>
+              </a:tabLst>
             </a:pPr>
             <a:r>
               <a:rPr lang="en-US" sz="1200" b="0" u="none" strike="noStrike">
@@ -1986,7 +2210,7 @@
         <p:spPr>
           <a:xfrm>
             <a:off x="3884760" y="8685360"/>
-            <a:ext cx="2971440" cy="458280"/>
+            <a:ext cx="2971080" cy="457920"/>
           </a:xfrm>
           <a:prstGeom prst="rect">
             <a:avLst/>
@@ -2006,6 +2230,9 @@
                 <a:spcPct val="100000"/>
               </a:lnSpc>
               <a:buNone/>
+              <a:tabLst>
+                <a:tab pos="0" algn="l"/>
+              </a:tabLst>
               <a:defRPr lang="en-US" sz="1200" b="0" u="none" strike="noStrike">
                 <a:solidFill>
                   <a:schemeClr val="dk1"/>
@@ -2023,8 +2250,11 @@
                 <a:spcPct val="100000"/>
               </a:lnSpc>
               <a:buNone/>
-            </a:pPr>
-            <a:fld id="{962292E7-9A31-4203-91AC-A80E0DCBFA7A}" type="slidenum">
+              <a:tabLst>
+                <a:tab pos="0" algn="l"/>
+              </a:tabLst>
+            </a:pPr>
+            <a:fld id="{B359D3A5-3087-415C-A0D4-A09F216EB270}" type="slidenum">
               <a:rPr lang="en-US" sz="1200" b="0" u="none" strike="noStrike">
                 <a:solidFill>
                   <a:schemeClr val="dk1"/>
@@ -2034,7 +2264,7 @@
                 <a:latin typeface="+mn-lt"/>
                 <a:ea typeface="+mn-ea"/>
               </a:rPr>
-              <a:t>&lt;number&gt;</a:t>
+              <a:t>1</a:t>
             </a:fld>
             <a:endParaRPr lang="en-US" sz="1200" b="0" u="none" strike="noStrike">
               <a:solidFill>
@@ -2082,7 +2312,7 @@
         <p:spPr>
           <a:xfrm>
             <a:off x="685800" y="1143000"/>
-            <a:ext cx="5486040" cy="3085920"/>
+            <a:ext cx="5485680" cy="3085560"/>
           </a:xfrm>
           <a:prstGeom prst="rect">
             <a:avLst/>
@@ -2105,7 +2335,7 @@
         <p:spPr>
           <a:xfrm>
             <a:off x="685800" y="4400640"/>
-            <a:ext cx="5486040" cy="3600000"/>
+            <a:ext cx="5485680" cy="3599640"/>
           </a:xfrm>
           <a:prstGeom prst="rect">
             <a:avLst/>
@@ -2125,6 +2355,9 @@
                 <a:spcPct val="100000"/>
               </a:lnSpc>
               <a:buNone/>
+              <a:tabLst>
+                <a:tab pos="0" algn="l"/>
+              </a:tabLst>
             </a:pPr>
             <a:r>
               <a:rPr lang="en-US" sz="1200" b="0" u="none" strike="noStrike">
@@ -2152,6 +2385,9 @@
                 <a:spcPct val="100000"/>
               </a:lnSpc>
               <a:buNone/>
+              <a:tabLst>
+                <a:tab pos="0" algn="l"/>
+              </a:tabLst>
             </a:pPr>
             <a:endParaRPr lang="en-US" sz="1200" b="0" u="none" strike="noStrike">
               <a:solidFill>
@@ -2168,6 +2404,9 @@
                 <a:spcPct val="100000"/>
               </a:lnSpc>
               <a:buNone/>
+              <a:tabLst>
+                <a:tab pos="0" algn="l"/>
+              </a:tabLst>
             </a:pPr>
             <a:r>
               <a:rPr lang="en-US" sz="1200" b="0" u="none" strike="noStrike">
@@ -2195,6 +2434,9 @@
                 <a:spcPct val="100000"/>
               </a:lnSpc>
               <a:buNone/>
+              <a:tabLst>
+                <a:tab pos="0" algn="l"/>
+              </a:tabLst>
             </a:pPr>
             <a:r>
               <a:rPr lang="en-US" sz="1200" b="0" u="none" strike="noStrike">
@@ -2222,6 +2464,9 @@
                 <a:spcPct val="100000"/>
               </a:lnSpc>
               <a:buNone/>
+              <a:tabLst>
+                <a:tab pos="0" algn="l"/>
+              </a:tabLst>
             </a:pPr>
             <a:r>
               <a:rPr lang="en-US" sz="1200" b="0" u="none" strike="noStrike">
@@ -2249,6 +2494,9 @@
                 <a:spcPct val="100000"/>
               </a:lnSpc>
               <a:buNone/>
+              <a:tabLst>
+                <a:tab pos="0" algn="l"/>
+              </a:tabLst>
             </a:pPr>
             <a:r>
               <a:rPr lang="en-US" sz="1200" b="0" u="none" strike="noStrike">
@@ -2276,6 +2524,9 @@
                 <a:spcPct val="100000"/>
               </a:lnSpc>
               <a:buNone/>
+              <a:tabLst>
+                <a:tab pos="0" algn="l"/>
+              </a:tabLst>
             </a:pPr>
             <a:r>
               <a:rPr lang="en-US" sz="1200" b="0" u="none" strike="noStrike">
@@ -2303,6 +2554,9 @@
                 <a:spcPct val="100000"/>
               </a:lnSpc>
               <a:buNone/>
+              <a:tabLst>
+                <a:tab pos="0" algn="l"/>
+              </a:tabLst>
             </a:pPr>
             <a:r>
               <a:rPr lang="en-US" sz="1200" b="0" u="none" strike="noStrike">
@@ -2330,6 +2584,9 @@
                 <a:spcPct val="100000"/>
               </a:lnSpc>
               <a:buNone/>
+              <a:tabLst>
+                <a:tab pos="0" algn="l"/>
+              </a:tabLst>
             </a:pPr>
             <a:r>
               <a:rPr lang="en-US" sz="1200" b="0" u="none" strike="noStrike">
@@ -2357,6 +2614,9 @@
                 <a:spcPct val="100000"/>
               </a:lnSpc>
               <a:buNone/>
+              <a:tabLst>
+                <a:tab pos="0" algn="l"/>
+              </a:tabLst>
             </a:pPr>
             <a:endParaRPr lang="en-US" sz="1200" b="0" u="none" strike="noStrike">
               <a:solidFill>
@@ -2373,6 +2633,9 @@
                 <a:spcPct val="100000"/>
               </a:lnSpc>
               <a:buNone/>
+              <a:tabLst>
+                <a:tab pos="0" algn="l"/>
+              </a:tabLst>
             </a:pPr>
             <a:r>
               <a:rPr lang="en-US" sz="1200" b="0" u="none" strike="noStrike">
@@ -2409,7 +2672,7 @@
         <p:spPr>
           <a:xfrm>
             <a:off x="3884760" y="8685360"/>
-            <a:ext cx="2971440" cy="458280"/>
+            <a:ext cx="2971080" cy="457920"/>
           </a:xfrm>
           <a:prstGeom prst="rect">
             <a:avLst/>
@@ -2429,6 +2692,9 @@
                 <a:spcPct val="100000"/>
               </a:lnSpc>
               <a:buNone/>
+              <a:tabLst>
+                <a:tab pos="0" algn="l"/>
+              </a:tabLst>
               <a:defRPr lang="en-US" sz="1200" b="0" u="none" strike="noStrike">
                 <a:solidFill>
                   <a:schemeClr val="dk1"/>
@@ -2446,8 +2712,11 @@
                 <a:spcPct val="100000"/>
               </a:lnSpc>
               <a:buNone/>
-            </a:pPr>
-            <a:fld id="{4D0B9369-AC0E-4ACD-B657-3D0FC3B4912B}" type="slidenum">
+              <a:tabLst>
+                <a:tab pos="0" algn="l"/>
+              </a:tabLst>
+            </a:pPr>
+            <a:fld id="{8ABFD8B5-BA28-46DB-A84D-11C7AD8E6B84}" type="slidenum">
               <a:rPr lang="en-US" sz="1200" b="0" u="none" strike="noStrike">
                 <a:solidFill>
                   <a:schemeClr val="dk1"/>
@@ -2457,7 +2726,7 @@
                 <a:latin typeface="+mn-lt"/>
                 <a:ea typeface="+mn-ea"/>
               </a:rPr>
-              <a:t>&lt;number&gt;</a:t>
+              <a:t>1</a:t>
             </a:fld>
             <a:endParaRPr lang="en-US" sz="1200" b="0" u="none" strike="noStrike">
               <a:solidFill>
@@ -2505,7 +2774,7 @@
         <p:spPr>
           <a:xfrm>
             <a:off x="685800" y="1143000"/>
-            <a:ext cx="5486040" cy="3085920"/>
+            <a:ext cx="5485680" cy="3085560"/>
           </a:xfrm>
           <a:prstGeom prst="rect">
             <a:avLst/>
@@ -2528,7 +2797,7 @@
         <p:spPr>
           <a:xfrm>
             <a:off x="685800" y="4400640"/>
-            <a:ext cx="5486040" cy="3600000"/>
+            <a:ext cx="5485680" cy="3599640"/>
           </a:xfrm>
           <a:prstGeom prst="rect">
             <a:avLst/>
@@ -2548,6 +2817,9 @@
                 <a:spcPct val="100000"/>
               </a:lnSpc>
               <a:buNone/>
+              <a:tabLst>
+                <a:tab pos="0" algn="l"/>
+              </a:tabLst>
             </a:pPr>
             <a:r>
               <a:rPr lang="en-US" sz="1200" b="0" u="none" strike="noStrike">
@@ -2575,6 +2847,9 @@
                 <a:spcPct val="100000"/>
               </a:lnSpc>
               <a:buNone/>
+              <a:tabLst>
+                <a:tab pos="0" algn="l"/>
+              </a:tabLst>
             </a:pPr>
             <a:endParaRPr lang="en-US" sz="1200" b="0" u="none" strike="noStrike">
               <a:solidFill>
@@ -2591,6 +2866,9 @@
                 <a:spcPct val="100000"/>
               </a:lnSpc>
               <a:buNone/>
+              <a:tabLst>
+                <a:tab pos="0" algn="l"/>
+              </a:tabLst>
             </a:pPr>
             <a:r>
               <a:rPr lang="en-US" sz="1200" b="0" u="none" strike="noStrike">
@@ -2618,6 +2896,9 @@
                 <a:spcPct val="100000"/>
               </a:lnSpc>
               <a:buNone/>
+              <a:tabLst>
+                <a:tab pos="0" algn="l"/>
+              </a:tabLst>
             </a:pPr>
             <a:endParaRPr lang="en-US" sz="1200" b="0" u="none" strike="noStrike">
               <a:solidFill>
@@ -2634,6 +2915,9 @@
                 <a:spcPct val="100000"/>
               </a:lnSpc>
               <a:buNone/>
+              <a:tabLst>
+                <a:tab pos="0" algn="l"/>
+              </a:tabLst>
             </a:pPr>
             <a:r>
               <a:rPr lang="en-US" sz="1200" b="0" u="none" strike="noStrike">
@@ -2661,6 +2945,9 @@
                 <a:spcPct val="100000"/>
               </a:lnSpc>
               <a:buNone/>
+              <a:tabLst>
+                <a:tab pos="0" algn="l"/>
+              </a:tabLst>
             </a:pPr>
             <a:endParaRPr lang="en-US" sz="1200" b="0" u="none" strike="noStrike">
               <a:solidFill>
@@ -2677,6 +2964,9 @@
                 <a:spcPct val="100000"/>
               </a:lnSpc>
               <a:buNone/>
+              <a:tabLst>
+                <a:tab pos="0" algn="l"/>
+              </a:tabLst>
             </a:pPr>
             <a:r>
               <a:rPr lang="en-US" sz="1200" b="0" u="none" strike="noStrike">
@@ -2704,6 +2994,9 @@
                 <a:spcPct val="100000"/>
               </a:lnSpc>
               <a:buNone/>
+              <a:tabLst>
+                <a:tab pos="0" algn="l"/>
+              </a:tabLst>
             </a:pPr>
             <a:endParaRPr lang="en-US" sz="1200" b="0" u="none" strike="noStrike">
               <a:solidFill>
@@ -2720,6 +3013,9 @@
                 <a:spcPct val="100000"/>
               </a:lnSpc>
               <a:buNone/>
+              <a:tabLst>
+                <a:tab pos="0" algn="l"/>
+              </a:tabLst>
             </a:pPr>
             <a:r>
               <a:rPr lang="en-US" sz="1200" b="0" u="none" strike="noStrike">
@@ -2756,7 +3052,7 @@
         <p:spPr>
           <a:xfrm>
             <a:off x="3884760" y="8685360"/>
-            <a:ext cx="2971440" cy="458280"/>
+            <a:ext cx="2971080" cy="457920"/>
           </a:xfrm>
           <a:prstGeom prst="rect">
             <a:avLst/>
@@ -2776,6 +3072,9 @@
                 <a:spcPct val="100000"/>
               </a:lnSpc>
               <a:buNone/>
+              <a:tabLst>
+                <a:tab pos="0" algn="l"/>
+              </a:tabLst>
               <a:defRPr lang="en-US" sz="1200" b="0" u="none" strike="noStrike">
                 <a:solidFill>
                   <a:schemeClr val="dk1"/>
@@ -2793,8 +3092,11 @@
                 <a:spcPct val="100000"/>
               </a:lnSpc>
               <a:buNone/>
-            </a:pPr>
-            <a:fld id="{01A8C14E-BCB5-4AD3-9BC9-0EE74DA227A4}" type="slidenum">
+              <a:tabLst>
+                <a:tab pos="0" algn="l"/>
+              </a:tabLst>
+            </a:pPr>
+            <a:fld id="{8806E449-72C2-44B3-8C8C-8165545DDC1A}" type="slidenum">
               <a:rPr lang="en-US" sz="1200" b="0" u="none" strike="noStrike">
                 <a:solidFill>
                   <a:schemeClr val="dk1"/>
@@ -2804,7 +3106,7 @@
                 <a:latin typeface="+mn-lt"/>
                 <a:ea typeface="+mn-ea"/>
               </a:rPr>
-              <a:t>&lt;number&gt;</a:t>
+              <a:t>1</a:t>
             </a:fld>
             <a:endParaRPr lang="en-US" sz="1200" b="0" u="none" strike="noStrike">
               <a:solidFill>
@@ -2852,7 +3154,7 @@
         <p:spPr>
           <a:xfrm>
             <a:off x="685800" y="1143000"/>
-            <a:ext cx="5486040" cy="3085920"/>
+            <a:ext cx="5485680" cy="3085560"/>
           </a:xfrm>
           <a:prstGeom prst="rect">
             <a:avLst/>
@@ -2875,7 +3177,7 @@
         <p:spPr>
           <a:xfrm>
             <a:off x="685800" y="4400640"/>
-            <a:ext cx="5486040" cy="3600000"/>
+            <a:ext cx="5485680" cy="3599640"/>
           </a:xfrm>
           <a:prstGeom prst="rect">
             <a:avLst/>
@@ -2895,6 +3197,9 @@
                 <a:spcPct val="100000"/>
               </a:lnSpc>
               <a:buNone/>
+              <a:tabLst>
+                <a:tab pos="0" algn="l"/>
+              </a:tabLst>
             </a:pPr>
             <a:r>
               <a:rPr lang="en-US" sz="1200" b="0" u="none" strike="noStrike">
@@ -2922,6 +3227,9 @@
                 <a:spcPct val="100000"/>
               </a:lnSpc>
               <a:buNone/>
+              <a:tabLst>
+                <a:tab pos="0" algn="l"/>
+              </a:tabLst>
             </a:pPr>
             <a:endParaRPr lang="en-US" sz="1200" b="0" u="none" strike="noStrike">
               <a:solidFill>
@@ -2938,6 +3246,9 @@
                 <a:spcPct val="100000"/>
               </a:lnSpc>
               <a:buNone/>
+              <a:tabLst>
+                <a:tab pos="0" algn="l"/>
+              </a:tabLst>
             </a:pPr>
             <a:r>
               <a:rPr lang="en-US" sz="1200" b="0" u="none" strike="noStrike">
@@ -2965,6 +3276,9 @@
                 <a:spcPct val="100000"/>
               </a:lnSpc>
               <a:buNone/>
+              <a:tabLst>
+                <a:tab pos="0" algn="l"/>
+              </a:tabLst>
             </a:pPr>
             <a:endParaRPr lang="en-US" sz="1200" b="0" u="none" strike="noStrike">
               <a:solidFill>
@@ -2981,6 +3295,9 @@
                 <a:spcPct val="100000"/>
               </a:lnSpc>
               <a:buNone/>
+              <a:tabLst>
+                <a:tab pos="0" algn="l"/>
+              </a:tabLst>
             </a:pPr>
             <a:r>
               <a:rPr lang="en-US" sz="1200" b="0" u="none" strike="noStrike">
@@ -3008,6 +3325,9 @@
                 <a:spcPct val="100000"/>
               </a:lnSpc>
               <a:buNone/>
+              <a:tabLst>
+                <a:tab pos="0" algn="l"/>
+              </a:tabLst>
             </a:pPr>
             <a:endParaRPr lang="en-US" sz="1200" b="0" u="none" strike="noStrike">
               <a:solidFill>
@@ -3024,6 +3344,9 @@
                 <a:spcPct val="100000"/>
               </a:lnSpc>
               <a:buNone/>
+              <a:tabLst>
+                <a:tab pos="0" algn="l"/>
+              </a:tabLst>
             </a:pPr>
             <a:r>
               <a:rPr lang="en-US" sz="1200" b="0" u="none" strike="noStrike">
@@ -3060,7 +3383,7 @@
         <p:spPr>
           <a:xfrm>
             <a:off x="3884760" y="8685360"/>
-            <a:ext cx="2971440" cy="458280"/>
+            <a:ext cx="2971080" cy="457920"/>
           </a:xfrm>
           <a:prstGeom prst="rect">
             <a:avLst/>
@@ -3080,6 +3403,9 @@
                 <a:spcPct val="100000"/>
               </a:lnSpc>
               <a:buNone/>
+              <a:tabLst>
+                <a:tab pos="0" algn="l"/>
+              </a:tabLst>
               <a:defRPr lang="en-US" sz="1200" b="0" u="none" strike="noStrike">
                 <a:solidFill>
                   <a:schemeClr val="dk1"/>
@@ -3097,8 +3423,11 @@
                 <a:spcPct val="100000"/>
               </a:lnSpc>
               <a:buNone/>
-            </a:pPr>
-            <a:fld id="{9CABAAA4-D071-4A9F-8FB5-57E9DEB5DD69}" type="slidenum">
+              <a:tabLst>
+                <a:tab pos="0" algn="l"/>
+              </a:tabLst>
+            </a:pPr>
+            <a:fld id="{ADD09EA9-9E53-4839-BDDC-10E2C09D0EE8}" type="slidenum">
               <a:rPr lang="en-US" sz="1200" b="0" u="none" strike="noStrike">
                 <a:solidFill>
                   <a:schemeClr val="dk1"/>
@@ -3108,7 +3437,7 @@
                 <a:latin typeface="+mn-lt"/>
                 <a:ea typeface="+mn-ea"/>
               </a:rPr>
-              <a:t>&lt;number&gt;</a:t>
+              <a:t>1</a:t>
             </a:fld>
             <a:endParaRPr lang="en-US" sz="1200" b="0" u="none" strike="noStrike">
               <a:solidFill>
@@ -3156,7 +3485,7 @@
         <p:spPr>
           <a:xfrm>
             <a:off x="685800" y="1143000"/>
-            <a:ext cx="5486040" cy="3085920"/>
+            <a:ext cx="5485680" cy="3085560"/>
           </a:xfrm>
           <a:prstGeom prst="rect">
             <a:avLst/>
@@ -3179,7 +3508,7 @@
         <p:spPr>
           <a:xfrm>
             <a:off x="685800" y="4400640"/>
-            <a:ext cx="5486040" cy="3600000"/>
+            <a:ext cx="5485680" cy="3599640"/>
           </a:xfrm>
           <a:prstGeom prst="rect">
             <a:avLst/>
@@ -3199,6 +3528,9 @@
                 <a:spcPct val="100000"/>
               </a:lnSpc>
               <a:buNone/>
+              <a:tabLst>
+                <a:tab pos="0" algn="l"/>
+              </a:tabLst>
             </a:pPr>
             <a:r>
               <a:rPr lang="en-US" sz="1200" b="0" u="none" strike="noStrike">
@@ -3226,6 +3558,9 @@
                 <a:spcPct val="100000"/>
               </a:lnSpc>
               <a:buNone/>
+              <a:tabLst>
+                <a:tab pos="0" algn="l"/>
+              </a:tabLst>
             </a:pPr>
             <a:endParaRPr lang="en-US" sz="1200" b="0" u="none" strike="noStrike">
               <a:solidFill>
@@ -3242,6 +3577,9 @@
                 <a:spcPct val="100000"/>
               </a:lnSpc>
               <a:buNone/>
+              <a:tabLst>
+                <a:tab pos="0" algn="l"/>
+              </a:tabLst>
             </a:pPr>
             <a:r>
               <a:rPr lang="en-US" sz="1200" b="0" u="none" strike="noStrike">
@@ -3269,6 +3607,9 @@
                 <a:spcPct val="100000"/>
               </a:lnSpc>
               <a:buNone/>
+              <a:tabLst>
+                <a:tab pos="0" algn="l"/>
+              </a:tabLst>
             </a:pPr>
             <a:endParaRPr lang="en-US" sz="1200" b="0" u="none" strike="noStrike">
               <a:solidFill>
@@ -3285,6 +3626,9 @@
                 <a:spcPct val="100000"/>
               </a:lnSpc>
               <a:buNone/>
+              <a:tabLst>
+                <a:tab pos="0" algn="l"/>
+              </a:tabLst>
             </a:pPr>
             <a:r>
               <a:rPr lang="en-US" sz="1200" b="0" u="none" strike="noStrike">
@@ -3312,6 +3656,9 @@
                 <a:spcPct val="100000"/>
               </a:lnSpc>
               <a:buNone/>
+              <a:tabLst>
+                <a:tab pos="0" algn="l"/>
+              </a:tabLst>
             </a:pPr>
             <a:endParaRPr lang="en-US" sz="1200" b="0" u="none" strike="noStrike">
               <a:solidFill>
@@ -3328,6 +3675,9 @@
                 <a:spcPct val="100000"/>
               </a:lnSpc>
               <a:buNone/>
+              <a:tabLst>
+                <a:tab pos="0" algn="l"/>
+              </a:tabLst>
             </a:pPr>
             <a:r>
               <a:rPr lang="en-US" sz="1200" b="0" u="none" strike="noStrike">
@@ -3355,6 +3705,9 @@
                 <a:spcPct val="100000"/>
               </a:lnSpc>
               <a:buNone/>
+              <a:tabLst>
+                <a:tab pos="0" algn="l"/>
+              </a:tabLst>
             </a:pPr>
             <a:endParaRPr lang="en-US" sz="1200" b="0" u="none" strike="noStrike">
               <a:solidFill>
@@ -3371,6 +3724,9 @@
                 <a:spcPct val="100000"/>
               </a:lnSpc>
               <a:buNone/>
+              <a:tabLst>
+                <a:tab pos="0" algn="l"/>
+              </a:tabLst>
             </a:pPr>
             <a:r>
               <a:rPr lang="en-US" sz="1200" b="0" u="none" strike="noStrike">
@@ -3398,6 +3754,9 @@
                 <a:spcPct val="100000"/>
               </a:lnSpc>
               <a:buNone/>
+              <a:tabLst>
+                <a:tab pos="0" algn="l"/>
+              </a:tabLst>
             </a:pPr>
             <a:endParaRPr lang="en-US" sz="1200" b="0" u="none" strike="noStrike">
               <a:solidFill>
@@ -3414,6 +3773,9 @@
                 <a:spcPct val="100000"/>
               </a:lnSpc>
               <a:buNone/>
+              <a:tabLst>
+                <a:tab pos="0" algn="l"/>
+              </a:tabLst>
             </a:pPr>
             <a:r>
               <a:rPr lang="en-US" sz="1200" b="0" u="none" strike="noStrike">
@@ -3441,6 +3803,9 @@
                 <a:spcPct val="100000"/>
               </a:lnSpc>
               <a:buNone/>
+              <a:tabLst>
+                <a:tab pos="0" algn="l"/>
+              </a:tabLst>
             </a:pPr>
             <a:endParaRPr lang="en-US" sz="1200" b="0" u="none" strike="noStrike">
               <a:solidFill>
@@ -3457,6 +3822,9 @@
                 <a:spcPct val="100000"/>
               </a:lnSpc>
               <a:buNone/>
+              <a:tabLst>
+                <a:tab pos="0" algn="l"/>
+              </a:tabLst>
             </a:pPr>
             <a:r>
               <a:rPr lang="en-US" sz="1200" b="0" u="none" strike="noStrike">
@@ -3484,6 +3852,9 @@
                 <a:spcPct val="100000"/>
               </a:lnSpc>
               <a:buNone/>
+              <a:tabLst>
+                <a:tab pos="0" algn="l"/>
+              </a:tabLst>
             </a:pPr>
             <a:endParaRPr lang="en-US" sz="1200" b="0" u="none" strike="noStrike">
               <a:solidFill>
@@ -3500,6 +3871,9 @@
                 <a:spcPct val="100000"/>
               </a:lnSpc>
               <a:buNone/>
+              <a:tabLst>
+                <a:tab pos="0" algn="l"/>
+              </a:tabLst>
             </a:pPr>
             <a:r>
               <a:rPr lang="en-US" sz="1200" b="0" u="none" strike="noStrike">
@@ -3536,7 +3910,7 @@
         <p:spPr>
           <a:xfrm>
             <a:off x="3884760" y="8685360"/>
-            <a:ext cx="2971440" cy="458280"/>
+            <a:ext cx="2971080" cy="457920"/>
           </a:xfrm>
           <a:prstGeom prst="rect">
             <a:avLst/>
@@ -3556,6 +3930,9 @@
                 <a:spcPct val="100000"/>
               </a:lnSpc>
               <a:buNone/>
+              <a:tabLst>
+                <a:tab pos="0" algn="l"/>
+              </a:tabLst>
               <a:defRPr lang="en-US" sz="1200" b="0" u="none" strike="noStrike">
                 <a:solidFill>
                   <a:schemeClr val="dk1"/>
@@ -3573,8 +3950,11 @@
                 <a:spcPct val="100000"/>
               </a:lnSpc>
               <a:buNone/>
-            </a:pPr>
-            <a:fld id="{ECA79F53-BEE1-4741-A802-55490918CCF9}" type="slidenum">
+              <a:tabLst>
+                <a:tab pos="0" algn="l"/>
+              </a:tabLst>
+            </a:pPr>
+            <a:fld id="{46BB62CD-3542-42B2-9B7A-7CD02EBC0241}" type="slidenum">
               <a:rPr lang="en-US" sz="1200" b="0" u="none" strike="noStrike">
                 <a:solidFill>
                   <a:schemeClr val="dk1"/>
@@ -3584,7 +3964,7 @@
                 <a:latin typeface="+mn-lt"/>
                 <a:ea typeface="+mn-ea"/>
               </a:rPr>
-              <a:t>&lt;number&gt;</a:t>
+              <a:t>1</a:t>
             </a:fld>
             <a:endParaRPr lang="en-US" sz="1200" b="0" u="none" strike="noStrike">
               <a:solidFill>
@@ -3632,7 +4012,7 @@
         <p:spPr>
           <a:xfrm>
             <a:off x="685800" y="1143000"/>
-            <a:ext cx="5486040" cy="3085920"/>
+            <a:ext cx="5485680" cy="3085560"/>
           </a:xfrm>
           <a:prstGeom prst="rect">
             <a:avLst/>
@@ -3655,7 +4035,7 @@
         <p:spPr>
           <a:xfrm>
             <a:off x="685800" y="4400640"/>
-            <a:ext cx="5486040" cy="3600000"/>
+            <a:ext cx="5485680" cy="3599640"/>
           </a:xfrm>
           <a:prstGeom prst="rect">
             <a:avLst/>
@@ -3675,6 +4055,9 @@
                 <a:spcPct val="100000"/>
               </a:lnSpc>
               <a:buNone/>
+              <a:tabLst>
+                <a:tab pos="0" algn="l"/>
+              </a:tabLst>
             </a:pPr>
             <a:r>
               <a:rPr lang="en-US" sz="1200" b="0" u="none" strike="noStrike">
@@ -3702,6 +4085,9 @@
                 <a:spcPct val="100000"/>
               </a:lnSpc>
               <a:buNone/>
+              <a:tabLst>
+                <a:tab pos="0" algn="l"/>
+              </a:tabLst>
             </a:pPr>
             <a:endParaRPr lang="en-US" sz="1200" b="0" u="none" strike="noStrike">
               <a:solidFill>
@@ -3718,6 +4104,9 @@
                 <a:spcPct val="100000"/>
               </a:lnSpc>
               <a:buNone/>
+              <a:tabLst>
+                <a:tab pos="0" algn="l"/>
+              </a:tabLst>
             </a:pPr>
             <a:r>
               <a:rPr lang="en-US" sz="1200" b="0" u="none" strike="noStrike">
@@ -3745,6 +4134,9 @@
                 <a:spcPct val="100000"/>
               </a:lnSpc>
               <a:buNone/>
+              <a:tabLst>
+                <a:tab pos="0" algn="l"/>
+              </a:tabLst>
             </a:pPr>
             <a:endParaRPr lang="en-US" sz="1200" b="0" u="none" strike="noStrike">
               <a:solidFill>
@@ -3761,6 +4153,9 @@
                 <a:spcPct val="100000"/>
               </a:lnSpc>
               <a:buNone/>
+              <a:tabLst>
+                <a:tab pos="0" algn="l"/>
+              </a:tabLst>
             </a:pPr>
             <a:r>
               <a:rPr lang="en-US" sz="1200" b="0" u="none" strike="noStrike">
@@ -3788,6 +4183,9 @@
                 <a:spcPct val="100000"/>
               </a:lnSpc>
               <a:buNone/>
+              <a:tabLst>
+                <a:tab pos="0" algn="l"/>
+              </a:tabLst>
             </a:pPr>
             <a:endParaRPr lang="en-US" sz="1200" b="0" u="none" strike="noStrike">
               <a:solidFill>
@@ -3804,6 +4202,9 @@
                 <a:spcPct val="100000"/>
               </a:lnSpc>
               <a:buNone/>
+              <a:tabLst>
+                <a:tab pos="0" algn="l"/>
+              </a:tabLst>
             </a:pPr>
             <a:r>
               <a:rPr lang="en-US" sz="1200" b="0" u="none" strike="noStrike">
@@ -3831,6 +4232,9 @@
                 <a:spcPct val="100000"/>
               </a:lnSpc>
               <a:buNone/>
+              <a:tabLst>
+                <a:tab pos="0" algn="l"/>
+              </a:tabLst>
             </a:pPr>
             <a:endParaRPr lang="en-US" sz="1200" b="0" u="none" strike="noStrike">
               <a:solidFill>
@@ -3847,6 +4251,9 @@
                 <a:spcPct val="100000"/>
               </a:lnSpc>
               <a:buNone/>
+              <a:tabLst>
+                <a:tab pos="0" algn="l"/>
+              </a:tabLst>
             </a:pPr>
             <a:r>
               <a:rPr lang="en-US" sz="1200" b="0" u="none" strike="noStrike">
@@ -3874,6 +4281,9 @@
                 <a:spcPct val="100000"/>
               </a:lnSpc>
               <a:buNone/>
+              <a:tabLst>
+                <a:tab pos="0" algn="l"/>
+              </a:tabLst>
             </a:pPr>
             <a:endParaRPr lang="en-US" sz="1200" b="0" u="none" strike="noStrike">
               <a:solidFill>
@@ -3890,6 +4300,9 @@
                 <a:spcPct val="100000"/>
               </a:lnSpc>
               <a:buNone/>
+              <a:tabLst>
+                <a:tab pos="0" algn="l"/>
+              </a:tabLst>
             </a:pPr>
             <a:r>
               <a:rPr lang="en-US" sz="1200" b="0" u="none" strike="noStrike">
@@ -3917,6 +4330,9 @@
                 <a:spcPct val="100000"/>
               </a:lnSpc>
               <a:buNone/>
+              <a:tabLst>
+                <a:tab pos="0" algn="l"/>
+              </a:tabLst>
             </a:pPr>
             <a:endParaRPr lang="en-US" sz="1200" b="0" u="none" strike="noStrike">
               <a:solidFill>
@@ -3933,6 +4349,9 @@
                 <a:spcPct val="100000"/>
               </a:lnSpc>
               <a:buNone/>
+              <a:tabLst>
+                <a:tab pos="0" algn="l"/>
+              </a:tabLst>
             </a:pPr>
             <a:r>
               <a:rPr lang="en-US" sz="1200" b="0" u="none" strike="noStrike">
@@ -3960,6 +4379,9 @@
                 <a:spcPct val="100000"/>
               </a:lnSpc>
               <a:buNone/>
+              <a:tabLst>
+                <a:tab pos="0" algn="l"/>
+              </a:tabLst>
             </a:pPr>
             <a:endParaRPr lang="en-US" sz="1200" b="0" u="none" strike="noStrike">
               <a:solidFill>
@@ -3976,6 +4398,9 @@
                 <a:spcPct val="100000"/>
               </a:lnSpc>
               <a:buNone/>
+              <a:tabLst>
+                <a:tab pos="0" algn="l"/>
+              </a:tabLst>
             </a:pPr>
             <a:r>
               <a:rPr lang="en-US" sz="1200" b="0" u="none" strike="noStrike">
@@ -4003,6 +4428,9 @@
                 <a:spcPct val="100000"/>
               </a:lnSpc>
               <a:buNone/>
+              <a:tabLst>
+                <a:tab pos="0" algn="l"/>
+              </a:tabLst>
             </a:pPr>
             <a:endParaRPr lang="en-US" sz="1200" b="0" u="none" strike="noStrike">
               <a:solidFill>
@@ -4019,6 +4447,9 @@
                 <a:spcPct val="100000"/>
               </a:lnSpc>
               <a:buNone/>
+              <a:tabLst>
+                <a:tab pos="0" algn="l"/>
+              </a:tabLst>
             </a:pPr>
             <a:r>
               <a:rPr lang="en-US" sz="1200" b="0" u="none" strike="noStrike">
@@ -4055,7 +4486,7 @@
         <p:spPr>
           <a:xfrm>
             <a:off x="3884760" y="8685360"/>
-            <a:ext cx="2971440" cy="458280"/>
+            <a:ext cx="2971080" cy="457920"/>
           </a:xfrm>
           <a:prstGeom prst="rect">
             <a:avLst/>
@@ -4075,6 +4506,9 @@
                 <a:spcPct val="100000"/>
               </a:lnSpc>
               <a:buNone/>
+              <a:tabLst>
+                <a:tab pos="0" algn="l"/>
+              </a:tabLst>
               <a:defRPr lang="en-US" sz="1200" b="0" u="none" strike="noStrike">
                 <a:solidFill>
                   <a:schemeClr val="dk1"/>
@@ -4092,8 +4526,11 @@
                 <a:spcPct val="100000"/>
               </a:lnSpc>
               <a:buNone/>
-            </a:pPr>
-            <a:fld id="{D18B4DF3-A0A0-4EDB-A8C9-92CEA2EF7878}" type="slidenum">
+              <a:tabLst>
+                <a:tab pos="0" algn="l"/>
+              </a:tabLst>
+            </a:pPr>
+            <a:fld id="{6F33F4B0-70A7-47F8-AC4F-54BEAE3174FE}" type="slidenum">
               <a:rPr lang="en-US" sz="1200" b="0" u="none" strike="noStrike">
                 <a:solidFill>
                   <a:schemeClr val="dk1"/>
@@ -4103,7 +4540,7 @@
                 <a:latin typeface="+mn-lt"/>
                 <a:ea typeface="+mn-ea"/>
               </a:rPr>
-              <a:t>&lt;number&gt;</a:t>
+              <a:t>1</a:t>
             </a:fld>
             <a:endParaRPr lang="en-US" sz="1200" b="0" u="none" strike="noStrike">
               <a:solidFill>
@@ -4151,7 +4588,7 @@
         <p:spPr>
           <a:xfrm>
             <a:off x="685800" y="1143000"/>
-            <a:ext cx="5486040" cy="3085920"/>
+            <a:ext cx="5485680" cy="3085560"/>
           </a:xfrm>
           <a:prstGeom prst="rect">
             <a:avLst/>
@@ -4174,7 +4611,7 @@
         <p:spPr>
           <a:xfrm>
             <a:off x="685800" y="4400640"/>
-            <a:ext cx="5486040" cy="3600000"/>
+            <a:ext cx="5485680" cy="3599640"/>
           </a:xfrm>
           <a:prstGeom prst="rect">
             <a:avLst/>
@@ -4194,6 +4631,9 @@
                 <a:spcPct val="100000"/>
               </a:lnSpc>
               <a:buNone/>
+              <a:tabLst>
+                <a:tab pos="0" algn="l"/>
+              </a:tabLst>
             </a:pPr>
             <a:r>
               <a:rPr lang="en-US" sz="1200" b="0" u="none" strike="noStrike">
@@ -4221,6 +4661,9 @@
                 <a:spcPct val="100000"/>
               </a:lnSpc>
               <a:buNone/>
+              <a:tabLst>
+                <a:tab pos="0" algn="l"/>
+              </a:tabLst>
             </a:pPr>
             <a:endParaRPr lang="en-US" sz="1200" b="0" u="none" strike="noStrike">
               <a:solidFill>
@@ -4237,6 +4680,9 @@
                 <a:spcPct val="100000"/>
               </a:lnSpc>
               <a:buNone/>
+              <a:tabLst>
+                <a:tab pos="0" algn="l"/>
+              </a:tabLst>
             </a:pPr>
             <a:r>
               <a:rPr lang="en-US" sz="1200" b="0" u="none" strike="noStrike">
@@ -4264,6 +4710,9 @@
                 <a:spcPct val="100000"/>
               </a:lnSpc>
               <a:buNone/>
+              <a:tabLst>
+                <a:tab pos="0" algn="l"/>
+              </a:tabLst>
             </a:pPr>
             <a:endParaRPr lang="en-US" sz="1200" b="0" u="none" strike="noStrike">
               <a:solidFill>
@@ -4280,6 +4729,9 @@
                 <a:spcPct val="100000"/>
               </a:lnSpc>
               <a:buNone/>
+              <a:tabLst>
+                <a:tab pos="0" algn="l"/>
+              </a:tabLst>
             </a:pPr>
             <a:r>
               <a:rPr lang="en-US" sz="1200" b="0" u="none" strike="noStrike">
@@ -4307,6 +4759,9 @@
                 <a:spcPct val="100000"/>
               </a:lnSpc>
               <a:buNone/>
+              <a:tabLst>
+                <a:tab pos="0" algn="l"/>
+              </a:tabLst>
             </a:pPr>
             <a:endParaRPr lang="en-US" sz="1200" b="0" u="none" strike="noStrike">
               <a:solidFill>
@@ -4323,6 +4778,9 @@
                 <a:spcPct val="100000"/>
               </a:lnSpc>
               <a:buNone/>
+              <a:tabLst>
+                <a:tab pos="0" algn="l"/>
+              </a:tabLst>
             </a:pPr>
             <a:r>
               <a:rPr lang="en-US" sz="1200" b="0" u="none" strike="noStrike">
@@ -4350,6 +4808,9 @@
                 <a:spcPct val="100000"/>
               </a:lnSpc>
               <a:buNone/>
+              <a:tabLst>
+                <a:tab pos="0" algn="l"/>
+              </a:tabLst>
             </a:pPr>
             <a:endParaRPr lang="en-US" sz="1200" b="0" u="none" strike="noStrike">
               <a:solidFill>
@@ -4366,6 +4827,9 @@
                 <a:spcPct val="100000"/>
               </a:lnSpc>
               <a:buNone/>
+              <a:tabLst>
+                <a:tab pos="0" algn="l"/>
+              </a:tabLst>
             </a:pPr>
             <a:r>
               <a:rPr lang="en-US" sz="1200" b="0" u="none" strike="noStrike">
@@ -4393,6 +4857,9 @@
                 <a:spcPct val="100000"/>
               </a:lnSpc>
               <a:buNone/>
+              <a:tabLst>
+                <a:tab pos="0" algn="l"/>
+              </a:tabLst>
             </a:pPr>
             <a:endParaRPr lang="en-US" sz="1200" b="0" u="none" strike="noStrike">
               <a:solidFill>
@@ -4409,6 +4876,9 @@
                 <a:spcPct val="100000"/>
               </a:lnSpc>
               <a:buNone/>
+              <a:tabLst>
+                <a:tab pos="0" algn="l"/>
+              </a:tabLst>
             </a:pPr>
             <a:r>
               <a:rPr lang="en-US" sz="1200" b="0" u="none" strike="noStrike">
@@ -4436,6 +4906,9 @@
                 <a:spcPct val="100000"/>
               </a:lnSpc>
               <a:buNone/>
+              <a:tabLst>
+                <a:tab pos="0" algn="l"/>
+              </a:tabLst>
             </a:pPr>
             <a:endParaRPr lang="en-US" sz="1200" b="0" u="none" strike="noStrike">
               <a:solidFill>
@@ -4452,6 +4925,9 @@
                 <a:spcPct val="100000"/>
               </a:lnSpc>
               <a:buNone/>
+              <a:tabLst>
+                <a:tab pos="0" algn="l"/>
+              </a:tabLst>
             </a:pPr>
             <a:r>
               <a:rPr lang="en-US" sz="1200" b="0" u="none" strike="noStrike">
@@ -4479,6 +4955,9 @@
                 <a:spcPct val="100000"/>
               </a:lnSpc>
               <a:buNone/>
+              <a:tabLst>
+                <a:tab pos="0" algn="l"/>
+              </a:tabLst>
             </a:pPr>
             <a:endParaRPr lang="en-US" sz="1200" b="0" u="none" strike="noStrike">
               <a:solidFill>
@@ -4495,6 +4974,9 @@
                 <a:spcPct val="100000"/>
               </a:lnSpc>
               <a:buNone/>
+              <a:tabLst>
+                <a:tab pos="0" algn="l"/>
+              </a:tabLst>
             </a:pPr>
             <a:r>
               <a:rPr lang="en-US" sz="1200" b="0" u="none" strike="noStrike">
@@ -4522,6 +5004,9 @@
                 <a:spcPct val="100000"/>
               </a:lnSpc>
               <a:buNone/>
+              <a:tabLst>
+                <a:tab pos="0" algn="l"/>
+              </a:tabLst>
             </a:pPr>
             <a:endParaRPr lang="en-US" sz="1200" b="0" u="none" strike="noStrike">
               <a:solidFill>
@@ -4538,6 +5023,9 @@
                 <a:spcPct val="100000"/>
               </a:lnSpc>
               <a:buNone/>
+              <a:tabLst>
+                <a:tab pos="0" algn="l"/>
+              </a:tabLst>
             </a:pPr>
             <a:r>
               <a:rPr lang="en-US" sz="1200" b="0" u="none" strike="noStrike">
@@ -4574,7 +5062,7 @@
         <p:spPr>
           <a:xfrm>
             <a:off x="3884760" y="8685360"/>
-            <a:ext cx="2971440" cy="458280"/>
+            <a:ext cx="2971080" cy="457920"/>
           </a:xfrm>
           <a:prstGeom prst="rect">
             <a:avLst/>
@@ -4594,6 +5082,9 @@
                 <a:spcPct val="100000"/>
               </a:lnSpc>
               <a:buNone/>
+              <a:tabLst>
+                <a:tab pos="0" algn="l"/>
+              </a:tabLst>
               <a:defRPr lang="en-US" sz="1200" b="0" u="none" strike="noStrike">
                 <a:solidFill>
                   <a:schemeClr val="dk1"/>
@@ -4611,8 +5102,11 @@
                 <a:spcPct val="100000"/>
               </a:lnSpc>
               <a:buNone/>
-            </a:pPr>
-            <a:fld id="{22C703D0-6A70-41DC-B1A9-D95E8F99F30D}" type="slidenum">
+              <a:tabLst>
+                <a:tab pos="0" algn="l"/>
+              </a:tabLst>
+            </a:pPr>
+            <a:fld id="{E0E1FD8A-014D-40EA-A434-D71B0455359C}" type="slidenum">
               <a:rPr lang="en-US" sz="1200" b="0" u="none" strike="noStrike">
                 <a:solidFill>
                   <a:schemeClr val="dk1"/>
@@ -4622,7 +5116,7 @@
                 <a:latin typeface="+mn-lt"/>
                 <a:ea typeface="+mn-ea"/>
               </a:rPr>
-              <a:t>&lt;number&gt;</a:t>
+              <a:t>1</a:t>
             </a:fld>
             <a:endParaRPr lang="en-US" sz="1200" b="0" u="none" strike="noStrike">
               <a:solidFill>
@@ -4670,7 +5164,7 @@
         <p:spPr>
           <a:xfrm>
             <a:off x="685800" y="1143000"/>
-            <a:ext cx="5486040" cy="3085920"/>
+            <a:ext cx="5485680" cy="3085560"/>
           </a:xfrm>
           <a:prstGeom prst="rect">
             <a:avLst/>
@@ -4693,7 +5187,7 @@
         <p:spPr>
           <a:xfrm>
             <a:off x="685800" y="4400640"/>
-            <a:ext cx="5486040" cy="3600000"/>
+            <a:ext cx="5485680" cy="3599640"/>
           </a:xfrm>
           <a:prstGeom prst="rect">
             <a:avLst/>
@@ -4713,6 +5207,9 @@
                 <a:spcPct val="100000"/>
               </a:lnSpc>
               <a:buNone/>
+              <a:tabLst>
+                <a:tab pos="0" algn="l"/>
+              </a:tabLst>
             </a:pPr>
             <a:r>
               <a:rPr lang="en-US" sz="1200" b="0" u="none" strike="noStrike">
@@ -4740,6 +5237,9 @@
                 <a:spcPct val="100000"/>
               </a:lnSpc>
               <a:buNone/>
+              <a:tabLst>
+                <a:tab pos="0" algn="l"/>
+              </a:tabLst>
             </a:pPr>
             <a:endParaRPr lang="en-US" sz="1200" b="0" u="none" strike="noStrike">
               <a:solidFill>
@@ -4756,6 +5256,9 @@
                 <a:spcPct val="100000"/>
               </a:lnSpc>
               <a:buNone/>
+              <a:tabLst>
+                <a:tab pos="0" algn="l"/>
+              </a:tabLst>
             </a:pPr>
             <a:r>
               <a:rPr lang="en-US" sz="1200" b="0" u="none" strike="noStrike">
@@ -4783,6 +5286,9 @@
                 <a:spcPct val="100000"/>
               </a:lnSpc>
               <a:buNone/>
+              <a:tabLst>
+                <a:tab pos="0" algn="l"/>
+              </a:tabLst>
             </a:pPr>
             <a:endParaRPr lang="en-US" sz="1200" b="0" u="none" strike="noStrike">
               <a:solidFill>
@@ -4799,6 +5305,9 @@
                 <a:spcPct val="100000"/>
               </a:lnSpc>
               <a:buNone/>
+              <a:tabLst>
+                <a:tab pos="0" algn="l"/>
+              </a:tabLst>
             </a:pPr>
             <a:r>
               <a:rPr lang="en-US" sz="1200" b="0" u="none" strike="noStrike">
@@ -4826,6 +5335,9 @@
                 <a:spcPct val="100000"/>
               </a:lnSpc>
               <a:buNone/>
+              <a:tabLst>
+                <a:tab pos="0" algn="l"/>
+              </a:tabLst>
             </a:pPr>
             <a:endParaRPr lang="en-US" sz="1200" b="0" u="none" strike="noStrike">
               <a:solidFill>
@@ -4842,6 +5354,9 @@
                 <a:spcPct val="100000"/>
               </a:lnSpc>
               <a:buNone/>
+              <a:tabLst>
+                <a:tab pos="0" algn="l"/>
+              </a:tabLst>
             </a:pPr>
             <a:r>
               <a:rPr lang="en-US" sz="1200" b="0" u="none" strike="noStrike">
@@ -4878,7 +5393,7 @@
         <p:spPr>
           <a:xfrm>
             <a:off x="3884760" y="8685360"/>
-            <a:ext cx="2971440" cy="458280"/>
+            <a:ext cx="2971080" cy="457920"/>
           </a:xfrm>
           <a:prstGeom prst="rect">
             <a:avLst/>
@@ -4898,6 +5413,9 @@
                 <a:spcPct val="100000"/>
               </a:lnSpc>
               <a:buNone/>
+              <a:tabLst>
+                <a:tab pos="0" algn="l"/>
+              </a:tabLst>
               <a:defRPr lang="en-US" sz="1200" b="0" u="none" strike="noStrike">
                 <a:solidFill>
                   <a:schemeClr val="dk1"/>
@@ -4915,8 +5433,11 @@
                 <a:spcPct val="100000"/>
               </a:lnSpc>
               <a:buNone/>
-            </a:pPr>
-            <a:fld id="{ED921447-116B-4160-A496-3BDE53B33F95}" type="slidenum">
+              <a:tabLst>
+                <a:tab pos="0" algn="l"/>
+              </a:tabLst>
+            </a:pPr>
+            <a:fld id="{3B1E81C9-7ACA-4222-80B1-4195AC2C4B30}" type="slidenum">
               <a:rPr lang="en-US" sz="1200" b="0" u="none" strike="noStrike">
                 <a:solidFill>
                   <a:schemeClr val="dk1"/>
@@ -4926,7 +5447,7 @@
                 <a:latin typeface="+mn-lt"/>
                 <a:ea typeface="+mn-ea"/>
               </a:rPr>
-              <a:t>&lt;number&gt;</a:t>
+              <a:t>1</a:t>
             </a:fld>
             <a:endParaRPr lang="en-US" sz="1200" b="0" u="none" strike="noStrike">
               <a:solidFill>
@@ -5020,6 +5541,9 @@
           <a:lstStyle>
             <a:lvl1pPr indent="0" algn="l">
               <a:buNone/>
+              <a:tabLst>
+                <a:tab pos="0" algn="l"/>
+              </a:tabLst>
               <a:defRPr lang="en-US" sz="1800" b="0" u="none" strike="noStrike">
                 <a:solidFill>
                   <a:schemeClr val="dk1"/>
@@ -5033,6 +5557,9 @@
           <a:p>
             <a:pPr indent="0" algn="l">
               <a:buNone/>
+              <a:tabLst>
+                <a:tab pos="0" algn="l"/>
+              </a:tabLst>
             </a:pPr>
             <a:r>
               <a:rPr lang="en-US" sz="1800" b="0" u="none" strike="noStrike">
@@ -5043,7 +5570,7 @@
                 <a:uFillTx/>
                 <a:latin typeface="Calibri"/>
               </a:rPr>
-              <a:t>Click </a:t>
+              <a:t>Click to edit the </a:t>
             </a:r>
             <a:r>
               <a:rPr lang="en-US" sz="1800" b="0" u="none" strike="noStrike">
@@ -5054,73 +5581,7 @@
                 <a:uFillTx/>
                 <a:latin typeface="Calibri"/>
               </a:rPr>
-              <a:t>to </a:t>
-            </a:r>
-            <a:r>
-              <a:rPr lang="en-US" sz="1800" b="0" u="none" strike="noStrike">
-                <a:solidFill>
-                  <a:schemeClr val="dk1"/>
-                </a:solidFill>
-                <a:effectLst/>
-                <a:uFillTx/>
-                <a:latin typeface="Calibri"/>
-              </a:rPr>
-              <a:t>edit </a:t>
-            </a:r>
-            <a:r>
-              <a:rPr lang="en-US" sz="1800" b="0" u="none" strike="noStrike">
-                <a:solidFill>
-                  <a:schemeClr val="dk1"/>
-                </a:solidFill>
-                <a:effectLst/>
-                <a:uFillTx/>
-                <a:latin typeface="Calibri"/>
-              </a:rPr>
-              <a:t>the </a:t>
-            </a:r>
-            <a:r>
-              <a:rPr lang="en-US" sz="1800" b="0" u="none" strike="noStrike">
-                <a:solidFill>
-                  <a:schemeClr val="dk1"/>
-                </a:solidFill>
-                <a:effectLst/>
-                <a:uFillTx/>
-                <a:latin typeface="Calibri"/>
-              </a:rPr>
-              <a:t>title </a:t>
-            </a:r>
-            <a:r>
-              <a:rPr lang="en-US" sz="1800" b="0" u="none" strike="noStrike">
-                <a:solidFill>
-                  <a:schemeClr val="dk1"/>
-                </a:solidFill>
-                <a:effectLst/>
-                <a:uFillTx/>
-                <a:latin typeface="Calibri"/>
-              </a:rPr>
-              <a:t>text </a:t>
-            </a:r>
-            <a:r>
-              <a:rPr lang="en-US" sz="1800" b="0" u="none" strike="noStrike">
-                <a:solidFill>
-                  <a:schemeClr val="dk1"/>
-                </a:solidFill>
-                <a:effectLst/>
-                <a:uFillTx/>
-                <a:latin typeface="Calibri"/>
-              </a:rPr>
-              <a:t>form</a:t>
-            </a:r>
-            <a:r>
-              <a:rPr lang="en-US" sz="1800" b="0" u="none" strike="noStrike">
-                <a:solidFill>
-                  <a:schemeClr val="dk1"/>
-                </a:solidFill>
-                <a:effectLst/>
-                <a:uFillTx/>
-                <a:latin typeface="Calibri"/>
-              </a:rPr>
-              <a:t>at</a:t>
+              <a:t>title text format</a:t>
             </a:r>
             <a:endParaRPr lang="en-US" sz="1800" b="0" u="none" strike="noStrike">
               <a:solidFill>
@@ -5296,7 +5757,7 @@
             </a:lvl7pPr>
           </a:lstStyle>
           <a:p>
-            <a:pPr marL="432000" indent="-324000" algn="l">
+            <a:pPr indent="-324000" algn="l">
               <a:spcBef>
                 <a:spcPts val="1417"/>
               </a:spcBef>
@@ -5563,7 +6024,7 @@
         <p:spPr>
           <a:xfrm>
             <a:off x="457200" y="457200"/>
-            <a:ext cx="11274120" cy="365400"/>
+            <a:ext cx="11273760" cy="365040"/>
           </a:xfrm>
           <a:prstGeom prst="rect">
             <a:avLst/>
@@ -5614,7 +6075,7 @@
                 <a:latin typeface="Calibri"/>
                 <a:ea typeface="Calibri"/>
               </a:rPr>
-              <a:t>ГОСУДАРСТВЕНН</a:t>
+              <a:t>ГОСУДАРСТВЕН</a:t>
             </a:r>
             <a:r>
               <a:rPr lang="en-US" sz="1400" b="1" u="none" spc="201" strike="noStrike">
@@ -5626,7 +6087,7 @@
                 <a:latin typeface="Calibri"/>
                 <a:ea typeface="Calibri"/>
               </a:rPr>
-              <a:t>ЫЙ </a:t>
+              <a:t>НЫЙ </a:t>
             </a:r>
             <a:r>
               <a:rPr lang="en-US" sz="1400" b="1" u="none" spc="201" strike="noStrike">
@@ -5638,7 +6099,7 @@
                 <a:latin typeface="Calibri"/>
                 <a:ea typeface="Calibri"/>
               </a:rPr>
-              <a:t>ПЕДАГОГИЧЕСКИ</a:t>
+              <a:t>ПЕДАГОГИЧЕС</a:t>
             </a:r>
             <a:r>
               <a:rPr lang="en-US" sz="1400" b="1" u="none" spc="201" strike="noStrike">
@@ -5650,7 +6111,19 @@
                 <a:latin typeface="Calibri"/>
                 <a:ea typeface="Calibri"/>
               </a:rPr>
-              <a:t>Й УНИВЕРСИТЕТ</a:t>
+              <a:t>КИЙ </a:t>
+            </a:r>
+            <a:r>
+              <a:rPr lang="en-US" sz="1400" b="1" u="none" spc="201" strike="noStrike">
+                <a:solidFill>
+                  <a:srgbClr val="B8C5D6"/>
+                </a:solidFill>
+                <a:effectLst/>
+                <a:uFillTx/>
+                <a:latin typeface="Calibri"/>
+                <a:ea typeface="Calibri"/>
+              </a:rPr>
+              <a:t>УНИВЕРСИТЕТ</a:t>
             </a:r>
             <a:endParaRPr lang="en-US" sz="1400" b="0" u="none" strike="noStrike">
               <a:solidFill>
@@ -5672,7 +6145,7 @@
         <p:spPr>
           <a:xfrm>
             <a:off x="457200" y="868680"/>
-            <a:ext cx="11274120" cy="273960"/>
+            <a:ext cx="11273760" cy="273600"/>
           </a:xfrm>
           <a:prstGeom prst="rect">
             <a:avLst/>
@@ -5711,7 +6184,7 @@
                 <a:latin typeface="Calibri"/>
                 <a:ea typeface="Calibri"/>
               </a:rPr>
-              <a:t>Факультет </a:t>
+              <a:t>Факульт</a:t>
             </a:r>
             <a:r>
               <a:rPr lang="en-US" sz="1200" b="0" i="1" u="none" strike="noStrike">
@@ -5723,7 +6196,7 @@
                 <a:latin typeface="Calibri"/>
                 <a:ea typeface="Calibri"/>
               </a:rPr>
-              <a:t>информационных </a:t>
+              <a:t>ет </a:t>
             </a:r>
             <a:r>
               <a:rPr lang="en-US" sz="1200" b="0" i="1" u="none" strike="noStrike">
@@ -5735,7 +6208,7 @@
                 <a:latin typeface="Calibri"/>
                 <a:ea typeface="Calibri"/>
               </a:rPr>
-              <a:t>технологий, </a:t>
+              <a:t>информа</a:t>
             </a:r>
             <a:r>
               <a:rPr lang="en-US" sz="1200" b="0" i="1" u="none" strike="noStrike">
@@ -5747,7 +6220,67 @@
                 <a:latin typeface="Calibri"/>
                 <a:ea typeface="Calibri"/>
               </a:rPr>
-              <a:t>математики и физики</a:t>
+              <a:t>ционных </a:t>
+            </a:r>
+            <a:r>
+              <a:rPr lang="en-US" sz="1200" b="0" i="1" u="none" strike="noStrike">
+                <a:solidFill>
+                  <a:srgbClr val="8FA0B8"/>
+                </a:solidFill>
+                <a:effectLst/>
+                <a:uFillTx/>
+                <a:latin typeface="Calibri"/>
+                <a:ea typeface="Calibri"/>
+              </a:rPr>
+              <a:t>технолог</a:t>
+            </a:r>
+            <a:r>
+              <a:rPr lang="en-US" sz="1200" b="0" i="1" u="none" strike="noStrike">
+                <a:solidFill>
+                  <a:srgbClr val="8FA0B8"/>
+                </a:solidFill>
+                <a:effectLst/>
+                <a:uFillTx/>
+                <a:latin typeface="Calibri"/>
+                <a:ea typeface="Calibri"/>
+              </a:rPr>
+              <a:t>ий, </a:t>
+            </a:r>
+            <a:r>
+              <a:rPr lang="en-US" sz="1200" b="0" i="1" u="none" strike="noStrike">
+                <a:solidFill>
+                  <a:srgbClr val="8FA0B8"/>
+                </a:solidFill>
+                <a:effectLst/>
+                <a:uFillTx/>
+                <a:latin typeface="Calibri"/>
+                <a:ea typeface="Calibri"/>
+              </a:rPr>
+              <a:t>матема</a:t>
+            </a:r>
+            <a:r>
+              <a:rPr lang="en-US" sz="1200" b="0" i="1" u="none" strike="noStrike">
+                <a:solidFill>
+                  <a:srgbClr val="8FA0B8"/>
+                </a:solidFill>
+                <a:effectLst/>
+                <a:uFillTx/>
+                <a:latin typeface="Calibri"/>
+                <a:ea typeface="Calibri"/>
+              </a:rPr>
+              <a:t>тики и </a:t>
+            </a:r>
+            <a:r>
+              <a:rPr lang="en-US" sz="1200" b="0" i="1" u="none" strike="noStrike">
+                <a:solidFill>
+                  <a:srgbClr val="8FA0B8"/>
+                </a:solidFill>
+                <a:effectLst/>
+                <a:uFillTx/>
+                <a:latin typeface="Calibri"/>
+                <a:ea typeface="Calibri"/>
+              </a:rPr>
+              <a:t>физики</a:t>
             </a:r>
             <a:endParaRPr lang="en-US" sz="1200" b="0" u="none" strike="noStrike">
               <a:solidFill>
@@ -5812,7 +6345,7 @@
         <p:spPr>
           <a:xfrm>
             <a:off x="457200" y="1691640"/>
-            <a:ext cx="11274120" cy="456840"/>
+            <a:ext cx="11273760" cy="456480"/>
           </a:xfrm>
           <a:prstGeom prst="rect">
             <a:avLst/>
@@ -5885,7 +6418,7 @@
         <p:spPr>
           <a:xfrm>
             <a:off x="457200" y="2377440"/>
-            <a:ext cx="11274120" cy="639720"/>
+            <a:ext cx="11273760" cy="639360"/>
           </a:xfrm>
           <a:prstGeom prst="rect">
             <a:avLst/>
@@ -5924,7 +6457,7 @@
                 <a:latin typeface="Calibri"/>
                 <a:ea typeface="Calibri"/>
               </a:rPr>
-              <a:t>Использ</a:t>
+              <a:t>Ис</a:t>
             </a:r>
             <a:r>
               <a:rPr lang="en-US" sz="3600" b="1" u="none" strike="noStrike">
@@ -5936,7 +6469,7 @@
                 <a:latin typeface="Calibri"/>
                 <a:ea typeface="Calibri"/>
               </a:rPr>
-              <a:t>ование </a:t>
+              <a:t>по</a:t>
             </a:r>
             <a:r>
               <a:rPr lang="en-US" sz="3600" b="1" u="none" strike="noStrike">
@@ -5948,7 +6481,7 @@
                 <a:latin typeface="Calibri"/>
                 <a:ea typeface="Calibri"/>
               </a:rPr>
-              <a:t>нейрок</a:t>
+              <a:t>ль</a:t>
             </a:r>
             <a:r>
               <a:rPr lang="en-US" sz="3600" b="1" u="none" strike="noStrike">
@@ -5960,7 +6493,7 @@
                 <a:latin typeface="Calibri"/>
                 <a:ea typeface="Calibri"/>
               </a:rPr>
-              <a:t>омпьют</a:t>
+              <a:t>зо</a:t>
             </a:r>
             <a:r>
               <a:rPr lang="en-US" sz="3600" b="1" u="none" strike="noStrike">
@@ -5972,7 +6505,7 @@
                 <a:latin typeface="Calibri"/>
                 <a:ea typeface="Calibri"/>
               </a:rPr>
-              <a:t>ерных </a:t>
+              <a:t>ва</a:t>
             </a:r>
             <a:r>
               <a:rPr lang="en-US" sz="3600" b="1" u="none" strike="noStrike">
@@ -5984,7 +6517,163 @@
                 <a:latin typeface="Calibri"/>
                 <a:ea typeface="Calibri"/>
               </a:rPr>
-              <a:t>систем</a:t>
+              <a:t>ни</a:t>
+            </a:r>
+            <a:r>
+              <a:rPr lang="en-US" sz="3600" b="1" u="none" strike="noStrike">
+                <a:solidFill>
+                  <a:srgbClr val="FFFFFF"/>
+                </a:solidFill>
+                <a:effectLst/>
+                <a:uFillTx/>
+                <a:latin typeface="Calibri"/>
+                <a:ea typeface="Calibri"/>
+              </a:rPr>
+              <a:t>е </a:t>
+            </a:r>
+            <a:r>
+              <a:rPr lang="en-US" sz="3600" b="1" u="none" strike="noStrike">
+                <a:solidFill>
+                  <a:srgbClr val="FFFFFF"/>
+                </a:solidFill>
+                <a:effectLst/>
+                <a:uFillTx/>
+                <a:latin typeface="Calibri"/>
+                <a:ea typeface="Calibri"/>
+              </a:rPr>
+              <a:t>не</a:t>
+            </a:r>
+            <a:r>
+              <a:rPr lang="en-US" sz="3600" b="1" u="none" strike="noStrike">
+                <a:solidFill>
+                  <a:srgbClr val="FFFFFF"/>
+                </a:solidFill>
+                <a:effectLst/>
+                <a:uFillTx/>
+                <a:latin typeface="Calibri"/>
+                <a:ea typeface="Calibri"/>
+              </a:rPr>
+              <a:t>йр</a:t>
+            </a:r>
+            <a:r>
+              <a:rPr lang="en-US" sz="3600" b="1" u="none" strike="noStrike">
+                <a:solidFill>
+                  <a:srgbClr val="FFFFFF"/>
+                </a:solidFill>
+                <a:effectLst/>
+                <a:uFillTx/>
+                <a:latin typeface="Calibri"/>
+                <a:ea typeface="Calibri"/>
+              </a:rPr>
+              <a:t>ок</a:t>
+            </a:r>
+            <a:r>
+              <a:rPr lang="en-US" sz="3600" b="1" u="none" strike="noStrike">
+                <a:solidFill>
+                  <a:srgbClr val="FFFFFF"/>
+                </a:solidFill>
+                <a:effectLst/>
+                <a:uFillTx/>
+                <a:latin typeface="Calibri"/>
+                <a:ea typeface="Calibri"/>
+              </a:rPr>
+              <a:t>ом</a:t>
+            </a:r>
+            <a:r>
+              <a:rPr lang="en-US" sz="3600" b="1" u="none" strike="noStrike">
+                <a:solidFill>
+                  <a:srgbClr val="FFFFFF"/>
+                </a:solidFill>
+                <a:effectLst/>
+                <a:uFillTx/>
+                <a:latin typeface="Calibri"/>
+                <a:ea typeface="Calibri"/>
+              </a:rPr>
+              <a:t>пь</a:t>
+            </a:r>
+            <a:r>
+              <a:rPr lang="en-US" sz="3600" b="1" u="none" strike="noStrike">
+                <a:solidFill>
+                  <a:srgbClr val="FFFFFF"/>
+                </a:solidFill>
+                <a:effectLst/>
+                <a:uFillTx/>
+                <a:latin typeface="Calibri"/>
+                <a:ea typeface="Calibri"/>
+              </a:rPr>
+              <a:t>ют</a:t>
+            </a:r>
+            <a:r>
+              <a:rPr lang="en-US" sz="3600" b="1" u="none" strike="noStrike">
+                <a:solidFill>
+                  <a:srgbClr val="FFFFFF"/>
+                </a:solidFill>
+                <a:effectLst/>
+                <a:uFillTx/>
+                <a:latin typeface="Calibri"/>
+                <a:ea typeface="Calibri"/>
+              </a:rPr>
+              <a:t>ер</a:t>
+            </a:r>
+            <a:r>
+              <a:rPr lang="en-US" sz="3600" b="1" u="none" strike="noStrike">
+                <a:solidFill>
+                  <a:srgbClr val="FFFFFF"/>
+                </a:solidFill>
+                <a:effectLst/>
+                <a:uFillTx/>
+                <a:latin typeface="Calibri"/>
+                <a:ea typeface="Calibri"/>
+              </a:rPr>
+              <a:t>ны</a:t>
+            </a:r>
+            <a:r>
+              <a:rPr lang="en-US" sz="3600" b="1" u="none" strike="noStrike">
+                <a:solidFill>
+                  <a:srgbClr val="FFFFFF"/>
+                </a:solidFill>
+                <a:effectLst/>
+                <a:uFillTx/>
+                <a:latin typeface="Calibri"/>
+                <a:ea typeface="Calibri"/>
+              </a:rPr>
+              <a:t>х </a:t>
+            </a:r>
+            <a:r>
+              <a:rPr lang="en-US" sz="3600" b="1" u="none" strike="noStrike">
+                <a:solidFill>
+                  <a:srgbClr val="FFFFFF"/>
+                </a:solidFill>
+                <a:effectLst/>
+                <a:uFillTx/>
+                <a:latin typeface="Calibri"/>
+                <a:ea typeface="Calibri"/>
+              </a:rPr>
+              <a:t>сис</a:t>
+            </a:r>
+            <a:r>
+              <a:rPr lang="en-US" sz="3600" b="1" u="none" strike="noStrike">
+                <a:solidFill>
+                  <a:srgbClr val="FFFFFF"/>
+                </a:solidFill>
+                <a:effectLst/>
+                <a:uFillTx/>
+                <a:latin typeface="Calibri"/>
+                <a:ea typeface="Calibri"/>
+              </a:rPr>
+              <a:t>те</a:t>
+            </a:r>
+            <a:r>
+              <a:rPr lang="en-US" sz="3600" b="1" u="none" strike="noStrike">
+                <a:solidFill>
+                  <a:srgbClr val="FFFFFF"/>
+                </a:solidFill>
+                <a:effectLst/>
+                <a:uFillTx/>
+                <a:latin typeface="Calibri"/>
+                <a:ea typeface="Calibri"/>
+              </a:rPr>
+              <a:t>м</a:t>
             </a:r>
             <a:endParaRPr lang="en-US" sz="3600" b="0" u="none" strike="noStrike">
               <a:solidFill>
@@ -6006,7 +6695,7 @@
         <p:spPr>
           <a:xfrm>
             <a:off x="457200" y="3017520"/>
-            <a:ext cx="11274120" cy="639720"/>
+            <a:ext cx="11273760" cy="639360"/>
           </a:xfrm>
           <a:prstGeom prst="rect">
             <a:avLst/>
@@ -6045,79 +6734,7 @@
                 <a:latin typeface="Calibri"/>
                 <a:ea typeface="Calibri"/>
               </a:rPr>
-              <a:t>для </a:t>
-            </a:r>
-            <a:r>
-              <a:rPr lang="en-US" sz="3600" b="1" u="none" strike="noStrike">
-                <a:solidFill>
-                  <a:srgbClr val="FFFFFF"/>
-                </a:solidFill>
-                <a:effectLst/>
-                <a:uFillTx/>
-                <a:latin typeface="Calibri"/>
-                <a:ea typeface="Calibri"/>
-              </a:rPr>
-              <a:t>предска</a:t>
-            </a:r>
-            <a:r>
-              <a:rPr lang="en-US" sz="3600" b="1" u="none" strike="noStrike">
-                <a:solidFill>
-                  <a:srgbClr val="FFFFFF"/>
-                </a:solidFill>
-                <a:effectLst/>
-                <a:uFillTx/>
-                <a:latin typeface="Calibri"/>
-                <a:ea typeface="Calibri"/>
-              </a:rPr>
-              <a:t>зания </a:t>
-            </a:r>
-            <a:r>
-              <a:rPr lang="en-US" sz="3600" b="1" u="none" strike="noStrike">
-                <a:solidFill>
-                  <a:srgbClr val="FFFFFF"/>
-                </a:solidFill>
-                <a:effectLst/>
-                <a:uFillTx/>
-                <a:latin typeface="Calibri"/>
-                <a:ea typeface="Calibri"/>
-              </a:rPr>
-              <a:t>климат</a:t>
-            </a:r>
-            <a:r>
-              <a:rPr lang="en-US" sz="3600" b="1" u="none" strike="noStrike">
-                <a:solidFill>
-                  <a:srgbClr val="FFFFFF"/>
-                </a:solidFill>
-                <a:effectLst/>
-                <a:uFillTx/>
-                <a:latin typeface="Calibri"/>
-                <a:ea typeface="Calibri"/>
-              </a:rPr>
-              <a:t>ических </a:t>
-            </a:r>
-            <a:r>
-              <a:rPr lang="en-US" sz="3600" b="1" u="none" strike="noStrike">
-                <a:solidFill>
-                  <a:srgbClr val="FFFFFF"/>
-                </a:solidFill>
-                <a:effectLst/>
-                <a:uFillTx/>
-                <a:latin typeface="Calibri"/>
-                <a:ea typeface="Calibri"/>
-              </a:rPr>
-              <a:t>измене</a:t>
-            </a:r>
-            <a:r>
-              <a:rPr lang="en-US" sz="3600" b="1" u="none" strike="noStrike">
-                <a:solidFill>
-                  <a:srgbClr val="FFFFFF"/>
-                </a:solidFill>
-                <a:effectLst/>
-                <a:uFillTx/>
-                <a:latin typeface="Calibri"/>
-                <a:ea typeface="Calibri"/>
-              </a:rPr>
-              <a:t>ний</a:t>
+              <a:t>для предсказания климатических изменений</a:t>
             </a:r>
             <a:endParaRPr lang="en-US" sz="3600" b="0" u="none" strike="noStrike">
               <a:solidFill>
@@ -6139,7 +6756,7 @@
         <p:spPr>
           <a:xfrm>
             <a:off x="457200" y="3886200"/>
-            <a:ext cx="11274120" cy="365400"/>
+            <a:ext cx="11273760" cy="365040"/>
           </a:xfrm>
           <a:prstGeom prst="rect">
             <a:avLst/>
@@ -6178,31 +6795,7 @@
                 <a:latin typeface="Calibri"/>
                 <a:ea typeface="Calibri"/>
               </a:rPr>
-              <a:t>по дисциплине </a:t>
-            </a:r>
-            <a:r>
-              <a:rPr lang="en-US" sz="1400" b="0" i="1" u="none" strike="noStrike">
-                <a:solidFill>
-                  <a:srgbClr val="CADCFC"/>
-                </a:solidFill>
-                <a:effectLst/>
-                <a:uFillTx/>
-                <a:latin typeface="Calibri"/>
-                <a:ea typeface="Calibri"/>
-              </a:rPr>
-              <a:t>«Нейрокомпьютерн</a:t>
-            </a:r>
-            <a:r>
-              <a:rPr lang="en-US" sz="1400" b="0" i="1" u="none" strike="noStrike">
-                <a:solidFill>
-                  <a:srgbClr val="CADCFC"/>
-                </a:solidFill>
-                <a:effectLst/>
-                <a:uFillTx/>
-                <a:latin typeface="Calibri"/>
-                <a:ea typeface="Calibri"/>
-              </a:rPr>
-              <a:t>ые системы»</a:t>
+              <a:t>по дисциплине «Нейрокомпьютерные системы»</a:t>
             </a:r>
             <a:endParaRPr lang="en-US" sz="1400" b="0" u="none" strike="noStrike">
               <a:solidFill>
@@ -6267,7 +6860,7 @@
         <p:spPr>
           <a:xfrm>
             <a:off x="1371600" y="4937760"/>
-            <a:ext cx="3657240" cy="273960"/>
+            <a:ext cx="3656880" cy="273600"/>
           </a:xfrm>
           <a:prstGeom prst="rect">
             <a:avLst/>
@@ -6328,7 +6921,7 @@
         <p:spPr>
           <a:xfrm>
             <a:off x="1371600" y="5212080"/>
-            <a:ext cx="4114440" cy="914040"/>
+            <a:ext cx="4114080" cy="913680"/>
           </a:xfrm>
           <a:prstGeom prst="rect">
             <a:avLst/>
@@ -6443,7 +7036,7 @@
         <p:spPr>
           <a:xfrm>
             <a:off x="6858000" y="4937760"/>
-            <a:ext cx="3657240" cy="273960"/>
+            <a:ext cx="3656880" cy="273600"/>
           </a:xfrm>
           <a:prstGeom prst="rect">
             <a:avLst/>
@@ -6516,7 +7109,7 @@
         <p:spPr>
           <a:xfrm>
             <a:off x="6858000" y="5212080"/>
-            <a:ext cx="4571640" cy="914040"/>
+            <a:ext cx="4571280" cy="913680"/>
           </a:xfrm>
           <a:prstGeom prst="rect">
             <a:avLst/>
@@ -6555,7 +7148,31 @@
                 <a:latin typeface="Calibri"/>
                 <a:ea typeface="Calibri"/>
               </a:rPr>
-              <a:t>проф. Круглый Д.Г.</a:t>
+              <a:t>профессор Круглый </a:t>
+            </a:r>
+            <a:r>
+              <a:rPr lang="en-US" sz="1500" b="1" u="none" strike="noStrike">
+                <a:solidFill>
+                  <a:srgbClr val="FFFFFF"/>
+                </a:solidFill>
+                <a:effectLst/>
+                <a:uFillTx/>
+                <a:latin typeface="Calibri"/>
+                <a:ea typeface="Calibri"/>
+              </a:rPr>
+              <a:t>Дмитрий </a:t>
+            </a:r>
+            <a:r>
+              <a:rPr lang="en-US" sz="1500" b="1" u="none" strike="noStrike">
+                <a:solidFill>
+                  <a:srgbClr val="FFFFFF"/>
+                </a:solidFill>
+                <a:effectLst/>
+                <a:uFillTx/>
+                <a:latin typeface="Calibri"/>
+                <a:ea typeface="Calibri"/>
+              </a:rPr>
+              <a:t>Григорьевич</a:t>
             </a:r>
             <a:endParaRPr lang="en-US" sz="1500" b="0" u="none" strike="noStrike">
               <a:solidFill>
@@ -6585,7 +7202,31 @@
                 <a:latin typeface="Calibri"/>
                 <a:ea typeface="Calibri"/>
               </a:rPr>
-              <a:t>Кафедра физики и программной инженерии</a:t>
+              <a:t>Кафедра физики и </a:t>
+            </a:r>
+            <a:r>
+              <a:rPr lang="en-US" sz="1300" b="0" u="none" strike="noStrike">
+                <a:solidFill>
+                  <a:srgbClr val="FFFFFF"/>
+                </a:solidFill>
+                <a:effectLst/>
+                <a:uFillTx/>
+                <a:latin typeface="Calibri"/>
+                <a:ea typeface="Calibri"/>
+              </a:rPr>
+              <a:t>программной </a:t>
+            </a:r>
+            <a:r>
+              <a:rPr lang="en-US" sz="1300" b="0" u="none" strike="noStrike">
+                <a:solidFill>
+                  <a:srgbClr val="FFFFFF"/>
+                </a:solidFill>
+                <a:effectLst/>
+                <a:uFillTx/>
+                <a:latin typeface="Calibri"/>
+                <a:ea typeface="Calibri"/>
+              </a:rPr>
+              <a:t>инженерии</a:t>
             </a:r>
             <a:endParaRPr lang="en-US" sz="1300" b="0" u="none" strike="noStrike">
               <a:solidFill>
@@ -6607,7 +7248,7 @@
         <p:spPr>
           <a:xfrm>
             <a:off x="0" y="6400800"/>
-            <a:ext cx="12188520" cy="456840"/>
+            <a:ext cx="12188160" cy="456480"/>
           </a:xfrm>
           <a:prstGeom prst="rect">
             <a:avLst/>
@@ -6650,7 +7291,7 @@
         <p:spPr>
           <a:xfrm>
             <a:off x="0" y="6400800"/>
-            <a:ext cx="12188520" cy="456840"/>
+            <a:ext cx="12188160" cy="456480"/>
           </a:xfrm>
           <a:prstGeom prst="rect">
             <a:avLst/>
@@ -6689,7 +7330,19 @@
                 <a:latin typeface="Calibri"/>
                 <a:ea typeface="Calibri"/>
               </a:rPr>
-              <a:t>Херсонская область · 2026</a:t>
+              <a:t>Херсонская </a:t>
+            </a:r>
+            <a:r>
+              <a:rPr lang="en-US" sz="1200" b="0" u="none" spc="300" strike="noStrike">
+                <a:solidFill>
+                  <a:srgbClr val="B8C5D6"/>
+                </a:solidFill>
+                <a:effectLst/>
+                <a:uFillTx/>
+                <a:latin typeface="Calibri"/>
+                <a:ea typeface="Calibri"/>
+              </a:rPr>
+              <a:t>область · 2026</a:t>
             </a:r>
             <a:endParaRPr lang="en-US" sz="1200" b="0" u="none" strike="noStrike">
               <a:solidFill>
@@ -6748,7 +7401,7 @@
         <p:spPr>
           <a:xfrm>
             <a:off x="457200" y="411480"/>
-            <a:ext cx="72720" cy="639720"/>
+            <a:ext cx="72360" cy="639360"/>
           </a:xfrm>
           <a:prstGeom prst="rect">
             <a:avLst/>
@@ -6767,7 +7420,7 @@
           <a:fontRef idx="minor"/>
         </p:style>
         <p:txBody>
-          <a:bodyPr lIns="90000" tIns="45000" rIns="90000" bIns="45000" anchor="t">
+          <a:bodyPr lIns="36360" tIns="45000" rIns="36360" bIns="45000" anchor="t">
             <a:noAutofit/>
           </a:bodyPr>
           <a:p>
@@ -6791,7 +7444,7 @@
         <p:spPr>
           <a:xfrm>
             <a:off x="685800" y="365760"/>
-            <a:ext cx="10816920" cy="594000"/>
+            <a:ext cx="10816560" cy="593640"/>
           </a:xfrm>
           <a:prstGeom prst="rect">
             <a:avLst/>
@@ -6852,7 +7505,7 @@
         <p:spPr>
           <a:xfrm>
             <a:off x="685800" y="960120"/>
-            <a:ext cx="10816920" cy="273960"/>
+            <a:ext cx="10816560" cy="273600"/>
           </a:xfrm>
           <a:prstGeom prst="rect">
             <a:avLst/>
@@ -6913,7 +7566,7 @@
         <p:spPr>
           <a:xfrm>
             <a:off x="640080" y="1554480"/>
-            <a:ext cx="3513960" cy="3382920"/>
+            <a:ext cx="3513600" cy="3382560"/>
           </a:xfrm>
           <a:prstGeom prst="rect">
             <a:avLst/>
@@ -6966,7 +7619,7 @@
         <p:spPr>
           <a:xfrm>
             <a:off x="640080" y="1554480"/>
-            <a:ext cx="3513960" cy="822600"/>
+            <a:ext cx="3513600" cy="822240"/>
           </a:xfrm>
           <a:prstGeom prst="rect">
             <a:avLst/>
@@ -7009,7 +7662,7 @@
         <p:spPr>
           <a:xfrm>
             <a:off x="640080" y="1600200"/>
-            <a:ext cx="3513960" cy="456840"/>
+            <a:ext cx="3513600" cy="456480"/>
           </a:xfrm>
           <a:prstGeom prst="rect">
             <a:avLst/>
@@ -7070,7 +7723,7 @@
         <p:spPr>
           <a:xfrm>
             <a:off x="640080" y="2011680"/>
-            <a:ext cx="3513960" cy="319680"/>
+            <a:ext cx="3513600" cy="319320"/>
           </a:xfrm>
           <a:prstGeom prst="rect">
             <a:avLst/>
@@ -7131,7 +7784,7 @@
         <p:spPr>
           <a:xfrm>
             <a:off x="822960" y="2606040"/>
-            <a:ext cx="3148200" cy="639720"/>
+            <a:ext cx="3147840" cy="639360"/>
           </a:xfrm>
           <a:prstGeom prst="rect">
             <a:avLst/>
@@ -7177,7 +7830,7 @@
         <p:spPr>
           <a:xfrm>
             <a:off x="822960" y="2606040"/>
-            <a:ext cx="3148200" cy="639720"/>
+            <a:ext cx="3147840" cy="639360"/>
           </a:xfrm>
           <a:prstGeom prst="rect">
             <a:avLst/>
@@ -7238,7 +7891,7 @@
         <p:spPr>
           <a:xfrm>
             <a:off x="822960" y="3383280"/>
-            <a:ext cx="3148200" cy="685440"/>
+            <a:ext cx="3147840" cy="685080"/>
           </a:xfrm>
           <a:prstGeom prst="rect">
             <a:avLst/>
@@ -7299,7 +7952,7 @@
         <p:spPr>
           <a:xfrm>
             <a:off x="822960" y="4297680"/>
-            <a:ext cx="3148200" cy="548280"/>
+            <a:ext cx="3147840" cy="547920"/>
           </a:xfrm>
           <a:prstGeom prst="rect">
             <a:avLst/>
@@ -7372,7 +8025,7 @@
         <p:spPr>
           <a:xfrm>
             <a:off x="4337280" y="1554480"/>
-            <a:ext cx="3513960" cy="3382920"/>
+            <a:ext cx="3513600" cy="3382560"/>
           </a:xfrm>
           <a:prstGeom prst="rect">
             <a:avLst/>
@@ -7425,7 +8078,7 @@
         <p:spPr>
           <a:xfrm>
             <a:off x="4337280" y="1554480"/>
-            <a:ext cx="3513960" cy="822600"/>
+            <a:ext cx="3513600" cy="822240"/>
           </a:xfrm>
           <a:prstGeom prst="rect">
             <a:avLst/>
@@ -7468,7 +8121,7 @@
         <p:spPr>
           <a:xfrm>
             <a:off x="4337280" y="1600200"/>
-            <a:ext cx="3513960" cy="456840"/>
+            <a:ext cx="3513600" cy="456480"/>
           </a:xfrm>
           <a:prstGeom prst="rect">
             <a:avLst/>
@@ -7529,7 +8182,7 @@
         <p:spPr>
           <a:xfrm>
             <a:off x="4337280" y="2011680"/>
-            <a:ext cx="3513960" cy="319680"/>
+            <a:ext cx="3513600" cy="319320"/>
           </a:xfrm>
           <a:prstGeom prst="rect">
             <a:avLst/>
@@ -7590,7 +8243,7 @@
         <p:spPr>
           <a:xfrm>
             <a:off x="4520160" y="2606040"/>
-            <a:ext cx="3148200" cy="639720"/>
+            <a:ext cx="3147840" cy="639360"/>
           </a:xfrm>
           <a:prstGeom prst="rect">
             <a:avLst/>
@@ -7636,7 +8289,7 @@
         <p:spPr>
           <a:xfrm>
             <a:off x="4520160" y="2606040"/>
-            <a:ext cx="3148200" cy="639720"/>
+            <a:ext cx="3147840" cy="639360"/>
           </a:xfrm>
           <a:prstGeom prst="rect">
             <a:avLst/>
@@ -7697,7 +8350,7 @@
         <p:spPr>
           <a:xfrm>
             <a:off x="4520160" y="3383280"/>
-            <a:ext cx="3148200" cy="685440"/>
+            <a:ext cx="3147840" cy="685080"/>
           </a:xfrm>
           <a:prstGeom prst="rect">
             <a:avLst/>
@@ -7758,7 +8411,7 @@
         <p:spPr>
           <a:xfrm>
             <a:off x="4520160" y="4297680"/>
-            <a:ext cx="3148200" cy="548280"/>
+            <a:ext cx="3147840" cy="547920"/>
           </a:xfrm>
           <a:prstGeom prst="rect">
             <a:avLst/>
@@ -7831,7 +8484,7 @@
         <p:spPr>
           <a:xfrm>
             <a:off x="8034480" y="1554480"/>
-            <a:ext cx="3513960" cy="3382920"/>
+            <a:ext cx="3513600" cy="3382560"/>
           </a:xfrm>
           <a:prstGeom prst="rect">
             <a:avLst/>
@@ -7884,7 +8537,7 @@
         <p:spPr>
           <a:xfrm>
             <a:off x="8034480" y="1554480"/>
-            <a:ext cx="3513960" cy="822600"/>
+            <a:ext cx="3513600" cy="822240"/>
           </a:xfrm>
           <a:prstGeom prst="rect">
             <a:avLst/>
@@ -7927,7 +8580,7 @@
         <p:spPr>
           <a:xfrm>
             <a:off x="8034480" y="1600200"/>
-            <a:ext cx="3513960" cy="456840"/>
+            <a:ext cx="3513600" cy="456480"/>
           </a:xfrm>
           <a:prstGeom prst="rect">
             <a:avLst/>
@@ -7988,7 +8641,7 @@
         <p:spPr>
           <a:xfrm>
             <a:off x="8034480" y="2011680"/>
-            <a:ext cx="3513960" cy="319680"/>
+            <a:ext cx="3513600" cy="319320"/>
           </a:xfrm>
           <a:prstGeom prst="rect">
             <a:avLst/>
@@ -8049,7 +8702,7 @@
         <p:spPr>
           <a:xfrm>
             <a:off x="8217360" y="2606040"/>
-            <a:ext cx="3148200" cy="639720"/>
+            <a:ext cx="3147840" cy="639360"/>
           </a:xfrm>
           <a:prstGeom prst="rect">
             <a:avLst/>
@@ -8095,7 +8748,7 @@
         <p:spPr>
           <a:xfrm>
             <a:off x="8217360" y="2606040"/>
-            <a:ext cx="3148200" cy="639720"/>
+            <a:ext cx="3147840" cy="639360"/>
           </a:xfrm>
           <a:prstGeom prst="rect">
             <a:avLst/>
@@ -8156,7 +8809,7 @@
         <p:spPr>
           <a:xfrm>
             <a:off x="8217360" y="3383280"/>
-            <a:ext cx="3148200" cy="685440"/>
+            <a:ext cx="3147840" cy="685080"/>
           </a:xfrm>
           <a:prstGeom prst="rect">
             <a:avLst/>
@@ -8217,7 +8870,7 @@
         <p:spPr>
           <a:xfrm>
             <a:off x="8217360" y="4297680"/>
-            <a:ext cx="3148200" cy="548280"/>
+            <a:ext cx="3147840" cy="547920"/>
           </a:xfrm>
           <a:prstGeom prst="rect">
             <a:avLst/>
@@ -8290,7 +8943,7 @@
         <p:spPr>
           <a:xfrm>
             <a:off x="640080" y="5212080"/>
-            <a:ext cx="10908360" cy="1142640"/>
+            <a:ext cx="10908000" cy="1142280"/>
           </a:xfrm>
           <a:prstGeom prst="rect">
             <a:avLst/>
@@ -8333,7 +8986,7 @@
         <p:spPr>
           <a:xfrm>
             <a:off x="868680" y="5349240"/>
-            <a:ext cx="1371240" cy="273960"/>
+            <a:ext cx="1370880" cy="273600"/>
           </a:xfrm>
           <a:prstGeom prst="rect">
             <a:avLst/>
@@ -8394,7 +9047,7 @@
         <p:spPr>
           <a:xfrm>
             <a:off x="868680" y="5623560"/>
-            <a:ext cx="10451160" cy="685440"/>
+            <a:ext cx="10450800" cy="685080"/>
           </a:xfrm>
           <a:prstGeom prst="rect">
             <a:avLst/>
@@ -8467,7 +9120,7 @@
         <p:spPr>
           <a:xfrm>
             <a:off x="0" y="6537960"/>
-            <a:ext cx="12188520" cy="319680"/>
+            <a:ext cx="12188160" cy="319320"/>
           </a:xfrm>
           <a:prstGeom prst="rect">
             <a:avLst/>
@@ -8510,7 +9163,7 @@
         <p:spPr>
           <a:xfrm>
             <a:off x="365760" y="6565320"/>
-            <a:ext cx="8229240" cy="273960"/>
+            <a:ext cx="8228880" cy="273600"/>
           </a:xfrm>
           <a:prstGeom prst="rect">
             <a:avLst/>
@@ -8571,7 +9224,7 @@
         <p:spPr>
           <a:xfrm>
             <a:off x="10908720" y="6565320"/>
-            <a:ext cx="914040" cy="273960"/>
+            <a:ext cx="913680" cy="273600"/>
           </a:xfrm>
           <a:prstGeom prst="rect">
             <a:avLst/>
@@ -8669,7 +9322,7 @@
         <p:spPr>
           <a:xfrm>
             <a:off x="457200" y="411480"/>
-            <a:ext cx="72720" cy="639720"/>
+            <a:ext cx="72360" cy="639360"/>
           </a:xfrm>
           <a:prstGeom prst="rect">
             <a:avLst/>
@@ -8688,7 +9341,7 @@
           <a:fontRef idx="minor"/>
         </p:style>
         <p:txBody>
-          <a:bodyPr lIns="90000" tIns="45000" rIns="90000" bIns="45000" anchor="t">
+          <a:bodyPr lIns="36360" tIns="45000" rIns="36360" bIns="45000" anchor="t">
             <a:noAutofit/>
           </a:bodyPr>
           <a:p>
@@ -8712,7 +9365,7 @@
         <p:spPr>
           <a:xfrm>
             <a:off x="685800" y="365760"/>
-            <a:ext cx="10816920" cy="594000"/>
+            <a:ext cx="10816560" cy="593640"/>
           </a:xfrm>
           <a:prstGeom prst="rect">
             <a:avLst/>
@@ -8773,7 +9426,7 @@
         <p:spPr>
           <a:xfrm>
             <a:off x="685800" y="960120"/>
-            <a:ext cx="10816920" cy="273960"/>
+            <a:ext cx="10816560" cy="273600"/>
           </a:xfrm>
           <a:prstGeom prst="rect">
             <a:avLst/>
@@ -8834,7 +9487,7 @@
         <p:spPr>
           <a:xfrm>
             <a:off x="640080" y="1554480"/>
-            <a:ext cx="5486040" cy="4754520"/>
+            <a:ext cx="5485680" cy="4754160"/>
           </a:xfrm>
           <a:prstGeom prst="rect">
             <a:avLst/>
@@ -8887,7 +9540,7 @@
         <p:spPr>
           <a:xfrm>
             <a:off x="640080" y="1554480"/>
-            <a:ext cx="5486040" cy="594000"/>
+            <a:ext cx="5485680" cy="593640"/>
           </a:xfrm>
           <a:prstGeom prst="rect">
             <a:avLst/>
@@ -8930,7 +9583,7 @@
         <p:spPr>
           <a:xfrm>
             <a:off x="640080" y="1554480"/>
-            <a:ext cx="5486040" cy="594000"/>
+            <a:ext cx="5485680" cy="593640"/>
           </a:xfrm>
           <a:prstGeom prst="rect">
             <a:avLst/>
@@ -8991,7 +9644,7 @@
         <p:spPr>
           <a:xfrm>
             <a:off x="868680" y="2331720"/>
-            <a:ext cx="5120280" cy="776880"/>
+            <a:ext cx="5119920" cy="776520"/>
           </a:xfrm>
           <a:prstGeom prst="rect">
             <a:avLst/>
@@ -9094,7 +9747,7 @@
         <p:spPr>
           <a:xfrm>
             <a:off x="868680" y="3108960"/>
-            <a:ext cx="5120280" cy="776880"/>
+            <a:ext cx="5119920" cy="776520"/>
           </a:xfrm>
           <a:prstGeom prst="rect">
             <a:avLst/>
@@ -9197,7 +9850,7 @@
         <p:spPr>
           <a:xfrm>
             <a:off x="868680" y="3886200"/>
-            <a:ext cx="5120280" cy="776880"/>
+            <a:ext cx="5119920" cy="776520"/>
           </a:xfrm>
           <a:prstGeom prst="rect">
             <a:avLst/>
@@ -9300,7 +9953,7 @@
         <p:spPr>
           <a:xfrm>
             <a:off x="868680" y="4663440"/>
-            <a:ext cx="5120280" cy="776880"/>
+            <a:ext cx="5119920" cy="776520"/>
           </a:xfrm>
           <a:prstGeom prst="rect">
             <a:avLst/>
@@ -9403,7 +10056,7 @@
         <p:spPr>
           <a:xfrm>
             <a:off x="868680" y="5440680"/>
-            <a:ext cx="5120280" cy="776880"/>
+            <a:ext cx="5119920" cy="776520"/>
           </a:xfrm>
           <a:prstGeom prst="rect">
             <a:avLst/>
@@ -9506,7 +10159,7 @@
         <p:spPr>
           <a:xfrm>
             <a:off x="6309360" y="1554480"/>
-            <a:ext cx="5239080" cy="4754520"/>
+            <a:ext cx="5238720" cy="4754160"/>
           </a:xfrm>
           <a:prstGeom prst="rect">
             <a:avLst/>
@@ -9559,7 +10212,7 @@
         <p:spPr>
           <a:xfrm>
             <a:off x="6309360" y="1554480"/>
-            <a:ext cx="5239080" cy="594000"/>
+            <a:ext cx="5238720" cy="593640"/>
           </a:xfrm>
           <a:prstGeom prst="rect">
             <a:avLst/>
@@ -9602,7 +10255,7 @@
         <p:spPr>
           <a:xfrm>
             <a:off x="6309360" y="1554480"/>
-            <a:ext cx="5239080" cy="594000"/>
+            <a:ext cx="5238720" cy="593640"/>
           </a:xfrm>
           <a:prstGeom prst="rect">
             <a:avLst/>
@@ -9663,7 +10316,7 @@
         <p:spPr>
           <a:xfrm>
             <a:off x="6537960" y="2331720"/>
-            <a:ext cx="5010480" cy="776880"/>
+            <a:ext cx="5010120" cy="776520"/>
           </a:xfrm>
           <a:prstGeom prst="rect">
             <a:avLst/>
@@ -9766,7 +10419,7 @@
         <p:spPr>
           <a:xfrm>
             <a:off x="6537960" y="3108960"/>
-            <a:ext cx="5010480" cy="776880"/>
+            <a:ext cx="5010120" cy="776520"/>
           </a:xfrm>
           <a:prstGeom prst="rect">
             <a:avLst/>
@@ -9869,7 +10522,7 @@
         <p:spPr>
           <a:xfrm>
             <a:off x="6537960" y="3886200"/>
-            <a:ext cx="5010480" cy="776880"/>
+            <a:ext cx="5010120" cy="776520"/>
           </a:xfrm>
           <a:prstGeom prst="rect">
             <a:avLst/>
@@ -9972,7 +10625,7 @@
         <p:spPr>
           <a:xfrm>
             <a:off x="6537960" y="4663440"/>
-            <a:ext cx="5010480" cy="776880"/>
+            <a:ext cx="5010120" cy="776520"/>
           </a:xfrm>
           <a:prstGeom prst="rect">
             <a:avLst/>
@@ -10075,7 +10728,7 @@
         <p:spPr>
           <a:xfrm>
             <a:off x="6537960" y="5440680"/>
-            <a:ext cx="5010480" cy="776880"/>
+            <a:ext cx="5010120" cy="776520"/>
           </a:xfrm>
           <a:prstGeom prst="rect">
             <a:avLst/>
@@ -10178,7 +10831,7 @@
         <p:spPr>
           <a:xfrm>
             <a:off x="0" y="6537960"/>
-            <a:ext cx="12188520" cy="319680"/>
+            <a:ext cx="12188160" cy="319320"/>
           </a:xfrm>
           <a:prstGeom prst="rect">
             <a:avLst/>
@@ -10221,7 +10874,7 @@
         <p:spPr>
           <a:xfrm>
             <a:off x="365760" y="6565320"/>
-            <a:ext cx="8229240" cy="273960"/>
+            <a:ext cx="8228880" cy="273600"/>
           </a:xfrm>
           <a:prstGeom prst="rect">
             <a:avLst/>
@@ -10282,7 +10935,7 @@
         <p:spPr>
           <a:xfrm>
             <a:off x="10908720" y="6565320"/>
-            <a:ext cx="914040" cy="273960"/>
+            <a:ext cx="913680" cy="273600"/>
           </a:xfrm>
           <a:prstGeom prst="rect">
             <a:avLst/>
@@ -10423,7 +11076,7 @@
         <p:spPr>
           <a:xfrm>
             <a:off x="457200" y="1097280"/>
-            <a:ext cx="11274120" cy="456840"/>
+            <a:ext cx="11273760" cy="456480"/>
           </a:xfrm>
           <a:prstGeom prst="rect">
             <a:avLst/>
@@ -10484,7 +11137,7 @@
         <p:spPr>
           <a:xfrm>
             <a:off x="640080" y="1828800"/>
-            <a:ext cx="3453120" cy="2559960"/>
+            <a:ext cx="3452760" cy="2559600"/>
           </a:xfrm>
           <a:prstGeom prst="rect">
             <a:avLst/>
@@ -10530,7 +11183,7 @@
         <p:spPr>
           <a:xfrm>
             <a:off x="822960" y="1965960"/>
-            <a:ext cx="3087360" cy="502560"/>
+            <a:ext cx="3087000" cy="502200"/>
           </a:xfrm>
           <a:prstGeom prst="rect">
             <a:avLst/>
@@ -10591,7 +11244,7 @@
         <p:spPr>
           <a:xfrm>
             <a:off x="822960" y="2514600"/>
-            <a:ext cx="3087360" cy="639720"/>
+            <a:ext cx="3087000" cy="639360"/>
           </a:xfrm>
           <a:prstGeom prst="rect">
             <a:avLst/>
@@ -10652,7 +11305,7 @@
         <p:spPr>
           <a:xfrm>
             <a:off x="822960" y="3200400"/>
-            <a:ext cx="3087360" cy="1142640"/>
+            <a:ext cx="3087000" cy="1142280"/>
           </a:xfrm>
           <a:prstGeom prst="rect">
             <a:avLst/>
@@ -10713,7 +11366,7 @@
         <p:spPr>
           <a:xfrm>
             <a:off x="4367880" y="1828800"/>
-            <a:ext cx="3453120" cy="2559960"/>
+            <a:ext cx="3452760" cy="2559600"/>
           </a:xfrm>
           <a:prstGeom prst="rect">
             <a:avLst/>
@@ -10759,7 +11412,7 @@
         <p:spPr>
           <a:xfrm>
             <a:off x="4550760" y="1965960"/>
-            <a:ext cx="3087360" cy="502560"/>
+            <a:ext cx="3087000" cy="502200"/>
           </a:xfrm>
           <a:prstGeom prst="rect">
             <a:avLst/>
@@ -10820,7 +11473,7 @@
         <p:spPr>
           <a:xfrm>
             <a:off x="4550760" y="2514600"/>
-            <a:ext cx="3087360" cy="639720"/>
+            <a:ext cx="3087000" cy="639360"/>
           </a:xfrm>
           <a:prstGeom prst="rect">
             <a:avLst/>
@@ -10881,7 +11534,7 @@
         <p:spPr>
           <a:xfrm>
             <a:off x="4550760" y="3200400"/>
-            <a:ext cx="3087360" cy="1142640"/>
+            <a:ext cx="3087000" cy="1142280"/>
           </a:xfrm>
           <a:prstGeom prst="rect">
             <a:avLst/>
@@ -10942,7 +11595,7 @@
         <p:spPr>
           <a:xfrm>
             <a:off x="8095320" y="1828800"/>
-            <a:ext cx="3453120" cy="2559960"/>
+            <a:ext cx="3452760" cy="2559600"/>
           </a:xfrm>
           <a:prstGeom prst="rect">
             <a:avLst/>
@@ -10988,7 +11641,7 @@
         <p:spPr>
           <a:xfrm>
             <a:off x="8278200" y="1965960"/>
-            <a:ext cx="3087360" cy="502560"/>
+            <a:ext cx="3087000" cy="502200"/>
           </a:xfrm>
           <a:prstGeom prst="rect">
             <a:avLst/>
@@ -11049,7 +11702,7 @@
         <p:spPr>
           <a:xfrm>
             <a:off x="8278200" y="2514600"/>
-            <a:ext cx="3087360" cy="639720"/>
+            <a:ext cx="3087000" cy="639360"/>
           </a:xfrm>
           <a:prstGeom prst="rect">
             <a:avLst/>
@@ -11110,7 +11763,7 @@
         <p:spPr>
           <a:xfrm>
             <a:off x="8278200" y="3200400"/>
-            <a:ext cx="3087360" cy="1142640"/>
+            <a:ext cx="3087000" cy="1142280"/>
           </a:xfrm>
           <a:prstGeom prst="rect">
             <a:avLst/>
@@ -11171,7 +11824,7 @@
         <p:spPr>
           <a:xfrm>
             <a:off x="457200" y="4937760"/>
-            <a:ext cx="11274120" cy="639720"/>
+            <a:ext cx="11273760" cy="639360"/>
           </a:xfrm>
           <a:prstGeom prst="rect">
             <a:avLst/>
@@ -11232,7 +11885,7 @@
         <p:spPr>
           <a:xfrm>
             <a:off x="457200" y="5623560"/>
-            <a:ext cx="11274120" cy="365400"/>
+            <a:ext cx="11273760" cy="365040"/>
           </a:xfrm>
           <a:prstGeom prst="rect">
             <a:avLst/>
@@ -11293,7 +11946,7 @@
         <p:spPr>
           <a:xfrm>
             <a:off x="0" y="6400800"/>
-            <a:ext cx="12188520" cy="456840"/>
+            <a:ext cx="12188160" cy="456480"/>
           </a:xfrm>
           <a:prstGeom prst="rect">
             <a:avLst/>
@@ -11336,7 +11989,7 @@
         <p:spPr>
           <a:xfrm>
             <a:off x="0" y="6400800"/>
-            <a:ext cx="12188520" cy="456840"/>
+            <a:ext cx="12188160" cy="456480"/>
           </a:xfrm>
           <a:prstGeom prst="rect">
             <a:avLst/>
@@ -11434,7 +12087,7 @@
         <p:spPr>
           <a:xfrm>
             <a:off x="457200" y="411480"/>
-            <a:ext cx="72720" cy="639720"/>
+            <a:ext cx="72360" cy="639360"/>
           </a:xfrm>
           <a:prstGeom prst="rect">
             <a:avLst/>
@@ -11453,7 +12106,7 @@
           <a:fontRef idx="minor"/>
         </p:style>
         <p:txBody>
-          <a:bodyPr lIns="90000" tIns="45000" rIns="90000" bIns="45000" anchor="t">
+          <a:bodyPr lIns="36360" tIns="45000" rIns="36360" bIns="45000" anchor="t">
             <a:noAutofit/>
           </a:bodyPr>
           <a:p>
@@ -11477,7 +12130,7 @@
         <p:spPr>
           <a:xfrm>
             <a:off x="685800" y="365760"/>
-            <a:ext cx="10816920" cy="594000"/>
+            <a:ext cx="10816560" cy="593640"/>
           </a:xfrm>
           <a:prstGeom prst="rect">
             <a:avLst/>
@@ -11516,7 +12169,19 @@
                 <a:latin typeface="Calibri"/>
                 <a:ea typeface="Calibri"/>
               </a:rPr>
-              <a:t>Актуальность темы</a:t>
+              <a:t>Актуально</a:t>
+            </a:r>
+            <a:r>
+              <a:rPr lang="en-US" sz="2800" b="1" u="none" strike="noStrike">
+                <a:solidFill>
+                  <a:srgbClr val="1A2332"/>
+                </a:solidFill>
+                <a:effectLst/>
+                <a:uFillTx/>
+                <a:latin typeface="Calibri"/>
+                <a:ea typeface="Calibri"/>
+              </a:rPr>
+              <a:t>сть темы</a:t>
             </a:r>
             <a:endParaRPr lang="en-US" sz="2800" b="0" u="none" strike="noStrike">
               <a:solidFill>
@@ -11538,7 +12203,7 @@
         <p:spPr>
           <a:xfrm>
             <a:off x="685800" y="960120"/>
-            <a:ext cx="10816920" cy="273960"/>
+            <a:ext cx="10816560" cy="273600"/>
           </a:xfrm>
           <a:prstGeom prst="rect">
             <a:avLst/>
@@ -11577,7 +12242,55 @@
                 <a:latin typeface="Calibri"/>
                 <a:ea typeface="Calibri"/>
               </a:rPr>
-              <a:t>Почему климатические изменения требуют новых методов анализа</a:t>
+              <a:t>Почему </a:t>
+            </a:r>
+            <a:r>
+              <a:rPr lang="en-US" sz="1300" b="0" i="1" u="none" strike="noStrike">
+                <a:solidFill>
+                  <a:srgbClr val="1C7293"/>
+                </a:solidFill>
+                <a:effectLst/>
+                <a:uFillTx/>
+                <a:latin typeface="Calibri"/>
+                <a:ea typeface="Calibri"/>
+              </a:rPr>
+              <a:t>климатические </a:t>
+            </a:r>
+            <a:r>
+              <a:rPr lang="en-US" sz="1300" b="0" i="1" u="none" strike="noStrike">
+                <a:solidFill>
+                  <a:srgbClr val="1C7293"/>
+                </a:solidFill>
+                <a:effectLst/>
+                <a:uFillTx/>
+                <a:latin typeface="Calibri"/>
+                <a:ea typeface="Calibri"/>
+              </a:rPr>
+              <a:t>изменения требуют </a:t>
+            </a:r>
+            <a:r>
+              <a:rPr lang="en-US" sz="1300" b="0" i="1" u="none" strike="noStrike">
+                <a:solidFill>
+                  <a:srgbClr val="1C7293"/>
+                </a:solidFill>
+                <a:effectLst/>
+                <a:uFillTx/>
+                <a:latin typeface="Calibri"/>
+                <a:ea typeface="Calibri"/>
+              </a:rPr>
+              <a:t>новых методов </a:t>
+            </a:r>
+            <a:r>
+              <a:rPr lang="en-US" sz="1300" b="0" i="1" u="none" strike="noStrike">
+                <a:solidFill>
+                  <a:srgbClr val="1C7293"/>
+                </a:solidFill>
+                <a:effectLst/>
+                <a:uFillTx/>
+                <a:latin typeface="Calibri"/>
+                <a:ea typeface="Calibri"/>
+              </a:rPr>
+              <a:t>анализа</a:t>
             </a:r>
             <a:endParaRPr lang="en-US" sz="1300" b="0" u="none" strike="noStrike">
               <a:solidFill>
@@ -11599,7 +12312,7 @@
         <p:spPr>
           <a:xfrm>
             <a:off x="640080" y="1554480"/>
-            <a:ext cx="5668920" cy="2742840"/>
+            <a:ext cx="5668560" cy="2742480"/>
           </a:xfrm>
           <a:prstGeom prst="rect">
             <a:avLst/>
@@ -11641,7 +12354,19 @@
                 <a:latin typeface="Calibri"/>
                 <a:ea typeface="Calibri"/>
               </a:rPr>
-              <a:t>Климатические изменения</a:t>
+              <a:t>Климатические </a:t>
+            </a:r>
+            <a:r>
+              <a:rPr lang="en-US" sz="1600" b="1" u="none" strike="noStrike">
+                <a:solidFill>
+                  <a:srgbClr val="065A82"/>
+                </a:solidFill>
+                <a:effectLst/>
+                <a:uFillTx/>
+                <a:latin typeface="Calibri"/>
+                <a:ea typeface="Calibri"/>
+              </a:rPr>
+              <a:t>изменения</a:t>
             </a:r>
             <a:r>
               <a:rPr lang="en-US" sz="1600" b="0" u="none" strike="noStrike">
@@ -11653,7 +12378,79 @@
                 <a:latin typeface="Calibri"/>
                 <a:ea typeface="Calibri"/>
               </a:rPr>
-              <a:t> — одна из наиболее сложных природно-технических проблем современности.</a:t>
+              <a:t> — одна </a:t>
+            </a:r>
+            <a:r>
+              <a:rPr lang="en-US" sz="1600" b="0" u="none" strike="noStrike">
+                <a:solidFill>
+                  <a:srgbClr val="1A2332"/>
+                </a:solidFill>
+                <a:effectLst/>
+                <a:uFillTx/>
+                <a:latin typeface="Calibri"/>
+                <a:ea typeface="Calibri"/>
+              </a:rPr>
+              <a:t>из наиболее </a:t>
+            </a:r>
+            <a:r>
+              <a:rPr lang="en-US" sz="1600" b="0" u="none" strike="noStrike">
+                <a:solidFill>
+                  <a:srgbClr val="1A2332"/>
+                </a:solidFill>
+                <a:effectLst/>
+                <a:uFillTx/>
+                <a:latin typeface="Calibri"/>
+                <a:ea typeface="Calibri"/>
+              </a:rPr>
+              <a:t>сложных </a:t>
+            </a:r>
+            <a:r>
+              <a:rPr lang="en-US" sz="1600" b="0" u="none" strike="noStrike">
+                <a:solidFill>
+                  <a:srgbClr val="1A2332"/>
+                </a:solidFill>
+                <a:effectLst/>
+                <a:uFillTx/>
+                <a:latin typeface="Calibri"/>
+                <a:ea typeface="Calibri"/>
+              </a:rPr>
+              <a:t>природно-</a:t>
+            </a:r>
+            <a:r>
+              <a:rPr lang="en-US" sz="1600" b="0" u="none" strike="noStrike">
+                <a:solidFill>
+                  <a:srgbClr val="1A2332"/>
+                </a:solidFill>
+                <a:effectLst/>
+                <a:uFillTx/>
+                <a:latin typeface="Calibri"/>
+                <a:ea typeface="Calibri"/>
+              </a:rPr>
+              <a:t>технических </a:t>
+            </a:r>
+            <a:r>
+              <a:rPr lang="en-US" sz="1600" b="0" u="none" strike="noStrike">
+                <a:solidFill>
+                  <a:srgbClr val="1A2332"/>
+                </a:solidFill>
+                <a:effectLst/>
+                <a:uFillTx/>
+                <a:latin typeface="Calibri"/>
+                <a:ea typeface="Calibri"/>
+              </a:rPr>
+              <a:t>проблем </a:t>
+            </a:r>
+            <a:r>
+              <a:rPr lang="en-US" sz="1600" b="0" u="none" strike="noStrike">
+                <a:solidFill>
+                  <a:srgbClr val="1A2332"/>
+                </a:solidFill>
+                <a:effectLst/>
+                <a:uFillTx/>
+                <a:latin typeface="Calibri"/>
+                <a:ea typeface="Calibri"/>
+              </a:rPr>
+              <a:t>современности.</a:t>
             </a:r>
             <a:endParaRPr lang="en-US" sz="1600" b="0" u="none" strike="noStrike">
               <a:solidFill>
@@ -11719,7 +12516,79 @@
                 <a:latin typeface="Calibri"/>
                 <a:ea typeface="Calibri"/>
               </a:rPr>
-              <a:t>Современные системы наблюдений формируют массивы данных, объём и сложность которых требуют </a:t>
+              <a:t>Современные </a:t>
+            </a:r>
+            <a:r>
+              <a:rPr lang="en-US" sz="1600" b="0" u="none" strike="noStrike">
+                <a:solidFill>
+                  <a:srgbClr val="1A2332"/>
+                </a:solidFill>
+                <a:effectLst/>
+                <a:uFillTx/>
+                <a:latin typeface="Calibri"/>
+                <a:ea typeface="Calibri"/>
+              </a:rPr>
+              <a:t>системы </a:t>
+            </a:r>
+            <a:r>
+              <a:rPr lang="en-US" sz="1600" b="0" u="none" strike="noStrike">
+                <a:solidFill>
+                  <a:srgbClr val="1A2332"/>
+                </a:solidFill>
+                <a:effectLst/>
+                <a:uFillTx/>
+                <a:latin typeface="Calibri"/>
+                <a:ea typeface="Calibri"/>
+              </a:rPr>
+              <a:t>наблюдений </a:t>
+            </a:r>
+            <a:r>
+              <a:rPr lang="en-US" sz="1600" b="0" u="none" strike="noStrike">
+                <a:solidFill>
+                  <a:srgbClr val="1A2332"/>
+                </a:solidFill>
+                <a:effectLst/>
+                <a:uFillTx/>
+                <a:latin typeface="Calibri"/>
+                <a:ea typeface="Calibri"/>
+              </a:rPr>
+              <a:t>формируют </a:t>
+            </a:r>
+            <a:r>
+              <a:rPr lang="en-US" sz="1600" b="0" u="none" strike="noStrike">
+                <a:solidFill>
+                  <a:srgbClr val="1A2332"/>
+                </a:solidFill>
+                <a:effectLst/>
+                <a:uFillTx/>
+                <a:latin typeface="Calibri"/>
+                <a:ea typeface="Calibri"/>
+              </a:rPr>
+              <a:t>массивы данных, </a:t>
+            </a:r>
+            <a:r>
+              <a:rPr lang="en-US" sz="1600" b="0" u="none" strike="noStrike">
+                <a:solidFill>
+                  <a:srgbClr val="1A2332"/>
+                </a:solidFill>
+                <a:effectLst/>
+                <a:uFillTx/>
+                <a:latin typeface="Calibri"/>
+                <a:ea typeface="Calibri"/>
+              </a:rPr>
+              <a:t>объём и сложность </a:t>
+            </a:r>
+            <a:r>
+              <a:rPr lang="en-US" sz="1600" b="0" u="none" strike="noStrike">
+                <a:solidFill>
+                  <a:srgbClr val="1A2332"/>
+                </a:solidFill>
+                <a:effectLst/>
+                <a:uFillTx/>
+                <a:latin typeface="Calibri"/>
+                <a:ea typeface="Calibri"/>
+              </a:rPr>
+              <a:t>которых требуют </a:t>
             </a:r>
             <a:r>
               <a:rPr lang="en-US" sz="1600" b="1" u="none" strike="noStrike">
@@ -11731,7 +12600,19 @@
                 <a:latin typeface="Calibri"/>
                 <a:ea typeface="Calibri"/>
               </a:rPr>
-              <a:t>дополнительных методов анализа</a:t>
+              <a:t>дополнительных </a:t>
+            </a:r>
+            <a:r>
+              <a:rPr lang="en-US" sz="1600" b="1" u="none" strike="noStrike">
+                <a:solidFill>
+                  <a:srgbClr val="065A82"/>
+                </a:solidFill>
+                <a:effectLst/>
+                <a:uFillTx/>
+                <a:latin typeface="Calibri"/>
+                <a:ea typeface="Calibri"/>
+              </a:rPr>
+              <a:t>методов анализа</a:t>
             </a:r>
             <a:r>
               <a:rPr lang="en-US" sz="1600" b="0" u="none" strike="noStrike">
@@ -11743,7 +12624,55 @@
                 <a:latin typeface="Calibri"/>
                 <a:ea typeface="Calibri"/>
               </a:rPr>
-              <a:t> помимо классических физических моделей.</a:t>
+              <a:t> </a:t>
+            </a:r>
+            <a:r>
+              <a:rPr lang="en-US" sz="1600" b="0" u="none" strike="noStrike">
+                <a:solidFill>
+                  <a:srgbClr val="1A2332"/>
+                </a:solidFill>
+                <a:effectLst/>
+                <a:uFillTx/>
+                <a:latin typeface="Calibri"/>
+                <a:ea typeface="Calibri"/>
+              </a:rPr>
+              <a:t>помимо </a:t>
+            </a:r>
+            <a:r>
+              <a:rPr lang="en-US" sz="1600" b="0" u="none" strike="noStrike">
+                <a:solidFill>
+                  <a:srgbClr val="1A2332"/>
+                </a:solidFill>
+                <a:effectLst/>
+                <a:uFillTx/>
+                <a:latin typeface="Calibri"/>
+                <a:ea typeface="Calibri"/>
+              </a:rPr>
+              <a:t>классических </a:t>
+            </a:r>
+            <a:r>
+              <a:rPr lang="en-US" sz="1600" b="0" u="none" strike="noStrike">
+                <a:solidFill>
+                  <a:srgbClr val="1A2332"/>
+                </a:solidFill>
+                <a:effectLst/>
+                <a:uFillTx/>
+                <a:latin typeface="Calibri"/>
+                <a:ea typeface="Calibri"/>
+              </a:rPr>
+              <a:t>физических </a:t>
+            </a:r>
+            <a:r>
+              <a:rPr lang="en-US" sz="1600" b="0" u="none" strike="noStrike">
+                <a:solidFill>
+                  <a:srgbClr val="1A2332"/>
+                </a:solidFill>
+                <a:effectLst/>
+                <a:uFillTx/>
+                <a:latin typeface="Calibri"/>
+                <a:ea typeface="Calibri"/>
+              </a:rPr>
+              <a:t>моделей.</a:t>
             </a:r>
             <a:endParaRPr lang="en-US" sz="1600" b="0" u="none" strike="noStrike">
               <a:solidFill>
@@ -11765,7 +12694,7 @@
         <p:spPr>
           <a:xfrm>
             <a:off x="6766560" y="1554480"/>
-            <a:ext cx="4937400" cy="1096920"/>
+            <a:ext cx="4937040" cy="1096560"/>
           </a:xfrm>
           <a:prstGeom prst="rect">
             <a:avLst/>
@@ -11818,7 +12747,7 @@
         <p:spPr>
           <a:xfrm>
             <a:off x="6766560" y="1554480"/>
-            <a:ext cx="91080" cy="1096920"/>
+            <a:ext cx="90720" cy="1096560"/>
           </a:xfrm>
           <a:prstGeom prst="rect">
             <a:avLst/>
@@ -11837,7 +12766,7 @@
           <a:fontRef idx="minor"/>
         </p:style>
         <p:txBody>
-          <a:bodyPr lIns="90000" tIns="45000" rIns="90000" bIns="45000" anchor="t">
+          <a:bodyPr lIns="45360" tIns="45000" rIns="45360" bIns="45000" anchor="t">
             <a:noAutofit/>
           </a:bodyPr>
           <a:p>
@@ -11861,7 +12790,7 @@
         <p:spPr>
           <a:xfrm>
             <a:off x="7040880" y="1645920"/>
-            <a:ext cx="1828440" cy="914040"/>
+            <a:ext cx="1828080" cy="913680"/>
           </a:xfrm>
           <a:prstGeom prst="rect">
             <a:avLst/>
@@ -11922,7 +12851,7 @@
         <p:spPr>
           <a:xfrm>
             <a:off x="8961120" y="1691640"/>
-            <a:ext cx="2697120" cy="868320"/>
+            <a:ext cx="2696760" cy="867960"/>
           </a:xfrm>
           <a:prstGeom prst="rect">
             <a:avLst/>
@@ -11983,7 +12912,7 @@
         <p:spPr>
           <a:xfrm>
             <a:off x="6766560" y="2834640"/>
-            <a:ext cx="4937400" cy="1096920"/>
+            <a:ext cx="4937040" cy="1096560"/>
           </a:xfrm>
           <a:prstGeom prst="rect">
             <a:avLst/>
@@ -12036,7 +12965,7 @@
         <p:spPr>
           <a:xfrm>
             <a:off x="6766560" y="2834640"/>
-            <a:ext cx="91080" cy="1096920"/>
+            <a:ext cx="90720" cy="1096560"/>
           </a:xfrm>
           <a:prstGeom prst="rect">
             <a:avLst/>
@@ -12055,7 +12984,7 @@
           <a:fontRef idx="minor"/>
         </p:style>
         <p:txBody>
-          <a:bodyPr lIns="90000" tIns="45000" rIns="90000" bIns="45000" anchor="t">
+          <a:bodyPr lIns="45360" tIns="45000" rIns="45360" bIns="45000" anchor="t">
             <a:noAutofit/>
           </a:bodyPr>
           <a:p>
@@ -12079,7 +13008,7 @@
         <p:spPr>
           <a:xfrm>
             <a:off x="7040880" y="2926080"/>
-            <a:ext cx="1828440" cy="914040"/>
+            <a:ext cx="1828080" cy="913680"/>
           </a:xfrm>
           <a:prstGeom prst="rect">
             <a:avLst/>
@@ -12140,7 +13069,7 @@
         <p:spPr>
           <a:xfrm>
             <a:off x="8961120" y="2971800"/>
-            <a:ext cx="2697120" cy="868320"/>
+            <a:ext cx="2696760" cy="867960"/>
           </a:xfrm>
           <a:prstGeom prst="rect">
             <a:avLst/>
@@ -12201,7 +13130,7 @@
         <p:spPr>
           <a:xfrm>
             <a:off x="6766560" y="4114800"/>
-            <a:ext cx="4937400" cy="1096920"/>
+            <a:ext cx="4937040" cy="1096560"/>
           </a:xfrm>
           <a:prstGeom prst="rect">
             <a:avLst/>
@@ -12254,7 +13183,7 @@
         <p:spPr>
           <a:xfrm>
             <a:off x="6766560" y="4114800"/>
-            <a:ext cx="91080" cy="1096920"/>
+            <a:ext cx="90720" cy="1096560"/>
           </a:xfrm>
           <a:prstGeom prst="rect">
             <a:avLst/>
@@ -12273,7 +13202,7 @@
           <a:fontRef idx="minor"/>
         </p:style>
         <p:txBody>
-          <a:bodyPr lIns="90000" tIns="45000" rIns="90000" bIns="45000" anchor="t">
+          <a:bodyPr lIns="45360" tIns="45000" rIns="45360" bIns="45000" anchor="t">
             <a:noAutofit/>
           </a:bodyPr>
           <a:p>
@@ -12297,7 +13226,7 @@
         <p:spPr>
           <a:xfrm>
             <a:off x="7040880" y="4206240"/>
-            <a:ext cx="1828440" cy="914040"/>
+            <a:ext cx="1828080" cy="913680"/>
           </a:xfrm>
           <a:prstGeom prst="rect">
             <a:avLst/>
@@ -12358,7 +13287,7 @@
         <p:spPr>
           <a:xfrm>
             <a:off x="8961120" y="4251960"/>
-            <a:ext cx="2697120" cy="868320"/>
+            <a:ext cx="2696760" cy="867960"/>
           </a:xfrm>
           <a:prstGeom prst="rect">
             <a:avLst/>
@@ -12419,7 +13348,7 @@
         <p:spPr>
           <a:xfrm>
             <a:off x="640080" y="5669280"/>
-            <a:ext cx="10908360" cy="639720"/>
+            <a:ext cx="10908000" cy="639360"/>
           </a:xfrm>
           <a:prstGeom prst="rect">
             <a:avLst/>
@@ -12482,7 +13411,7 @@
         <p:spPr>
           <a:xfrm>
             <a:off x="0" y="6537960"/>
-            <a:ext cx="12188520" cy="319680"/>
+            <a:ext cx="12188160" cy="319320"/>
           </a:xfrm>
           <a:prstGeom prst="rect">
             <a:avLst/>
@@ -12525,7 +13454,7 @@
         <p:spPr>
           <a:xfrm>
             <a:off x="365760" y="6565320"/>
-            <a:ext cx="8229240" cy="273960"/>
+            <a:ext cx="8228880" cy="273600"/>
           </a:xfrm>
           <a:prstGeom prst="rect">
             <a:avLst/>
@@ -12586,7 +13515,7 @@
         <p:spPr>
           <a:xfrm>
             <a:off x="10908720" y="6565320"/>
-            <a:ext cx="914040" cy="273960"/>
+            <a:ext cx="913680" cy="273600"/>
           </a:xfrm>
           <a:prstGeom prst="rect">
             <a:avLst/>
@@ -12684,7 +13613,7 @@
         <p:spPr>
           <a:xfrm>
             <a:off x="457200" y="411480"/>
-            <a:ext cx="72720" cy="639720"/>
+            <a:ext cx="72360" cy="639360"/>
           </a:xfrm>
           <a:prstGeom prst="rect">
             <a:avLst/>
@@ -12703,7 +13632,7 @@
           <a:fontRef idx="minor"/>
         </p:style>
         <p:txBody>
-          <a:bodyPr lIns="90000" tIns="45000" rIns="90000" bIns="45000" anchor="t">
+          <a:bodyPr lIns="36360" tIns="45000" rIns="36360" bIns="45000" anchor="t">
             <a:noAutofit/>
           </a:bodyPr>
           <a:p>
@@ -12727,7 +13656,7 @@
         <p:spPr>
           <a:xfrm>
             <a:off x="685800" y="365760"/>
-            <a:ext cx="10816920" cy="594000"/>
+            <a:ext cx="10816560" cy="593640"/>
           </a:xfrm>
           <a:prstGeom prst="rect">
             <a:avLst/>
@@ -12788,7 +13717,7 @@
         <p:spPr>
           <a:xfrm>
             <a:off x="640080" y="1417320"/>
-            <a:ext cx="10908360" cy="1005480"/>
+            <a:ext cx="10908000" cy="1005120"/>
           </a:xfrm>
           <a:prstGeom prst="rect">
             <a:avLst/>
@@ -12831,7 +13760,7 @@
         <p:spPr>
           <a:xfrm>
             <a:off x="868680" y="1508760"/>
-            <a:ext cx="1096920" cy="319680"/>
+            <a:ext cx="1096560" cy="319320"/>
           </a:xfrm>
           <a:prstGeom prst="rect">
             <a:avLst/>
@@ -12892,7 +13821,7 @@
         <p:spPr>
           <a:xfrm>
             <a:off x="868680" y="1828800"/>
-            <a:ext cx="10634040" cy="594000"/>
+            <a:ext cx="10633680" cy="593640"/>
           </a:xfrm>
           <a:prstGeom prst="rect">
             <a:avLst/>
@@ -12953,7 +13882,7 @@
         <p:spPr>
           <a:xfrm>
             <a:off x="640080" y="2606040"/>
-            <a:ext cx="2742840" cy="319680"/>
+            <a:ext cx="2742480" cy="319320"/>
           </a:xfrm>
           <a:prstGeom prst="rect">
             <a:avLst/>
@@ -13014,7 +13943,7 @@
         <p:spPr>
           <a:xfrm>
             <a:off x="640080" y="3017520"/>
-            <a:ext cx="3544560" cy="1508400"/>
+            <a:ext cx="3544200" cy="1508040"/>
           </a:xfrm>
           <a:prstGeom prst="rect">
             <a:avLst/>
@@ -13067,7 +13996,7 @@
         <p:spPr>
           <a:xfrm>
             <a:off x="822960" y="3200400"/>
-            <a:ext cx="502560" cy="502560"/>
+            <a:ext cx="502200" cy="502200"/>
           </a:xfrm>
           <a:prstGeom prst="ellipse">
             <a:avLst/>
@@ -13110,7 +14039,7 @@
         <p:spPr>
           <a:xfrm>
             <a:off x="822960" y="3200400"/>
-            <a:ext cx="502560" cy="502560"/>
+            <a:ext cx="502200" cy="502200"/>
           </a:xfrm>
           <a:prstGeom prst="rect">
             <a:avLst/>
@@ -13171,7 +14100,7 @@
         <p:spPr>
           <a:xfrm>
             <a:off x="822960" y="3794760"/>
-            <a:ext cx="3178800" cy="594000"/>
+            <a:ext cx="3178440" cy="593640"/>
           </a:xfrm>
           <a:prstGeom prst="rect">
             <a:avLst/>
@@ -13232,7 +14161,7 @@
         <p:spPr>
           <a:xfrm>
             <a:off x="4322160" y="3017520"/>
-            <a:ext cx="3544560" cy="1508400"/>
+            <a:ext cx="3544200" cy="1508040"/>
           </a:xfrm>
           <a:prstGeom prst="rect">
             <a:avLst/>
@@ -13285,7 +14214,7 @@
         <p:spPr>
           <a:xfrm>
             <a:off x="4505040" y="3200400"/>
-            <a:ext cx="502560" cy="502560"/>
+            <a:ext cx="502200" cy="502200"/>
           </a:xfrm>
           <a:prstGeom prst="ellipse">
             <a:avLst/>
@@ -13328,7 +14257,7 @@
         <p:spPr>
           <a:xfrm>
             <a:off x="4505040" y="3200400"/>
-            <a:ext cx="502560" cy="502560"/>
+            <a:ext cx="502200" cy="502200"/>
           </a:xfrm>
           <a:prstGeom prst="rect">
             <a:avLst/>
@@ -13389,7 +14318,7 @@
         <p:spPr>
           <a:xfrm>
             <a:off x="4505040" y="3794760"/>
-            <a:ext cx="3178800" cy="594000"/>
+            <a:ext cx="3178440" cy="593640"/>
           </a:xfrm>
           <a:prstGeom prst="rect">
             <a:avLst/>
@@ -13450,7 +14379,7 @@
         <p:spPr>
           <a:xfrm>
             <a:off x="8003880" y="3017520"/>
-            <a:ext cx="3544560" cy="1508400"/>
+            <a:ext cx="3544200" cy="1508040"/>
           </a:xfrm>
           <a:prstGeom prst="rect">
             <a:avLst/>
@@ -13503,7 +14432,7 @@
         <p:spPr>
           <a:xfrm>
             <a:off x="8186760" y="3200400"/>
-            <a:ext cx="502560" cy="502560"/>
+            <a:ext cx="502200" cy="502200"/>
           </a:xfrm>
           <a:prstGeom prst="ellipse">
             <a:avLst/>
@@ -13546,7 +14475,7 @@
         <p:spPr>
           <a:xfrm>
             <a:off x="8186760" y="3200400"/>
-            <a:ext cx="502560" cy="502560"/>
+            <a:ext cx="502200" cy="502200"/>
           </a:xfrm>
           <a:prstGeom prst="rect">
             <a:avLst/>
@@ -13607,7 +14536,7 @@
         <p:spPr>
           <a:xfrm>
             <a:off x="8186760" y="3794760"/>
-            <a:ext cx="3178800" cy="594000"/>
+            <a:ext cx="3178440" cy="593640"/>
           </a:xfrm>
           <a:prstGeom prst="rect">
             <a:avLst/>
@@ -13668,7 +14597,7 @@
         <p:spPr>
           <a:xfrm>
             <a:off x="640080" y="4709160"/>
-            <a:ext cx="3544560" cy="1508400"/>
+            <a:ext cx="3544200" cy="1508040"/>
           </a:xfrm>
           <a:prstGeom prst="rect">
             <a:avLst/>
@@ -13721,7 +14650,7 @@
         <p:spPr>
           <a:xfrm>
             <a:off x="822960" y="4892040"/>
-            <a:ext cx="502560" cy="502560"/>
+            <a:ext cx="502200" cy="502200"/>
           </a:xfrm>
           <a:prstGeom prst="ellipse">
             <a:avLst/>
@@ -13764,7 +14693,7 @@
         <p:spPr>
           <a:xfrm>
             <a:off x="822960" y="4892040"/>
-            <a:ext cx="502560" cy="502560"/>
+            <a:ext cx="502200" cy="502200"/>
           </a:xfrm>
           <a:prstGeom prst="rect">
             <a:avLst/>
@@ -13825,7 +14754,7 @@
         <p:spPr>
           <a:xfrm>
             <a:off x="822960" y="5486400"/>
-            <a:ext cx="3178800" cy="594000"/>
+            <a:ext cx="3178440" cy="593640"/>
           </a:xfrm>
           <a:prstGeom prst="rect">
             <a:avLst/>
@@ -13886,7 +14815,7 @@
         <p:spPr>
           <a:xfrm>
             <a:off x="4322160" y="4709160"/>
-            <a:ext cx="3544560" cy="1508400"/>
+            <a:ext cx="3544200" cy="1508040"/>
           </a:xfrm>
           <a:prstGeom prst="rect">
             <a:avLst/>
@@ -13939,7 +14868,7 @@
         <p:spPr>
           <a:xfrm>
             <a:off x="4505040" y="4892040"/>
-            <a:ext cx="502560" cy="502560"/>
+            <a:ext cx="502200" cy="502200"/>
           </a:xfrm>
           <a:prstGeom prst="ellipse">
             <a:avLst/>
@@ -13982,7 +14911,7 @@
         <p:spPr>
           <a:xfrm>
             <a:off x="4505040" y="4892040"/>
-            <a:ext cx="502560" cy="502560"/>
+            <a:ext cx="502200" cy="502200"/>
           </a:xfrm>
           <a:prstGeom prst="rect">
             <a:avLst/>
@@ -14043,7 +14972,7 @@
         <p:spPr>
           <a:xfrm>
             <a:off x="4505040" y="5486400"/>
-            <a:ext cx="3178800" cy="594000"/>
+            <a:ext cx="3178440" cy="593640"/>
           </a:xfrm>
           <a:prstGeom prst="rect">
             <a:avLst/>
@@ -14104,7 +15033,7 @@
         <p:spPr>
           <a:xfrm>
             <a:off x="8003880" y="4709160"/>
-            <a:ext cx="3544560" cy="1508400"/>
+            <a:ext cx="3544200" cy="1508040"/>
           </a:xfrm>
           <a:prstGeom prst="rect">
             <a:avLst/>
@@ -14157,7 +15086,7 @@
         <p:spPr>
           <a:xfrm>
             <a:off x="8186760" y="4892040"/>
-            <a:ext cx="502560" cy="502560"/>
+            <a:ext cx="502200" cy="502200"/>
           </a:xfrm>
           <a:prstGeom prst="ellipse">
             <a:avLst/>
@@ -14200,7 +15129,7 @@
         <p:spPr>
           <a:xfrm>
             <a:off x="8186760" y="4892040"/>
-            <a:ext cx="502560" cy="502560"/>
+            <a:ext cx="502200" cy="502200"/>
           </a:xfrm>
           <a:prstGeom prst="rect">
             <a:avLst/>
@@ -14261,7 +15190,7 @@
         <p:spPr>
           <a:xfrm>
             <a:off x="8186760" y="5486400"/>
-            <a:ext cx="3178800" cy="594000"/>
+            <a:ext cx="3178440" cy="593640"/>
           </a:xfrm>
           <a:prstGeom prst="rect">
             <a:avLst/>
@@ -14322,7 +15251,7 @@
         <p:spPr>
           <a:xfrm>
             <a:off x="0" y="6537960"/>
-            <a:ext cx="12188520" cy="319680"/>
+            <a:ext cx="12188160" cy="319320"/>
           </a:xfrm>
           <a:prstGeom prst="rect">
             <a:avLst/>
@@ -14365,7 +15294,7 @@
         <p:spPr>
           <a:xfrm>
             <a:off x="365760" y="6565320"/>
-            <a:ext cx="8229240" cy="273960"/>
+            <a:ext cx="8228880" cy="273600"/>
           </a:xfrm>
           <a:prstGeom prst="rect">
             <a:avLst/>
@@ -14426,7 +15355,7 @@
         <p:spPr>
           <a:xfrm>
             <a:off x="10908720" y="6565320"/>
-            <a:ext cx="914040" cy="273960"/>
+            <a:ext cx="913680" cy="273600"/>
           </a:xfrm>
           <a:prstGeom prst="rect">
             <a:avLst/>
@@ -14524,7 +15453,7 @@
         <p:spPr>
           <a:xfrm>
             <a:off x="457200" y="411480"/>
-            <a:ext cx="72720" cy="639720"/>
+            <a:ext cx="72360" cy="639360"/>
           </a:xfrm>
           <a:prstGeom prst="rect">
             <a:avLst/>
@@ -14543,7 +15472,7 @@
           <a:fontRef idx="minor"/>
         </p:style>
         <p:txBody>
-          <a:bodyPr lIns="90000" tIns="45000" rIns="90000" bIns="45000" anchor="t">
+          <a:bodyPr lIns="36360" tIns="45000" rIns="36360" bIns="45000" anchor="t">
             <a:noAutofit/>
           </a:bodyPr>
           <a:p>
@@ -14567,7 +15496,7 @@
         <p:spPr>
           <a:xfrm>
             <a:off x="685800" y="365760"/>
-            <a:ext cx="10816920" cy="594000"/>
+            <a:ext cx="10816560" cy="593640"/>
           </a:xfrm>
           <a:prstGeom prst="rect">
             <a:avLst/>
@@ -14628,7 +15557,7 @@
         <p:spPr>
           <a:xfrm>
             <a:off x="640080" y="1554480"/>
-            <a:ext cx="3513960" cy="4114440"/>
+            <a:ext cx="3513600" cy="4114080"/>
           </a:xfrm>
           <a:prstGeom prst="rect">
             <a:avLst/>
@@ -14681,7 +15610,7 @@
         <p:spPr>
           <a:xfrm>
             <a:off x="640080" y="1554480"/>
-            <a:ext cx="3513960" cy="731160"/>
+            <a:ext cx="3513600" cy="730800"/>
           </a:xfrm>
           <a:prstGeom prst="rect">
             <a:avLst/>
@@ -14724,7 +15653,7 @@
         <p:spPr>
           <a:xfrm>
             <a:off x="640080" y="1554480"/>
-            <a:ext cx="3513960" cy="731160"/>
+            <a:ext cx="3513600" cy="730800"/>
           </a:xfrm>
           <a:prstGeom prst="rect">
             <a:avLst/>
@@ -14785,7 +15714,7 @@
         <p:spPr>
           <a:xfrm>
             <a:off x="914400" y="2560320"/>
-            <a:ext cx="2965320" cy="2925720"/>
+            <a:ext cx="2964960" cy="2925360"/>
           </a:xfrm>
           <a:prstGeom prst="rect">
             <a:avLst/>
@@ -14849,7 +15778,7 @@
         <p:spPr>
           <a:xfrm>
             <a:off x="4337280" y="1554480"/>
-            <a:ext cx="3513960" cy="4114440"/>
+            <a:ext cx="3513600" cy="4114080"/>
           </a:xfrm>
           <a:prstGeom prst="rect">
             <a:avLst/>
@@ -14902,7 +15831,7 @@
         <p:spPr>
           <a:xfrm>
             <a:off x="4337280" y="1554480"/>
-            <a:ext cx="3513960" cy="731160"/>
+            <a:ext cx="3513600" cy="730800"/>
           </a:xfrm>
           <a:prstGeom prst="rect">
             <a:avLst/>
@@ -14945,7 +15874,7 @@
         <p:spPr>
           <a:xfrm>
             <a:off x="4337280" y="1554480"/>
-            <a:ext cx="3513960" cy="731160"/>
+            <a:ext cx="3513600" cy="730800"/>
           </a:xfrm>
           <a:prstGeom prst="rect">
             <a:avLst/>
@@ -15006,7 +15935,7 @@
         <p:spPr>
           <a:xfrm>
             <a:off x="4611600" y="2560320"/>
-            <a:ext cx="2965320" cy="2925720"/>
+            <a:ext cx="2964960" cy="2925360"/>
           </a:xfrm>
           <a:prstGeom prst="rect">
             <a:avLst/>
@@ -15070,7 +15999,7 @@
         <p:spPr>
           <a:xfrm>
             <a:off x="8034480" y="1554480"/>
-            <a:ext cx="3513960" cy="4114440"/>
+            <a:ext cx="3513600" cy="4114080"/>
           </a:xfrm>
           <a:prstGeom prst="rect">
             <a:avLst/>
@@ -15123,7 +16052,7 @@
         <p:spPr>
           <a:xfrm>
             <a:off x="8034480" y="1554480"/>
-            <a:ext cx="3513960" cy="731160"/>
+            <a:ext cx="3513600" cy="730800"/>
           </a:xfrm>
           <a:prstGeom prst="rect">
             <a:avLst/>
@@ -15166,7 +16095,7 @@
         <p:spPr>
           <a:xfrm>
             <a:off x="8034480" y="1554480"/>
-            <a:ext cx="3513960" cy="731160"/>
+            <a:ext cx="3513600" cy="730800"/>
           </a:xfrm>
           <a:prstGeom prst="rect">
             <a:avLst/>
@@ -15227,7 +16156,7 @@
         <p:spPr>
           <a:xfrm>
             <a:off x="8308800" y="2560320"/>
-            <a:ext cx="2965320" cy="2925720"/>
+            <a:ext cx="2964960" cy="2925360"/>
           </a:xfrm>
           <a:prstGeom prst="rect">
             <a:avLst/>
@@ -15291,7 +16220,7 @@
         <p:spPr>
           <a:xfrm>
             <a:off x="640080" y="5806440"/>
-            <a:ext cx="10908360" cy="639720"/>
+            <a:ext cx="10908000" cy="639360"/>
           </a:xfrm>
           <a:prstGeom prst="rect">
             <a:avLst/>
@@ -15366,7 +16295,7 @@
         <p:spPr>
           <a:xfrm>
             <a:off x="0" y="6537960"/>
-            <a:ext cx="12188520" cy="319680"/>
+            <a:ext cx="12188160" cy="319320"/>
           </a:xfrm>
           <a:prstGeom prst="rect">
             <a:avLst/>
@@ -15409,7 +16338,7 @@
         <p:spPr>
           <a:xfrm>
             <a:off x="365760" y="6565320"/>
-            <a:ext cx="8229240" cy="273960"/>
+            <a:ext cx="8228880" cy="273600"/>
           </a:xfrm>
           <a:prstGeom prst="rect">
             <a:avLst/>
@@ -15470,7 +16399,7 @@
         <p:spPr>
           <a:xfrm>
             <a:off x="10908720" y="6565320"/>
-            <a:ext cx="914040" cy="273960"/>
+            <a:ext cx="913680" cy="273600"/>
           </a:xfrm>
           <a:prstGeom prst="rect">
             <a:avLst/>
@@ -15568,7 +16497,7 @@
         <p:spPr>
           <a:xfrm>
             <a:off x="457200" y="411480"/>
-            <a:ext cx="72720" cy="639720"/>
+            <a:ext cx="72360" cy="639360"/>
           </a:xfrm>
           <a:prstGeom prst="rect">
             <a:avLst/>
@@ -15587,51 +16516,173 @@
           <a:fontRef idx="minor"/>
         </p:style>
         <p:txBody>
+          <a:bodyPr lIns="36360" tIns="45000" rIns="36360" bIns="45000" anchor="t">
+            <a:noAutofit/>
+          </a:bodyPr>
+          <a:p>
+            <a:endParaRPr lang="en-US" sz="1800" b="0" u="none" strike="noStrike">
+              <a:solidFill>
+                <a:srgbClr val="FFFFFF"/>
+              </a:solidFill>
+              <a:effectLst/>
+              <a:uFillTx/>
+              <a:latin typeface="Arial"/>
+            </a:endParaRPr>
+          </a:p>
+        </p:txBody>
+      </p:sp>
+      <p:sp>
+        <p:nvSpPr>
+          <p:cNvPr id="96" name="Text 1"/>
+          <p:cNvSpPr/>
+          <p:nvPr/>
+        </p:nvSpPr>
+        <p:spPr>
+          <a:xfrm>
+            <a:off x="685800" y="365760"/>
+            <a:ext cx="10816560" cy="593640"/>
+          </a:xfrm>
+          <a:prstGeom prst="rect">
+            <a:avLst/>
+          </a:prstGeom>
+          <a:noFill/>
+          <a:ln w="0">
+            <a:noFill/>
+          </a:ln>
+        </p:spPr>
+        <p:style>
+          <a:lnRef idx="0"/>
+          <a:fillRef idx="0"/>
+          <a:effectRef idx="0"/>
+          <a:fontRef idx="minor"/>
+        </p:style>
+        <p:txBody>
+          <a:bodyPr lIns="0" tIns="0" rIns="0" bIns="0" anchor="ctr">
+            <a:noAutofit/>
+          </a:bodyPr>
+          <a:p>
+            <a:pPr defTabSz="914400">
+              <a:lnSpc>
+                <a:spcPct val="100000"/>
+              </a:lnSpc>
+              <a:tabLst>
+                <a:tab pos="0" algn="l"/>
+              </a:tabLst>
+            </a:pPr>
+            <a:r>
+              <a:rPr lang="en-US" sz="2800" b="1" u="none" strike="noStrike">
+                <a:solidFill>
+                  <a:srgbClr val="1A2332"/>
+                </a:solidFill>
+                <a:effectLst/>
+                <a:uFillTx/>
+                <a:latin typeface="Calibri"/>
+                <a:ea typeface="Calibri"/>
+              </a:rPr>
+              <a:t>Нейрокомпьютерные системы: основа подхода</a:t>
+            </a:r>
+            <a:endParaRPr lang="en-US" sz="2800" b="0" u="none" strike="noStrike">
+              <a:solidFill>
+                <a:srgbClr val="000000"/>
+              </a:solidFill>
+              <a:effectLst/>
+              <a:uFillTx/>
+              <a:latin typeface="Arial"/>
+            </a:endParaRPr>
+          </a:p>
+        </p:txBody>
+      </p:sp>
+      <p:sp>
+        <p:nvSpPr>
+          <p:cNvPr id="97" name="Text 2"/>
+          <p:cNvSpPr/>
+          <p:nvPr/>
+        </p:nvSpPr>
+        <p:spPr>
+          <a:xfrm>
+            <a:off x="685800" y="960120"/>
+            <a:ext cx="10816560" cy="273600"/>
+          </a:xfrm>
+          <a:prstGeom prst="rect">
+            <a:avLst/>
+          </a:prstGeom>
+          <a:noFill/>
+          <a:ln w="0">
+            <a:noFill/>
+          </a:ln>
+        </p:spPr>
+        <p:style>
+          <a:lnRef idx="0"/>
+          <a:fillRef idx="0"/>
+          <a:effectRef idx="0"/>
+          <a:fontRef idx="minor"/>
+        </p:style>
+        <p:txBody>
+          <a:bodyPr lIns="0" tIns="0" rIns="0" bIns="0" anchor="ctr">
+            <a:noAutofit/>
+          </a:bodyPr>
+          <a:p>
+            <a:pPr defTabSz="914400">
+              <a:lnSpc>
+                <a:spcPct val="100000"/>
+              </a:lnSpc>
+              <a:tabLst>
+                <a:tab pos="0" algn="l"/>
+              </a:tabLst>
+            </a:pPr>
+            <a:r>
+              <a:rPr lang="en-US" sz="1300" b="0" i="1" u="none" strike="noStrike">
+                <a:solidFill>
+                  <a:srgbClr val="1C7293"/>
+                </a:solidFill>
+                <a:effectLst/>
+                <a:uFillTx/>
+                <a:latin typeface="Calibri"/>
+                <a:ea typeface="Calibri"/>
+              </a:rPr>
+              <a:t>Раздел 1.1 теоретической части</a:t>
+            </a:r>
+            <a:endParaRPr lang="en-US" sz="1300" b="0" u="none" strike="noStrike">
+              <a:solidFill>
+                <a:srgbClr val="000000"/>
+              </a:solidFill>
+              <a:effectLst/>
+              <a:uFillTx/>
+              <a:latin typeface="Arial"/>
+            </a:endParaRPr>
+          </a:p>
+        </p:txBody>
+      </p:sp>
+      <p:sp>
+        <p:nvSpPr>
+          <p:cNvPr id="98" name="Text 3"/>
+          <p:cNvSpPr/>
+          <p:nvPr/>
+        </p:nvSpPr>
+        <p:spPr>
+          <a:xfrm>
+            <a:off x="640080" y="1554480"/>
+            <a:ext cx="5028480" cy="3199680"/>
+          </a:xfrm>
+          <a:prstGeom prst="rect">
+            <a:avLst/>
+          </a:prstGeom>
+          <a:noFill/>
+          <a:ln w="0">
+            <a:noFill/>
+          </a:ln>
+        </p:spPr>
+        <p:style>
+          <a:lnRef idx="0"/>
+          <a:fillRef idx="0"/>
+          <a:effectRef idx="0"/>
+          <a:fontRef idx="minor"/>
+        </p:style>
+        <p:txBody>
           <a:bodyPr lIns="90000" tIns="45000" rIns="90000" bIns="45000" anchor="t">
             <a:noAutofit/>
           </a:bodyPr>
           <a:p>
-            <a:endParaRPr lang="en-US" sz="1800" b="0" u="none" strike="noStrike">
-              <a:solidFill>
-                <a:srgbClr val="FFFFFF"/>
-              </a:solidFill>
-              <a:effectLst/>
-              <a:uFillTx/>
-              <a:latin typeface="Arial"/>
-            </a:endParaRPr>
-          </a:p>
-        </p:txBody>
-      </p:sp>
-      <p:sp>
-        <p:nvSpPr>
-          <p:cNvPr id="96" name="Text 1"/>
-          <p:cNvSpPr/>
-          <p:nvPr/>
-        </p:nvSpPr>
-        <p:spPr>
-          <a:xfrm>
-            <a:off x="685800" y="365760"/>
-            <a:ext cx="10816920" cy="594000"/>
-          </a:xfrm>
-          <a:prstGeom prst="rect">
-            <a:avLst/>
-          </a:prstGeom>
-          <a:noFill/>
-          <a:ln w="0">
-            <a:noFill/>
-          </a:ln>
-        </p:spPr>
-        <p:style>
-          <a:lnRef idx="0"/>
-          <a:fillRef idx="0"/>
-          <a:effectRef idx="0"/>
-          <a:fontRef idx="minor"/>
-        </p:style>
-        <p:txBody>
-          <a:bodyPr lIns="0" tIns="0" rIns="0" bIns="0" anchor="ctr">
-            <a:noAutofit/>
-          </a:bodyPr>
-          <a:p>
             <a:pPr defTabSz="914400">
               <a:lnSpc>
                 <a:spcPct val="100000"/>
@@ -15641,7 +16692,19 @@
               </a:tabLst>
             </a:pPr>
             <a:r>
-              <a:rPr lang="en-US" sz="2800" b="1" u="none" strike="noStrike">
+              <a:rPr lang="en-US" sz="1400" b="1" u="none" strike="noStrike">
+                <a:solidFill>
+                  <a:srgbClr val="065A82"/>
+                </a:solidFill>
+                <a:effectLst/>
+                <a:uFillTx/>
+                <a:latin typeface="Calibri"/>
+                <a:ea typeface="Calibri"/>
+              </a:rPr>
+              <a:t>Нейрокомпьютерная система</a:t>
+            </a:r>
+            <a:r>
+              <a:rPr lang="en-US" sz="1400" b="0" u="none" strike="noStrike">
                 <a:solidFill>
                   <a:srgbClr val="1A2332"/>
                 </a:solidFill>
@@ -15650,48 +16713,17 @@
                 <a:latin typeface="Calibri"/>
                 <a:ea typeface="Calibri"/>
               </a:rPr>
-              <a:t>Нейрокомпьютерные системы: основа подхода</a:t>
-            </a:r>
-            <a:endParaRPr lang="en-US" sz="2800" b="0" u="none" strike="noStrike">
-              <a:solidFill>
-                <a:srgbClr val="000000"/>
-              </a:solidFill>
-              <a:effectLst/>
-              <a:uFillTx/>
-              <a:latin typeface="Arial"/>
-            </a:endParaRPr>
-          </a:p>
-        </p:txBody>
-      </p:sp>
-      <p:sp>
-        <p:nvSpPr>
-          <p:cNvPr id="97" name="Text 2"/>
-          <p:cNvSpPr/>
-          <p:nvPr/>
-        </p:nvSpPr>
-        <p:spPr>
-          <a:xfrm>
-            <a:off x="685800" y="960120"/>
-            <a:ext cx="10816920" cy="273960"/>
-          </a:xfrm>
-          <a:prstGeom prst="rect">
-            <a:avLst/>
-          </a:prstGeom>
-          <a:noFill/>
-          <a:ln w="0">
-            <a:noFill/>
-          </a:ln>
-        </p:spPr>
-        <p:style>
-          <a:lnRef idx="0"/>
-          <a:fillRef idx="0"/>
-          <a:effectRef idx="0"/>
-          <a:fontRef idx="minor"/>
-        </p:style>
-        <p:txBody>
-          <a:bodyPr lIns="0" tIns="0" rIns="0" bIns="0" anchor="ctr">
-            <a:noAutofit/>
-          </a:bodyPr>
+              <a:t> — вычислительная система, использующая принципы искусственных нейронных сетей для обработки информации.</a:t>
+            </a:r>
+            <a:endParaRPr lang="en-US" sz="1400" b="0" u="none" strike="noStrike">
+              <a:solidFill>
+                <a:srgbClr val="000000"/>
+              </a:solidFill>
+              <a:effectLst/>
+              <a:uFillTx/>
+              <a:latin typeface="Arial"/>
+            </a:endParaRPr>
+          </a:p>
           <a:p>
             <a:pPr defTabSz="914400">
               <a:lnSpc>
@@ -15702,57 +16734,26 @@
               </a:tabLst>
             </a:pPr>
             <a:r>
-              <a:rPr lang="en-US" sz="1300" b="0" i="1" u="none" strike="noStrike">
-                <a:solidFill>
-                  <a:srgbClr val="1C7293"/>
-                </a:solidFill>
-                <a:effectLst/>
-                <a:uFillTx/>
-                <a:latin typeface="Calibri"/>
-                <a:ea typeface="Calibri"/>
-              </a:rPr>
-              <a:t>Раздел 1.1 теоретической части</a:t>
-            </a:r>
-            <a:endParaRPr lang="en-US" sz="1300" b="0" u="none" strike="noStrike">
-              <a:solidFill>
-                <a:srgbClr val="000000"/>
-              </a:solidFill>
-              <a:effectLst/>
-              <a:uFillTx/>
-              <a:latin typeface="Arial"/>
-            </a:endParaRPr>
-          </a:p>
-        </p:txBody>
-      </p:sp>
-      <p:sp>
-        <p:nvSpPr>
-          <p:cNvPr id="98" name="Text 3"/>
-          <p:cNvSpPr/>
-          <p:nvPr/>
-        </p:nvSpPr>
-        <p:spPr>
-          <a:xfrm>
-            <a:off x="640080" y="1554480"/>
-            <a:ext cx="5028840" cy="3200040"/>
-          </a:xfrm>
-          <a:prstGeom prst="rect">
-            <a:avLst/>
-          </a:prstGeom>
-          <a:noFill/>
-          <a:ln w="0">
-            <a:noFill/>
-          </a:ln>
-        </p:spPr>
-        <p:style>
-          <a:lnRef idx="0"/>
-          <a:fillRef idx="0"/>
-          <a:effectRef idx="0"/>
-          <a:fontRef idx="minor"/>
-        </p:style>
-        <p:txBody>
-          <a:bodyPr lIns="90000" tIns="45000" rIns="90000" bIns="45000" anchor="t">
-            <a:noAutofit/>
-          </a:bodyPr>
+              <a:rPr lang="en-US" sz="600" b="0" u="none" strike="noStrike">
+                <a:solidFill>
+                  <a:srgbClr val="1A2332"/>
+                </a:solidFill>
+                <a:effectLst/>
+                <a:uFillTx/>
+                <a:latin typeface="Calibri"/>
+                <a:ea typeface="Calibri"/>
+              </a:rPr>
+              <a:t> </a:t>
+            </a:r>
+            <a:endParaRPr lang="en-US" sz="600" b="0" u="none" strike="noStrike">
+              <a:solidFill>
+                <a:srgbClr val="000000"/>
+              </a:solidFill>
+              <a:effectLst/>
+              <a:uFillTx/>
+              <a:latin typeface="Arial"/>
+            </a:endParaRPr>
+          </a:p>
           <a:p>
             <a:pPr defTabSz="914400">
               <a:lnSpc>
@@ -15763,16 +16764,28 @@
               </a:tabLst>
             </a:pPr>
             <a:r>
+              <a:rPr lang="en-US" sz="1400" b="0" u="none" strike="noStrike">
+                <a:solidFill>
+                  <a:srgbClr val="1A2332"/>
+                </a:solidFill>
+                <a:effectLst/>
+                <a:uFillTx/>
+                <a:latin typeface="Calibri"/>
+                <a:ea typeface="Calibri"/>
+              </a:rPr>
+              <a:t>Ключевая особенность: </a:t>
+            </a:r>
+            <a:r>
               <a:rPr lang="en-US" sz="1400" b="1" u="none" strike="noStrike">
                 <a:solidFill>
-                  <a:srgbClr val="065A82"/>
-                </a:solidFill>
-                <a:effectLst/>
-                <a:uFillTx/>
-                <a:latin typeface="Calibri"/>
-                <a:ea typeface="Calibri"/>
-              </a:rPr>
-              <a:t>Нейрокомпьютерная система</a:t>
+                  <a:srgbClr val="1A2332"/>
+                </a:solidFill>
+                <a:effectLst/>
+                <a:uFillTx/>
+                <a:latin typeface="Calibri"/>
+                <a:ea typeface="Calibri"/>
+              </a:rPr>
+              <a:t>система не использует жёстко заданный алгоритм</a:t>
             </a:r>
             <a:r>
               <a:rPr lang="en-US" sz="1400" b="0" u="none" strike="noStrike">
@@ -15784,7 +16797,7 @@
                 <a:latin typeface="Calibri"/>
                 <a:ea typeface="Calibri"/>
               </a:rPr>
-              <a:t> — вычислительная система, использующая принципы искусственных нейронных сетей для обработки информации.</a:t>
+              <a:t>, а настраивает параметры на основе обучающих данных, постепенно уменьшая ошибку.</a:t>
             </a:r>
             <a:endParaRPr lang="en-US" sz="1400" b="0" u="none" strike="noStrike">
               <a:solidFill>
@@ -15844,31 +16857,7 @@
                 <a:latin typeface="Calibri"/>
                 <a:ea typeface="Calibri"/>
               </a:rPr>
-              <a:t>Ключевая особенность: </a:t>
-            </a:r>
-            <a:r>
-              <a:rPr lang="en-US" sz="1400" b="1" u="none" strike="noStrike">
-                <a:solidFill>
-                  <a:srgbClr val="1A2332"/>
-                </a:solidFill>
-                <a:effectLst/>
-                <a:uFillTx/>
-                <a:latin typeface="Calibri"/>
-                <a:ea typeface="Calibri"/>
-              </a:rPr>
-              <a:t>система не использует жёстко заданный алгоритм</a:t>
-            </a:r>
-            <a:r>
-              <a:rPr lang="en-US" sz="1400" b="0" u="none" strike="noStrike">
-                <a:solidFill>
-                  <a:srgbClr val="1A2332"/>
-                </a:solidFill>
-                <a:effectLst/>
-                <a:uFillTx/>
-                <a:latin typeface="Calibri"/>
-                <a:ea typeface="Calibri"/>
-              </a:rPr>
-              <a:t>, а настраивает параметры на основе обучающих данных, постепенно уменьшая ошибку.</a:t>
+              <a:t>Относится к коннекционистской парадигме ИИ: результат определяется топологией связей и значениями параметров.</a:t>
             </a:r>
             <a:endParaRPr lang="en-US" sz="1400" b="0" u="none" strike="noStrike">
               <a:solidFill>
@@ -15879,66 +16868,6 @@
               <a:latin typeface="Arial"/>
             </a:endParaRPr>
           </a:p>
-          <a:p>
-            <a:pPr defTabSz="914400">
-              <a:lnSpc>
-                <a:spcPct val="100000"/>
-              </a:lnSpc>
-              <a:tabLst>
-                <a:tab pos="0" algn="l"/>
-              </a:tabLst>
-            </a:pPr>
-            <a:r>
-              <a:rPr lang="en-US" sz="600" b="0" u="none" strike="noStrike">
-                <a:solidFill>
-                  <a:srgbClr val="1A2332"/>
-                </a:solidFill>
-                <a:effectLst/>
-                <a:uFillTx/>
-                <a:latin typeface="Calibri"/>
-                <a:ea typeface="Calibri"/>
-              </a:rPr>
-              <a:t> </a:t>
-            </a:r>
-            <a:endParaRPr lang="en-US" sz="600" b="0" u="none" strike="noStrike">
-              <a:solidFill>
-                <a:srgbClr val="000000"/>
-              </a:solidFill>
-              <a:effectLst/>
-              <a:uFillTx/>
-              <a:latin typeface="Arial"/>
-            </a:endParaRPr>
-          </a:p>
-          <a:p>
-            <a:pPr defTabSz="914400">
-              <a:lnSpc>
-                <a:spcPct val="100000"/>
-              </a:lnSpc>
-              <a:tabLst>
-                <a:tab pos="0" algn="l"/>
-              </a:tabLst>
-            </a:pPr>
-            <a:r>
-              <a:rPr lang="en-US" sz="1400" b="0" u="none" strike="noStrike">
-                <a:solidFill>
-                  <a:srgbClr val="1A2332"/>
-                </a:solidFill>
-                <a:effectLst/>
-                <a:uFillTx/>
-                <a:latin typeface="Calibri"/>
-                <a:ea typeface="Calibri"/>
-              </a:rPr>
-              <a:t>Относится к коннекционистской парадигме ИИ: результат определяется топологией связей и значениями параметров.</a:t>
-            </a:r>
-            <a:endParaRPr lang="en-US" sz="1400" b="0" u="none" strike="noStrike">
-              <a:solidFill>
-                <a:srgbClr val="000000"/>
-              </a:solidFill>
-              <a:effectLst/>
-              <a:uFillTx/>
-              <a:latin typeface="Arial"/>
-            </a:endParaRPr>
-          </a:p>
         </p:txBody>
       </p:sp>
       <p:sp>
@@ -15950,7 +16879,7 @@
         <p:spPr>
           <a:xfrm>
             <a:off x="640080" y="4937760"/>
-            <a:ext cx="5028840" cy="1371240"/>
+            <a:ext cx="5028480" cy="1370880"/>
           </a:xfrm>
           <a:prstGeom prst="rect">
             <a:avLst/>
@@ -15996,7 +16925,7 @@
         <p:spPr>
           <a:xfrm>
             <a:off x="777240" y="5029200"/>
-            <a:ext cx="4754520" cy="273960"/>
+            <a:ext cx="4754160" cy="273600"/>
           </a:xfrm>
           <a:prstGeom prst="rect">
             <a:avLst/>
@@ -16057,7 +16986,7 @@
         <p:spPr>
           <a:xfrm>
             <a:off x="777240" y="5349240"/>
-            <a:ext cx="4754520" cy="365400"/>
+            <a:ext cx="4754160" cy="365040"/>
           </a:xfrm>
           <a:prstGeom prst="rect">
             <a:avLst/>
@@ -16082,6 +17011,12 @@
               <a:lnSpc>
                 <a:spcPct val="100000"/>
               </a:lnSpc>
+              <a:spcBef>
+                <a:spcPts val="1191"/>
+              </a:spcBef>
+              <a:spcAft>
+                <a:spcPts val="992"/>
+              </a:spcAft>
               <a:tabLst>
                 <a:tab pos="0" algn="l"/>
               </a:tabLst>
@@ -16108,7 +17043,7 @@
                 <a:latin typeface="Cambria"/>
                 <a:ea typeface="Cambria"/>
               </a:rPr>
-              <a:t>                                     (1)</a:t>
+              <a:t>                         Взвешенная сумма входов</a:t>
             </a:r>
             <a:endParaRPr lang="en-US" sz="1600" b="0" u="none" strike="noStrike">
               <a:solidFill>
@@ -16130,7 +17065,7 @@
         <p:spPr>
           <a:xfrm>
             <a:off x="777240" y="5760720"/>
-            <a:ext cx="4754520" cy="365400"/>
+            <a:ext cx="4754160" cy="365040"/>
           </a:xfrm>
           <a:prstGeom prst="rect">
             <a:avLst/>
@@ -16155,6 +17090,12 @@
               <a:lnSpc>
                 <a:spcPct val="100000"/>
               </a:lnSpc>
+              <a:spcBef>
+                <a:spcPts val="1191"/>
+              </a:spcBef>
+              <a:spcAft>
+                <a:spcPts val="992"/>
+              </a:spcAft>
               <a:tabLst>
                 <a:tab pos="0" algn="l"/>
               </a:tabLst>
@@ -16181,7 +17122,7 @@
                 <a:latin typeface="Cambria"/>
                 <a:ea typeface="Cambria"/>
               </a:rPr>
-              <a:t>                                            (2)</a:t>
+              <a:t>                                    Функция активации</a:t>
             </a:r>
             <a:endParaRPr lang="en-US" sz="1600" b="0" u="none" strike="noStrike">
               <a:solidFill>
@@ -16203,7 +17144,7 @@
         <p:spPr>
           <a:xfrm>
             <a:off x="6126480" y="1554480"/>
-            <a:ext cx="5577480" cy="4754520"/>
+            <a:ext cx="5577120" cy="4754160"/>
           </a:xfrm>
           <a:prstGeom prst="rect">
             <a:avLst/>
@@ -16256,7 +17197,7 @@
         <p:spPr>
           <a:xfrm>
             <a:off x="6263640" y="1691640"/>
-            <a:ext cx="5303160" cy="273960"/>
+            <a:ext cx="5302800" cy="273600"/>
           </a:xfrm>
           <a:prstGeom prst="rect">
             <a:avLst/>
@@ -16317,7 +17258,7 @@
         <p:spPr>
           <a:xfrm>
             <a:off x="6355080" y="2468880"/>
-            <a:ext cx="639720" cy="502560"/>
+            <a:ext cx="639360" cy="502200"/>
           </a:xfrm>
           <a:prstGeom prst="ellipse">
             <a:avLst/>
@@ -16360,7 +17301,7 @@
         <p:spPr>
           <a:xfrm>
             <a:off x="6355080" y="2468880"/>
-            <a:ext cx="639720" cy="502560"/>
+            <a:ext cx="639360" cy="502200"/>
           </a:xfrm>
           <a:prstGeom prst="rect">
             <a:avLst/>
@@ -16465,7 +17406,7 @@
         <p:spPr>
           <a:xfrm>
             <a:off x="7315200" y="2423160"/>
-            <a:ext cx="548280" cy="273960"/>
+            <a:ext cx="547920" cy="273600"/>
           </a:xfrm>
           <a:prstGeom prst="rect">
             <a:avLst/>
@@ -16526,7 +17467,7 @@
         <p:spPr>
           <a:xfrm>
             <a:off x="6355080" y="3474720"/>
-            <a:ext cx="639720" cy="502560"/>
+            <a:ext cx="639360" cy="502200"/>
           </a:xfrm>
           <a:prstGeom prst="ellipse">
             <a:avLst/>
@@ -16569,7 +17510,7 @@
         <p:spPr>
           <a:xfrm>
             <a:off x="6355080" y="3474720"/>
-            <a:ext cx="639720" cy="502560"/>
+            <a:ext cx="639360" cy="502200"/>
           </a:xfrm>
           <a:prstGeom prst="rect">
             <a:avLst/>
@@ -16674,7 +17615,7 @@
         <p:spPr>
           <a:xfrm>
             <a:off x="7315200" y="3429000"/>
-            <a:ext cx="548280" cy="273960"/>
+            <a:ext cx="547920" cy="273600"/>
           </a:xfrm>
           <a:prstGeom prst="rect">
             <a:avLst/>
@@ -16735,7 +17676,7 @@
         <p:spPr>
           <a:xfrm>
             <a:off x="6355080" y="4480560"/>
-            <a:ext cx="639720" cy="502560"/>
+            <a:ext cx="639360" cy="502200"/>
           </a:xfrm>
           <a:prstGeom prst="ellipse">
             <a:avLst/>
@@ -16778,7 +17719,7 @@
         <p:spPr>
           <a:xfrm>
             <a:off x="6355080" y="4480560"/>
-            <a:ext cx="639720" cy="502560"/>
+            <a:ext cx="639360" cy="502200"/>
           </a:xfrm>
           <a:prstGeom prst="rect">
             <a:avLst/>
@@ -16883,7 +17824,7 @@
         <p:spPr>
           <a:xfrm>
             <a:off x="7315200" y="4434840"/>
-            <a:ext cx="548280" cy="273960"/>
+            <a:ext cx="547920" cy="273600"/>
           </a:xfrm>
           <a:prstGeom prst="rect">
             <a:avLst/>
@@ -16944,7 +17885,7 @@
         <p:spPr>
           <a:xfrm>
             <a:off x="8503920" y="3474720"/>
-            <a:ext cx="914040" cy="868320"/>
+            <a:ext cx="913680" cy="867960"/>
           </a:xfrm>
           <a:prstGeom prst="ellipse">
             <a:avLst/>
@@ -16987,7 +17928,7 @@
         <p:spPr>
           <a:xfrm>
             <a:off x="8503920" y="3474720"/>
-            <a:ext cx="914040" cy="868320"/>
+            <a:ext cx="913680" cy="867960"/>
           </a:xfrm>
           <a:prstGeom prst="rect">
             <a:avLst/>
@@ -17092,7 +18033,7 @@
         <p:spPr>
           <a:xfrm>
             <a:off x="9464040" y="3611880"/>
-            <a:ext cx="456840" cy="273960"/>
+            <a:ext cx="456480" cy="273600"/>
           </a:xfrm>
           <a:prstGeom prst="rect">
             <a:avLst/>
@@ -17153,7 +18094,7 @@
         <p:spPr>
           <a:xfrm>
             <a:off x="10012680" y="3474720"/>
-            <a:ext cx="868320" cy="868320"/>
+            <a:ext cx="867960" cy="867960"/>
           </a:xfrm>
           <a:prstGeom prst="rect">
             <a:avLst/>
@@ -17196,7 +18137,7 @@
         <p:spPr>
           <a:xfrm>
             <a:off x="10012680" y="3474720"/>
-            <a:ext cx="868320" cy="868320"/>
+            <a:ext cx="867960" cy="867960"/>
           </a:xfrm>
           <a:prstGeom prst="rect">
             <a:avLst/>
@@ -17301,7 +18242,7 @@
         <p:spPr>
           <a:xfrm>
             <a:off x="11292840" y="3611880"/>
-            <a:ext cx="365400" cy="548280"/>
+            <a:ext cx="365040" cy="547920"/>
           </a:xfrm>
           <a:prstGeom prst="rect">
             <a:avLst/>
@@ -17362,7 +18303,7 @@
         <p:spPr>
           <a:xfrm>
             <a:off x="8641080" y="4343400"/>
-            <a:ext cx="639720" cy="273960"/>
+            <a:ext cx="639360" cy="273600"/>
           </a:xfrm>
           <a:prstGeom prst="rect">
             <a:avLst/>
@@ -17423,7 +18364,7 @@
         <p:spPr>
           <a:xfrm>
             <a:off x="6263640" y="5943600"/>
-            <a:ext cx="5303160" cy="273960"/>
+            <a:ext cx="5302800" cy="273600"/>
           </a:xfrm>
           <a:prstGeom prst="rect">
             <a:avLst/>
@@ -17484,7 +18425,7 @@
         <p:spPr>
           <a:xfrm>
             <a:off x="0" y="6537960"/>
-            <a:ext cx="12188520" cy="319680"/>
+            <a:ext cx="12188160" cy="319320"/>
           </a:xfrm>
           <a:prstGeom prst="rect">
             <a:avLst/>
@@ -17527,7 +18468,7 @@
         <p:spPr>
           <a:xfrm>
             <a:off x="365760" y="6565320"/>
-            <a:ext cx="8229240" cy="273960"/>
+            <a:ext cx="8228880" cy="273600"/>
           </a:xfrm>
           <a:prstGeom prst="rect">
             <a:avLst/>
@@ -17588,7 +18529,7 @@
         <p:spPr>
           <a:xfrm>
             <a:off x="10908720" y="6565320"/>
-            <a:ext cx="914040" cy="273960"/>
+            <a:ext cx="913680" cy="273600"/>
           </a:xfrm>
           <a:prstGeom prst="rect">
             <a:avLst/>
@@ -17686,7 +18627,7 @@
         <p:spPr>
           <a:xfrm>
             <a:off x="457200" y="411480"/>
-            <a:ext cx="72720" cy="639720"/>
+            <a:ext cx="72360" cy="639360"/>
           </a:xfrm>
           <a:prstGeom prst="rect">
             <a:avLst/>
@@ -17705,7 +18646,7 @@
           <a:fontRef idx="minor"/>
         </p:style>
         <p:txBody>
-          <a:bodyPr lIns="90000" tIns="45000" rIns="90000" bIns="45000" anchor="t">
+          <a:bodyPr lIns="36360" tIns="45000" rIns="36360" bIns="45000" anchor="t">
             <a:noAutofit/>
           </a:bodyPr>
           <a:p>
@@ -17729,7 +18670,7 @@
         <p:spPr>
           <a:xfrm>
             <a:off x="685800" y="365760"/>
-            <a:ext cx="10816920" cy="594000"/>
+            <a:ext cx="10816560" cy="593640"/>
           </a:xfrm>
           <a:prstGeom prst="rect">
             <a:avLst/>
@@ -17790,7 +18731,7 @@
         <p:spPr>
           <a:xfrm>
             <a:off x="685800" y="960120"/>
-            <a:ext cx="10816920" cy="273960"/>
+            <a:ext cx="10816560" cy="273600"/>
           </a:xfrm>
           <a:prstGeom prst="rect">
             <a:avLst/>
@@ -18769,7 +19710,7 @@
         <p:spPr>
           <a:xfrm>
             <a:off x="8778240" y="1554480"/>
-            <a:ext cx="2925720" cy="4571640"/>
+            <a:ext cx="2925360" cy="4571280"/>
           </a:xfrm>
           <a:prstGeom prst="rect">
             <a:avLst/>
@@ -18822,7 +19763,7 @@
         <p:spPr>
           <a:xfrm>
             <a:off x="8778240" y="1554480"/>
-            <a:ext cx="2925720" cy="548280"/>
+            <a:ext cx="2925360" cy="547920"/>
           </a:xfrm>
           <a:prstGeom prst="rect">
             <a:avLst/>
@@ -18865,7 +19806,7 @@
         <p:spPr>
           <a:xfrm>
             <a:off x="8778240" y="1554480"/>
-            <a:ext cx="2925720" cy="548280"/>
+            <a:ext cx="2925360" cy="547920"/>
           </a:xfrm>
           <a:prstGeom prst="rect">
             <a:avLst/>
@@ -18926,7 +19867,7 @@
         <p:spPr>
           <a:xfrm>
             <a:off x="8961120" y="2240280"/>
-            <a:ext cx="2651400" cy="731160"/>
+            <a:ext cx="2651040" cy="730800"/>
           </a:xfrm>
           <a:prstGeom prst="rect">
             <a:avLst/>
@@ -19017,7 +19958,7 @@
         <p:spPr>
           <a:xfrm>
             <a:off x="8961120" y="3017520"/>
-            <a:ext cx="2651400" cy="731160"/>
+            <a:ext cx="2651040" cy="730800"/>
           </a:xfrm>
           <a:prstGeom prst="rect">
             <a:avLst/>
@@ -19108,7 +20049,7 @@
         <p:spPr>
           <a:xfrm>
             <a:off x="8961120" y="3794760"/>
-            <a:ext cx="2651400" cy="731160"/>
+            <a:ext cx="2651040" cy="730800"/>
           </a:xfrm>
           <a:prstGeom prst="rect">
             <a:avLst/>
@@ -19199,7 +20140,7 @@
         <p:spPr>
           <a:xfrm>
             <a:off x="8961120" y="4572000"/>
-            <a:ext cx="2651400" cy="731160"/>
+            <a:ext cx="2651040" cy="730800"/>
           </a:xfrm>
           <a:prstGeom prst="rect">
             <a:avLst/>
@@ -19290,7 +20231,7 @@
         <p:spPr>
           <a:xfrm>
             <a:off x="8961120" y="5349240"/>
-            <a:ext cx="2651400" cy="731160"/>
+            <a:ext cx="2651040" cy="730800"/>
           </a:xfrm>
           <a:prstGeom prst="rect">
             <a:avLst/>
@@ -19381,7 +20322,7 @@
         <p:spPr>
           <a:xfrm>
             <a:off x="0" y="6537960"/>
-            <a:ext cx="12188520" cy="319680"/>
+            <a:ext cx="12188160" cy="319320"/>
           </a:xfrm>
           <a:prstGeom prst="rect">
             <a:avLst/>
@@ -19424,7 +20365,7 @@
         <p:spPr>
           <a:xfrm>
             <a:off x="365760" y="6565320"/>
-            <a:ext cx="8229240" cy="273960"/>
+            <a:ext cx="8228880" cy="273600"/>
           </a:xfrm>
           <a:prstGeom prst="rect">
             <a:avLst/>
@@ -19485,7 +20426,7 @@
         <p:spPr>
           <a:xfrm>
             <a:off x="10908720" y="6565320"/>
-            <a:ext cx="914040" cy="273960"/>
+            <a:ext cx="913680" cy="273600"/>
           </a:xfrm>
           <a:prstGeom prst="rect">
             <a:avLst/>
@@ -19583,7 +20524,7 @@
         <p:spPr>
           <a:xfrm>
             <a:off x="457200" y="411480"/>
-            <a:ext cx="72720" cy="639720"/>
+            <a:ext cx="72360" cy="639360"/>
           </a:xfrm>
           <a:prstGeom prst="rect">
             <a:avLst/>
@@ -19602,7 +20543,7 @@
           <a:fontRef idx="minor"/>
         </p:style>
         <p:txBody>
-          <a:bodyPr lIns="90000" tIns="45000" rIns="90000" bIns="45000" anchor="t">
+          <a:bodyPr lIns="36360" tIns="45000" rIns="36360" bIns="45000" anchor="t">
             <a:noAutofit/>
           </a:bodyPr>
           <a:p>
@@ -19626,7 +20567,7 @@
         <p:spPr>
           <a:xfrm>
             <a:off x="685800" y="365760"/>
-            <a:ext cx="10816920" cy="594000"/>
+            <a:ext cx="10816560" cy="593640"/>
           </a:xfrm>
           <a:prstGeom prst="rect">
             <a:avLst/>
@@ -19687,7 +20628,7 @@
         <p:spPr>
           <a:xfrm>
             <a:off x="685800" y="960120"/>
-            <a:ext cx="10816920" cy="273960"/>
+            <a:ext cx="10816560" cy="273600"/>
           </a:xfrm>
           <a:prstGeom prst="rect">
             <a:avLst/>
@@ -21640,7 +22581,7 @@
         <p:spPr>
           <a:xfrm>
             <a:off x="640080" y="5897880"/>
-            <a:ext cx="10908360" cy="502560"/>
+            <a:ext cx="10908000" cy="502200"/>
           </a:xfrm>
           <a:prstGeom prst="rect">
             <a:avLst/>
@@ -21763,7 +22704,7 @@
         <p:spPr>
           <a:xfrm>
             <a:off x="0" y="6537960"/>
-            <a:ext cx="12188520" cy="319680"/>
+            <a:ext cx="12188160" cy="319320"/>
           </a:xfrm>
           <a:prstGeom prst="rect">
             <a:avLst/>
@@ -21806,7 +22747,7 @@
         <p:spPr>
           <a:xfrm>
             <a:off x="365760" y="6565320"/>
-            <a:ext cx="8229240" cy="273960"/>
+            <a:ext cx="8228880" cy="273600"/>
           </a:xfrm>
           <a:prstGeom prst="rect">
             <a:avLst/>
@@ -21867,7 +22808,7 @@
         <p:spPr>
           <a:xfrm>
             <a:off x="10908720" y="6565320"/>
-            <a:ext cx="914040" cy="273960"/>
+            <a:ext cx="913680" cy="273600"/>
           </a:xfrm>
           <a:prstGeom prst="rect">
             <a:avLst/>
@@ -21965,7 +22906,7 @@
         <p:spPr>
           <a:xfrm>
             <a:off x="457200" y="411480"/>
-            <a:ext cx="72720" cy="639720"/>
+            <a:ext cx="72360" cy="639360"/>
           </a:xfrm>
           <a:prstGeom prst="rect">
             <a:avLst/>
@@ -21984,7 +22925,7 @@
           <a:fontRef idx="minor"/>
         </p:style>
         <p:txBody>
-          <a:bodyPr lIns="90000" tIns="45000" rIns="90000" bIns="45000" anchor="t">
+          <a:bodyPr lIns="36360" tIns="45000" rIns="36360" bIns="45000" anchor="t">
             <a:noAutofit/>
           </a:bodyPr>
           <a:p>
@@ -22008,7 +22949,7 @@
         <p:spPr>
           <a:xfrm>
             <a:off x="685800" y="365760"/>
-            <a:ext cx="10816920" cy="594000"/>
+            <a:ext cx="10816560" cy="593640"/>
           </a:xfrm>
           <a:prstGeom prst="rect">
             <a:avLst/>
@@ -22069,7 +23010,7 @@
         <p:spPr>
           <a:xfrm>
             <a:off x="685800" y="960120"/>
-            <a:ext cx="10816920" cy="273960"/>
+            <a:ext cx="10816560" cy="273600"/>
           </a:xfrm>
           <a:prstGeom prst="rect">
             <a:avLst/>
@@ -22130,7 +23071,7 @@
         <p:spPr>
           <a:xfrm>
             <a:off x="676800" y="1828800"/>
-            <a:ext cx="1691280" cy="2194200"/>
+            <a:ext cx="1690920" cy="2193840"/>
           </a:xfrm>
           <a:prstGeom prst="rect">
             <a:avLst/>
@@ -22183,7 +23124,7 @@
         <p:spPr>
           <a:xfrm>
             <a:off x="676800" y="1828800"/>
-            <a:ext cx="1691280" cy="109440"/>
+            <a:ext cx="1690920" cy="109080"/>
           </a:xfrm>
           <a:prstGeom prst="rect">
             <a:avLst/>
@@ -22226,7 +23167,7 @@
         <p:spPr>
           <a:xfrm>
             <a:off x="1202400" y="2057400"/>
-            <a:ext cx="639720" cy="639720"/>
+            <a:ext cx="639360" cy="639360"/>
           </a:xfrm>
           <a:prstGeom prst="ellipse">
             <a:avLst/>
@@ -22269,7 +23210,7 @@
         <p:spPr>
           <a:xfrm>
             <a:off x="1202400" y="2057400"/>
-            <a:ext cx="639720" cy="639720"/>
+            <a:ext cx="639360" cy="639360"/>
           </a:xfrm>
           <a:prstGeom prst="rect">
             <a:avLst/>
@@ -22330,7 +23271,7 @@
         <p:spPr>
           <a:xfrm>
             <a:off x="768240" y="2788920"/>
-            <a:ext cx="1508400" cy="456840"/>
+            <a:ext cx="1508040" cy="456480"/>
           </a:xfrm>
           <a:prstGeom prst="rect">
             <a:avLst/>
@@ -22391,7 +23332,7 @@
         <p:spPr>
           <a:xfrm>
             <a:off x="768240" y="3246120"/>
-            <a:ext cx="1508400" cy="685440"/>
+            <a:ext cx="1508040" cy="685080"/>
           </a:xfrm>
           <a:prstGeom prst="rect">
             <a:avLst/>
@@ -22502,7 +23443,7 @@
           <a:fontRef idx="minor"/>
         </p:style>
         <p:txBody>
-          <a:bodyPr lIns="90000" tIns="-44640" rIns="90000" bIns="-44640" anchor="t" anchorCtr="1">
+          <a:bodyPr lIns="68400" tIns="-44640" rIns="68400" bIns="-44640" anchor="t" anchorCtr="1">
             <a:noAutofit/>
           </a:bodyPr>
           <a:p>
@@ -22526,7 +23467,7 @@
         <p:spPr>
           <a:xfrm>
             <a:off x="2505600" y="1828800"/>
-            <a:ext cx="1691280" cy="2194200"/>
+            <a:ext cx="1690920" cy="2193840"/>
           </a:xfrm>
           <a:prstGeom prst="rect">
             <a:avLst/>
@@ -22579,7 +23520,7 @@
         <p:spPr>
           <a:xfrm>
             <a:off x="2505600" y="1828800"/>
-            <a:ext cx="1691280" cy="109440"/>
+            <a:ext cx="1690920" cy="109080"/>
           </a:xfrm>
           <a:prstGeom prst="rect">
             <a:avLst/>
@@ -22622,7 +23563,7 @@
         <p:spPr>
           <a:xfrm>
             <a:off x="3031200" y="2057400"/>
-            <a:ext cx="639720" cy="639720"/>
+            <a:ext cx="639360" cy="639360"/>
           </a:xfrm>
           <a:prstGeom prst="ellipse">
             <a:avLst/>
@@ -22665,7 +23606,7 @@
         <p:spPr>
           <a:xfrm>
             <a:off x="3031200" y="2057400"/>
-            <a:ext cx="639720" cy="639720"/>
+            <a:ext cx="639360" cy="639360"/>
           </a:xfrm>
           <a:prstGeom prst="rect">
             <a:avLst/>
@@ -22726,7 +23667,7 @@
         <p:spPr>
           <a:xfrm>
             <a:off x="2597040" y="2788920"/>
-            <a:ext cx="1508400" cy="456840"/>
+            <a:ext cx="1508040" cy="456480"/>
           </a:xfrm>
           <a:prstGeom prst="rect">
             <a:avLst/>
@@ -22787,7 +23728,7 @@
         <p:spPr>
           <a:xfrm>
             <a:off x="2597040" y="3246120"/>
-            <a:ext cx="1508400" cy="685440"/>
+            <a:ext cx="1508040" cy="685080"/>
           </a:xfrm>
           <a:prstGeom prst="rect">
             <a:avLst/>
@@ -22898,7 +23839,7 @@
           <a:fontRef idx="minor"/>
         </p:style>
         <p:txBody>
-          <a:bodyPr lIns="90000" tIns="-44640" rIns="90000" bIns="-44640" anchor="t" anchorCtr="1">
+          <a:bodyPr lIns="68400" tIns="-44640" rIns="68400" bIns="-44640" anchor="t" anchorCtr="1">
             <a:noAutofit/>
           </a:bodyPr>
           <a:p>
@@ -22922,7 +23863,7 @@
         <p:spPr>
           <a:xfrm>
             <a:off x="4334400" y="1828800"/>
-            <a:ext cx="1691280" cy="2194200"/>
+            <a:ext cx="1690920" cy="2193840"/>
           </a:xfrm>
           <a:prstGeom prst="rect">
             <a:avLst/>
@@ -22975,7 +23916,7 @@
         <p:spPr>
           <a:xfrm>
             <a:off x="4334400" y="1828800"/>
-            <a:ext cx="1691280" cy="109440"/>
+            <a:ext cx="1690920" cy="109080"/>
           </a:xfrm>
           <a:prstGeom prst="rect">
             <a:avLst/>
@@ -23018,7 +23959,7 @@
         <p:spPr>
           <a:xfrm>
             <a:off x="4860000" y="2057400"/>
-            <a:ext cx="639720" cy="639720"/>
+            <a:ext cx="639360" cy="639360"/>
           </a:xfrm>
           <a:prstGeom prst="ellipse">
             <a:avLst/>
@@ -23061,7 +24002,7 @@
         <p:spPr>
           <a:xfrm>
             <a:off x="4860000" y="2057400"/>
-            <a:ext cx="639720" cy="639720"/>
+            <a:ext cx="639360" cy="639360"/>
           </a:xfrm>
           <a:prstGeom prst="rect">
             <a:avLst/>
@@ -23122,7 +24063,7 @@
         <p:spPr>
           <a:xfrm>
             <a:off x="4425840" y="2788920"/>
-            <a:ext cx="1508400" cy="456840"/>
+            <a:ext cx="1508040" cy="456480"/>
           </a:xfrm>
           <a:prstGeom prst="rect">
             <a:avLst/>
@@ -23183,7 +24124,7 @@
         <p:spPr>
           <a:xfrm>
             <a:off x="4425840" y="3246120"/>
-            <a:ext cx="1508400" cy="685440"/>
+            <a:ext cx="1508040" cy="685080"/>
           </a:xfrm>
           <a:prstGeom prst="rect">
             <a:avLst/>
@@ -23294,7 +24235,7 @@
           <a:fontRef idx="minor"/>
         </p:style>
         <p:txBody>
-          <a:bodyPr lIns="90000" tIns="-44640" rIns="90000" bIns="-44640" anchor="t" anchorCtr="1">
+          <a:bodyPr lIns="68400" tIns="-44640" rIns="68400" bIns="-44640" anchor="t" anchorCtr="1">
             <a:noAutofit/>
           </a:bodyPr>
           <a:p>
@@ -23318,7 +24259,7 @@
         <p:spPr>
           <a:xfrm>
             <a:off x="6163200" y="1828800"/>
-            <a:ext cx="1691280" cy="2194200"/>
+            <a:ext cx="1690920" cy="2193840"/>
           </a:xfrm>
           <a:prstGeom prst="rect">
             <a:avLst/>
@@ -23371,7 +24312,7 @@
         <p:spPr>
           <a:xfrm>
             <a:off x="6163200" y="1828800"/>
-            <a:ext cx="1691280" cy="109440"/>
+            <a:ext cx="1690920" cy="109080"/>
           </a:xfrm>
           <a:prstGeom prst="rect">
             <a:avLst/>
@@ -23414,7 +24355,7 @@
         <p:spPr>
           <a:xfrm>
             <a:off x="6688800" y="2057400"/>
-            <a:ext cx="639720" cy="639720"/>
+            <a:ext cx="639360" cy="639360"/>
           </a:xfrm>
           <a:prstGeom prst="ellipse">
             <a:avLst/>
@@ -23457,7 +24398,7 @@
         <p:spPr>
           <a:xfrm>
             <a:off x="6688800" y="2057400"/>
-            <a:ext cx="639720" cy="639720"/>
+            <a:ext cx="639360" cy="639360"/>
           </a:xfrm>
           <a:prstGeom prst="rect">
             <a:avLst/>
@@ -23518,7 +24459,7 @@
         <p:spPr>
           <a:xfrm>
             <a:off x="6254640" y="2788920"/>
-            <a:ext cx="1508400" cy="456840"/>
+            <a:ext cx="1508040" cy="456480"/>
           </a:xfrm>
           <a:prstGeom prst="rect">
             <a:avLst/>
@@ -23579,7 +24520,7 @@
         <p:spPr>
           <a:xfrm>
             <a:off x="6254640" y="3246120"/>
-            <a:ext cx="1508400" cy="685440"/>
+            <a:ext cx="1508040" cy="685080"/>
           </a:xfrm>
           <a:prstGeom prst="rect">
             <a:avLst/>
@@ -23690,7 +24631,7 @@
           <a:fontRef idx="minor"/>
         </p:style>
         <p:txBody>
-          <a:bodyPr lIns="90000" tIns="-44640" rIns="90000" bIns="-44640" anchor="t" anchorCtr="1">
+          <a:bodyPr lIns="68400" tIns="-44640" rIns="68400" bIns="-44640" anchor="t" anchorCtr="1">
             <a:noAutofit/>
           </a:bodyPr>
           <a:p>
@@ -23714,7 +24655,7 @@
         <p:spPr>
           <a:xfrm>
             <a:off x="7992000" y="1828800"/>
-            <a:ext cx="1691280" cy="2194200"/>
+            <a:ext cx="1690920" cy="2193840"/>
           </a:xfrm>
           <a:prstGeom prst="rect">
             <a:avLst/>
@@ -23767,7 +24708,7 @@
         <p:spPr>
           <a:xfrm>
             <a:off x="7992000" y="1828800"/>
-            <a:ext cx="1691280" cy="109440"/>
+            <a:ext cx="1690920" cy="109080"/>
           </a:xfrm>
           <a:prstGeom prst="rect">
             <a:avLst/>
@@ -23810,7 +24751,7 @@
         <p:spPr>
           <a:xfrm>
             <a:off x="8517600" y="2057400"/>
-            <a:ext cx="639720" cy="639720"/>
+            <a:ext cx="639360" cy="639360"/>
           </a:xfrm>
           <a:prstGeom prst="ellipse">
             <a:avLst/>
@@ -23853,7 +24794,7 @@
         <p:spPr>
           <a:xfrm>
             <a:off x="8517600" y="2057400"/>
-            <a:ext cx="639720" cy="639720"/>
+            <a:ext cx="639360" cy="639360"/>
           </a:xfrm>
           <a:prstGeom prst="rect">
             <a:avLst/>
@@ -23914,7 +24855,7 @@
         <p:spPr>
           <a:xfrm>
             <a:off x="8083440" y="2788920"/>
-            <a:ext cx="1508400" cy="456840"/>
+            <a:ext cx="1508040" cy="456480"/>
           </a:xfrm>
           <a:prstGeom prst="rect">
             <a:avLst/>
@@ -23975,7 +24916,7 @@
         <p:spPr>
           <a:xfrm>
             <a:off x="8083440" y="3246120"/>
-            <a:ext cx="1508400" cy="685440"/>
+            <a:ext cx="1508040" cy="685080"/>
           </a:xfrm>
           <a:prstGeom prst="rect">
             <a:avLst/>
@@ -24086,7 +25027,7 @@
           <a:fontRef idx="minor"/>
         </p:style>
         <p:txBody>
-          <a:bodyPr lIns="90000" tIns="-44640" rIns="90000" bIns="-44640" anchor="t" anchorCtr="1">
+          <a:bodyPr lIns="68400" tIns="-44640" rIns="68400" bIns="-44640" anchor="t" anchorCtr="1">
             <a:noAutofit/>
           </a:bodyPr>
           <a:p>
@@ -24110,7 +25051,7 @@
         <p:spPr>
           <a:xfrm>
             <a:off x="9820800" y="1828800"/>
-            <a:ext cx="1691280" cy="2194200"/>
+            <a:ext cx="1690920" cy="2193840"/>
           </a:xfrm>
           <a:prstGeom prst="rect">
             <a:avLst/>
@@ -24163,7 +25104,7 @@
         <p:spPr>
           <a:xfrm>
             <a:off x="9820800" y="1828800"/>
-            <a:ext cx="1691280" cy="109440"/>
+            <a:ext cx="1690920" cy="109080"/>
           </a:xfrm>
           <a:prstGeom prst="rect">
             <a:avLst/>
@@ -24206,7 +25147,7 @@
         <p:spPr>
           <a:xfrm>
             <a:off x="10346400" y="2057400"/>
-            <a:ext cx="639720" cy="639720"/>
+            <a:ext cx="639360" cy="639360"/>
           </a:xfrm>
           <a:prstGeom prst="ellipse">
             <a:avLst/>
@@ -24249,7 +25190,7 @@
         <p:spPr>
           <a:xfrm>
             <a:off x="10346400" y="2057400"/>
-            <a:ext cx="639720" cy="639720"/>
+            <a:ext cx="639360" cy="639360"/>
           </a:xfrm>
           <a:prstGeom prst="rect">
             <a:avLst/>
@@ -24310,7 +25251,7 @@
         <p:spPr>
           <a:xfrm>
             <a:off x="9912240" y="2788920"/>
-            <a:ext cx="1508400" cy="456840"/>
+            <a:ext cx="1508040" cy="456480"/>
           </a:xfrm>
           <a:prstGeom prst="rect">
             <a:avLst/>
@@ -24371,7 +25312,7 @@
         <p:spPr>
           <a:xfrm>
             <a:off x="9912240" y="3246120"/>
-            <a:ext cx="1508400" cy="685440"/>
+            <a:ext cx="1508040" cy="685080"/>
           </a:xfrm>
           <a:prstGeom prst="rect">
             <a:avLst/>
@@ -24462,7 +25403,7 @@
         <p:spPr>
           <a:xfrm>
             <a:off x="640080" y="4663440"/>
-            <a:ext cx="10908360" cy="1691280"/>
+            <a:ext cx="10908000" cy="1690920"/>
           </a:xfrm>
           <a:prstGeom prst="rect">
             <a:avLst/>
@@ -24508,7 +25449,7 @@
         <p:spPr>
           <a:xfrm>
             <a:off x="640080" y="4663440"/>
-            <a:ext cx="72720" cy="1691280"/>
+            <a:ext cx="72360" cy="1690920"/>
           </a:xfrm>
           <a:prstGeom prst="rect">
             <a:avLst/>
@@ -24527,7 +25468,7 @@
           <a:fontRef idx="minor"/>
         </p:style>
         <p:txBody>
-          <a:bodyPr lIns="90000" tIns="45000" rIns="90000" bIns="45000" anchor="t">
+          <a:bodyPr lIns="36360" tIns="45000" rIns="36360" bIns="45000" anchor="t">
             <a:noAutofit/>
           </a:bodyPr>
           <a:p>
@@ -24551,7 +25492,7 @@
         <p:spPr>
           <a:xfrm>
             <a:off x="914400" y="4754880"/>
-            <a:ext cx="5486040" cy="273960"/>
+            <a:ext cx="5485680" cy="273600"/>
           </a:xfrm>
           <a:prstGeom prst="rect">
             <a:avLst/>
@@ -24612,7 +25553,7 @@
         <p:spPr>
           <a:xfrm>
             <a:off x="914400" y="5074920"/>
-            <a:ext cx="5211720" cy="1188360"/>
+            <a:ext cx="5211360" cy="1188000"/>
           </a:xfrm>
           <a:prstGeom prst="rect">
             <a:avLst/>
@@ -24705,7 +25646,7 @@
         <p:spPr>
           <a:xfrm>
             <a:off x="6217920" y="5074920"/>
-            <a:ext cx="5211720" cy="1188360"/>
+            <a:ext cx="5211360" cy="1188000"/>
           </a:xfrm>
           <a:prstGeom prst="rect">
             <a:avLst/>
@@ -24798,7 +25739,7 @@
         <p:spPr>
           <a:xfrm>
             <a:off x="0" y="6537960"/>
-            <a:ext cx="12188520" cy="319680"/>
+            <a:ext cx="12188160" cy="319320"/>
           </a:xfrm>
           <a:prstGeom prst="rect">
             <a:avLst/>
@@ -24841,7 +25782,7 @@
         <p:spPr>
           <a:xfrm>
             <a:off x="365760" y="6565320"/>
-            <a:ext cx="8229240" cy="273960"/>
+            <a:ext cx="8228880" cy="273600"/>
           </a:xfrm>
           <a:prstGeom prst="rect">
             <a:avLst/>
@@ -24902,7 +25843,7 @@
         <p:spPr>
           <a:xfrm>
             <a:off x="10908720" y="6565320"/>
-            <a:ext cx="914040" cy="273960"/>
+            <a:ext cx="913680" cy="273600"/>
           </a:xfrm>
           <a:prstGeom prst="rect">
             <a:avLst/>
@@ -25000,7 +25941,7 @@
         <p:spPr>
           <a:xfrm>
             <a:off x="457200" y="411480"/>
-            <a:ext cx="72720" cy="639720"/>
+            <a:ext cx="72360" cy="639360"/>
           </a:xfrm>
           <a:prstGeom prst="rect">
             <a:avLst/>
@@ -25019,7 +25960,7 @@
           <a:fontRef idx="minor"/>
         </p:style>
         <p:txBody>
-          <a:bodyPr lIns="90000" tIns="45000" rIns="90000" bIns="45000" anchor="t">
+          <a:bodyPr lIns="36360" tIns="45000" rIns="36360" bIns="45000" anchor="t">
             <a:noAutofit/>
           </a:bodyPr>
           <a:p>
@@ -25043,7 +25984,7 @@
         <p:spPr>
           <a:xfrm>
             <a:off x="685800" y="365760"/>
-            <a:ext cx="10816920" cy="594000"/>
+            <a:ext cx="10816560" cy="593640"/>
           </a:xfrm>
           <a:prstGeom prst="rect">
             <a:avLst/>
@@ -25104,7 +26045,7 @@
         <p:spPr>
           <a:xfrm>
             <a:off x="685800" y="960120"/>
-            <a:ext cx="10816920" cy="273960"/>
+            <a:ext cx="10816560" cy="273600"/>
           </a:xfrm>
           <a:prstGeom prst="rect">
             <a:avLst/>
@@ -25165,7 +26106,7 @@
         <p:spPr>
           <a:xfrm>
             <a:off x="640080" y="1554480"/>
-            <a:ext cx="5668920" cy="4754520"/>
+            <a:ext cx="5668560" cy="4754160"/>
           </a:xfrm>
           <a:prstGeom prst="rect">
             <a:avLst/>
@@ -25218,7 +26159,7 @@
         <p:spPr>
           <a:xfrm>
             <a:off x="822960" y="1691640"/>
-            <a:ext cx="5303160" cy="273960"/>
+            <a:ext cx="5302800" cy="273600"/>
           </a:xfrm>
           <a:prstGeom prst="rect">
             <a:avLst/>
@@ -25279,7 +26220,7 @@
         <p:spPr>
           <a:xfrm>
             <a:off x="914400" y="2103120"/>
-            <a:ext cx="5120280" cy="639720"/>
+            <a:ext cx="5119920" cy="639360"/>
           </a:xfrm>
           <a:prstGeom prst="rect">
             <a:avLst/>
@@ -25322,7 +26263,7 @@
         <p:spPr>
           <a:xfrm>
             <a:off x="1097280" y="2103120"/>
-            <a:ext cx="3200040" cy="639720"/>
+            <a:ext cx="3199680" cy="639360"/>
           </a:xfrm>
           <a:prstGeom prst="rect">
             <a:avLst/>
@@ -25383,7 +26324,7 @@
         <p:spPr>
           <a:xfrm>
             <a:off x="4297680" y="2103120"/>
-            <a:ext cx="1645560" cy="639720"/>
+            <a:ext cx="1645200" cy="639360"/>
           </a:xfrm>
           <a:prstGeom prst="rect">
             <a:avLst/>
@@ -25464,7 +26405,7 @@
           <a:fontRef idx="minor"/>
         </p:style>
         <p:txBody>
-          <a:bodyPr lIns="90000" tIns="10080" rIns="90000" bIns="10080" anchor="t" anchorCtr="1">
+          <a:bodyPr lIns="0" tIns="10080" rIns="0" bIns="10080" anchor="t" anchorCtr="1">
             <a:noAutofit/>
           </a:bodyPr>
           <a:p>
@@ -25488,7 +26429,7 @@
         <p:spPr>
           <a:xfrm>
             <a:off x="914400" y="2834640"/>
-            <a:ext cx="5120280" cy="639720"/>
+            <a:ext cx="5119920" cy="639360"/>
           </a:xfrm>
           <a:prstGeom prst="rect">
             <a:avLst/>
@@ -25531,7 +26472,7 @@
         <p:spPr>
           <a:xfrm>
             <a:off x="1097280" y="2834640"/>
-            <a:ext cx="3200040" cy="639720"/>
+            <a:ext cx="3199680" cy="639360"/>
           </a:xfrm>
           <a:prstGeom prst="rect">
             <a:avLst/>
@@ -25592,7 +26533,7 @@
         <p:spPr>
           <a:xfrm>
             <a:off x="4297680" y="2834640"/>
-            <a:ext cx="1645560" cy="639720"/>
+            <a:ext cx="1645200" cy="639360"/>
           </a:xfrm>
           <a:prstGeom prst="rect">
             <a:avLst/>
@@ -25673,7 +26614,7 @@
           <a:fontRef idx="minor"/>
         </p:style>
         <p:txBody>
-          <a:bodyPr lIns="90000" tIns="10080" rIns="90000" bIns="10080" anchor="t" anchorCtr="1">
+          <a:bodyPr lIns="0" tIns="10080" rIns="0" bIns="10080" anchor="t" anchorCtr="1">
             <a:noAutofit/>
           </a:bodyPr>
           <a:p>
@@ -25697,7 +26638,7 @@
         <p:spPr>
           <a:xfrm>
             <a:off x="914400" y="3566160"/>
-            <a:ext cx="5120280" cy="639720"/>
+            <a:ext cx="5119920" cy="639360"/>
           </a:xfrm>
           <a:prstGeom prst="rect">
             <a:avLst/>
@@ -25740,7 +26681,7 @@
         <p:spPr>
           <a:xfrm>
             <a:off x="1097280" y="3566160"/>
-            <a:ext cx="3200040" cy="639720"/>
+            <a:ext cx="3199680" cy="639360"/>
           </a:xfrm>
           <a:prstGeom prst="rect">
             <a:avLst/>
@@ -25801,7 +26742,7 @@
         <p:spPr>
           <a:xfrm>
             <a:off x="4297680" y="3566160"/>
-            <a:ext cx="1645560" cy="639720"/>
+            <a:ext cx="1645200" cy="639360"/>
           </a:xfrm>
           <a:prstGeom prst="rect">
             <a:avLst/>
@@ -25882,7 +26823,7 @@
           <a:fontRef idx="minor"/>
         </p:style>
         <p:txBody>
-          <a:bodyPr lIns="90000" tIns="10080" rIns="90000" bIns="10080" anchor="t" anchorCtr="1">
+          <a:bodyPr lIns="0" tIns="10080" rIns="0" bIns="10080" anchor="t" anchorCtr="1">
             <a:noAutofit/>
           </a:bodyPr>
           <a:p>
@@ -25906,7 +26847,7 @@
         <p:spPr>
           <a:xfrm>
             <a:off x="914400" y="4297680"/>
-            <a:ext cx="5120280" cy="639720"/>
+            <a:ext cx="5119920" cy="639360"/>
           </a:xfrm>
           <a:prstGeom prst="rect">
             <a:avLst/>
@@ -25949,7 +26890,7 @@
         <p:spPr>
           <a:xfrm>
             <a:off x="1097280" y="4297680"/>
-            <a:ext cx="3200040" cy="639720"/>
+            <a:ext cx="3199680" cy="639360"/>
           </a:xfrm>
           <a:prstGeom prst="rect">
             <a:avLst/>
@@ -26010,7 +26951,7 @@
         <p:spPr>
           <a:xfrm>
             <a:off x="4297680" y="4297680"/>
-            <a:ext cx="1645560" cy="639720"/>
+            <a:ext cx="1645200" cy="639360"/>
           </a:xfrm>
           <a:prstGeom prst="rect">
             <a:avLst/>
@@ -26091,7 +27032,7 @@
           <a:fontRef idx="minor"/>
         </p:style>
         <p:txBody>
-          <a:bodyPr lIns="90000" tIns="10080" rIns="90000" bIns="10080" anchor="t" anchorCtr="1">
+          <a:bodyPr lIns="0" tIns="10080" rIns="0" bIns="10080" anchor="t" anchorCtr="1">
             <a:noAutofit/>
           </a:bodyPr>
           <a:p>
@@ -26115,7 +27056,7 @@
         <p:spPr>
           <a:xfrm>
             <a:off x="914400" y="5029200"/>
-            <a:ext cx="5120280" cy="639720"/>
+            <a:ext cx="5119920" cy="639360"/>
           </a:xfrm>
           <a:prstGeom prst="rect">
             <a:avLst/>
@@ -26158,7 +27099,7 @@
         <p:spPr>
           <a:xfrm>
             <a:off x="1097280" y="5029200"/>
-            <a:ext cx="3200040" cy="639720"/>
+            <a:ext cx="3199680" cy="639360"/>
           </a:xfrm>
           <a:prstGeom prst="rect">
             <a:avLst/>
@@ -26219,7 +27160,7 @@
         <p:spPr>
           <a:xfrm>
             <a:off x="4297680" y="5029200"/>
-            <a:ext cx="1645560" cy="639720"/>
+            <a:ext cx="1645200" cy="639360"/>
           </a:xfrm>
           <a:prstGeom prst="rect">
             <a:avLst/>
@@ -26280,7 +27221,7 @@
         <p:spPr>
           <a:xfrm>
             <a:off x="6675120" y="1554480"/>
-            <a:ext cx="5028840" cy="365400"/>
+            <a:ext cx="5028480" cy="365040"/>
           </a:xfrm>
           <a:prstGeom prst="rect">
             <a:avLst/>
@@ -26341,7 +27282,7 @@
         <p:spPr>
           <a:xfrm>
             <a:off x="6675120" y="2057400"/>
-            <a:ext cx="5028840" cy="502560"/>
+            <a:ext cx="5028480" cy="502200"/>
           </a:xfrm>
           <a:prstGeom prst="rect">
             <a:avLst/>
@@ -26387,7 +27328,7 @@
         <p:spPr>
           <a:xfrm>
             <a:off x="6812280" y="2057400"/>
-            <a:ext cx="2011320" cy="502560"/>
+            <a:ext cx="2010960" cy="502200"/>
           </a:xfrm>
           <a:prstGeom prst="rect">
             <a:avLst/>
@@ -26448,7 +27389,7 @@
         <p:spPr>
           <a:xfrm>
             <a:off x="8823960" y="2057400"/>
-            <a:ext cx="2742840" cy="502560"/>
+            <a:ext cx="2742480" cy="502200"/>
           </a:xfrm>
           <a:prstGeom prst="rect">
             <a:avLst/>
@@ -26509,7 +27450,7 @@
         <p:spPr>
           <a:xfrm>
             <a:off x="6675120" y="2560320"/>
-            <a:ext cx="5028840" cy="502560"/>
+            <a:ext cx="5028480" cy="502200"/>
           </a:xfrm>
           <a:prstGeom prst="rect">
             <a:avLst/>
@@ -26555,7 +27496,7 @@
         <p:spPr>
           <a:xfrm>
             <a:off x="6812280" y="2560320"/>
-            <a:ext cx="2011320" cy="502560"/>
+            <a:ext cx="2010960" cy="502200"/>
           </a:xfrm>
           <a:prstGeom prst="rect">
             <a:avLst/>
@@ -26616,7 +27557,7 @@
         <p:spPr>
           <a:xfrm>
             <a:off x="8823960" y="2560320"/>
-            <a:ext cx="2742840" cy="502560"/>
+            <a:ext cx="2742480" cy="502200"/>
           </a:xfrm>
           <a:prstGeom prst="rect">
             <a:avLst/>
@@ -26677,7 +27618,7 @@
         <p:spPr>
           <a:xfrm>
             <a:off x="6675120" y="3063240"/>
-            <a:ext cx="5028840" cy="502560"/>
+            <a:ext cx="5028480" cy="502200"/>
           </a:xfrm>
           <a:prstGeom prst="rect">
             <a:avLst/>
@@ -26723,7 +27664,7 @@
         <p:spPr>
           <a:xfrm>
             <a:off x="6812280" y="3063240"/>
-            <a:ext cx="2011320" cy="502560"/>
+            <a:ext cx="2010960" cy="502200"/>
           </a:xfrm>
           <a:prstGeom prst="rect">
             <a:avLst/>
@@ -26784,7 +27725,7 @@
         <p:spPr>
           <a:xfrm>
             <a:off x="8823960" y="3063240"/>
-            <a:ext cx="2742840" cy="502560"/>
+            <a:ext cx="2742480" cy="502200"/>
           </a:xfrm>
           <a:prstGeom prst="rect">
             <a:avLst/>
@@ -26845,7 +27786,7 @@
         <p:spPr>
           <a:xfrm>
             <a:off x="6675120" y="3566160"/>
-            <a:ext cx="5028840" cy="502560"/>
+            <a:ext cx="5028480" cy="502200"/>
           </a:xfrm>
           <a:prstGeom prst="rect">
             <a:avLst/>
@@ -26891,7 +27832,7 @@
         <p:spPr>
           <a:xfrm>
             <a:off x="6812280" y="3566160"/>
-            <a:ext cx="2011320" cy="502560"/>
+            <a:ext cx="2010960" cy="502200"/>
           </a:xfrm>
           <a:prstGeom prst="rect">
             <a:avLst/>
@@ -26952,7 +27893,7 @@
         <p:spPr>
           <a:xfrm>
             <a:off x="8823960" y="3566160"/>
-            <a:ext cx="2742840" cy="502560"/>
+            <a:ext cx="2742480" cy="502200"/>
           </a:xfrm>
           <a:prstGeom prst="rect">
             <a:avLst/>
@@ -27013,7 +27954,7 @@
         <p:spPr>
           <a:xfrm>
             <a:off x="6675120" y="4069080"/>
-            <a:ext cx="5028840" cy="502560"/>
+            <a:ext cx="5028480" cy="502200"/>
           </a:xfrm>
           <a:prstGeom prst="rect">
             <a:avLst/>
@@ -27059,7 +28000,7 @@
         <p:spPr>
           <a:xfrm>
             <a:off x="6812280" y="4069080"/>
-            <a:ext cx="2011320" cy="502560"/>
+            <a:ext cx="2010960" cy="502200"/>
           </a:xfrm>
           <a:prstGeom prst="rect">
             <a:avLst/>
@@ -27120,7 +28061,7 @@
         <p:spPr>
           <a:xfrm>
             <a:off x="8823960" y="4069080"/>
-            <a:ext cx="2742840" cy="502560"/>
+            <a:ext cx="2742480" cy="502200"/>
           </a:xfrm>
           <a:prstGeom prst="rect">
             <a:avLst/>
@@ -27181,7 +28122,7 @@
         <p:spPr>
           <a:xfrm>
             <a:off x="6675120" y="4572000"/>
-            <a:ext cx="5028840" cy="502560"/>
+            <a:ext cx="5028480" cy="502200"/>
           </a:xfrm>
           <a:prstGeom prst="rect">
             <a:avLst/>
@@ -27227,7 +28168,7 @@
         <p:spPr>
           <a:xfrm>
             <a:off x="6812280" y="4572000"/>
-            <a:ext cx="2011320" cy="502560"/>
+            <a:ext cx="2010960" cy="502200"/>
           </a:xfrm>
           <a:prstGeom prst="rect">
             <a:avLst/>
@@ -27288,7 +28229,7 @@
         <p:spPr>
           <a:xfrm>
             <a:off x="8823960" y="4572000"/>
-            <a:ext cx="2742840" cy="502560"/>
+            <a:ext cx="2742480" cy="502200"/>
           </a:xfrm>
           <a:prstGeom prst="rect">
             <a:avLst/>
@@ -27349,7 +28290,7 @@
         <p:spPr>
           <a:xfrm>
             <a:off x="6675120" y="5074920"/>
-            <a:ext cx="5028840" cy="502560"/>
+            <a:ext cx="5028480" cy="502200"/>
           </a:xfrm>
           <a:prstGeom prst="rect">
             <a:avLst/>
@@ -27395,7 +28336,7 @@
         <p:spPr>
           <a:xfrm>
             <a:off x="6812280" y="5074920"/>
-            <a:ext cx="2011320" cy="502560"/>
+            <a:ext cx="2010960" cy="502200"/>
           </a:xfrm>
           <a:prstGeom prst="rect">
             <a:avLst/>
@@ -27456,7 +28397,7 @@
         <p:spPr>
           <a:xfrm>
             <a:off x="8823960" y="5074920"/>
-            <a:ext cx="2742840" cy="502560"/>
+            <a:ext cx="2742480" cy="502200"/>
           </a:xfrm>
           <a:prstGeom prst="rect">
             <a:avLst/>
@@ -27517,7 +28458,7 @@
         <p:spPr>
           <a:xfrm>
             <a:off x="6675120" y="5669280"/>
-            <a:ext cx="5028840" cy="639720"/>
+            <a:ext cx="5028480" cy="639360"/>
           </a:xfrm>
           <a:prstGeom prst="rect">
             <a:avLst/>
@@ -27560,7 +28501,7 @@
         <p:spPr>
           <a:xfrm>
             <a:off x="6812280" y="5669280"/>
-            <a:ext cx="4754520" cy="639720"/>
+            <a:ext cx="4754160" cy="639360"/>
           </a:xfrm>
           <a:prstGeom prst="rect">
             <a:avLst/>
@@ -27621,7 +28562,7 @@
         <p:spPr>
           <a:xfrm>
             <a:off x="0" y="6537960"/>
-            <a:ext cx="12188520" cy="319680"/>
+            <a:ext cx="12188160" cy="319320"/>
           </a:xfrm>
           <a:prstGeom prst="rect">
             <a:avLst/>
@@ -27664,7 +28605,7 @@
         <p:spPr>
           <a:xfrm>
             <a:off x="365760" y="6565320"/>
-            <a:ext cx="8229240" cy="273960"/>
+            <a:ext cx="8228880" cy="273600"/>
           </a:xfrm>
           <a:prstGeom prst="rect">
             <a:avLst/>
@@ -27725,7 +28666,7 @@
         <p:spPr>
           <a:xfrm>
             <a:off x="10908720" y="6565320"/>
-            <a:ext cx="914040" cy="273960"/>
+            <a:ext cx="913680" cy="273600"/>
           </a:xfrm>
           <a:prstGeom prst="rect">
             <a:avLst/>

--- a/2_semester/kursovaya/result/6_presentaciya.pptx
+++ b/2_semester/kursovaya/result/6_presentaciya.pptx
@@ -80,18 +80,7 @@
                 <a:uFillTx/>
                 <a:latin typeface="Calibri"/>
               </a:rPr>
-              <a:t>Click to move </a:t>
-            </a:r>
-            <a:r>
-              <a:rPr lang="en-US" sz="1800" b="0" u="none" strike="noStrike">
-                <a:solidFill>
-                  <a:schemeClr val="dk1"/>
-                </a:solidFill>
-                <a:effectLst/>
-                <a:uFillTx/>
-                <a:latin typeface="Calibri"/>
-              </a:rPr>
-              <a:t>the slide</a:t>
+              <a:t>Click to move the slide</a:t>
             </a:r>
             <a:endParaRPr lang="en-US" sz="1800" b="0" u="none" strike="noStrike">
               <a:solidFill>
@@ -144,73 +133,7 @@
                 <a:uFillTx/>
                 <a:latin typeface="Arial"/>
               </a:rPr>
-              <a:t>Click </a:t>
-            </a:r>
-            <a:r>
-              <a:rPr lang="en-US" sz="2000" b="0" u="none" strike="noStrike">
-                <a:solidFill>
-                  <a:srgbClr val="000000"/>
-                </a:solidFill>
-                <a:effectLst/>
-                <a:uFillTx/>
-                <a:latin typeface="Arial"/>
-              </a:rPr>
-              <a:t>to </a:t>
-            </a:r>
-            <a:r>
-              <a:rPr lang="en-US" sz="2000" b="0" u="none" strike="noStrike">
-                <a:solidFill>
-                  <a:srgbClr val="000000"/>
-                </a:solidFill>
-                <a:effectLst/>
-                <a:uFillTx/>
-                <a:latin typeface="Arial"/>
-              </a:rPr>
-              <a:t>edit </a:t>
-            </a:r>
-            <a:r>
-              <a:rPr lang="en-US" sz="2000" b="0" u="none" strike="noStrike">
-                <a:solidFill>
-                  <a:srgbClr val="000000"/>
-                </a:solidFill>
-                <a:effectLst/>
-                <a:uFillTx/>
-                <a:latin typeface="Arial"/>
-              </a:rPr>
-              <a:t>the </a:t>
-            </a:r>
-            <a:r>
-              <a:rPr lang="en-US" sz="2000" b="0" u="none" strike="noStrike">
-                <a:solidFill>
-                  <a:srgbClr val="000000"/>
-                </a:solidFill>
-                <a:effectLst/>
-                <a:uFillTx/>
-                <a:latin typeface="Arial"/>
-              </a:rPr>
-              <a:t>notes </a:t>
-            </a:r>
-            <a:r>
-              <a:rPr lang="en-US" sz="2000" b="0" u="none" strike="noStrike">
-                <a:solidFill>
-                  <a:srgbClr val="000000"/>
-                </a:solidFill>
-                <a:effectLst/>
-                <a:uFillTx/>
-                <a:latin typeface="Arial"/>
-              </a:rPr>
-              <a:t>form</a:t>
-            </a:r>
-            <a:r>
-              <a:rPr lang="en-US" sz="2000" b="0" u="none" strike="noStrike">
-                <a:solidFill>
-                  <a:srgbClr val="000000"/>
-                </a:solidFill>
-                <a:effectLst/>
-                <a:uFillTx/>
-                <a:latin typeface="Arial"/>
-              </a:rPr>
-              <a:t>at</a:t>
+              <a:t>Click to edit the notes format</a:t>
             </a:r>
             <a:endParaRPr lang="en-US" sz="2000" b="0" u="none" strike="noStrike">
               <a:solidFill>
@@ -452,7 +375,7 @@
             <a:pPr indent="0" algn="r">
               <a:buNone/>
             </a:pPr>
-            <a:fld id="{1FE5DCC3-78E1-40BE-B627-2CC617C8BE50}" type="slidenum">
+            <a:fld id="{FB0B1931-3A65-411F-A83C-ABAA6063BA1D}" type="slidenum">
               <a:rPr lang="en-US" sz="1400" b="0" u="none" strike="noStrike">
                 <a:solidFill>
                   <a:srgbClr val="000000"/>
@@ -510,7 +433,7 @@
         <p:spPr>
           <a:xfrm>
             <a:off x="685800" y="1143000"/>
-            <a:ext cx="5485680" cy="3085560"/>
+            <a:ext cx="5485320" cy="3085200"/>
           </a:xfrm>
           <a:prstGeom prst="rect">
             <a:avLst/>
@@ -533,7 +456,7 @@
         <p:spPr>
           <a:xfrm>
             <a:off x="685800" y="4400640"/>
-            <a:ext cx="5485680" cy="3599640"/>
+            <a:ext cx="5485320" cy="3599280"/>
           </a:xfrm>
           <a:prstGeom prst="rect">
             <a:avLst/>
@@ -641,7 +564,7 @@
         <p:spPr>
           <a:xfrm>
             <a:off x="3884760" y="8685360"/>
-            <a:ext cx="2971080" cy="457920"/>
+            <a:ext cx="2970720" cy="457560"/>
           </a:xfrm>
           <a:prstGeom prst="rect">
             <a:avLst/>
@@ -685,7 +608,7 @@
                 <a:tab pos="0" algn="l"/>
               </a:tabLst>
             </a:pPr>
-            <a:fld id="{70BC7FA5-7C20-440A-9B52-49D9E4268F6D}" type="slidenum">
+            <a:fld id="{721D3C90-612A-4D4A-BE92-6F44F44B2F5C}" type="slidenum">
               <a:rPr lang="en-US" sz="1200" b="0" u="none" strike="noStrike">
                 <a:solidFill>
                   <a:schemeClr val="dk1"/>
@@ -743,7 +666,7 @@
         <p:spPr>
           <a:xfrm>
             <a:off x="685800" y="1143000"/>
-            <a:ext cx="5485680" cy="3085560"/>
+            <a:ext cx="5485320" cy="3085200"/>
           </a:xfrm>
           <a:prstGeom prst="rect">
             <a:avLst/>
@@ -766,7 +689,7 @@
         <p:spPr>
           <a:xfrm>
             <a:off x="685800" y="4400640"/>
-            <a:ext cx="5485680" cy="3599640"/>
+            <a:ext cx="5485320" cy="3599280"/>
           </a:xfrm>
           <a:prstGeom prst="rect">
             <a:avLst/>
@@ -1070,7 +993,7 @@
         <p:spPr>
           <a:xfrm>
             <a:off x="3884760" y="8685360"/>
-            <a:ext cx="2971080" cy="457920"/>
+            <a:ext cx="2970720" cy="457560"/>
           </a:xfrm>
           <a:prstGeom prst="rect">
             <a:avLst/>
@@ -1114,7 +1037,7 @@
                 <a:tab pos="0" algn="l"/>
               </a:tabLst>
             </a:pPr>
-            <a:fld id="{5C65B9B0-4DB7-43AD-82AA-7A547FD4499E}" type="slidenum">
+            <a:fld id="{E630D3FA-6208-486A-895D-D18F55FE9937}" type="slidenum">
               <a:rPr lang="en-US" sz="1200" b="0" u="none" strike="noStrike">
                 <a:solidFill>
                   <a:schemeClr val="dk1"/>
@@ -1172,7 +1095,7 @@
         <p:spPr>
           <a:xfrm>
             <a:off x="685800" y="1143000"/>
-            <a:ext cx="5485680" cy="3085560"/>
+            <a:ext cx="5485320" cy="3085200"/>
           </a:xfrm>
           <a:prstGeom prst="rect">
             <a:avLst/>
@@ -1195,7 +1118,7 @@
         <p:spPr>
           <a:xfrm>
             <a:off x="685800" y="4400640"/>
-            <a:ext cx="5485680" cy="3599640"/>
+            <a:ext cx="5485320" cy="3599280"/>
           </a:xfrm>
           <a:prstGeom prst="rect">
             <a:avLst/>
@@ -1401,7 +1324,7 @@
         <p:spPr>
           <a:xfrm>
             <a:off x="3884760" y="8685360"/>
-            <a:ext cx="2971080" cy="457920"/>
+            <a:ext cx="2970720" cy="457560"/>
           </a:xfrm>
           <a:prstGeom prst="rect">
             <a:avLst/>
@@ -1445,7 +1368,7 @@
                 <a:tab pos="0" algn="l"/>
               </a:tabLst>
             </a:pPr>
-            <a:fld id="{2704402E-4880-4A46-AF59-A3F7542E4447}" type="slidenum">
+            <a:fld id="{4BB569EB-0AB2-4789-ACC6-5C8359A50FEA}" type="slidenum">
               <a:rPr lang="en-US" sz="1200" b="0" u="none" strike="noStrike">
                 <a:solidFill>
                   <a:schemeClr val="dk1"/>
@@ -1503,7 +1426,7 @@
         <p:spPr>
           <a:xfrm>
             <a:off x="685800" y="1143000"/>
-            <a:ext cx="5485680" cy="3085560"/>
+            <a:ext cx="5485320" cy="3085200"/>
           </a:xfrm>
           <a:prstGeom prst="rect">
             <a:avLst/>
@@ -1526,7 +1449,7 @@
         <p:spPr>
           <a:xfrm>
             <a:off x="685800" y="4400640"/>
-            <a:ext cx="5485680" cy="3599640"/>
+            <a:ext cx="5485320" cy="3599280"/>
           </a:xfrm>
           <a:prstGeom prst="rect">
             <a:avLst/>
@@ -1879,7 +1802,7 @@
         <p:spPr>
           <a:xfrm>
             <a:off x="3884760" y="8685360"/>
-            <a:ext cx="2971080" cy="457920"/>
+            <a:ext cx="2970720" cy="457560"/>
           </a:xfrm>
           <a:prstGeom prst="rect">
             <a:avLst/>
@@ -1923,7 +1846,7 @@
                 <a:tab pos="0" algn="l"/>
               </a:tabLst>
             </a:pPr>
-            <a:fld id="{88255411-EA09-48A6-85EE-8F43EFBB904E}" type="slidenum">
+            <a:fld id="{57634880-EF60-4D09-B70C-65F71BA6F94B}" type="slidenum">
               <a:rPr lang="en-US" sz="1200" b="0" u="none" strike="noStrike">
                 <a:solidFill>
                   <a:schemeClr val="dk1"/>
@@ -1933,7 +1856,7 @@
                 <a:latin typeface="+mn-lt"/>
                 <a:ea typeface="+mn-ea"/>
               </a:rPr>
-              <a:t>1</a:t>
+              <a:t>&lt;number&gt;</a:t>
             </a:fld>
             <a:endParaRPr lang="en-US" sz="1200" b="0" u="none" strike="noStrike">
               <a:solidFill>
@@ -1981,7 +1904,7 @@
         <p:spPr>
           <a:xfrm>
             <a:off x="685800" y="1143000"/>
-            <a:ext cx="5485680" cy="3085560"/>
+            <a:ext cx="5485320" cy="3085200"/>
           </a:xfrm>
           <a:prstGeom prst="rect">
             <a:avLst/>
@@ -2004,7 +1927,7 @@
         <p:spPr>
           <a:xfrm>
             <a:off x="685800" y="4400640"/>
-            <a:ext cx="5485680" cy="3599640"/>
+            <a:ext cx="5485320" cy="3599280"/>
           </a:xfrm>
           <a:prstGeom prst="rect">
             <a:avLst/>
@@ -2210,7 +2133,7 @@
         <p:spPr>
           <a:xfrm>
             <a:off x="3884760" y="8685360"/>
-            <a:ext cx="2971080" cy="457920"/>
+            <a:ext cx="2970720" cy="457560"/>
           </a:xfrm>
           <a:prstGeom prst="rect">
             <a:avLst/>
@@ -2254,7 +2177,7 @@
                 <a:tab pos="0" algn="l"/>
               </a:tabLst>
             </a:pPr>
-            <a:fld id="{B359D3A5-3087-415C-A0D4-A09F216EB270}" type="slidenum">
+            <a:fld id="{796B2928-DFB6-4F11-9854-521802BBE96E}" type="slidenum">
               <a:rPr lang="en-US" sz="1200" b="0" u="none" strike="noStrike">
                 <a:solidFill>
                   <a:schemeClr val="dk1"/>
@@ -2312,7 +2235,7 @@
         <p:spPr>
           <a:xfrm>
             <a:off x="685800" y="1143000"/>
-            <a:ext cx="5485680" cy="3085560"/>
+            <a:ext cx="5485320" cy="3085200"/>
           </a:xfrm>
           <a:prstGeom prst="rect">
             <a:avLst/>
@@ -2335,7 +2258,7 @@
         <p:spPr>
           <a:xfrm>
             <a:off x="685800" y="4400640"/>
-            <a:ext cx="5485680" cy="3599640"/>
+            <a:ext cx="5485320" cy="3599280"/>
           </a:xfrm>
           <a:prstGeom prst="rect">
             <a:avLst/>
@@ -2672,7 +2595,7 @@
         <p:spPr>
           <a:xfrm>
             <a:off x="3884760" y="8685360"/>
-            <a:ext cx="2971080" cy="457920"/>
+            <a:ext cx="2970720" cy="457560"/>
           </a:xfrm>
           <a:prstGeom prst="rect">
             <a:avLst/>
@@ -2716,7 +2639,7 @@
                 <a:tab pos="0" algn="l"/>
               </a:tabLst>
             </a:pPr>
-            <a:fld id="{8ABFD8B5-BA28-46DB-A84D-11C7AD8E6B84}" type="slidenum">
+            <a:fld id="{F9028DEF-5CCC-444F-901B-12D894457734}" type="slidenum">
               <a:rPr lang="en-US" sz="1200" b="0" u="none" strike="noStrike">
                 <a:solidFill>
                   <a:schemeClr val="dk1"/>
@@ -2774,7 +2697,7 @@
         <p:spPr>
           <a:xfrm>
             <a:off x="685800" y="1143000"/>
-            <a:ext cx="5485680" cy="3085560"/>
+            <a:ext cx="5485320" cy="3085200"/>
           </a:xfrm>
           <a:prstGeom prst="rect">
             <a:avLst/>
@@ -2797,7 +2720,7 @@
         <p:spPr>
           <a:xfrm>
             <a:off x="685800" y="4400640"/>
-            <a:ext cx="5485680" cy="3599640"/>
+            <a:ext cx="5485320" cy="3599280"/>
           </a:xfrm>
           <a:prstGeom prst="rect">
             <a:avLst/>
@@ -3052,7 +2975,7 @@
         <p:spPr>
           <a:xfrm>
             <a:off x="3884760" y="8685360"/>
-            <a:ext cx="2971080" cy="457920"/>
+            <a:ext cx="2970720" cy="457560"/>
           </a:xfrm>
           <a:prstGeom prst="rect">
             <a:avLst/>
@@ -3096,7 +3019,7 @@
                 <a:tab pos="0" algn="l"/>
               </a:tabLst>
             </a:pPr>
-            <a:fld id="{8806E449-72C2-44B3-8C8C-8165545DDC1A}" type="slidenum">
+            <a:fld id="{E11097EB-7D3B-483D-A3EC-C8851AA7FC07}" type="slidenum">
               <a:rPr lang="en-US" sz="1200" b="0" u="none" strike="noStrike">
                 <a:solidFill>
                   <a:schemeClr val="dk1"/>
@@ -3154,7 +3077,7 @@
         <p:spPr>
           <a:xfrm>
             <a:off x="685800" y="1143000"/>
-            <a:ext cx="5485680" cy="3085560"/>
+            <a:ext cx="5485320" cy="3085200"/>
           </a:xfrm>
           <a:prstGeom prst="rect">
             <a:avLst/>
@@ -3177,7 +3100,7 @@
         <p:spPr>
           <a:xfrm>
             <a:off x="685800" y="4400640"/>
-            <a:ext cx="5485680" cy="3599640"/>
+            <a:ext cx="5485320" cy="3599280"/>
           </a:xfrm>
           <a:prstGeom prst="rect">
             <a:avLst/>
@@ -3383,7 +3306,7 @@
         <p:spPr>
           <a:xfrm>
             <a:off x="3884760" y="8685360"/>
-            <a:ext cx="2971080" cy="457920"/>
+            <a:ext cx="2970720" cy="457560"/>
           </a:xfrm>
           <a:prstGeom prst="rect">
             <a:avLst/>
@@ -3427,7 +3350,7 @@
                 <a:tab pos="0" algn="l"/>
               </a:tabLst>
             </a:pPr>
-            <a:fld id="{ADD09EA9-9E53-4839-BDDC-10E2C09D0EE8}" type="slidenum">
+            <a:fld id="{18AB4B2B-3B74-4DDC-B789-D39E76F52151}" type="slidenum">
               <a:rPr lang="en-US" sz="1200" b="0" u="none" strike="noStrike">
                 <a:solidFill>
                   <a:schemeClr val="dk1"/>
@@ -3485,7 +3408,7 @@
         <p:spPr>
           <a:xfrm>
             <a:off x="685800" y="1143000"/>
-            <a:ext cx="5485680" cy="3085560"/>
+            <a:ext cx="5485320" cy="3085200"/>
           </a:xfrm>
           <a:prstGeom prst="rect">
             <a:avLst/>
@@ -3508,7 +3431,7 @@
         <p:spPr>
           <a:xfrm>
             <a:off x="685800" y="4400640"/>
-            <a:ext cx="5485680" cy="3599640"/>
+            <a:ext cx="5485320" cy="3599280"/>
           </a:xfrm>
           <a:prstGeom prst="rect">
             <a:avLst/>
@@ -3910,7 +3833,7 @@
         <p:spPr>
           <a:xfrm>
             <a:off x="3884760" y="8685360"/>
-            <a:ext cx="2971080" cy="457920"/>
+            <a:ext cx="2970720" cy="457560"/>
           </a:xfrm>
           <a:prstGeom prst="rect">
             <a:avLst/>
@@ -3954,7 +3877,7 @@
                 <a:tab pos="0" algn="l"/>
               </a:tabLst>
             </a:pPr>
-            <a:fld id="{46BB62CD-3542-42B2-9B7A-7CD02EBC0241}" type="slidenum">
+            <a:fld id="{ADA216FD-04FA-4CF9-955F-E472F280CE49}" type="slidenum">
               <a:rPr lang="en-US" sz="1200" b="0" u="none" strike="noStrike">
                 <a:solidFill>
                   <a:schemeClr val="dk1"/>
@@ -4012,7 +3935,7 @@
         <p:spPr>
           <a:xfrm>
             <a:off x="685800" y="1143000"/>
-            <a:ext cx="5485680" cy="3085560"/>
+            <a:ext cx="5485320" cy="3085200"/>
           </a:xfrm>
           <a:prstGeom prst="rect">
             <a:avLst/>
@@ -4035,7 +3958,7 @@
         <p:spPr>
           <a:xfrm>
             <a:off x="685800" y="4400640"/>
-            <a:ext cx="5485680" cy="3599640"/>
+            <a:ext cx="5485320" cy="3599280"/>
           </a:xfrm>
           <a:prstGeom prst="rect">
             <a:avLst/>
@@ -4486,7 +4409,7 @@
         <p:spPr>
           <a:xfrm>
             <a:off x="3884760" y="8685360"/>
-            <a:ext cx="2971080" cy="457920"/>
+            <a:ext cx="2970720" cy="457560"/>
           </a:xfrm>
           <a:prstGeom prst="rect">
             <a:avLst/>
@@ -4530,7 +4453,7 @@
                 <a:tab pos="0" algn="l"/>
               </a:tabLst>
             </a:pPr>
-            <a:fld id="{6F33F4B0-70A7-47F8-AC4F-54BEAE3174FE}" type="slidenum">
+            <a:fld id="{BD6C3DA9-1E92-4880-8F0F-F7DEE21A7D49}" type="slidenum">
               <a:rPr lang="en-US" sz="1200" b="0" u="none" strike="noStrike">
                 <a:solidFill>
                   <a:schemeClr val="dk1"/>
@@ -4588,7 +4511,7 @@
         <p:spPr>
           <a:xfrm>
             <a:off x="685800" y="1143000"/>
-            <a:ext cx="5485680" cy="3085560"/>
+            <a:ext cx="5485320" cy="3085200"/>
           </a:xfrm>
           <a:prstGeom prst="rect">
             <a:avLst/>
@@ -4611,7 +4534,7 @@
         <p:spPr>
           <a:xfrm>
             <a:off x="685800" y="4400640"/>
-            <a:ext cx="5485680" cy="3599640"/>
+            <a:ext cx="5485320" cy="3599280"/>
           </a:xfrm>
           <a:prstGeom prst="rect">
             <a:avLst/>
@@ -5062,7 +4985,7 @@
         <p:spPr>
           <a:xfrm>
             <a:off x="3884760" y="8685360"/>
-            <a:ext cx="2971080" cy="457920"/>
+            <a:ext cx="2970720" cy="457560"/>
           </a:xfrm>
           <a:prstGeom prst="rect">
             <a:avLst/>
@@ -5106,7 +5029,7 @@
                 <a:tab pos="0" algn="l"/>
               </a:tabLst>
             </a:pPr>
-            <a:fld id="{E0E1FD8A-014D-40EA-A434-D71B0455359C}" type="slidenum">
+            <a:fld id="{BDB8CF00-5EB8-4FAD-8B8C-9CC680488E0B}" type="slidenum">
               <a:rPr lang="en-US" sz="1200" b="0" u="none" strike="noStrike">
                 <a:solidFill>
                   <a:schemeClr val="dk1"/>
@@ -5164,7 +5087,7 @@
         <p:spPr>
           <a:xfrm>
             <a:off x="685800" y="1143000"/>
-            <a:ext cx="5485680" cy="3085560"/>
+            <a:ext cx="5485320" cy="3085200"/>
           </a:xfrm>
           <a:prstGeom prst="rect">
             <a:avLst/>
@@ -5187,7 +5110,7 @@
         <p:spPr>
           <a:xfrm>
             <a:off x="685800" y="4400640"/>
-            <a:ext cx="5485680" cy="3599640"/>
+            <a:ext cx="5485320" cy="3599280"/>
           </a:xfrm>
           <a:prstGeom prst="rect">
             <a:avLst/>
@@ -5393,7 +5316,7 @@
         <p:spPr>
           <a:xfrm>
             <a:off x="3884760" y="8685360"/>
-            <a:ext cx="2971080" cy="457920"/>
+            <a:ext cx="2970720" cy="457560"/>
           </a:xfrm>
           <a:prstGeom prst="rect">
             <a:avLst/>
@@ -5437,7 +5360,7 @@
                 <a:tab pos="0" algn="l"/>
               </a:tabLst>
             </a:pPr>
-            <a:fld id="{3B1E81C9-7ACA-4222-80B1-4195AC2C4B30}" type="slidenum">
+            <a:fld id="{3AE19E29-0E13-4C7C-9A18-E7E08A2223AA}" type="slidenum">
               <a:rPr lang="en-US" sz="1200" b="0" u="none" strike="noStrike">
                 <a:solidFill>
                   <a:schemeClr val="dk1"/>
@@ -5570,18 +5493,7 @@
                 <a:uFillTx/>
                 <a:latin typeface="Calibri"/>
               </a:rPr>
-              <a:t>Click to edit the </a:t>
-            </a:r>
-            <a:r>
-              <a:rPr lang="en-US" sz="1800" b="0" u="none" strike="noStrike">
-                <a:solidFill>
-                  <a:schemeClr val="dk1"/>
-                </a:solidFill>
-                <a:effectLst/>
-                <a:uFillTx/>
-                <a:latin typeface="Calibri"/>
-              </a:rPr>
-              <a:t>title text format</a:t>
+              <a:t>Click to edit the title text format</a:t>
             </a:r>
             <a:endParaRPr lang="en-US" sz="1800" b="0" u="none" strike="noStrike">
               <a:solidFill>
@@ -6024,7 +5936,7 @@
         <p:spPr>
           <a:xfrm>
             <a:off x="457200" y="457200"/>
-            <a:ext cx="11273760" cy="365040"/>
+            <a:ext cx="11273400" cy="364680"/>
           </a:xfrm>
           <a:prstGeom prst="rect">
             <a:avLst/>
@@ -6063,224 +5975,68 @@
                 <a:latin typeface="Calibri"/>
                 <a:ea typeface="Calibri"/>
               </a:rPr>
-              <a:t>ХЕРСОНСКИЙ </a:t>
-            </a:r>
-            <a:r>
-              <a:rPr lang="en-US" sz="1400" b="1" u="none" spc="201" strike="noStrike">
-                <a:solidFill>
-                  <a:srgbClr val="B8C5D6"/>
+              <a:t>ХЕРСОНСКИЙ ГОСУДАРСТВЕННЫЙ ПЕДАГОГИЧЕСКИЙ УНИВЕРСИТЕТ</a:t>
+            </a:r>
+            <a:endParaRPr lang="en-US" sz="1400" b="0" u="none" strike="noStrike">
+              <a:solidFill>
+                <a:srgbClr val="FFFFFF"/>
+              </a:solidFill>
+              <a:effectLst/>
+              <a:uFillTx/>
+              <a:latin typeface="Arial"/>
+            </a:endParaRPr>
+          </a:p>
+        </p:txBody>
+      </p:sp>
+      <p:sp>
+        <p:nvSpPr>
+          <p:cNvPr id="11" name="Text 1"/>
+          <p:cNvSpPr/>
+          <p:nvPr/>
+        </p:nvSpPr>
+        <p:spPr>
+          <a:xfrm>
+            <a:off x="457200" y="868680"/>
+            <a:ext cx="11273400" cy="273240"/>
+          </a:xfrm>
+          <a:prstGeom prst="rect">
+            <a:avLst/>
+          </a:prstGeom>
+          <a:noFill/>
+          <a:ln w="0">
+            <a:noFill/>
+          </a:ln>
+        </p:spPr>
+        <p:style>
+          <a:lnRef idx="0"/>
+          <a:fillRef idx="0"/>
+          <a:effectRef idx="0"/>
+          <a:fontRef idx="minor"/>
+        </p:style>
+        <p:txBody>
+          <a:bodyPr lIns="90000" tIns="45000" rIns="90000" bIns="45000" anchor="ctr">
+            <a:noAutofit/>
+          </a:bodyPr>
+          <a:p>
+            <a:pPr algn="ctr" defTabSz="914400">
+              <a:lnSpc>
+                <a:spcPct val="100000"/>
+              </a:lnSpc>
+              <a:tabLst>
+                <a:tab pos="0" algn="l"/>
+              </a:tabLst>
+            </a:pPr>
+            <a:r>
+              <a:rPr lang="en-US" sz="1200" b="0" i="1" u="none" strike="noStrike">
+                <a:solidFill>
+                  <a:srgbClr val="8FA0B8"/>
                 </a:solidFill>
                 <a:effectLst/>
                 <a:uFillTx/>
                 <a:latin typeface="Calibri"/>
                 <a:ea typeface="Calibri"/>
               </a:rPr>
-              <a:t>ГОСУДАРСТВЕН</a:t>
-            </a:r>
-            <a:r>
-              <a:rPr lang="en-US" sz="1400" b="1" u="none" spc="201" strike="noStrike">
-                <a:solidFill>
-                  <a:srgbClr val="B8C5D6"/>
-                </a:solidFill>
-                <a:effectLst/>
-                <a:uFillTx/>
-                <a:latin typeface="Calibri"/>
-                <a:ea typeface="Calibri"/>
-              </a:rPr>
-              <a:t>НЫЙ </a:t>
-            </a:r>
-            <a:r>
-              <a:rPr lang="en-US" sz="1400" b="1" u="none" spc="201" strike="noStrike">
-                <a:solidFill>
-                  <a:srgbClr val="B8C5D6"/>
-                </a:solidFill>
-                <a:effectLst/>
-                <a:uFillTx/>
-                <a:latin typeface="Calibri"/>
-                <a:ea typeface="Calibri"/>
-              </a:rPr>
-              <a:t>ПЕДАГОГИЧЕС</a:t>
-            </a:r>
-            <a:r>
-              <a:rPr lang="en-US" sz="1400" b="1" u="none" spc="201" strike="noStrike">
-                <a:solidFill>
-                  <a:srgbClr val="B8C5D6"/>
-                </a:solidFill>
-                <a:effectLst/>
-                <a:uFillTx/>
-                <a:latin typeface="Calibri"/>
-                <a:ea typeface="Calibri"/>
-              </a:rPr>
-              <a:t>КИЙ </a:t>
-            </a:r>
-            <a:r>
-              <a:rPr lang="en-US" sz="1400" b="1" u="none" spc="201" strike="noStrike">
-                <a:solidFill>
-                  <a:srgbClr val="B8C5D6"/>
-                </a:solidFill>
-                <a:effectLst/>
-                <a:uFillTx/>
-                <a:latin typeface="Calibri"/>
-                <a:ea typeface="Calibri"/>
-              </a:rPr>
-              <a:t>УНИВЕРСИТЕТ</a:t>
-            </a:r>
-            <a:endParaRPr lang="en-US" sz="1400" b="0" u="none" strike="noStrike">
-              <a:solidFill>
-                <a:srgbClr val="FFFFFF"/>
-              </a:solidFill>
-              <a:effectLst/>
-              <a:uFillTx/>
-              <a:latin typeface="Arial"/>
-            </a:endParaRPr>
-          </a:p>
-        </p:txBody>
-      </p:sp>
-      <p:sp>
-        <p:nvSpPr>
-          <p:cNvPr id="11" name="Text 1"/>
-          <p:cNvSpPr/>
-          <p:nvPr/>
-        </p:nvSpPr>
-        <p:spPr>
-          <a:xfrm>
-            <a:off x="457200" y="868680"/>
-            <a:ext cx="11273760" cy="273600"/>
-          </a:xfrm>
-          <a:prstGeom prst="rect">
-            <a:avLst/>
-          </a:prstGeom>
-          <a:noFill/>
-          <a:ln w="0">
-            <a:noFill/>
-          </a:ln>
-        </p:spPr>
-        <p:style>
-          <a:lnRef idx="0"/>
-          <a:fillRef idx="0"/>
-          <a:effectRef idx="0"/>
-          <a:fontRef idx="minor"/>
-        </p:style>
-        <p:txBody>
-          <a:bodyPr lIns="90000" tIns="45000" rIns="90000" bIns="45000" anchor="ctr">
-            <a:noAutofit/>
-          </a:bodyPr>
-          <a:p>
-            <a:pPr algn="ctr" defTabSz="914400">
-              <a:lnSpc>
-                <a:spcPct val="100000"/>
-              </a:lnSpc>
-              <a:tabLst>
-                <a:tab pos="0" algn="l"/>
-              </a:tabLst>
-            </a:pPr>
-            <a:r>
-              <a:rPr lang="en-US" sz="1200" b="0" i="1" u="none" strike="noStrike">
-                <a:solidFill>
-                  <a:srgbClr val="8FA0B8"/>
-                </a:solidFill>
-                <a:effectLst/>
-                <a:uFillTx/>
-                <a:latin typeface="Calibri"/>
-                <a:ea typeface="Calibri"/>
-              </a:rPr>
-              <a:t>Факульт</a:t>
-            </a:r>
-            <a:r>
-              <a:rPr lang="en-US" sz="1200" b="0" i="1" u="none" strike="noStrike">
-                <a:solidFill>
-                  <a:srgbClr val="8FA0B8"/>
-                </a:solidFill>
-                <a:effectLst/>
-                <a:uFillTx/>
-                <a:latin typeface="Calibri"/>
-                <a:ea typeface="Calibri"/>
-              </a:rPr>
-              <a:t>ет </a:t>
-            </a:r>
-            <a:r>
-              <a:rPr lang="en-US" sz="1200" b="0" i="1" u="none" strike="noStrike">
-                <a:solidFill>
-                  <a:srgbClr val="8FA0B8"/>
-                </a:solidFill>
-                <a:effectLst/>
-                <a:uFillTx/>
-                <a:latin typeface="Calibri"/>
-                <a:ea typeface="Calibri"/>
-              </a:rPr>
-              <a:t>информа</a:t>
-            </a:r>
-            <a:r>
-              <a:rPr lang="en-US" sz="1200" b="0" i="1" u="none" strike="noStrike">
-                <a:solidFill>
-                  <a:srgbClr val="8FA0B8"/>
-                </a:solidFill>
-                <a:effectLst/>
-                <a:uFillTx/>
-                <a:latin typeface="Calibri"/>
-                <a:ea typeface="Calibri"/>
-              </a:rPr>
-              <a:t>ционных </a:t>
-            </a:r>
-            <a:r>
-              <a:rPr lang="en-US" sz="1200" b="0" i="1" u="none" strike="noStrike">
-                <a:solidFill>
-                  <a:srgbClr val="8FA0B8"/>
-                </a:solidFill>
-                <a:effectLst/>
-                <a:uFillTx/>
-                <a:latin typeface="Calibri"/>
-                <a:ea typeface="Calibri"/>
-              </a:rPr>
-              <a:t>технолог</a:t>
-            </a:r>
-            <a:r>
-              <a:rPr lang="en-US" sz="1200" b="0" i="1" u="none" strike="noStrike">
-                <a:solidFill>
-                  <a:srgbClr val="8FA0B8"/>
-                </a:solidFill>
-                <a:effectLst/>
-                <a:uFillTx/>
-                <a:latin typeface="Calibri"/>
-                <a:ea typeface="Calibri"/>
-              </a:rPr>
-              <a:t>ий, </a:t>
-            </a:r>
-            <a:r>
-              <a:rPr lang="en-US" sz="1200" b="0" i="1" u="none" strike="noStrike">
-                <a:solidFill>
-                  <a:srgbClr val="8FA0B8"/>
-                </a:solidFill>
-                <a:effectLst/>
-                <a:uFillTx/>
-                <a:latin typeface="Calibri"/>
-                <a:ea typeface="Calibri"/>
-              </a:rPr>
-              <a:t>матема</a:t>
-            </a:r>
-            <a:r>
-              <a:rPr lang="en-US" sz="1200" b="0" i="1" u="none" strike="noStrike">
-                <a:solidFill>
-                  <a:srgbClr val="8FA0B8"/>
-                </a:solidFill>
-                <a:effectLst/>
-                <a:uFillTx/>
-                <a:latin typeface="Calibri"/>
-                <a:ea typeface="Calibri"/>
-              </a:rPr>
-              <a:t>тики и </a:t>
-            </a:r>
-            <a:r>
-              <a:rPr lang="en-US" sz="1200" b="0" i="1" u="none" strike="noStrike">
-                <a:solidFill>
-                  <a:srgbClr val="8FA0B8"/>
-                </a:solidFill>
-                <a:effectLst/>
-                <a:uFillTx/>
-                <a:latin typeface="Calibri"/>
-                <a:ea typeface="Calibri"/>
-              </a:rPr>
-              <a:t>физики</a:t>
+              <a:t>Факультет информационных технологий, математики и физики</a:t>
             </a:r>
             <a:endParaRPr lang="en-US" sz="1200" b="0" u="none" strike="noStrike">
               <a:solidFill>
@@ -6345,7 +6101,7 @@
         <p:spPr>
           <a:xfrm>
             <a:off x="457200" y="1691640"/>
-            <a:ext cx="11273760" cy="456480"/>
+            <a:ext cx="11273400" cy="456120"/>
           </a:xfrm>
           <a:prstGeom prst="rect">
             <a:avLst/>
@@ -6384,21 +6140,70 @@
                 <a:latin typeface="Calibri"/>
                 <a:ea typeface="Calibri"/>
               </a:rPr>
-              <a:t>КУРСОВАЯ </a:t>
-            </a:r>
-            <a:r>
-              <a:rPr lang="en-US" sz="1800" b="1" u="none" spc="400" strike="noStrike">
-                <a:solidFill>
-                  <a:srgbClr val="FF8C42"/>
+              <a:t>КУРСОВАЯ РАБОТА</a:t>
+            </a:r>
+            <a:endParaRPr lang="en-US" sz="1800" b="0" u="none" strike="noStrike">
+              <a:solidFill>
+                <a:srgbClr val="FFFFFF"/>
+              </a:solidFill>
+              <a:effectLst/>
+              <a:uFillTx/>
+              <a:latin typeface="Arial"/>
+            </a:endParaRPr>
+          </a:p>
+        </p:txBody>
+      </p:sp>
+      <p:sp>
+        <p:nvSpPr>
+          <p:cNvPr id="14" name="Text 4"/>
+          <p:cNvSpPr/>
+          <p:nvPr/>
+        </p:nvSpPr>
+        <p:spPr>
+          <a:xfrm>
+            <a:off x="457200" y="2377440"/>
+            <a:ext cx="11273400" cy="639000"/>
+          </a:xfrm>
+          <a:prstGeom prst="rect">
+            <a:avLst/>
+          </a:prstGeom>
+          <a:noFill/>
+          <a:ln w="0">
+            <a:noFill/>
+          </a:ln>
+        </p:spPr>
+        <p:style>
+          <a:lnRef idx="0"/>
+          <a:fillRef idx="0"/>
+          <a:effectRef idx="0"/>
+          <a:fontRef idx="minor"/>
+        </p:style>
+        <p:txBody>
+          <a:bodyPr lIns="90000" tIns="45000" rIns="90000" bIns="45000" anchor="ctr">
+            <a:noAutofit/>
+          </a:bodyPr>
+          <a:p>
+            <a:pPr algn="ctr" defTabSz="914400">
+              <a:lnSpc>
+                <a:spcPct val="100000"/>
+              </a:lnSpc>
+              <a:tabLst>
+                <a:tab pos="0" algn="l"/>
+              </a:tabLst>
+            </a:pPr>
+            <a:r>
+              <a:rPr lang="en-US" sz="3600" b="1" u="none" strike="noStrike">
+                <a:solidFill>
+                  <a:srgbClr val="FFFFFF"/>
                 </a:solidFill>
                 <a:effectLst/>
                 <a:uFillTx/>
                 <a:latin typeface="Calibri"/>
                 <a:ea typeface="Calibri"/>
               </a:rPr>
-              <a:t>РАБОТА</a:t>
-            </a:r>
-            <a:endParaRPr lang="en-US" sz="1800" b="0" u="none" strike="noStrike">
+              <a:t>Использование нейрокомпьютерных систем</a:t>
+            </a:r>
+            <a:endParaRPr lang="en-US" sz="3600" b="0" u="none" strike="noStrike">
               <a:solidFill>
                 <a:srgbClr val="FFFFFF"/>
               </a:solidFill>
@@ -6411,14 +6216,14 @@
       </p:sp>
       <p:sp>
         <p:nvSpPr>
-          <p:cNvPr id="14" name="Text 4"/>
-          <p:cNvSpPr/>
-          <p:nvPr/>
-        </p:nvSpPr>
-        <p:spPr>
-          <a:xfrm>
-            <a:off x="457200" y="2377440"/>
-            <a:ext cx="11273760" cy="639360"/>
+          <p:cNvPr id="15" name="Text 5"/>
+          <p:cNvSpPr/>
+          <p:nvPr/>
+        </p:nvSpPr>
+        <p:spPr>
+          <a:xfrm>
+            <a:off x="457200" y="3017520"/>
+            <a:ext cx="11273400" cy="639000"/>
           </a:xfrm>
           <a:prstGeom prst="rect">
             <a:avLst/>
@@ -6457,223 +6262,7 @@
                 <a:latin typeface="Calibri"/>
                 <a:ea typeface="Calibri"/>
               </a:rPr>
-              <a:t>Ис</a:t>
-            </a:r>
-            <a:r>
-              <a:rPr lang="en-US" sz="3600" b="1" u="none" strike="noStrike">
-                <a:solidFill>
-                  <a:srgbClr val="FFFFFF"/>
-                </a:solidFill>
-                <a:effectLst/>
-                <a:uFillTx/>
-                <a:latin typeface="Calibri"/>
-                <a:ea typeface="Calibri"/>
-              </a:rPr>
-              <a:t>по</a:t>
-            </a:r>
-            <a:r>
-              <a:rPr lang="en-US" sz="3600" b="1" u="none" strike="noStrike">
-                <a:solidFill>
-                  <a:srgbClr val="FFFFFF"/>
-                </a:solidFill>
-                <a:effectLst/>
-                <a:uFillTx/>
-                <a:latin typeface="Calibri"/>
-                <a:ea typeface="Calibri"/>
-              </a:rPr>
-              <a:t>ль</a:t>
-            </a:r>
-            <a:r>
-              <a:rPr lang="en-US" sz="3600" b="1" u="none" strike="noStrike">
-                <a:solidFill>
-                  <a:srgbClr val="FFFFFF"/>
-                </a:solidFill>
-                <a:effectLst/>
-                <a:uFillTx/>
-                <a:latin typeface="Calibri"/>
-                <a:ea typeface="Calibri"/>
-              </a:rPr>
-              <a:t>зо</a:t>
-            </a:r>
-            <a:r>
-              <a:rPr lang="en-US" sz="3600" b="1" u="none" strike="noStrike">
-                <a:solidFill>
-                  <a:srgbClr val="FFFFFF"/>
-                </a:solidFill>
-                <a:effectLst/>
-                <a:uFillTx/>
-                <a:latin typeface="Calibri"/>
-                <a:ea typeface="Calibri"/>
-              </a:rPr>
-              <a:t>ва</a:t>
-            </a:r>
-            <a:r>
-              <a:rPr lang="en-US" sz="3600" b="1" u="none" strike="noStrike">
-                <a:solidFill>
-                  <a:srgbClr val="FFFFFF"/>
-                </a:solidFill>
-                <a:effectLst/>
-                <a:uFillTx/>
-                <a:latin typeface="Calibri"/>
-                <a:ea typeface="Calibri"/>
-              </a:rPr>
-              <a:t>ни</a:t>
-            </a:r>
-            <a:r>
-              <a:rPr lang="en-US" sz="3600" b="1" u="none" strike="noStrike">
-                <a:solidFill>
-                  <a:srgbClr val="FFFFFF"/>
-                </a:solidFill>
-                <a:effectLst/>
-                <a:uFillTx/>
-                <a:latin typeface="Calibri"/>
-                <a:ea typeface="Calibri"/>
-              </a:rPr>
-              <a:t>е </a:t>
-            </a:r>
-            <a:r>
-              <a:rPr lang="en-US" sz="3600" b="1" u="none" strike="noStrike">
-                <a:solidFill>
-                  <a:srgbClr val="FFFFFF"/>
-                </a:solidFill>
-                <a:effectLst/>
-                <a:uFillTx/>
-                <a:latin typeface="Calibri"/>
-                <a:ea typeface="Calibri"/>
-              </a:rPr>
-              <a:t>не</a:t>
-            </a:r>
-            <a:r>
-              <a:rPr lang="en-US" sz="3600" b="1" u="none" strike="noStrike">
-                <a:solidFill>
-                  <a:srgbClr val="FFFFFF"/>
-                </a:solidFill>
-                <a:effectLst/>
-                <a:uFillTx/>
-                <a:latin typeface="Calibri"/>
-                <a:ea typeface="Calibri"/>
-              </a:rPr>
-              <a:t>йр</a:t>
-            </a:r>
-            <a:r>
-              <a:rPr lang="en-US" sz="3600" b="1" u="none" strike="noStrike">
-                <a:solidFill>
-                  <a:srgbClr val="FFFFFF"/>
-                </a:solidFill>
-                <a:effectLst/>
-                <a:uFillTx/>
-                <a:latin typeface="Calibri"/>
-                <a:ea typeface="Calibri"/>
-              </a:rPr>
-              <a:t>ок</a:t>
-            </a:r>
-            <a:r>
-              <a:rPr lang="en-US" sz="3600" b="1" u="none" strike="noStrike">
-                <a:solidFill>
-                  <a:srgbClr val="FFFFFF"/>
-                </a:solidFill>
-                <a:effectLst/>
-                <a:uFillTx/>
-                <a:latin typeface="Calibri"/>
-                <a:ea typeface="Calibri"/>
-              </a:rPr>
-              <a:t>ом</a:t>
-            </a:r>
-            <a:r>
-              <a:rPr lang="en-US" sz="3600" b="1" u="none" strike="noStrike">
-                <a:solidFill>
-                  <a:srgbClr val="FFFFFF"/>
-                </a:solidFill>
-                <a:effectLst/>
-                <a:uFillTx/>
-                <a:latin typeface="Calibri"/>
-                <a:ea typeface="Calibri"/>
-              </a:rPr>
-              <a:t>пь</a:t>
-            </a:r>
-            <a:r>
-              <a:rPr lang="en-US" sz="3600" b="1" u="none" strike="noStrike">
-                <a:solidFill>
-                  <a:srgbClr val="FFFFFF"/>
-                </a:solidFill>
-                <a:effectLst/>
-                <a:uFillTx/>
-                <a:latin typeface="Calibri"/>
-                <a:ea typeface="Calibri"/>
-              </a:rPr>
-              <a:t>ют</a:t>
-            </a:r>
-            <a:r>
-              <a:rPr lang="en-US" sz="3600" b="1" u="none" strike="noStrike">
-                <a:solidFill>
-                  <a:srgbClr val="FFFFFF"/>
-                </a:solidFill>
-                <a:effectLst/>
-                <a:uFillTx/>
-                <a:latin typeface="Calibri"/>
-                <a:ea typeface="Calibri"/>
-              </a:rPr>
-              <a:t>ер</a:t>
-            </a:r>
-            <a:r>
-              <a:rPr lang="en-US" sz="3600" b="1" u="none" strike="noStrike">
-                <a:solidFill>
-                  <a:srgbClr val="FFFFFF"/>
-                </a:solidFill>
-                <a:effectLst/>
-                <a:uFillTx/>
-                <a:latin typeface="Calibri"/>
-                <a:ea typeface="Calibri"/>
-              </a:rPr>
-              <a:t>ны</a:t>
-            </a:r>
-            <a:r>
-              <a:rPr lang="en-US" sz="3600" b="1" u="none" strike="noStrike">
-                <a:solidFill>
-                  <a:srgbClr val="FFFFFF"/>
-                </a:solidFill>
-                <a:effectLst/>
-                <a:uFillTx/>
-                <a:latin typeface="Calibri"/>
-                <a:ea typeface="Calibri"/>
-              </a:rPr>
-              <a:t>х </a:t>
-            </a:r>
-            <a:r>
-              <a:rPr lang="en-US" sz="3600" b="1" u="none" strike="noStrike">
-                <a:solidFill>
-                  <a:srgbClr val="FFFFFF"/>
-                </a:solidFill>
-                <a:effectLst/>
-                <a:uFillTx/>
-                <a:latin typeface="Calibri"/>
-                <a:ea typeface="Calibri"/>
-              </a:rPr>
-              <a:t>сис</a:t>
-            </a:r>
-            <a:r>
-              <a:rPr lang="en-US" sz="3600" b="1" u="none" strike="noStrike">
-                <a:solidFill>
-                  <a:srgbClr val="FFFFFF"/>
-                </a:solidFill>
-                <a:effectLst/>
-                <a:uFillTx/>
-                <a:latin typeface="Calibri"/>
-                <a:ea typeface="Calibri"/>
-              </a:rPr>
-              <a:t>те</a:t>
-            </a:r>
-            <a:r>
-              <a:rPr lang="en-US" sz="3600" b="1" u="none" strike="noStrike">
-                <a:solidFill>
-                  <a:srgbClr val="FFFFFF"/>
-                </a:solidFill>
-                <a:effectLst/>
-                <a:uFillTx/>
-                <a:latin typeface="Calibri"/>
-                <a:ea typeface="Calibri"/>
-              </a:rPr>
-              <a:t>м</a:t>
+              <a:t>для предсказания климатических изменений</a:t>
             </a:r>
             <a:endParaRPr lang="en-US" sz="3600" b="0" u="none" strike="noStrike">
               <a:solidFill>
@@ -6688,67 +6277,6 @@
       </p:sp>
       <p:sp>
         <p:nvSpPr>
-          <p:cNvPr id="15" name="Text 5"/>
-          <p:cNvSpPr/>
-          <p:nvPr/>
-        </p:nvSpPr>
-        <p:spPr>
-          <a:xfrm>
-            <a:off x="457200" y="3017520"/>
-            <a:ext cx="11273760" cy="639360"/>
-          </a:xfrm>
-          <a:prstGeom prst="rect">
-            <a:avLst/>
-          </a:prstGeom>
-          <a:noFill/>
-          <a:ln w="0">
-            <a:noFill/>
-          </a:ln>
-        </p:spPr>
-        <p:style>
-          <a:lnRef idx="0"/>
-          <a:fillRef idx="0"/>
-          <a:effectRef idx="0"/>
-          <a:fontRef idx="minor"/>
-        </p:style>
-        <p:txBody>
-          <a:bodyPr lIns="90000" tIns="45000" rIns="90000" bIns="45000" anchor="ctr">
-            <a:noAutofit/>
-          </a:bodyPr>
-          <a:p>
-            <a:pPr algn="ctr" defTabSz="914400">
-              <a:lnSpc>
-                <a:spcPct val="100000"/>
-              </a:lnSpc>
-              <a:tabLst>
-                <a:tab pos="0" algn="l"/>
-              </a:tabLst>
-            </a:pPr>
-            <a:r>
-              <a:rPr lang="en-US" sz="3600" b="1" u="none" strike="noStrike">
-                <a:solidFill>
-                  <a:srgbClr val="FFFFFF"/>
-                </a:solidFill>
-                <a:effectLst/>
-                <a:uFillTx/>
-                <a:latin typeface="Calibri"/>
-                <a:ea typeface="Calibri"/>
-              </a:rPr>
-              <a:t>для предсказания климатических изменений</a:t>
-            </a:r>
-            <a:endParaRPr lang="en-US" sz="3600" b="0" u="none" strike="noStrike">
-              <a:solidFill>
-                <a:srgbClr val="FFFFFF"/>
-              </a:solidFill>
-              <a:effectLst/>
-              <a:uFillTx/>
-              <a:latin typeface="Arial"/>
-            </a:endParaRPr>
-          </a:p>
-        </p:txBody>
-      </p:sp>
-      <p:sp>
-        <p:nvSpPr>
           <p:cNvPr id="16" name="Text 6"/>
           <p:cNvSpPr/>
           <p:nvPr/>
@@ -6756,7 +6284,7 @@
         <p:spPr>
           <a:xfrm>
             <a:off x="457200" y="3886200"/>
-            <a:ext cx="11273760" cy="365040"/>
+            <a:ext cx="11273400" cy="364680"/>
           </a:xfrm>
           <a:prstGeom prst="rect">
             <a:avLst/>
@@ -6860,7 +6388,7 @@
         <p:spPr>
           <a:xfrm>
             <a:off x="1371600" y="4937760"/>
-            <a:ext cx="3656880" cy="273600"/>
+            <a:ext cx="3656520" cy="273240"/>
           </a:xfrm>
           <a:prstGeom prst="rect">
             <a:avLst/>
@@ -6921,7 +6449,7 @@
         <p:spPr>
           <a:xfrm>
             <a:off x="1371600" y="5212080"/>
-            <a:ext cx="4114080" cy="913680"/>
+            <a:ext cx="4113720" cy="913320"/>
           </a:xfrm>
           <a:prstGeom prst="rect">
             <a:avLst/>
@@ -6960,8 +6488,148 @@
                 <a:latin typeface="Calibri"/>
                 <a:ea typeface="Calibri"/>
               </a:rPr>
-              <a:t>Деменков Иван </a:t>
-            </a:r>
+              <a:t>Деменков Иван Михайлович</a:t>
+            </a:r>
+            <a:endParaRPr lang="en-US" sz="1500" b="0" u="none" strike="noStrike">
+              <a:solidFill>
+                <a:srgbClr val="FFFFFF"/>
+              </a:solidFill>
+              <a:effectLst/>
+              <a:uFillTx/>
+              <a:latin typeface="Arial"/>
+            </a:endParaRPr>
+          </a:p>
+          <a:p>
+            <a:pPr defTabSz="914400">
+              <a:lnSpc>
+                <a:spcPct val="100000"/>
+              </a:lnSpc>
+              <a:tabLst>
+                <a:tab pos="0" algn="l"/>
+              </a:tabLst>
+            </a:pPr>
+            <a:r>
+              <a:rPr lang="en-US" sz="1300" b="0" u="none" strike="noStrike">
+                <a:solidFill>
+                  <a:srgbClr val="FFFFFF"/>
+                </a:solidFill>
+                <a:effectLst/>
+                <a:uFillTx/>
+                <a:latin typeface="Calibri"/>
+                <a:ea typeface="Calibri"/>
+              </a:rPr>
+              <a:t>1 курс, группа 12-25 РПмз</a:t>
+            </a:r>
+            <a:endParaRPr lang="en-US" sz="1300" b="0" u="none" strike="noStrike">
+              <a:solidFill>
+                <a:srgbClr val="FFFFFF"/>
+              </a:solidFill>
+              <a:effectLst/>
+              <a:uFillTx/>
+              <a:latin typeface="Arial"/>
+            </a:endParaRPr>
+          </a:p>
+        </p:txBody>
+      </p:sp>
+      <p:sp>
+        <p:nvSpPr>
+          <p:cNvPr id="20" name="Text 10"/>
+          <p:cNvSpPr/>
+          <p:nvPr/>
+        </p:nvSpPr>
+        <p:spPr>
+          <a:xfrm>
+            <a:off x="6858000" y="4937760"/>
+            <a:ext cx="3656520" cy="273240"/>
+          </a:xfrm>
+          <a:prstGeom prst="rect">
+            <a:avLst/>
+          </a:prstGeom>
+          <a:noFill/>
+          <a:ln w="0">
+            <a:noFill/>
+          </a:ln>
+        </p:spPr>
+        <p:style>
+          <a:lnRef idx="0"/>
+          <a:fillRef idx="0"/>
+          <a:effectRef idx="0"/>
+          <a:fontRef idx="minor"/>
+        </p:style>
+        <p:txBody>
+          <a:bodyPr lIns="90000" tIns="45000" rIns="90000" bIns="45000" anchor="ctr">
+            <a:noAutofit/>
+          </a:bodyPr>
+          <a:p>
+            <a:pPr defTabSz="914400">
+              <a:lnSpc>
+                <a:spcPct val="100000"/>
+              </a:lnSpc>
+              <a:tabLst>
+                <a:tab pos="0" algn="l"/>
+              </a:tabLst>
+            </a:pPr>
+            <a:r>
+              <a:rPr lang="en-US" sz="1000" b="1" u="none" spc="300" strike="noStrike">
+                <a:solidFill>
+                  <a:srgbClr val="8FA0B8"/>
+                </a:solidFill>
+                <a:effectLst/>
+                <a:uFillTx/>
+                <a:latin typeface="Calibri"/>
+                <a:ea typeface="Calibri"/>
+              </a:rPr>
+              <a:t>НАУЧНЫЙ РУКОВОДИТЕЛЬ</a:t>
+            </a:r>
+            <a:endParaRPr lang="en-US" sz="1000" b="0" u="none" strike="noStrike">
+              <a:solidFill>
+                <a:srgbClr val="FFFFFF"/>
+              </a:solidFill>
+              <a:effectLst/>
+              <a:uFillTx/>
+              <a:latin typeface="Arial"/>
+            </a:endParaRPr>
+          </a:p>
+        </p:txBody>
+      </p:sp>
+      <p:sp>
+        <p:nvSpPr>
+          <p:cNvPr id="21" name="Text 11"/>
+          <p:cNvSpPr/>
+          <p:nvPr/>
+        </p:nvSpPr>
+        <p:spPr>
+          <a:xfrm>
+            <a:off x="6858000" y="5212080"/>
+            <a:ext cx="4570920" cy="913320"/>
+          </a:xfrm>
+          <a:prstGeom prst="rect">
+            <a:avLst/>
+          </a:prstGeom>
+          <a:noFill/>
+          <a:ln w="0">
+            <a:noFill/>
+          </a:ln>
+        </p:spPr>
+        <p:style>
+          <a:lnRef idx="0"/>
+          <a:fillRef idx="0"/>
+          <a:effectRef idx="0"/>
+          <a:fontRef idx="minor"/>
+        </p:style>
+        <p:txBody>
+          <a:bodyPr lIns="90000" tIns="45000" rIns="90000" bIns="45000" anchor="t">
+            <a:noAutofit/>
+          </a:bodyPr>
+          <a:p>
+            <a:pPr defTabSz="914400">
+              <a:lnSpc>
+                <a:spcPct val="100000"/>
+              </a:lnSpc>
+              <a:tabLst>
+                <a:tab pos="0" algn="l"/>
+              </a:tabLst>
+            </a:pPr>
             <a:r>
               <a:rPr lang="en-US" sz="1500" b="1" u="none" strike="noStrike">
                 <a:solidFill>
@@ -6972,7 +6640,7 @@
                 <a:latin typeface="Calibri"/>
                 <a:ea typeface="Calibri"/>
               </a:rPr>
-              <a:t>Михайлович</a:t>
+              <a:t>профессор Круглый Дмитрий Георгиевич</a:t>
             </a:r>
             <a:endParaRPr lang="en-US" sz="1500" b="0" u="none" strike="noStrike">
               <a:solidFill>
@@ -7002,19 +6670,7 @@
                 <a:latin typeface="Calibri"/>
                 <a:ea typeface="Calibri"/>
               </a:rPr>
-              <a:t>1 курс, группа 12-25 </a:t>
-            </a:r>
-            <a:r>
-              <a:rPr lang="en-US" sz="1300" b="0" u="none" strike="noStrike">
-                <a:solidFill>
-                  <a:srgbClr val="FFFFFF"/>
-                </a:solidFill>
-                <a:effectLst/>
-                <a:uFillTx/>
-                <a:latin typeface="Calibri"/>
-                <a:ea typeface="Calibri"/>
-              </a:rPr>
-              <a:t>РПмз</a:t>
+              <a:t>Кафедра физики и программной инженерии</a:t>
             </a:r>
             <a:endParaRPr lang="en-US" sz="1300" b="0" u="none" strike="noStrike">
               <a:solidFill>
@@ -7029,218 +6685,6 @@
       </p:sp>
       <p:sp>
         <p:nvSpPr>
-          <p:cNvPr id="20" name="Text 10"/>
-          <p:cNvSpPr/>
-          <p:nvPr/>
-        </p:nvSpPr>
-        <p:spPr>
-          <a:xfrm>
-            <a:off x="6858000" y="4937760"/>
-            <a:ext cx="3656880" cy="273600"/>
-          </a:xfrm>
-          <a:prstGeom prst="rect">
-            <a:avLst/>
-          </a:prstGeom>
-          <a:noFill/>
-          <a:ln w="0">
-            <a:noFill/>
-          </a:ln>
-        </p:spPr>
-        <p:style>
-          <a:lnRef idx="0"/>
-          <a:fillRef idx="0"/>
-          <a:effectRef idx="0"/>
-          <a:fontRef idx="minor"/>
-        </p:style>
-        <p:txBody>
-          <a:bodyPr lIns="90000" tIns="45000" rIns="90000" bIns="45000" anchor="ctr">
-            <a:noAutofit/>
-          </a:bodyPr>
-          <a:p>
-            <a:pPr defTabSz="914400">
-              <a:lnSpc>
-                <a:spcPct val="100000"/>
-              </a:lnSpc>
-              <a:tabLst>
-                <a:tab pos="0" algn="l"/>
-              </a:tabLst>
-            </a:pPr>
-            <a:r>
-              <a:rPr lang="en-US" sz="1000" b="1" u="none" spc="300" strike="noStrike">
-                <a:solidFill>
-                  <a:srgbClr val="8FA0B8"/>
-                </a:solidFill>
-                <a:effectLst/>
-                <a:uFillTx/>
-                <a:latin typeface="Calibri"/>
-                <a:ea typeface="Calibri"/>
-              </a:rPr>
-              <a:t>НАУЧНЫЙ </a:t>
-            </a:r>
-            <a:r>
-              <a:rPr lang="en-US" sz="1000" b="1" u="none" spc="300" strike="noStrike">
-                <a:solidFill>
-                  <a:srgbClr val="8FA0B8"/>
-                </a:solidFill>
-                <a:effectLst/>
-                <a:uFillTx/>
-                <a:latin typeface="Calibri"/>
-                <a:ea typeface="Calibri"/>
-              </a:rPr>
-              <a:t>РУКОВОДИТЕЛЬ</a:t>
-            </a:r>
-            <a:endParaRPr lang="en-US" sz="1000" b="0" u="none" strike="noStrike">
-              <a:solidFill>
-                <a:srgbClr val="FFFFFF"/>
-              </a:solidFill>
-              <a:effectLst/>
-              <a:uFillTx/>
-              <a:latin typeface="Arial"/>
-            </a:endParaRPr>
-          </a:p>
-        </p:txBody>
-      </p:sp>
-      <p:sp>
-        <p:nvSpPr>
-          <p:cNvPr id="21" name="Text 11"/>
-          <p:cNvSpPr/>
-          <p:nvPr/>
-        </p:nvSpPr>
-        <p:spPr>
-          <a:xfrm>
-            <a:off x="6858000" y="5212080"/>
-            <a:ext cx="4571280" cy="913680"/>
-          </a:xfrm>
-          <a:prstGeom prst="rect">
-            <a:avLst/>
-          </a:prstGeom>
-          <a:noFill/>
-          <a:ln w="0">
-            <a:noFill/>
-          </a:ln>
-        </p:spPr>
-        <p:style>
-          <a:lnRef idx="0"/>
-          <a:fillRef idx="0"/>
-          <a:effectRef idx="0"/>
-          <a:fontRef idx="minor"/>
-        </p:style>
-        <p:txBody>
-          <a:bodyPr lIns="90000" tIns="45000" rIns="90000" bIns="45000" anchor="t">
-            <a:noAutofit/>
-          </a:bodyPr>
-          <a:p>
-            <a:pPr defTabSz="914400">
-              <a:lnSpc>
-                <a:spcPct val="100000"/>
-              </a:lnSpc>
-              <a:tabLst>
-                <a:tab pos="0" algn="l"/>
-              </a:tabLst>
-            </a:pPr>
-            <a:r>
-              <a:rPr lang="en-US" sz="1500" b="1" u="none" strike="noStrike">
-                <a:solidFill>
-                  <a:srgbClr val="FFFFFF"/>
-                </a:solidFill>
-                <a:effectLst/>
-                <a:uFillTx/>
-                <a:latin typeface="Calibri"/>
-                <a:ea typeface="Calibri"/>
-              </a:rPr>
-              <a:t>профессор Круглый </a:t>
-            </a:r>
-            <a:r>
-              <a:rPr lang="en-US" sz="1500" b="1" u="none" strike="noStrike">
-                <a:solidFill>
-                  <a:srgbClr val="FFFFFF"/>
-                </a:solidFill>
-                <a:effectLst/>
-                <a:uFillTx/>
-                <a:latin typeface="Calibri"/>
-                <a:ea typeface="Calibri"/>
-              </a:rPr>
-              <a:t>Дмитрий </a:t>
-            </a:r>
-            <a:r>
-              <a:rPr lang="en-US" sz="1500" b="1" u="none" strike="noStrike">
-                <a:solidFill>
-                  <a:srgbClr val="FFFFFF"/>
-                </a:solidFill>
-                <a:effectLst/>
-                <a:uFillTx/>
-                <a:latin typeface="Calibri"/>
-                <a:ea typeface="Calibri"/>
-              </a:rPr>
-              <a:t>Григорьевич</a:t>
-            </a:r>
-            <a:endParaRPr lang="en-US" sz="1500" b="0" u="none" strike="noStrike">
-              <a:solidFill>
-                <a:srgbClr val="FFFFFF"/>
-              </a:solidFill>
-              <a:effectLst/>
-              <a:uFillTx/>
-              <a:latin typeface="Arial"/>
-            </a:endParaRPr>
-          </a:p>
-          <a:p>
-            <a:pPr defTabSz="914400">
-              <a:lnSpc>
-                <a:spcPct val="100000"/>
-              </a:lnSpc>
-              <a:tabLst>
-                <a:tab pos="0" algn="l"/>
-              </a:tabLst>
-            </a:pPr>
-            <a:r>
-              <a:rPr lang="en-US" sz="1300" b="0" u="none" strike="noStrike">
-                <a:solidFill>
-                  <a:srgbClr val="FFFFFF"/>
-                </a:solidFill>
-                <a:effectLst/>
-                <a:uFillTx/>
-                <a:latin typeface="Calibri"/>
-                <a:ea typeface="Calibri"/>
-              </a:rPr>
-              <a:t>Кафедра физики и </a:t>
-            </a:r>
-            <a:r>
-              <a:rPr lang="en-US" sz="1300" b="0" u="none" strike="noStrike">
-                <a:solidFill>
-                  <a:srgbClr val="FFFFFF"/>
-                </a:solidFill>
-                <a:effectLst/>
-                <a:uFillTx/>
-                <a:latin typeface="Calibri"/>
-                <a:ea typeface="Calibri"/>
-              </a:rPr>
-              <a:t>программной </a:t>
-            </a:r>
-            <a:r>
-              <a:rPr lang="en-US" sz="1300" b="0" u="none" strike="noStrike">
-                <a:solidFill>
-                  <a:srgbClr val="FFFFFF"/>
-                </a:solidFill>
-                <a:effectLst/>
-                <a:uFillTx/>
-                <a:latin typeface="Calibri"/>
-                <a:ea typeface="Calibri"/>
-              </a:rPr>
-              <a:t>инженерии</a:t>
-            </a:r>
-            <a:endParaRPr lang="en-US" sz="1300" b="0" u="none" strike="noStrike">
-              <a:solidFill>
-                <a:srgbClr val="FFFFFF"/>
-              </a:solidFill>
-              <a:effectLst/>
-              <a:uFillTx/>
-              <a:latin typeface="Arial"/>
-            </a:endParaRPr>
-          </a:p>
-        </p:txBody>
-      </p:sp>
-      <p:sp>
-        <p:nvSpPr>
           <p:cNvPr id="22" name="Shape 12"/>
           <p:cNvSpPr/>
           <p:nvPr/>
@@ -7248,7 +6692,7 @@
         <p:spPr>
           <a:xfrm>
             <a:off x="0" y="6400800"/>
-            <a:ext cx="12188160" cy="456480"/>
+            <a:ext cx="12187800" cy="456120"/>
           </a:xfrm>
           <a:prstGeom prst="rect">
             <a:avLst/>
@@ -7291,7 +6735,7 @@
         <p:spPr>
           <a:xfrm>
             <a:off x="0" y="6400800"/>
-            <a:ext cx="12188160" cy="456480"/>
+            <a:ext cx="12187800" cy="456120"/>
           </a:xfrm>
           <a:prstGeom prst="rect">
             <a:avLst/>
@@ -7330,19 +6774,7 @@
                 <a:latin typeface="Calibri"/>
                 <a:ea typeface="Calibri"/>
               </a:rPr>
-              <a:t>Херсонская </a:t>
-            </a:r>
-            <a:r>
-              <a:rPr lang="en-US" sz="1200" b="0" u="none" spc="300" strike="noStrike">
-                <a:solidFill>
-                  <a:srgbClr val="B8C5D6"/>
-                </a:solidFill>
-                <a:effectLst/>
-                <a:uFillTx/>
-                <a:latin typeface="Calibri"/>
-                <a:ea typeface="Calibri"/>
-              </a:rPr>
-              <a:t>область · 2026</a:t>
+              <a:t>Херсонская область · 2026</a:t>
             </a:r>
             <a:endParaRPr lang="en-US" sz="1200" b="0" u="none" strike="noStrike">
               <a:solidFill>
@@ -7401,7 +6833,7 @@
         <p:spPr>
           <a:xfrm>
             <a:off x="457200" y="411480"/>
-            <a:ext cx="72360" cy="639360"/>
+            <a:ext cx="72000" cy="639000"/>
           </a:xfrm>
           <a:prstGeom prst="rect">
             <a:avLst/>
@@ -7420,7 +6852,7 @@
           <a:fontRef idx="minor"/>
         </p:style>
         <p:txBody>
-          <a:bodyPr lIns="36360" tIns="45000" rIns="36360" bIns="45000" anchor="t">
+          <a:bodyPr lIns="36000" tIns="45000" rIns="36000" bIns="45000" anchor="t">
             <a:noAutofit/>
           </a:bodyPr>
           <a:p>
@@ -7444,7 +6876,7 @@
         <p:spPr>
           <a:xfrm>
             <a:off x="685800" y="365760"/>
-            <a:ext cx="10816560" cy="593640"/>
+            <a:ext cx="10816200" cy="593280"/>
           </a:xfrm>
           <a:prstGeom prst="rect">
             <a:avLst/>
@@ -7505,7 +6937,7 @@
         <p:spPr>
           <a:xfrm>
             <a:off x="685800" y="960120"/>
-            <a:ext cx="10816560" cy="273600"/>
+            <a:ext cx="10816200" cy="273240"/>
           </a:xfrm>
           <a:prstGeom prst="rect">
             <a:avLst/>
@@ -7566,7 +6998,7 @@
         <p:spPr>
           <a:xfrm>
             <a:off x="640080" y="1554480"/>
-            <a:ext cx="3513600" cy="3382560"/>
+            <a:ext cx="3513240" cy="3382200"/>
           </a:xfrm>
           <a:prstGeom prst="rect">
             <a:avLst/>
@@ -7619,7 +7051,7 @@
         <p:spPr>
           <a:xfrm>
             <a:off x="640080" y="1554480"/>
-            <a:ext cx="3513600" cy="822240"/>
+            <a:ext cx="3513240" cy="821880"/>
           </a:xfrm>
           <a:prstGeom prst="rect">
             <a:avLst/>
@@ -7662,7 +7094,7 @@
         <p:spPr>
           <a:xfrm>
             <a:off x="640080" y="1600200"/>
-            <a:ext cx="3513600" cy="456480"/>
+            <a:ext cx="3513240" cy="456120"/>
           </a:xfrm>
           <a:prstGeom prst="rect">
             <a:avLst/>
@@ -7723,7 +7155,7 @@
         <p:spPr>
           <a:xfrm>
             <a:off x="640080" y="2011680"/>
-            <a:ext cx="3513600" cy="319320"/>
+            <a:ext cx="3513240" cy="318960"/>
           </a:xfrm>
           <a:prstGeom prst="rect">
             <a:avLst/>
@@ -7784,7 +7216,7 @@
         <p:spPr>
           <a:xfrm>
             <a:off x="822960" y="2606040"/>
-            <a:ext cx="3147840" cy="639360"/>
+            <a:ext cx="3147480" cy="639000"/>
           </a:xfrm>
           <a:prstGeom prst="rect">
             <a:avLst/>
@@ -7830,7 +7262,7 @@
         <p:spPr>
           <a:xfrm>
             <a:off x="822960" y="2606040"/>
-            <a:ext cx="3147840" cy="639360"/>
+            <a:ext cx="3147480" cy="639000"/>
           </a:xfrm>
           <a:prstGeom prst="rect">
             <a:avLst/>
@@ -7891,7 +7323,7 @@
         <p:spPr>
           <a:xfrm>
             <a:off x="822960" y="3383280"/>
-            <a:ext cx="3147840" cy="685080"/>
+            <a:ext cx="3147480" cy="684720"/>
           </a:xfrm>
           <a:prstGeom prst="rect">
             <a:avLst/>
@@ -7952,7 +7384,7 @@
         <p:spPr>
           <a:xfrm>
             <a:off x="822960" y="4297680"/>
-            <a:ext cx="3147840" cy="547920"/>
+            <a:ext cx="3147480" cy="547560"/>
           </a:xfrm>
           <a:prstGeom prst="rect">
             <a:avLst/>
@@ -8025,7 +7457,7 @@
         <p:spPr>
           <a:xfrm>
             <a:off x="4337280" y="1554480"/>
-            <a:ext cx="3513600" cy="3382560"/>
+            <a:ext cx="3513240" cy="3382200"/>
           </a:xfrm>
           <a:prstGeom prst="rect">
             <a:avLst/>
@@ -8078,7 +7510,7 @@
         <p:spPr>
           <a:xfrm>
             <a:off x="4337280" y="1554480"/>
-            <a:ext cx="3513600" cy="822240"/>
+            <a:ext cx="3513240" cy="821880"/>
           </a:xfrm>
           <a:prstGeom prst="rect">
             <a:avLst/>
@@ -8121,7 +7553,7 @@
         <p:spPr>
           <a:xfrm>
             <a:off x="4337280" y="1600200"/>
-            <a:ext cx="3513600" cy="456480"/>
+            <a:ext cx="3513240" cy="456120"/>
           </a:xfrm>
           <a:prstGeom prst="rect">
             <a:avLst/>
@@ -8182,7 +7614,7 @@
         <p:spPr>
           <a:xfrm>
             <a:off x="4337280" y="2011680"/>
-            <a:ext cx="3513600" cy="319320"/>
+            <a:ext cx="3513240" cy="318960"/>
           </a:xfrm>
           <a:prstGeom prst="rect">
             <a:avLst/>
@@ -8243,7 +7675,7 @@
         <p:spPr>
           <a:xfrm>
             <a:off x="4520160" y="2606040"/>
-            <a:ext cx="3147840" cy="639360"/>
+            <a:ext cx="3147480" cy="639000"/>
           </a:xfrm>
           <a:prstGeom prst="rect">
             <a:avLst/>
@@ -8289,7 +7721,7 @@
         <p:spPr>
           <a:xfrm>
             <a:off x="4520160" y="2606040"/>
-            <a:ext cx="3147840" cy="639360"/>
+            <a:ext cx="3147480" cy="639000"/>
           </a:xfrm>
           <a:prstGeom prst="rect">
             <a:avLst/>
@@ -8350,7 +7782,7 @@
         <p:spPr>
           <a:xfrm>
             <a:off x="4520160" y="3383280"/>
-            <a:ext cx="3147840" cy="685080"/>
+            <a:ext cx="3147480" cy="684720"/>
           </a:xfrm>
           <a:prstGeom prst="rect">
             <a:avLst/>
@@ -8411,7 +7843,7 @@
         <p:spPr>
           <a:xfrm>
             <a:off x="4520160" y="4297680"/>
-            <a:ext cx="3147840" cy="547920"/>
+            <a:ext cx="3147480" cy="547560"/>
           </a:xfrm>
           <a:prstGeom prst="rect">
             <a:avLst/>
@@ -8484,7 +7916,7 @@
         <p:spPr>
           <a:xfrm>
             <a:off x="8034480" y="1554480"/>
-            <a:ext cx="3513600" cy="3382560"/>
+            <a:ext cx="3513240" cy="3382200"/>
           </a:xfrm>
           <a:prstGeom prst="rect">
             <a:avLst/>
@@ -8537,7 +7969,7 @@
         <p:spPr>
           <a:xfrm>
             <a:off x="8034480" y="1554480"/>
-            <a:ext cx="3513600" cy="822240"/>
+            <a:ext cx="3513240" cy="821880"/>
           </a:xfrm>
           <a:prstGeom prst="rect">
             <a:avLst/>
@@ -8580,7 +8012,7 @@
         <p:spPr>
           <a:xfrm>
             <a:off x="8034480" y="1600200"/>
-            <a:ext cx="3513600" cy="456480"/>
+            <a:ext cx="3513240" cy="456120"/>
           </a:xfrm>
           <a:prstGeom prst="rect">
             <a:avLst/>
@@ -8641,7 +8073,7 @@
         <p:spPr>
           <a:xfrm>
             <a:off x="8034480" y="2011680"/>
-            <a:ext cx="3513600" cy="319320"/>
+            <a:ext cx="3513240" cy="318960"/>
           </a:xfrm>
           <a:prstGeom prst="rect">
             <a:avLst/>
@@ -8702,7 +8134,7 @@
         <p:spPr>
           <a:xfrm>
             <a:off x="8217360" y="2606040"/>
-            <a:ext cx="3147840" cy="639360"/>
+            <a:ext cx="3147480" cy="639000"/>
           </a:xfrm>
           <a:prstGeom prst="rect">
             <a:avLst/>
@@ -8748,7 +8180,7 @@
         <p:spPr>
           <a:xfrm>
             <a:off x="8217360" y="2606040"/>
-            <a:ext cx="3147840" cy="639360"/>
+            <a:ext cx="3147480" cy="639000"/>
           </a:xfrm>
           <a:prstGeom prst="rect">
             <a:avLst/>
@@ -8809,7 +8241,7 @@
         <p:spPr>
           <a:xfrm>
             <a:off x="8217360" y="3383280"/>
-            <a:ext cx="3147840" cy="685080"/>
+            <a:ext cx="3147480" cy="684720"/>
           </a:xfrm>
           <a:prstGeom prst="rect">
             <a:avLst/>
@@ -8870,7 +8302,7 @@
         <p:spPr>
           <a:xfrm>
             <a:off x="8217360" y="4297680"/>
-            <a:ext cx="3147840" cy="547920"/>
+            <a:ext cx="3147480" cy="547560"/>
           </a:xfrm>
           <a:prstGeom prst="rect">
             <a:avLst/>
@@ -8943,7 +8375,7 @@
         <p:spPr>
           <a:xfrm>
             <a:off x="640080" y="5212080"/>
-            <a:ext cx="10908000" cy="1142280"/>
+            <a:ext cx="10907640" cy="1141920"/>
           </a:xfrm>
           <a:prstGeom prst="rect">
             <a:avLst/>
@@ -8986,7 +8418,7 @@
         <p:spPr>
           <a:xfrm>
             <a:off x="868680" y="5349240"/>
-            <a:ext cx="1370880" cy="273600"/>
+            <a:ext cx="1370520" cy="273240"/>
           </a:xfrm>
           <a:prstGeom prst="rect">
             <a:avLst/>
@@ -9047,7 +8479,7 @@
         <p:spPr>
           <a:xfrm>
             <a:off x="868680" y="5623560"/>
-            <a:ext cx="10450800" cy="685080"/>
+            <a:ext cx="10450440" cy="684720"/>
           </a:xfrm>
           <a:prstGeom prst="rect">
             <a:avLst/>
@@ -9120,7 +8552,7 @@
         <p:spPr>
           <a:xfrm>
             <a:off x="0" y="6537960"/>
-            <a:ext cx="12188160" cy="319320"/>
+            <a:ext cx="12187800" cy="318960"/>
           </a:xfrm>
           <a:prstGeom prst="rect">
             <a:avLst/>
@@ -9163,7 +8595,7 @@
         <p:spPr>
           <a:xfrm>
             <a:off x="365760" y="6565320"/>
-            <a:ext cx="8228880" cy="273600"/>
+            <a:ext cx="8228520" cy="273240"/>
           </a:xfrm>
           <a:prstGeom prst="rect">
             <a:avLst/>
@@ -9224,7 +8656,7 @@
         <p:spPr>
           <a:xfrm>
             <a:off x="10908720" y="6565320"/>
-            <a:ext cx="913680" cy="273600"/>
+            <a:ext cx="913320" cy="273240"/>
           </a:xfrm>
           <a:prstGeom prst="rect">
             <a:avLst/>
@@ -9322,7 +8754,7 @@
         <p:spPr>
           <a:xfrm>
             <a:off x="457200" y="411480"/>
-            <a:ext cx="72360" cy="639360"/>
+            <a:ext cx="72000" cy="639000"/>
           </a:xfrm>
           <a:prstGeom prst="rect">
             <a:avLst/>
@@ -9341,7 +8773,7 @@
           <a:fontRef idx="minor"/>
         </p:style>
         <p:txBody>
-          <a:bodyPr lIns="36360" tIns="45000" rIns="36360" bIns="45000" anchor="t">
+          <a:bodyPr lIns="36000" tIns="45000" rIns="36000" bIns="45000" anchor="t">
             <a:noAutofit/>
           </a:bodyPr>
           <a:p>
@@ -9365,7 +8797,7 @@
         <p:spPr>
           <a:xfrm>
             <a:off x="685800" y="365760"/>
-            <a:ext cx="10816560" cy="593640"/>
+            <a:ext cx="10816200" cy="593280"/>
           </a:xfrm>
           <a:prstGeom prst="rect">
             <a:avLst/>
@@ -9426,7 +8858,7 @@
         <p:spPr>
           <a:xfrm>
             <a:off x="685800" y="960120"/>
-            <a:ext cx="10816560" cy="273600"/>
+            <a:ext cx="10816200" cy="273240"/>
           </a:xfrm>
           <a:prstGeom prst="rect">
             <a:avLst/>
@@ -9487,7 +8919,7 @@
         <p:spPr>
           <a:xfrm>
             <a:off x="640080" y="1554480"/>
-            <a:ext cx="5485680" cy="4754160"/>
+            <a:ext cx="5485320" cy="4753800"/>
           </a:xfrm>
           <a:prstGeom prst="rect">
             <a:avLst/>
@@ -9540,7 +8972,7 @@
         <p:spPr>
           <a:xfrm>
             <a:off x="640080" y="1554480"/>
-            <a:ext cx="5485680" cy="593640"/>
+            <a:ext cx="5485320" cy="593280"/>
           </a:xfrm>
           <a:prstGeom prst="rect">
             <a:avLst/>
@@ -9583,7 +9015,7 @@
         <p:spPr>
           <a:xfrm>
             <a:off x="640080" y="1554480"/>
-            <a:ext cx="5485680" cy="593640"/>
+            <a:ext cx="5485320" cy="593280"/>
           </a:xfrm>
           <a:prstGeom prst="rect">
             <a:avLst/>
@@ -9644,7 +9076,7 @@
         <p:spPr>
           <a:xfrm>
             <a:off x="868680" y="2331720"/>
-            <a:ext cx="5119920" cy="776520"/>
+            <a:ext cx="5119560" cy="776160"/>
           </a:xfrm>
           <a:prstGeom prst="rect">
             <a:avLst/>
@@ -9747,7 +9179,7 @@
         <p:spPr>
           <a:xfrm>
             <a:off x="868680" y="3108960"/>
-            <a:ext cx="5119920" cy="776520"/>
+            <a:ext cx="5119560" cy="776160"/>
           </a:xfrm>
           <a:prstGeom prst="rect">
             <a:avLst/>
@@ -9850,7 +9282,7 @@
         <p:spPr>
           <a:xfrm>
             <a:off x="868680" y="3886200"/>
-            <a:ext cx="5119920" cy="776520"/>
+            <a:ext cx="5119560" cy="776160"/>
           </a:xfrm>
           <a:prstGeom prst="rect">
             <a:avLst/>
@@ -9953,7 +9385,7 @@
         <p:spPr>
           <a:xfrm>
             <a:off x="868680" y="4663440"/>
-            <a:ext cx="5119920" cy="776520"/>
+            <a:ext cx="5119560" cy="776160"/>
           </a:xfrm>
           <a:prstGeom prst="rect">
             <a:avLst/>
@@ -10056,7 +9488,7 @@
         <p:spPr>
           <a:xfrm>
             <a:off x="868680" y="5440680"/>
-            <a:ext cx="5119920" cy="776520"/>
+            <a:ext cx="5119560" cy="776160"/>
           </a:xfrm>
           <a:prstGeom prst="rect">
             <a:avLst/>
@@ -10159,7 +9591,7 @@
         <p:spPr>
           <a:xfrm>
             <a:off x="6309360" y="1554480"/>
-            <a:ext cx="5238720" cy="4754160"/>
+            <a:ext cx="5238360" cy="4753800"/>
           </a:xfrm>
           <a:prstGeom prst="rect">
             <a:avLst/>
@@ -10212,7 +9644,7 @@
         <p:spPr>
           <a:xfrm>
             <a:off x="6309360" y="1554480"/>
-            <a:ext cx="5238720" cy="593640"/>
+            <a:ext cx="5238360" cy="593280"/>
           </a:xfrm>
           <a:prstGeom prst="rect">
             <a:avLst/>
@@ -10255,7 +9687,7 @@
         <p:spPr>
           <a:xfrm>
             <a:off x="6309360" y="1554480"/>
-            <a:ext cx="5238720" cy="593640"/>
+            <a:ext cx="5238360" cy="593280"/>
           </a:xfrm>
           <a:prstGeom prst="rect">
             <a:avLst/>
@@ -10316,7 +9748,7 @@
         <p:spPr>
           <a:xfrm>
             <a:off x="6537960" y="2331720"/>
-            <a:ext cx="5010120" cy="776520"/>
+            <a:ext cx="5009760" cy="776160"/>
           </a:xfrm>
           <a:prstGeom prst="rect">
             <a:avLst/>
@@ -10419,7 +9851,7 @@
         <p:spPr>
           <a:xfrm>
             <a:off x="6537960" y="3108960"/>
-            <a:ext cx="5010120" cy="776520"/>
+            <a:ext cx="5009760" cy="776160"/>
           </a:xfrm>
           <a:prstGeom prst="rect">
             <a:avLst/>
@@ -10522,7 +9954,7 @@
         <p:spPr>
           <a:xfrm>
             <a:off x="6537960" y="3886200"/>
-            <a:ext cx="5010120" cy="776520"/>
+            <a:ext cx="5009760" cy="776160"/>
           </a:xfrm>
           <a:prstGeom prst="rect">
             <a:avLst/>
@@ -10625,7 +10057,7 @@
         <p:spPr>
           <a:xfrm>
             <a:off x="6537960" y="4663440"/>
-            <a:ext cx="5010120" cy="776520"/>
+            <a:ext cx="5009760" cy="776160"/>
           </a:xfrm>
           <a:prstGeom prst="rect">
             <a:avLst/>
@@ -10728,7 +10160,7 @@
         <p:spPr>
           <a:xfrm>
             <a:off x="6537960" y="5440680"/>
-            <a:ext cx="5010120" cy="776520"/>
+            <a:ext cx="5009760" cy="776160"/>
           </a:xfrm>
           <a:prstGeom prst="rect">
             <a:avLst/>
@@ -10831,7 +10263,7 @@
         <p:spPr>
           <a:xfrm>
             <a:off x="0" y="6537960"/>
-            <a:ext cx="12188160" cy="319320"/>
+            <a:ext cx="12187800" cy="318960"/>
           </a:xfrm>
           <a:prstGeom prst="rect">
             <a:avLst/>
@@ -10874,7 +10306,7 @@
         <p:spPr>
           <a:xfrm>
             <a:off x="365760" y="6565320"/>
-            <a:ext cx="8228880" cy="273600"/>
+            <a:ext cx="8228520" cy="273240"/>
           </a:xfrm>
           <a:prstGeom prst="rect">
             <a:avLst/>
@@ -10935,7 +10367,7 @@
         <p:spPr>
           <a:xfrm>
             <a:off x="10908720" y="6565320"/>
-            <a:ext cx="913680" cy="273600"/>
+            <a:ext cx="913320" cy="273240"/>
           </a:xfrm>
           <a:prstGeom prst="rect">
             <a:avLst/>
@@ -11076,7 +10508,7 @@
         <p:spPr>
           <a:xfrm>
             <a:off x="457200" y="1097280"/>
-            <a:ext cx="11273760" cy="456480"/>
+            <a:ext cx="11273400" cy="456120"/>
           </a:xfrm>
           <a:prstGeom prst="rect">
             <a:avLst/>
@@ -11137,7 +10569,7 @@
         <p:spPr>
           <a:xfrm>
             <a:off x="640080" y="1828800"/>
-            <a:ext cx="3452760" cy="2559600"/>
+            <a:ext cx="3452400" cy="2559240"/>
           </a:xfrm>
           <a:prstGeom prst="rect">
             <a:avLst/>
@@ -11183,7 +10615,7 @@
         <p:spPr>
           <a:xfrm>
             <a:off x="822960" y="1965960"/>
-            <a:ext cx="3087000" cy="502200"/>
+            <a:ext cx="3086640" cy="501840"/>
           </a:xfrm>
           <a:prstGeom prst="rect">
             <a:avLst/>
@@ -11244,7 +10676,7 @@
         <p:spPr>
           <a:xfrm>
             <a:off x="822960" y="2514600"/>
-            <a:ext cx="3087000" cy="639360"/>
+            <a:ext cx="3086640" cy="639000"/>
           </a:xfrm>
           <a:prstGeom prst="rect">
             <a:avLst/>
@@ -11305,7 +10737,7 @@
         <p:spPr>
           <a:xfrm>
             <a:off x="822960" y="3200400"/>
-            <a:ext cx="3087000" cy="1142280"/>
+            <a:ext cx="3086640" cy="1141920"/>
           </a:xfrm>
           <a:prstGeom prst="rect">
             <a:avLst/>
@@ -11366,7 +10798,7 @@
         <p:spPr>
           <a:xfrm>
             <a:off x="4367880" y="1828800"/>
-            <a:ext cx="3452760" cy="2559600"/>
+            <a:ext cx="3452400" cy="2559240"/>
           </a:xfrm>
           <a:prstGeom prst="rect">
             <a:avLst/>
@@ -11412,7 +10844,7 @@
         <p:spPr>
           <a:xfrm>
             <a:off x="4550760" y="1965960"/>
-            <a:ext cx="3087000" cy="502200"/>
+            <a:ext cx="3086640" cy="501840"/>
           </a:xfrm>
           <a:prstGeom prst="rect">
             <a:avLst/>
@@ -11473,7 +10905,7 @@
         <p:spPr>
           <a:xfrm>
             <a:off x="4550760" y="2514600"/>
-            <a:ext cx="3087000" cy="639360"/>
+            <a:ext cx="3086640" cy="639000"/>
           </a:xfrm>
           <a:prstGeom prst="rect">
             <a:avLst/>
@@ -11534,7 +10966,7 @@
         <p:spPr>
           <a:xfrm>
             <a:off x="4550760" y="3200400"/>
-            <a:ext cx="3087000" cy="1142280"/>
+            <a:ext cx="3086640" cy="1141920"/>
           </a:xfrm>
           <a:prstGeom prst="rect">
             <a:avLst/>
@@ -11595,7 +11027,7 @@
         <p:spPr>
           <a:xfrm>
             <a:off x="8095320" y="1828800"/>
-            <a:ext cx="3452760" cy="2559600"/>
+            <a:ext cx="3452400" cy="2559240"/>
           </a:xfrm>
           <a:prstGeom prst="rect">
             <a:avLst/>
@@ -11641,7 +11073,7 @@
         <p:spPr>
           <a:xfrm>
             <a:off x="8278200" y="1965960"/>
-            <a:ext cx="3087000" cy="502200"/>
+            <a:ext cx="3086640" cy="501840"/>
           </a:xfrm>
           <a:prstGeom prst="rect">
             <a:avLst/>
@@ -11702,7 +11134,7 @@
         <p:spPr>
           <a:xfrm>
             <a:off x="8278200" y="2514600"/>
-            <a:ext cx="3087000" cy="639360"/>
+            <a:ext cx="3086640" cy="639000"/>
           </a:xfrm>
           <a:prstGeom prst="rect">
             <a:avLst/>
@@ -11763,7 +11195,7 @@
         <p:spPr>
           <a:xfrm>
             <a:off x="8278200" y="3200400"/>
-            <a:ext cx="3087000" cy="1142280"/>
+            <a:ext cx="3086640" cy="1141920"/>
           </a:xfrm>
           <a:prstGeom prst="rect">
             <a:avLst/>
@@ -11824,7 +11256,7 @@
         <p:spPr>
           <a:xfrm>
             <a:off x="457200" y="4937760"/>
-            <a:ext cx="11273760" cy="639360"/>
+            <a:ext cx="11273400" cy="639000"/>
           </a:xfrm>
           <a:prstGeom prst="rect">
             <a:avLst/>
@@ -11885,7 +11317,7 @@
         <p:spPr>
           <a:xfrm>
             <a:off x="457200" y="5623560"/>
-            <a:ext cx="11273760" cy="365040"/>
+            <a:ext cx="11273400" cy="364680"/>
           </a:xfrm>
           <a:prstGeom prst="rect">
             <a:avLst/>
@@ -11946,7 +11378,7 @@
         <p:spPr>
           <a:xfrm>
             <a:off x="0" y="6400800"/>
-            <a:ext cx="12188160" cy="456480"/>
+            <a:ext cx="12187800" cy="456120"/>
           </a:xfrm>
           <a:prstGeom prst="rect">
             <a:avLst/>
@@ -11989,7 +11421,7 @@
         <p:spPr>
           <a:xfrm>
             <a:off x="0" y="6400800"/>
-            <a:ext cx="12188160" cy="456480"/>
+            <a:ext cx="12187800" cy="456120"/>
           </a:xfrm>
           <a:prstGeom prst="rect">
             <a:avLst/>
@@ -12087,7 +11519,7 @@
         <p:spPr>
           <a:xfrm>
             <a:off x="457200" y="411480"/>
-            <a:ext cx="72360" cy="639360"/>
+            <a:ext cx="72000" cy="639000"/>
           </a:xfrm>
           <a:prstGeom prst="rect">
             <a:avLst/>
@@ -12106,7 +11538,7 @@
           <a:fontRef idx="minor"/>
         </p:style>
         <p:txBody>
-          <a:bodyPr lIns="36360" tIns="45000" rIns="36360" bIns="45000" anchor="t">
+          <a:bodyPr lIns="36000" tIns="45000" rIns="36000" bIns="45000" anchor="t">
             <a:noAutofit/>
           </a:bodyPr>
           <a:p>
@@ -12130,7 +11562,7 @@
         <p:spPr>
           <a:xfrm>
             <a:off x="685800" y="365760"/>
-            <a:ext cx="10816560" cy="593640"/>
+            <a:ext cx="10816200" cy="593280"/>
           </a:xfrm>
           <a:prstGeom prst="rect">
             <a:avLst/>
@@ -12169,128 +11601,68 @@
                 <a:latin typeface="Calibri"/>
                 <a:ea typeface="Calibri"/>
               </a:rPr>
-              <a:t>Актуально</a:t>
-            </a:r>
-            <a:r>
-              <a:rPr lang="en-US" sz="2800" b="1" u="none" strike="noStrike">
-                <a:solidFill>
-                  <a:srgbClr val="1A2332"/>
+              <a:t>Актуальность темы</a:t>
+            </a:r>
+            <a:endParaRPr lang="en-US" sz="2800" b="0" u="none" strike="noStrike">
+              <a:solidFill>
+                <a:srgbClr val="000000"/>
+              </a:solidFill>
+              <a:effectLst/>
+              <a:uFillTx/>
+              <a:latin typeface="Arial"/>
+            </a:endParaRPr>
+          </a:p>
+        </p:txBody>
+      </p:sp>
+      <p:sp>
+        <p:nvSpPr>
+          <p:cNvPr id="26" name="Text 2"/>
+          <p:cNvSpPr/>
+          <p:nvPr/>
+        </p:nvSpPr>
+        <p:spPr>
+          <a:xfrm>
+            <a:off x="685800" y="960120"/>
+            <a:ext cx="10816200" cy="273240"/>
+          </a:xfrm>
+          <a:prstGeom prst="rect">
+            <a:avLst/>
+          </a:prstGeom>
+          <a:noFill/>
+          <a:ln w="0">
+            <a:noFill/>
+          </a:ln>
+        </p:spPr>
+        <p:style>
+          <a:lnRef idx="0"/>
+          <a:fillRef idx="0"/>
+          <a:effectRef idx="0"/>
+          <a:fontRef idx="minor"/>
+        </p:style>
+        <p:txBody>
+          <a:bodyPr lIns="0" tIns="0" rIns="0" bIns="0" anchor="ctr">
+            <a:noAutofit/>
+          </a:bodyPr>
+          <a:p>
+            <a:pPr defTabSz="914400">
+              <a:lnSpc>
+                <a:spcPct val="100000"/>
+              </a:lnSpc>
+              <a:tabLst>
+                <a:tab pos="0" algn="l"/>
+              </a:tabLst>
+            </a:pPr>
+            <a:r>
+              <a:rPr lang="en-US" sz="1300" b="0" i="1" u="none" strike="noStrike">
+                <a:solidFill>
+                  <a:srgbClr val="1C7293"/>
                 </a:solidFill>
                 <a:effectLst/>
                 <a:uFillTx/>
                 <a:latin typeface="Calibri"/>
                 <a:ea typeface="Calibri"/>
               </a:rPr>
-              <a:t>сть темы</a:t>
-            </a:r>
-            <a:endParaRPr lang="en-US" sz="2800" b="0" u="none" strike="noStrike">
-              <a:solidFill>
-                <a:srgbClr val="000000"/>
-              </a:solidFill>
-              <a:effectLst/>
-              <a:uFillTx/>
-              <a:latin typeface="Arial"/>
-            </a:endParaRPr>
-          </a:p>
-        </p:txBody>
-      </p:sp>
-      <p:sp>
-        <p:nvSpPr>
-          <p:cNvPr id="26" name="Text 2"/>
-          <p:cNvSpPr/>
-          <p:nvPr/>
-        </p:nvSpPr>
-        <p:spPr>
-          <a:xfrm>
-            <a:off x="685800" y="960120"/>
-            <a:ext cx="10816560" cy="273600"/>
-          </a:xfrm>
-          <a:prstGeom prst="rect">
-            <a:avLst/>
-          </a:prstGeom>
-          <a:noFill/>
-          <a:ln w="0">
-            <a:noFill/>
-          </a:ln>
-        </p:spPr>
-        <p:style>
-          <a:lnRef idx="0"/>
-          <a:fillRef idx="0"/>
-          <a:effectRef idx="0"/>
-          <a:fontRef idx="minor"/>
-        </p:style>
-        <p:txBody>
-          <a:bodyPr lIns="0" tIns="0" rIns="0" bIns="0" anchor="ctr">
-            <a:noAutofit/>
-          </a:bodyPr>
-          <a:p>
-            <a:pPr defTabSz="914400">
-              <a:lnSpc>
-                <a:spcPct val="100000"/>
-              </a:lnSpc>
-              <a:tabLst>
-                <a:tab pos="0" algn="l"/>
-              </a:tabLst>
-            </a:pPr>
-            <a:r>
-              <a:rPr lang="en-US" sz="1300" b="0" i="1" u="none" strike="noStrike">
-                <a:solidFill>
-                  <a:srgbClr val="1C7293"/>
-                </a:solidFill>
-                <a:effectLst/>
-                <a:uFillTx/>
-                <a:latin typeface="Calibri"/>
-                <a:ea typeface="Calibri"/>
-              </a:rPr>
-              <a:t>Почему </a:t>
-            </a:r>
-            <a:r>
-              <a:rPr lang="en-US" sz="1300" b="0" i="1" u="none" strike="noStrike">
-                <a:solidFill>
-                  <a:srgbClr val="1C7293"/>
-                </a:solidFill>
-                <a:effectLst/>
-                <a:uFillTx/>
-                <a:latin typeface="Calibri"/>
-                <a:ea typeface="Calibri"/>
-              </a:rPr>
-              <a:t>климатические </a:t>
-            </a:r>
-            <a:r>
-              <a:rPr lang="en-US" sz="1300" b="0" i="1" u="none" strike="noStrike">
-                <a:solidFill>
-                  <a:srgbClr val="1C7293"/>
-                </a:solidFill>
-                <a:effectLst/>
-                <a:uFillTx/>
-                <a:latin typeface="Calibri"/>
-                <a:ea typeface="Calibri"/>
-              </a:rPr>
-              <a:t>изменения требуют </a:t>
-            </a:r>
-            <a:r>
-              <a:rPr lang="en-US" sz="1300" b="0" i="1" u="none" strike="noStrike">
-                <a:solidFill>
-                  <a:srgbClr val="1C7293"/>
-                </a:solidFill>
-                <a:effectLst/>
-                <a:uFillTx/>
-                <a:latin typeface="Calibri"/>
-                <a:ea typeface="Calibri"/>
-              </a:rPr>
-              <a:t>новых методов </a:t>
-            </a:r>
-            <a:r>
-              <a:rPr lang="en-US" sz="1300" b="0" i="1" u="none" strike="noStrike">
-                <a:solidFill>
-                  <a:srgbClr val="1C7293"/>
-                </a:solidFill>
-                <a:effectLst/>
-                <a:uFillTx/>
-                <a:latin typeface="Calibri"/>
-                <a:ea typeface="Calibri"/>
-              </a:rPr>
-              <a:t>анализа</a:t>
+              <a:t>Почему климатические изменения требуют новых методов анализа</a:t>
             </a:r>
             <a:endParaRPr lang="en-US" sz="1300" b="0" u="none" strike="noStrike">
               <a:solidFill>
@@ -12312,7 +11684,7 @@
         <p:spPr>
           <a:xfrm>
             <a:off x="640080" y="1554480"/>
-            <a:ext cx="5668560" cy="2742480"/>
+            <a:ext cx="5668200" cy="2742120"/>
           </a:xfrm>
           <a:prstGeom prst="rect">
             <a:avLst/>
@@ -12354,103 +11726,19 @@
                 <a:latin typeface="Calibri"/>
                 <a:ea typeface="Calibri"/>
               </a:rPr>
-              <a:t>Климатические </a:t>
-            </a:r>
-            <a:r>
-              <a:rPr lang="en-US" sz="1600" b="1" u="none" strike="noStrike">
-                <a:solidFill>
-                  <a:srgbClr val="065A82"/>
+              <a:t>Климатические изменения</a:t>
+            </a:r>
+            <a:r>
+              <a:rPr lang="en-US" sz="1600" b="0" u="none" strike="noStrike">
+                <a:solidFill>
+                  <a:srgbClr val="1A2332"/>
                 </a:solidFill>
                 <a:effectLst/>
                 <a:uFillTx/>
                 <a:latin typeface="Calibri"/>
                 <a:ea typeface="Calibri"/>
               </a:rPr>
-              <a:t>изменения</a:t>
-            </a:r>
-            <a:r>
-              <a:rPr lang="en-US" sz="1600" b="0" u="none" strike="noStrike">
-                <a:solidFill>
-                  <a:srgbClr val="1A2332"/>
-                </a:solidFill>
-                <a:effectLst/>
-                <a:uFillTx/>
-                <a:latin typeface="Calibri"/>
-                <a:ea typeface="Calibri"/>
-              </a:rPr>
-              <a:t> — одна </a:t>
-            </a:r>
-            <a:r>
-              <a:rPr lang="en-US" sz="1600" b="0" u="none" strike="noStrike">
-                <a:solidFill>
-                  <a:srgbClr val="1A2332"/>
-                </a:solidFill>
-                <a:effectLst/>
-                <a:uFillTx/>
-                <a:latin typeface="Calibri"/>
-                <a:ea typeface="Calibri"/>
-              </a:rPr>
-              <a:t>из наиболее </a:t>
-            </a:r>
-            <a:r>
-              <a:rPr lang="en-US" sz="1600" b="0" u="none" strike="noStrike">
-                <a:solidFill>
-                  <a:srgbClr val="1A2332"/>
-                </a:solidFill>
-                <a:effectLst/>
-                <a:uFillTx/>
-                <a:latin typeface="Calibri"/>
-                <a:ea typeface="Calibri"/>
-              </a:rPr>
-              <a:t>сложных </a:t>
-            </a:r>
-            <a:r>
-              <a:rPr lang="en-US" sz="1600" b="0" u="none" strike="noStrike">
-                <a:solidFill>
-                  <a:srgbClr val="1A2332"/>
-                </a:solidFill>
-                <a:effectLst/>
-                <a:uFillTx/>
-                <a:latin typeface="Calibri"/>
-                <a:ea typeface="Calibri"/>
-              </a:rPr>
-              <a:t>природно-</a:t>
-            </a:r>
-            <a:r>
-              <a:rPr lang="en-US" sz="1600" b="0" u="none" strike="noStrike">
-                <a:solidFill>
-                  <a:srgbClr val="1A2332"/>
-                </a:solidFill>
-                <a:effectLst/>
-                <a:uFillTx/>
-                <a:latin typeface="Calibri"/>
-                <a:ea typeface="Calibri"/>
-              </a:rPr>
-              <a:t>технических </a:t>
-            </a:r>
-            <a:r>
-              <a:rPr lang="en-US" sz="1600" b="0" u="none" strike="noStrike">
-                <a:solidFill>
-                  <a:srgbClr val="1A2332"/>
-                </a:solidFill>
-                <a:effectLst/>
-                <a:uFillTx/>
-                <a:latin typeface="Calibri"/>
-                <a:ea typeface="Calibri"/>
-              </a:rPr>
-              <a:t>проблем </a:t>
-            </a:r>
-            <a:r>
-              <a:rPr lang="en-US" sz="1600" b="0" u="none" strike="noStrike">
-                <a:solidFill>
-                  <a:srgbClr val="1A2332"/>
-                </a:solidFill>
-                <a:effectLst/>
-                <a:uFillTx/>
-                <a:latin typeface="Calibri"/>
-                <a:ea typeface="Calibri"/>
-              </a:rPr>
-              <a:t>современности.</a:t>
+              <a:t> — одна из наиболее сложных природно-технических проблем современности.</a:t>
             </a:r>
             <a:endParaRPr lang="en-US" sz="1600" b="0" u="none" strike="noStrike">
               <a:solidFill>
@@ -12516,7 +11804,19 @@
                 <a:latin typeface="Calibri"/>
                 <a:ea typeface="Calibri"/>
               </a:rPr>
-              <a:t>Современные </a:t>
+              <a:t>Современные системы наблюдений формируют массивы данных, объём и сложность которых требуют </a:t>
+            </a:r>
+            <a:r>
+              <a:rPr lang="en-US" sz="1600" b="1" u="none" strike="noStrike">
+                <a:solidFill>
+                  <a:srgbClr val="065A82"/>
+                </a:solidFill>
+                <a:effectLst/>
+                <a:uFillTx/>
+                <a:latin typeface="Calibri"/>
+                <a:ea typeface="Calibri"/>
+              </a:rPr>
+              <a:t>дополнительных методов анализа</a:t>
             </a:r>
             <a:r>
               <a:rPr lang="en-US" sz="1600" b="0" u="none" strike="noStrike">
@@ -12528,151 +11828,7 @@
                 <a:latin typeface="Calibri"/>
                 <a:ea typeface="Calibri"/>
               </a:rPr>
-              <a:t>системы </a:t>
-            </a:r>
-            <a:r>
-              <a:rPr lang="en-US" sz="1600" b="0" u="none" strike="noStrike">
-                <a:solidFill>
-                  <a:srgbClr val="1A2332"/>
-                </a:solidFill>
-                <a:effectLst/>
-                <a:uFillTx/>
-                <a:latin typeface="Calibri"/>
-                <a:ea typeface="Calibri"/>
-              </a:rPr>
-              <a:t>наблюдений </a:t>
-            </a:r>
-            <a:r>
-              <a:rPr lang="en-US" sz="1600" b="0" u="none" strike="noStrike">
-                <a:solidFill>
-                  <a:srgbClr val="1A2332"/>
-                </a:solidFill>
-                <a:effectLst/>
-                <a:uFillTx/>
-                <a:latin typeface="Calibri"/>
-                <a:ea typeface="Calibri"/>
-              </a:rPr>
-              <a:t>формируют </a:t>
-            </a:r>
-            <a:r>
-              <a:rPr lang="en-US" sz="1600" b="0" u="none" strike="noStrike">
-                <a:solidFill>
-                  <a:srgbClr val="1A2332"/>
-                </a:solidFill>
-                <a:effectLst/>
-                <a:uFillTx/>
-                <a:latin typeface="Calibri"/>
-                <a:ea typeface="Calibri"/>
-              </a:rPr>
-              <a:t>массивы данных, </a:t>
-            </a:r>
-            <a:r>
-              <a:rPr lang="en-US" sz="1600" b="0" u="none" strike="noStrike">
-                <a:solidFill>
-                  <a:srgbClr val="1A2332"/>
-                </a:solidFill>
-                <a:effectLst/>
-                <a:uFillTx/>
-                <a:latin typeface="Calibri"/>
-                <a:ea typeface="Calibri"/>
-              </a:rPr>
-              <a:t>объём и сложность </a:t>
-            </a:r>
-            <a:r>
-              <a:rPr lang="en-US" sz="1600" b="0" u="none" strike="noStrike">
-                <a:solidFill>
-                  <a:srgbClr val="1A2332"/>
-                </a:solidFill>
-                <a:effectLst/>
-                <a:uFillTx/>
-                <a:latin typeface="Calibri"/>
-                <a:ea typeface="Calibri"/>
-              </a:rPr>
-              <a:t>которых требуют </a:t>
-            </a:r>
-            <a:r>
-              <a:rPr lang="en-US" sz="1600" b="1" u="none" strike="noStrike">
-                <a:solidFill>
-                  <a:srgbClr val="065A82"/>
-                </a:solidFill>
-                <a:effectLst/>
-                <a:uFillTx/>
-                <a:latin typeface="Calibri"/>
-                <a:ea typeface="Calibri"/>
-              </a:rPr>
-              <a:t>дополнительных </a:t>
-            </a:r>
-            <a:r>
-              <a:rPr lang="en-US" sz="1600" b="1" u="none" strike="noStrike">
-                <a:solidFill>
-                  <a:srgbClr val="065A82"/>
-                </a:solidFill>
-                <a:effectLst/>
-                <a:uFillTx/>
-                <a:latin typeface="Calibri"/>
-                <a:ea typeface="Calibri"/>
-              </a:rPr>
-              <a:t>методов анализа</a:t>
-            </a:r>
-            <a:r>
-              <a:rPr lang="en-US" sz="1600" b="0" u="none" strike="noStrike">
-                <a:solidFill>
-                  <a:srgbClr val="1A2332"/>
-                </a:solidFill>
-                <a:effectLst/>
-                <a:uFillTx/>
-                <a:latin typeface="Calibri"/>
-                <a:ea typeface="Calibri"/>
-              </a:rPr>
-              <a:t> </a:t>
-            </a:r>
-            <a:r>
-              <a:rPr lang="en-US" sz="1600" b="0" u="none" strike="noStrike">
-                <a:solidFill>
-                  <a:srgbClr val="1A2332"/>
-                </a:solidFill>
-                <a:effectLst/>
-                <a:uFillTx/>
-                <a:latin typeface="Calibri"/>
-                <a:ea typeface="Calibri"/>
-              </a:rPr>
-              <a:t>помимо </a:t>
-            </a:r>
-            <a:r>
-              <a:rPr lang="en-US" sz="1600" b="0" u="none" strike="noStrike">
-                <a:solidFill>
-                  <a:srgbClr val="1A2332"/>
-                </a:solidFill>
-                <a:effectLst/>
-                <a:uFillTx/>
-                <a:latin typeface="Calibri"/>
-                <a:ea typeface="Calibri"/>
-              </a:rPr>
-              <a:t>классических </a:t>
-            </a:r>
-            <a:r>
-              <a:rPr lang="en-US" sz="1600" b="0" u="none" strike="noStrike">
-                <a:solidFill>
-                  <a:srgbClr val="1A2332"/>
-                </a:solidFill>
-                <a:effectLst/>
-                <a:uFillTx/>
-                <a:latin typeface="Calibri"/>
-                <a:ea typeface="Calibri"/>
-              </a:rPr>
-              <a:t>физических </a:t>
-            </a:r>
-            <a:r>
-              <a:rPr lang="en-US" sz="1600" b="0" u="none" strike="noStrike">
-                <a:solidFill>
-                  <a:srgbClr val="1A2332"/>
-                </a:solidFill>
-                <a:effectLst/>
-                <a:uFillTx/>
-                <a:latin typeface="Calibri"/>
-                <a:ea typeface="Calibri"/>
-              </a:rPr>
-              <a:t>моделей.</a:t>
+              <a:t> помимо классических физических моделей.</a:t>
             </a:r>
             <a:endParaRPr lang="en-US" sz="1600" b="0" u="none" strike="noStrike">
               <a:solidFill>
@@ -12694,7 +11850,7 @@
         <p:spPr>
           <a:xfrm>
             <a:off x="6766560" y="1554480"/>
-            <a:ext cx="4937040" cy="1096560"/>
+            <a:ext cx="4936680" cy="1096200"/>
           </a:xfrm>
           <a:prstGeom prst="rect">
             <a:avLst/>
@@ -12747,7 +11903,7 @@
         <p:spPr>
           <a:xfrm>
             <a:off x="6766560" y="1554480"/>
-            <a:ext cx="90720" cy="1096560"/>
+            <a:ext cx="90360" cy="1096200"/>
           </a:xfrm>
           <a:prstGeom prst="rect">
             <a:avLst/>
@@ -12790,7 +11946,7 @@
         <p:spPr>
           <a:xfrm>
             <a:off x="7040880" y="1645920"/>
-            <a:ext cx="1828080" cy="913680"/>
+            <a:ext cx="1827720" cy="913320"/>
           </a:xfrm>
           <a:prstGeom prst="rect">
             <a:avLst/>
@@ -12851,7 +12007,7 @@
         <p:spPr>
           <a:xfrm>
             <a:off x="8961120" y="1691640"/>
-            <a:ext cx="2696760" cy="867960"/>
+            <a:ext cx="2696400" cy="867600"/>
           </a:xfrm>
           <a:prstGeom prst="rect">
             <a:avLst/>
@@ -12912,7 +12068,7 @@
         <p:spPr>
           <a:xfrm>
             <a:off x="6766560" y="2834640"/>
-            <a:ext cx="4937040" cy="1096560"/>
+            <a:ext cx="4936680" cy="1096200"/>
           </a:xfrm>
           <a:prstGeom prst="rect">
             <a:avLst/>
@@ -12965,7 +12121,7 @@
         <p:spPr>
           <a:xfrm>
             <a:off x="6766560" y="2834640"/>
-            <a:ext cx="90720" cy="1096560"/>
+            <a:ext cx="90360" cy="1096200"/>
           </a:xfrm>
           <a:prstGeom prst="rect">
             <a:avLst/>
@@ -13008,7 +12164,7 @@
         <p:spPr>
           <a:xfrm>
             <a:off x="7040880" y="2926080"/>
-            <a:ext cx="1828080" cy="913680"/>
+            <a:ext cx="1827720" cy="913320"/>
           </a:xfrm>
           <a:prstGeom prst="rect">
             <a:avLst/>
@@ -13069,7 +12225,7 @@
         <p:spPr>
           <a:xfrm>
             <a:off x="8961120" y="2971800"/>
-            <a:ext cx="2696760" cy="867960"/>
+            <a:ext cx="2696400" cy="867600"/>
           </a:xfrm>
           <a:prstGeom prst="rect">
             <a:avLst/>
@@ -13130,7 +12286,7 @@
         <p:spPr>
           <a:xfrm>
             <a:off x="6766560" y="4114800"/>
-            <a:ext cx="4937040" cy="1096560"/>
+            <a:ext cx="4936680" cy="1096200"/>
           </a:xfrm>
           <a:prstGeom prst="rect">
             <a:avLst/>
@@ -13183,7 +12339,7 @@
         <p:spPr>
           <a:xfrm>
             <a:off x="6766560" y="4114800"/>
-            <a:ext cx="90720" cy="1096560"/>
+            <a:ext cx="90360" cy="1096200"/>
           </a:xfrm>
           <a:prstGeom prst="rect">
             <a:avLst/>
@@ -13226,7 +12382,7 @@
         <p:spPr>
           <a:xfrm>
             <a:off x="7040880" y="4206240"/>
-            <a:ext cx="1828080" cy="913680"/>
+            <a:ext cx="1827720" cy="913320"/>
           </a:xfrm>
           <a:prstGeom prst="rect">
             <a:avLst/>
@@ -13287,7 +12443,7 @@
         <p:spPr>
           <a:xfrm>
             <a:off x="8961120" y="4251960"/>
-            <a:ext cx="2696760" cy="867960"/>
+            <a:ext cx="2696400" cy="867600"/>
           </a:xfrm>
           <a:prstGeom prst="rect">
             <a:avLst/>
@@ -13348,7 +12504,7 @@
         <p:spPr>
           <a:xfrm>
             <a:off x="640080" y="5669280"/>
-            <a:ext cx="10908000" cy="639360"/>
+            <a:ext cx="10907640" cy="639000"/>
           </a:xfrm>
           <a:prstGeom prst="rect">
             <a:avLst/>
@@ -13411,7 +12567,7 @@
         <p:spPr>
           <a:xfrm>
             <a:off x="0" y="6537960"/>
-            <a:ext cx="12188160" cy="319320"/>
+            <a:ext cx="12187800" cy="318960"/>
           </a:xfrm>
           <a:prstGeom prst="rect">
             <a:avLst/>
@@ -13454,7 +12610,7 @@
         <p:spPr>
           <a:xfrm>
             <a:off x="365760" y="6565320"/>
-            <a:ext cx="8228880" cy="273600"/>
+            <a:ext cx="8228520" cy="273240"/>
           </a:xfrm>
           <a:prstGeom prst="rect">
             <a:avLst/>
@@ -13515,7 +12671,7 @@
         <p:spPr>
           <a:xfrm>
             <a:off x="10908720" y="6565320"/>
-            <a:ext cx="913680" cy="273600"/>
+            <a:ext cx="913320" cy="273240"/>
           </a:xfrm>
           <a:prstGeom prst="rect">
             <a:avLst/>
@@ -13613,7 +12769,7 @@
         <p:spPr>
           <a:xfrm>
             <a:off x="457200" y="411480"/>
-            <a:ext cx="72360" cy="639360"/>
+            <a:ext cx="72000" cy="639000"/>
           </a:xfrm>
           <a:prstGeom prst="rect">
             <a:avLst/>
@@ -13632,7 +12788,7 @@
           <a:fontRef idx="minor"/>
         </p:style>
         <p:txBody>
-          <a:bodyPr lIns="36360" tIns="45000" rIns="36360" bIns="45000" anchor="t">
+          <a:bodyPr lIns="36000" tIns="45000" rIns="36000" bIns="45000" anchor="t">
             <a:noAutofit/>
           </a:bodyPr>
           <a:p>
@@ -13656,7 +12812,7 @@
         <p:spPr>
           <a:xfrm>
             <a:off x="685800" y="365760"/>
-            <a:ext cx="10816560" cy="593640"/>
+            <a:ext cx="10816200" cy="593280"/>
           </a:xfrm>
           <a:prstGeom prst="rect">
             <a:avLst/>
@@ -13717,7 +12873,7 @@
         <p:spPr>
           <a:xfrm>
             <a:off x="640080" y="1417320"/>
-            <a:ext cx="10908000" cy="1005120"/>
+            <a:ext cx="10907640" cy="1004760"/>
           </a:xfrm>
           <a:prstGeom prst="rect">
             <a:avLst/>
@@ -13760,7 +12916,7 @@
         <p:spPr>
           <a:xfrm>
             <a:off x="868680" y="1508760"/>
-            <a:ext cx="1096560" cy="319320"/>
+            <a:ext cx="1096200" cy="318960"/>
           </a:xfrm>
           <a:prstGeom prst="rect">
             <a:avLst/>
@@ -13821,7 +12977,7 @@
         <p:spPr>
           <a:xfrm>
             <a:off x="868680" y="1828800"/>
-            <a:ext cx="10633680" cy="593640"/>
+            <a:ext cx="10633320" cy="593280"/>
           </a:xfrm>
           <a:prstGeom prst="rect">
             <a:avLst/>
@@ -13882,7 +13038,7 @@
         <p:spPr>
           <a:xfrm>
             <a:off x="640080" y="2606040"/>
-            <a:ext cx="2742480" cy="319320"/>
+            <a:ext cx="2742120" cy="318960"/>
           </a:xfrm>
           <a:prstGeom prst="rect">
             <a:avLst/>
@@ -13943,7 +13099,7 @@
         <p:spPr>
           <a:xfrm>
             <a:off x="640080" y="3017520"/>
-            <a:ext cx="3544200" cy="1508040"/>
+            <a:ext cx="3543840" cy="1507680"/>
           </a:xfrm>
           <a:prstGeom prst="rect">
             <a:avLst/>
@@ -13996,7 +13152,7 @@
         <p:spPr>
           <a:xfrm>
             <a:off x="822960" y="3200400"/>
-            <a:ext cx="502200" cy="502200"/>
+            <a:ext cx="501840" cy="501840"/>
           </a:xfrm>
           <a:prstGeom prst="ellipse">
             <a:avLst/>
@@ -14039,7 +13195,7 @@
         <p:spPr>
           <a:xfrm>
             <a:off x="822960" y="3200400"/>
-            <a:ext cx="502200" cy="502200"/>
+            <a:ext cx="501840" cy="501840"/>
           </a:xfrm>
           <a:prstGeom prst="rect">
             <a:avLst/>
@@ -14100,7 +13256,7 @@
         <p:spPr>
           <a:xfrm>
             <a:off x="822960" y="3794760"/>
-            <a:ext cx="3178440" cy="593640"/>
+            <a:ext cx="3178080" cy="593280"/>
           </a:xfrm>
           <a:prstGeom prst="rect">
             <a:avLst/>
@@ -14161,7 +13317,7 @@
         <p:spPr>
           <a:xfrm>
             <a:off x="4322160" y="3017520"/>
-            <a:ext cx="3544200" cy="1508040"/>
+            <a:ext cx="3543840" cy="1507680"/>
           </a:xfrm>
           <a:prstGeom prst="rect">
             <a:avLst/>
@@ -14214,7 +13370,7 @@
         <p:spPr>
           <a:xfrm>
             <a:off x="4505040" y="3200400"/>
-            <a:ext cx="502200" cy="502200"/>
+            <a:ext cx="501840" cy="501840"/>
           </a:xfrm>
           <a:prstGeom prst="ellipse">
             <a:avLst/>
@@ -14257,7 +13413,7 @@
         <p:spPr>
           <a:xfrm>
             <a:off x="4505040" y="3200400"/>
-            <a:ext cx="502200" cy="502200"/>
+            <a:ext cx="501840" cy="501840"/>
           </a:xfrm>
           <a:prstGeom prst="rect">
             <a:avLst/>
@@ -14318,7 +13474,7 @@
         <p:spPr>
           <a:xfrm>
             <a:off x="4505040" y="3794760"/>
-            <a:ext cx="3178440" cy="593640"/>
+            <a:ext cx="3178080" cy="593280"/>
           </a:xfrm>
           <a:prstGeom prst="rect">
             <a:avLst/>
@@ -14379,7 +13535,7 @@
         <p:spPr>
           <a:xfrm>
             <a:off x="8003880" y="3017520"/>
-            <a:ext cx="3544200" cy="1508040"/>
+            <a:ext cx="3543840" cy="1507680"/>
           </a:xfrm>
           <a:prstGeom prst="rect">
             <a:avLst/>
@@ -14432,7 +13588,7 @@
         <p:spPr>
           <a:xfrm>
             <a:off x="8186760" y="3200400"/>
-            <a:ext cx="502200" cy="502200"/>
+            <a:ext cx="501840" cy="501840"/>
           </a:xfrm>
           <a:prstGeom prst="ellipse">
             <a:avLst/>
@@ -14475,7 +13631,7 @@
         <p:spPr>
           <a:xfrm>
             <a:off x="8186760" y="3200400"/>
-            <a:ext cx="502200" cy="502200"/>
+            <a:ext cx="501840" cy="501840"/>
           </a:xfrm>
           <a:prstGeom prst="rect">
             <a:avLst/>
@@ -14536,7 +13692,7 @@
         <p:spPr>
           <a:xfrm>
             <a:off x="8186760" y="3794760"/>
-            <a:ext cx="3178440" cy="593640"/>
+            <a:ext cx="3178080" cy="593280"/>
           </a:xfrm>
           <a:prstGeom prst="rect">
             <a:avLst/>
@@ -14597,7 +13753,7 @@
         <p:spPr>
           <a:xfrm>
             <a:off x="640080" y="4709160"/>
-            <a:ext cx="3544200" cy="1508040"/>
+            <a:ext cx="3543840" cy="1507680"/>
           </a:xfrm>
           <a:prstGeom prst="rect">
             <a:avLst/>
@@ -14650,7 +13806,7 @@
         <p:spPr>
           <a:xfrm>
             <a:off x="822960" y="4892040"/>
-            <a:ext cx="502200" cy="502200"/>
+            <a:ext cx="501840" cy="501840"/>
           </a:xfrm>
           <a:prstGeom prst="ellipse">
             <a:avLst/>
@@ -14693,7 +13849,7 @@
         <p:spPr>
           <a:xfrm>
             <a:off x="822960" y="4892040"/>
-            <a:ext cx="502200" cy="502200"/>
+            <a:ext cx="501840" cy="501840"/>
           </a:xfrm>
           <a:prstGeom prst="rect">
             <a:avLst/>
@@ -14754,7 +13910,7 @@
         <p:spPr>
           <a:xfrm>
             <a:off x="822960" y="5486400"/>
-            <a:ext cx="3178440" cy="593640"/>
+            <a:ext cx="3178080" cy="593280"/>
           </a:xfrm>
           <a:prstGeom prst="rect">
             <a:avLst/>
@@ -14815,7 +13971,7 @@
         <p:spPr>
           <a:xfrm>
             <a:off x="4322160" y="4709160"/>
-            <a:ext cx="3544200" cy="1508040"/>
+            <a:ext cx="3543840" cy="1507680"/>
           </a:xfrm>
           <a:prstGeom prst="rect">
             <a:avLst/>
@@ -14868,7 +14024,7 @@
         <p:spPr>
           <a:xfrm>
             <a:off x="4505040" y="4892040"/>
-            <a:ext cx="502200" cy="502200"/>
+            <a:ext cx="501840" cy="501840"/>
           </a:xfrm>
           <a:prstGeom prst="ellipse">
             <a:avLst/>
@@ -14911,7 +14067,7 @@
         <p:spPr>
           <a:xfrm>
             <a:off x="4505040" y="4892040"/>
-            <a:ext cx="502200" cy="502200"/>
+            <a:ext cx="501840" cy="501840"/>
           </a:xfrm>
           <a:prstGeom prst="rect">
             <a:avLst/>
@@ -14972,7 +14128,7 @@
         <p:spPr>
           <a:xfrm>
             <a:off x="4505040" y="5486400"/>
-            <a:ext cx="3178440" cy="593640"/>
+            <a:ext cx="3178080" cy="593280"/>
           </a:xfrm>
           <a:prstGeom prst="rect">
             <a:avLst/>
@@ -15033,7 +14189,7 @@
         <p:spPr>
           <a:xfrm>
             <a:off x="8003880" y="4709160"/>
-            <a:ext cx="3544200" cy="1508040"/>
+            <a:ext cx="3543840" cy="1507680"/>
           </a:xfrm>
           <a:prstGeom prst="rect">
             <a:avLst/>
@@ -15086,7 +14242,7 @@
         <p:spPr>
           <a:xfrm>
             <a:off x="8186760" y="4892040"/>
-            <a:ext cx="502200" cy="502200"/>
+            <a:ext cx="501840" cy="501840"/>
           </a:xfrm>
           <a:prstGeom prst="ellipse">
             <a:avLst/>
@@ -15129,7 +14285,7 @@
         <p:spPr>
           <a:xfrm>
             <a:off x="8186760" y="4892040"/>
-            <a:ext cx="502200" cy="502200"/>
+            <a:ext cx="501840" cy="501840"/>
           </a:xfrm>
           <a:prstGeom prst="rect">
             <a:avLst/>
@@ -15190,7 +14346,7 @@
         <p:spPr>
           <a:xfrm>
             <a:off x="8186760" y="5486400"/>
-            <a:ext cx="3178440" cy="593640"/>
+            <a:ext cx="3178080" cy="593280"/>
           </a:xfrm>
           <a:prstGeom prst="rect">
             <a:avLst/>
@@ -15251,7 +14407,7 @@
         <p:spPr>
           <a:xfrm>
             <a:off x="0" y="6537960"/>
-            <a:ext cx="12188160" cy="319320"/>
+            <a:ext cx="12187800" cy="318960"/>
           </a:xfrm>
           <a:prstGeom prst="rect">
             <a:avLst/>
@@ -15294,7 +14450,7 @@
         <p:spPr>
           <a:xfrm>
             <a:off x="365760" y="6565320"/>
-            <a:ext cx="8228880" cy="273600"/>
+            <a:ext cx="8228520" cy="273240"/>
           </a:xfrm>
           <a:prstGeom prst="rect">
             <a:avLst/>
@@ -15355,7 +14511,7 @@
         <p:spPr>
           <a:xfrm>
             <a:off x="10908720" y="6565320"/>
-            <a:ext cx="913680" cy="273600"/>
+            <a:ext cx="913320" cy="273240"/>
           </a:xfrm>
           <a:prstGeom prst="rect">
             <a:avLst/>
@@ -15453,7 +14609,7 @@
         <p:spPr>
           <a:xfrm>
             <a:off x="457200" y="411480"/>
-            <a:ext cx="72360" cy="639360"/>
+            <a:ext cx="72000" cy="639000"/>
           </a:xfrm>
           <a:prstGeom prst="rect">
             <a:avLst/>
@@ -15472,7 +14628,7 @@
           <a:fontRef idx="minor"/>
         </p:style>
         <p:txBody>
-          <a:bodyPr lIns="36360" tIns="45000" rIns="36360" bIns="45000" anchor="t">
+          <a:bodyPr lIns="36000" tIns="45000" rIns="36000" bIns="45000" anchor="t">
             <a:noAutofit/>
           </a:bodyPr>
           <a:p>
@@ -15496,7 +14652,7 @@
         <p:spPr>
           <a:xfrm>
             <a:off x="685800" y="365760"/>
-            <a:ext cx="10816560" cy="593640"/>
+            <a:ext cx="10816200" cy="593280"/>
           </a:xfrm>
           <a:prstGeom prst="rect">
             <a:avLst/>
@@ -15557,7 +14713,7 @@
         <p:spPr>
           <a:xfrm>
             <a:off x="640080" y="1554480"/>
-            <a:ext cx="3513600" cy="4114080"/>
+            <a:ext cx="3513240" cy="4113720"/>
           </a:xfrm>
           <a:prstGeom prst="rect">
             <a:avLst/>
@@ -15610,7 +14766,7 @@
         <p:spPr>
           <a:xfrm>
             <a:off x="640080" y="1554480"/>
-            <a:ext cx="3513600" cy="730800"/>
+            <a:ext cx="3513240" cy="730440"/>
           </a:xfrm>
           <a:prstGeom prst="rect">
             <a:avLst/>
@@ -15653,7 +14809,7 @@
         <p:spPr>
           <a:xfrm>
             <a:off x="640080" y="1554480"/>
-            <a:ext cx="3513600" cy="730800"/>
+            <a:ext cx="3513240" cy="730440"/>
           </a:xfrm>
           <a:prstGeom prst="rect">
             <a:avLst/>
@@ -15714,7 +14870,7 @@
         <p:spPr>
           <a:xfrm>
             <a:off x="914400" y="2560320"/>
-            <a:ext cx="2964960" cy="2925360"/>
+            <a:ext cx="2964600" cy="2925000"/>
           </a:xfrm>
           <a:prstGeom prst="rect">
             <a:avLst/>
@@ -15778,7 +14934,7 @@
         <p:spPr>
           <a:xfrm>
             <a:off x="4337280" y="1554480"/>
-            <a:ext cx="3513600" cy="4114080"/>
+            <a:ext cx="3513240" cy="4113720"/>
           </a:xfrm>
           <a:prstGeom prst="rect">
             <a:avLst/>
@@ -15831,7 +14987,7 @@
         <p:spPr>
           <a:xfrm>
             <a:off x="4337280" y="1554480"/>
-            <a:ext cx="3513600" cy="730800"/>
+            <a:ext cx="3513240" cy="730440"/>
           </a:xfrm>
           <a:prstGeom prst="rect">
             <a:avLst/>
@@ -15874,7 +15030,7 @@
         <p:spPr>
           <a:xfrm>
             <a:off x="4337280" y="1554480"/>
-            <a:ext cx="3513600" cy="730800"/>
+            <a:ext cx="3513240" cy="730440"/>
           </a:xfrm>
           <a:prstGeom prst="rect">
             <a:avLst/>
@@ -15935,7 +15091,7 @@
         <p:spPr>
           <a:xfrm>
             <a:off x="4611600" y="2560320"/>
-            <a:ext cx="2964960" cy="2925360"/>
+            <a:ext cx="2964600" cy="2925000"/>
           </a:xfrm>
           <a:prstGeom prst="rect">
             <a:avLst/>
@@ -15999,7 +15155,7 @@
         <p:spPr>
           <a:xfrm>
             <a:off x="8034480" y="1554480"/>
-            <a:ext cx="3513600" cy="4114080"/>
+            <a:ext cx="3513240" cy="4113720"/>
           </a:xfrm>
           <a:prstGeom prst="rect">
             <a:avLst/>
@@ -16052,7 +15208,7 @@
         <p:spPr>
           <a:xfrm>
             <a:off x="8034480" y="1554480"/>
-            <a:ext cx="3513600" cy="730800"/>
+            <a:ext cx="3513240" cy="730440"/>
           </a:xfrm>
           <a:prstGeom prst="rect">
             <a:avLst/>
@@ -16095,7 +15251,7 @@
         <p:spPr>
           <a:xfrm>
             <a:off x="8034480" y="1554480"/>
-            <a:ext cx="3513600" cy="730800"/>
+            <a:ext cx="3513240" cy="730440"/>
           </a:xfrm>
           <a:prstGeom prst="rect">
             <a:avLst/>
@@ -16156,7 +15312,7 @@
         <p:spPr>
           <a:xfrm>
             <a:off x="8308800" y="2560320"/>
-            <a:ext cx="2964960" cy="2925360"/>
+            <a:ext cx="2964600" cy="2925000"/>
           </a:xfrm>
           <a:prstGeom prst="rect">
             <a:avLst/>
@@ -16220,7 +15376,7 @@
         <p:spPr>
           <a:xfrm>
             <a:off x="640080" y="5806440"/>
-            <a:ext cx="10908000" cy="639360"/>
+            <a:ext cx="10907640" cy="639000"/>
           </a:xfrm>
           <a:prstGeom prst="rect">
             <a:avLst/>
@@ -16295,7 +15451,7 @@
         <p:spPr>
           <a:xfrm>
             <a:off x="0" y="6537960"/>
-            <a:ext cx="12188160" cy="319320"/>
+            <a:ext cx="12187800" cy="318960"/>
           </a:xfrm>
           <a:prstGeom prst="rect">
             <a:avLst/>
@@ -16338,7 +15494,7 @@
         <p:spPr>
           <a:xfrm>
             <a:off x="365760" y="6565320"/>
-            <a:ext cx="8228880" cy="273600"/>
+            <a:ext cx="8228520" cy="273240"/>
           </a:xfrm>
           <a:prstGeom prst="rect">
             <a:avLst/>
@@ -16399,7 +15555,7 @@
         <p:spPr>
           <a:xfrm>
             <a:off x="10908720" y="6565320"/>
-            <a:ext cx="913680" cy="273600"/>
+            <a:ext cx="913320" cy="273240"/>
           </a:xfrm>
           <a:prstGeom prst="rect">
             <a:avLst/>
@@ -16497,7 +15653,7 @@
         <p:spPr>
           <a:xfrm>
             <a:off x="457200" y="411480"/>
-            <a:ext cx="72360" cy="639360"/>
+            <a:ext cx="72000" cy="639000"/>
           </a:xfrm>
           <a:prstGeom prst="rect">
             <a:avLst/>
@@ -16516,7 +15672,7 @@
           <a:fontRef idx="minor"/>
         </p:style>
         <p:txBody>
-          <a:bodyPr lIns="36360" tIns="45000" rIns="36360" bIns="45000" anchor="t">
+          <a:bodyPr lIns="36000" tIns="45000" rIns="36000" bIns="45000" anchor="t">
             <a:noAutofit/>
           </a:bodyPr>
           <a:p>
@@ -16540,7 +15696,7 @@
         <p:spPr>
           <a:xfrm>
             <a:off x="685800" y="365760"/>
-            <a:ext cx="10816560" cy="593640"/>
+            <a:ext cx="10816200" cy="593280"/>
           </a:xfrm>
           <a:prstGeom prst="rect">
             <a:avLst/>
@@ -16601,7 +15757,7 @@
         <p:spPr>
           <a:xfrm>
             <a:off x="685800" y="960120"/>
-            <a:ext cx="10816560" cy="273600"/>
+            <a:ext cx="10816200" cy="273240"/>
           </a:xfrm>
           <a:prstGeom prst="rect">
             <a:avLst/>
@@ -16662,7 +15818,7 @@
         <p:spPr>
           <a:xfrm>
             <a:off x="640080" y="1554480"/>
-            <a:ext cx="5028480" cy="3199680"/>
+            <a:ext cx="5028120" cy="3199320"/>
           </a:xfrm>
           <a:prstGeom prst="rect">
             <a:avLst/>
@@ -16879,7 +16035,7 @@
         <p:spPr>
           <a:xfrm>
             <a:off x="640080" y="4937760"/>
-            <a:ext cx="5028480" cy="1370880"/>
+            <a:ext cx="5028120" cy="1370520"/>
           </a:xfrm>
           <a:prstGeom prst="rect">
             <a:avLst/>
@@ -16925,7 +16081,7 @@
         <p:spPr>
           <a:xfrm>
             <a:off x="777240" y="5029200"/>
-            <a:ext cx="4754160" cy="273600"/>
+            <a:ext cx="4753800" cy="273240"/>
           </a:xfrm>
           <a:prstGeom prst="rect">
             <a:avLst/>
@@ -16986,7 +16142,7 @@
         <p:spPr>
           <a:xfrm>
             <a:off x="777240" y="5349240"/>
-            <a:ext cx="4754160" cy="365040"/>
+            <a:ext cx="4753800" cy="364680"/>
           </a:xfrm>
           <a:prstGeom prst="rect">
             <a:avLst/>
@@ -17065,7 +16221,7 @@
         <p:spPr>
           <a:xfrm>
             <a:off x="777240" y="5760720"/>
-            <a:ext cx="4754160" cy="365040"/>
+            <a:ext cx="4753800" cy="364680"/>
           </a:xfrm>
           <a:prstGeom prst="rect">
             <a:avLst/>
@@ -17144,7 +16300,7 @@
         <p:spPr>
           <a:xfrm>
             <a:off x="6126480" y="1554480"/>
-            <a:ext cx="5577120" cy="4754160"/>
+            <a:ext cx="5576760" cy="4753800"/>
           </a:xfrm>
           <a:prstGeom prst="rect">
             <a:avLst/>
@@ -17197,7 +16353,7 @@
         <p:spPr>
           <a:xfrm>
             <a:off x="6263640" y="1691640"/>
-            <a:ext cx="5302800" cy="273600"/>
+            <a:ext cx="5302440" cy="273240"/>
           </a:xfrm>
           <a:prstGeom prst="rect">
             <a:avLst/>
@@ -17258,7 +16414,7 @@
         <p:spPr>
           <a:xfrm>
             <a:off x="6355080" y="2468880"/>
-            <a:ext cx="639360" cy="502200"/>
+            <a:ext cx="639000" cy="501840"/>
           </a:xfrm>
           <a:prstGeom prst="ellipse">
             <a:avLst/>
@@ -17301,7 +16457,7 @@
         <p:spPr>
           <a:xfrm>
             <a:off x="6355080" y="2468880"/>
-            <a:ext cx="639360" cy="502200"/>
+            <a:ext cx="639000" cy="501840"/>
           </a:xfrm>
           <a:prstGeom prst="rect">
             <a:avLst/>
@@ -17406,7 +16562,7 @@
         <p:spPr>
           <a:xfrm>
             <a:off x="7315200" y="2423160"/>
-            <a:ext cx="547920" cy="273600"/>
+            <a:ext cx="547560" cy="273240"/>
           </a:xfrm>
           <a:prstGeom prst="rect">
             <a:avLst/>
@@ -17467,7 +16623,7 @@
         <p:spPr>
           <a:xfrm>
             <a:off x="6355080" y="3474720"/>
-            <a:ext cx="639360" cy="502200"/>
+            <a:ext cx="639000" cy="501840"/>
           </a:xfrm>
           <a:prstGeom prst="ellipse">
             <a:avLst/>
@@ -17510,7 +16666,7 @@
         <p:spPr>
           <a:xfrm>
             <a:off x="6355080" y="3474720"/>
-            <a:ext cx="639360" cy="502200"/>
+            <a:ext cx="639000" cy="501840"/>
           </a:xfrm>
           <a:prstGeom prst="rect">
             <a:avLst/>
@@ -17615,7 +16771,7 @@
         <p:spPr>
           <a:xfrm>
             <a:off x="7315200" y="3429000"/>
-            <a:ext cx="547920" cy="273600"/>
+            <a:ext cx="547560" cy="273240"/>
           </a:xfrm>
           <a:prstGeom prst="rect">
             <a:avLst/>
@@ -17676,7 +16832,7 @@
         <p:spPr>
           <a:xfrm>
             <a:off x="6355080" y="4480560"/>
-            <a:ext cx="639360" cy="502200"/>
+            <a:ext cx="639000" cy="501840"/>
           </a:xfrm>
           <a:prstGeom prst="ellipse">
             <a:avLst/>
@@ -17719,7 +16875,7 @@
         <p:spPr>
           <a:xfrm>
             <a:off x="6355080" y="4480560"/>
-            <a:ext cx="639360" cy="502200"/>
+            <a:ext cx="639000" cy="501840"/>
           </a:xfrm>
           <a:prstGeom prst="rect">
             <a:avLst/>
@@ -17824,7 +16980,7 @@
         <p:spPr>
           <a:xfrm>
             <a:off x="7315200" y="4434840"/>
-            <a:ext cx="547920" cy="273600"/>
+            <a:ext cx="547560" cy="273240"/>
           </a:xfrm>
           <a:prstGeom prst="rect">
             <a:avLst/>
@@ -17885,7 +17041,7 @@
         <p:spPr>
           <a:xfrm>
             <a:off x="8503920" y="3474720"/>
-            <a:ext cx="913680" cy="867960"/>
+            <a:ext cx="913320" cy="867600"/>
           </a:xfrm>
           <a:prstGeom prst="ellipse">
             <a:avLst/>
@@ -17928,7 +17084,7 @@
         <p:spPr>
           <a:xfrm>
             <a:off x="8503920" y="3474720"/>
-            <a:ext cx="913680" cy="867960"/>
+            <a:ext cx="913320" cy="867600"/>
           </a:xfrm>
           <a:prstGeom prst="rect">
             <a:avLst/>
@@ -18033,7 +17189,7 @@
         <p:spPr>
           <a:xfrm>
             <a:off x="9464040" y="3611880"/>
-            <a:ext cx="456480" cy="273600"/>
+            <a:ext cx="456120" cy="273240"/>
           </a:xfrm>
           <a:prstGeom prst="rect">
             <a:avLst/>
@@ -18094,7 +17250,7 @@
         <p:spPr>
           <a:xfrm>
             <a:off x="10012680" y="3474720"/>
-            <a:ext cx="867960" cy="867960"/>
+            <a:ext cx="867600" cy="867600"/>
           </a:xfrm>
           <a:prstGeom prst="rect">
             <a:avLst/>
@@ -18137,7 +17293,7 @@
         <p:spPr>
           <a:xfrm>
             <a:off x="10012680" y="3474720"/>
-            <a:ext cx="867960" cy="867960"/>
+            <a:ext cx="867600" cy="867600"/>
           </a:xfrm>
           <a:prstGeom prst="rect">
             <a:avLst/>
@@ -18242,7 +17398,7 @@
         <p:spPr>
           <a:xfrm>
             <a:off x="11292840" y="3611880"/>
-            <a:ext cx="365040" cy="547920"/>
+            <a:ext cx="364680" cy="547560"/>
           </a:xfrm>
           <a:prstGeom prst="rect">
             <a:avLst/>
@@ -18303,7 +17459,7 @@
         <p:spPr>
           <a:xfrm>
             <a:off x="8641080" y="4343400"/>
-            <a:ext cx="639360" cy="273600"/>
+            <a:ext cx="639000" cy="273240"/>
           </a:xfrm>
           <a:prstGeom prst="rect">
             <a:avLst/>
@@ -18364,7 +17520,7 @@
         <p:spPr>
           <a:xfrm>
             <a:off x="6263640" y="5943600"/>
-            <a:ext cx="5302800" cy="273600"/>
+            <a:ext cx="5302440" cy="273240"/>
           </a:xfrm>
           <a:prstGeom prst="rect">
             <a:avLst/>
@@ -18425,7 +17581,7 @@
         <p:spPr>
           <a:xfrm>
             <a:off x="0" y="6537960"/>
-            <a:ext cx="12188160" cy="319320"/>
+            <a:ext cx="12187800" cy="318960"/>
           </a:xfrm>
           <a:prstGeom prst="rect">
             <a:avLst/>
@@ -18468,7 +17624,7 @@
         <p:spPr>
           <a:xfrm>
             <a:off x="365760" y="6565320"/>
-            <a:ext cx="8228880" cy="273600"/>
+            <a:ext cx="8228520" cy="273240"/>
           </a:xfrm>
           <a:prstGeom prst="rect">
             <a:avLst/>
@@ -18529,7 +17685,7 @@
         <p:spPr>
           <a:xfrm>
             <a:off x="10908720" y="6565320"/>
-            <a:ext cx="913680" cy="273600"/>
+            <a:ext cx="913320" cy="273240"/>
           </a:xfrm>
           <a:prstGeom prst="rect">
             <a:avLst/>
@@ -18627,7 +17783,7 @@
         <p:spPr>
           <a:xfrm>
             <a:off x="457200" y="411480"/>
-            <a:ext cx="72360" cy="639360"/>
+            <a:ext cx="72000" cy="639000"/>
           </a:xfrm>
           <a:prstGeom prst="rect">
             <a:avLst/>
@@ -18646,7 +17802,7 @@
           <a:fontRef idx="minor"/>
         </p:style>
         <p:txBody>
-          <a:bodyPr lIns="36360" tIns="45000" rIns="36360" bIns="45000" anchor="t">
+          <a:bodyPr lIns="36000" tIns="45000" rIns="36000" bIns="45000" anchor="t">
             <a:noAutofit/>
           </a:bodyPr>
           <a:p>
@@ -18670,7 +17826,7 @@
         <p:spPr>
           <a:xfrm>
             <a:off x="685800" y="365760"/>
-            <a:ext cx="10816560" cy="593640"/>
+            <a:ext cx="10816200" cy="593280"/>
           </a:xfrm>
           <a:prstGeom prst="rect">
             <a:avLst/>
@@ -18731,7 +17887,7 @@
         <p:spPr>
           <a:xfrm>
             <a:off x="685800" y="960120"/>
-            <a:ext cx="10816560" cy="273600"/>
+            <a:ext cx="10816200" cy="273240"/>
           </a:xfrm>
           <a:prstGeom prst="rect">
             <a:avLst/>
@@ -19710,7 +18866,7 @@
         <p:spPr>
           <a:xfrm>
             <a:off x="8778240" y="1554480"/>
-            <a:ext cx="2925360" cy="4571280"/>
+            <a:ext cx="2925000" cy="4570920"/>
           </a:xfrm>
           <a:prstGeom prst="rect">
             <a:avLst/>
@@ -19763,7 +18919,7 @@
         <p:spPr>
           <a:xfrm>
             <a:off x="8778240" y="1554480"/>
-            <a:ext cx="2925360" cy="547920"/>
+            <a:ext cx="2925000" cy="547560"/>
           </a:xfrm>
           <a:prstGeom prst="rect">
             <a:avLst/>
@@ -19806,7 +18962,7 @@
         <p:spPr>
           <a:xfrm>
             <a:off x="8778240" y="1554480"/>
-            <a:ext cx="2925360" cy="547920"/>
+            <a:ext cx="2925000" cy="547560"/>
           </a:xfrm>
           <a:prstGeom prst="rect">
             <a:avLst/>
@@ -19867,7 +19023,7 @@
         <p:spPr>
           <a:xfrm>
             <a:off x="8961120" y="2240280"/>
-            <a:ext cx="2651040" cy="730800"/>
+            <a:ext cx="2650680" cy="730440"/>
           </a:xfrm>
           <a:prstGeom prst="rect">
             <a:avLst/>
@@ -19958,7 +19114,7 @@
         <p:spPr>
           <a:xfrm>
             <a:off x="8961120" y="3017520"/>
-            <a:ext cx="2651040" cy="730800"/>
+            <a:ext cx="2650680" cy="730440"/>
           </a:xfrm>
           <a:prstGeom prst="rect">
             <a:avLst/>
@@ -20049,7 +19205,7 @@
         <p:spPr>
           <a:xfrm>
             <a:off x="8961120" y="3794760"/>
-            <a:ext cx="2651040" cy="730800"/>
+            <a:ext cx="2650680" cy="730440"/>
           </a:xfrm>
           <a:prstGeom prst="rect">
             <a:avLst/>
@@ -20140,7 +19296,7 @@
         <p:spPr>
           <a:xfrm>
             <a:off x="8961120" y="4572000"/>
-            <a:ext cx="2651040" cy="730800"/>
+            <a:ext cx="2650680" cy="730440"/>
           </a:xfrm>
           <a:prstGeom prst="rect">
             <a:avLst/>
@@ -20231,7 +19387,7 @@
         <p:spPr>
           <a:xfrm>
             <a:off x="8961120" y="5349240"/>
-            <a:ext cx="2651040" cy="730800"/>
+            <a:ext cx="2650680" cy="730440"/>
           </a:xfrm>
           <a:prstGeom prst="rect">
             <a:avLst/>
@@ -20322,7 +19478,7 @@
         <p:spPr>
           <a:xfrm>
             <a:off x="0" y="6537960"/>
-            <a:ext cx="12188160" cy="319320"/>
+            <a:ext cx="12187800" cy="318960"/>
           </a:xfrm>
           <a:prstGeom prst="rect">
             <a:avLst/>
@@ -20365,7 +19521,7 @@
         <p:spPr>
           <a:xfrm>
             <a:off x="365760" y="6565320"/>
-            <a:ext cx="8228880" cy="273600"/>
+            <a:ext cx="8228520" cy="273240"/>
           </a:xfrm>
           <a:prstGeom prst="rect">
             <a:avLst/>
@@ -20426,7 +19582,7 @@
         <p:spPr>
           <a:xfrm>
             <a:off x="10908720" y="6565320"/>
-            <a:ext cx="913680" cy="273600"/>
+            <a:ext cx="913320" cy="273240"/>
           </a:xfrm>
           <a:prstGeom prst="rect">
             <a:avLst/>
@@ -20524,7 +19680,7 @@
         <p:spPr>
           <a:xfrm>
             <a:off x="457200" y="411480"/>
-            <a:ext cx="72360" cy="639360"/>
+            <a:ext cx="72000" cy="639000"/>
           </a:xfrm>
           <a:prstGeom prst="rect">
             <a:avLst/>
@@ -20543,7 +19699,7 @@
           <a:fontRef idx="minor"/>
         </p:style>
         <p:txBody>
-          <a:bodyPr lIns="36360" tIns="45000" rIns="36360" bIns="45000" anchor="t">
+          <a:bodyPr lIns="36000" tIns="45000" rIns="36000" bIns="45000" anchor="t">
             <a:noAutofit/>
           </a:bodyPr>
           <a:p>
@@ -20567,7 +19723,7 @@
         <p:spPr>
           <a:xfrm>
             <a:off x="685800" y="365760"/>
-            <a:ext cx="10816560" cy="593640"/>
+            <a:ext cx="10816200" cy="593280"/>
           </a:xfrm>
           <a:prstGeom prst="rect">
             <a:avLst/>
@@ -20628,7 +19784,7 @@
         <p:spPr>
           <a:xfrm>
             <a:off x="685800" y="960120"/>
-            <a:ext cx="10816560" cy="273600"/>
+            <a:ext cx="10816200" cy="273240"/>
           </a:xfrm>
           <a:prstGeom prst="rect">
             <a:avLst/>
@@ -22581,7 +21737,7 @@
         <p:spPr>
           <a:xfrm>
             <a:off x="640080" y="5897880"/>
-            <a:ext cx="10908000" cy="502200"/>
+            <a:ext cx="10907640" cy="501840"/>
           </a:xfrm>
           <a:prstGeom prst="rect">
             <a:avLst/>
@@ -22704,7 +21860,7 @@
         <p:spPr>
           <a:xfrm>
             <a:off x="0" y="6537960"/>
-            <a:ext cx="12188160" cy="319320"/>
+            <a:ext cx="12187800" cy="318960"/>
           </a:xfrm>
           <a:prstGeom prst="rect">
             <a:avLst/>
@@ -22747,7 +21903,7 @@
         <p:spPr>
           <a:xfrm>
             <a:off x="365760" y="6565320"/>
-            <a:ext cx="8228880" cy="273600"/>
+            <a:ext cx="8228520" cy="273240"/>
           </a:xfrm>
           <a:prstGeom prst="rect">
             <a:avLst/>
@@ -22808,7 +21964,7 @@
         <p:spPr>
           <a:xfrm>
             <a:off x="10908720" y="6565320"/>
-            <a:ext cx="913680" cy="273600"/>
+            <a:ext cx="913320" cy="273240"/>
           </a:xfrm>
           <a:prstGeom prst="rect">
             <a:avLst/>
@@ -22906,7 +22062,7 @@
         <p:spPr>
           <a:xfrm>
             <a:off x="457200" y="411480"/>
-            <a:ext cx="72360" cy="639360"/>
+            <a:ext cx="72000" cy="639000"/>
           </a:xfrm>
           <a:prstGeom prst="rect">
             <a:avLst/>
@@ -22925,7 +22081,7 @@
           <a:fontRef idx="minor"/>
         </p:style>
         <p:txBody>
-          <a:bodyPr lIns="36360" tIns="45000" rIns="36360" bIns="45000" anchor="t">
+          <a:bodyPr lIns="36000" tIns="45000" rIns="36000" bIns="45000" anchor="t">
             <a:noAutofit/>
           </a:bodyPr>
           <a:p>
@@ -22949,7 +22105,7 @@
         <p:spPr>
           <a:xfrm>
             <a:off x="685800" y="365760"/>
-            <a:ext cx="10816560" cy="593640"/>
+            <a:ext cx="10816200" cy="593280"/>
           </a:xfrm>
           <a:prstGeom prst="rect">
             <a:avLst/>
@@ -23010,7 +22166,7 @@
         <p:spPr>
           <a:xfrm>
             <a:off x="685800" y="960120"/>
-            <a:ext cx="10816560" cy="273600"/>
+            <a:ext cx="10816200" cy="273240"/>
           </a:xfrm>
           <a:prstGeom prst="rect">
             <a:avLst/>
@@ -23071,7 +22227,7 @@
         <p:spPr>
           <a:xfrm>
             <a:off x="676800" y="1828800"/>
-            <a:ext cx="1690920" cy="2193840"/>
+            <a:ext cx="1690560" cy="2193480"/>
           </a:xfrm>
           <a:prstGeom prst="rect">
             <a:avLst/>
@@ -23124,7 +22280,7 @@
         <p:spPr>
           <a:xfrm>
             <a:off x="676800" y="1828800"/>
-            <a:ext cx="1690920" cy="109080"/>
+            <a:ext cx="1690560" cy="108720"/>
           </a:xfrm>
           <a:prstGeom prst="rect">
             <a:avLst/>
@@ -23167,7 +22323,7 @@
         <p:spPr>
           <a:xfrm>
             <a:off x="1202400" y="2057400"/>
-            <a:ext cx="639360" cy="639360"/>
+            <a:ext cx="639000" cy="639000"/>
           </a:xfrm>
           <a:prstGeom prst="ellipse">
             <a:avLst/>
@@ -23210,7 +22366,7 @@
         <p:spPr>
           <a:xfrm>
             <a:off x="1202400" y="2057400"/>
-            <a:ext cx="639360" cy="639360"/>
+            <a:ext cx="639000" cy="639000"/>
           </a:xfrm>
           <a:prstGeom prst="rect">
             <a:avLst/>
@@ -23271,7 +22427,7 @@
         <p:spPr>
           <a:xfrm>
             <a:off x="768240" y="2788920"/>
-            <a:ext cx="1508040" cy="456480"/>
+            <a:ext cx="1507680" cy="456120"/>
           </a:xfrm>
           <a:prstGeom prst="rect">
             <a:avLst/>
@@ -23332,7 +22488,7 @@
         <p:spPr>
           <a:xfrm>
             <a:off x="768240" y="3246120"/>
-            <a:ext cx="1508040" cy="685080"/>
+            <a:ext cx="1507680" cy="684720"/>
           </a:xfrm>
           <a:prstGeom prst="rect">
             <a:avLst/>
@@ -23467,7 +22623,7 @@
         <p:spPr>
           <a:xfrm>
             <a:off x="2505600" y="1828800"/>
-            <a:ext cx="1690920" cy="2193840"/>
+            <a:ext cx="1690560" cy="2193480"/>
           </a:xfrm>
           <a:prstGeom prst="rect">
             <a:avLst/>
@@ -23520,7 +22676,7 @@
         <p:spPr>
           <a:xfrm>
             <a:off x="2505600" y="1828800"/>
-            <a:ext cx="1690920" cy="109080"/>
+            <a:ext cx="1690560" cy="108720"/>
           </a:xfrm>
           <a:prstGeom prst="rect">
             <a:avLst/>
@@ -23563,7 +22719,7 @@
         <p:spPr>
           <a:xfrm>
             <a:off x="3031200" y="2057400"/>
-            <a:ext cx="639360" cy="639360"/>
+            <a:ext cx="639000" cy="639000"/>
           </a:xfrm>
           <a:prstGeom prst="ellipse">
             <a:avLst/>
@@ -23606,7 +22762,7 @@
         <p:spPr>
           <a:xfrm>
             <a:off x="3031200" y="2057400"/>
-            <a:ext cx="639360" cy="639360"/>
+            <a:ext cx="639000" cy="639000"/>
           </a:xfrm>
           <a:prstGeom prst="rect">
             <a:avLst/>
@@ -23667,7 +22823,7 @@
         <p:spPr>
           <a:xfrm>
             <a:off x="2597040" y="2788920"/>
-            <a:ext cx="1508040" cy="456480"/>
+            <a:ext cx="1507680" cy="456120"/>
           </a:xfrm>
           <a:prstGeom prst="rect">
             <a:avLst/>
@@ -23728,7 +22884,7 @@
         <p:spPr>
           <a:xfrm>
             <a:off x="2597040" y="3246120"/>
-            <a:ext cx="1508040" cy="685080"/>
+            <a:ext cx="1507680" cy="684720"/>
           </a:xfrm>
           <a:prstGeom prst="rect">
             <a:avLst/>
@@ -23863,7 +23019,7 @@
         <p:spPr>
           <a:xfrm>
             <a:off x="4334400" y="1828800"/>
-            <a:ext cx="1690920" cy="2193840"/>
+            <a:ext cx="1690560" cy="2193480"/>
           </a:xfrm>
           <a:prstGeom prst="rect">
             <a:avLst/>
@@ -23916,7 +23072,7 @@
         <p:spPr>
           <a:xfrm>
             <a:off x="4334400" y="1828800"/>
-            <a:ext cx="1690920" cy="109080"/>
+            <a:ext cx="1690560" cy="108720"/>
           </a:xfrm>
           <a:prstGeom prst="rect">
             <a:avLst/>
@@ -23959,7 +23115,7 @@
         <p:spPr>
           <a:xfrm>
             <a:off x="4860000" y="2057400"/>
-            <a:ext cx="639360" cy="639360"/>
+            <a:ext cx="639000" cy="639000"/>
           </a:xfrm>
           <a:prstGeom prst="ellipse">
             <a:avLst/>
@@ -24002,7 +23158,7 @@
         <p:spPr>
           <a:xfrm>
             <a:off x="4860000" y="2057400"/>
-            <a:ext cx="639360" cy="639360"/>
+            <a:ext cx="639000" cy="639000"/>
           </a:xfrm>
           <a:prstGeom prst="rect">
             <a:avLst/>
@@ -24063,7 +23219,7 @@
         <p:spPr>
           <a:xfrm>
             <a:off x="4425840" y="2788920"/>
-            <a:ext cx="1508040" cy="456480"/>
+            <a:ext cx="1507680" cy="456120"/>
           </a:xfrm>
           <a:prstGeom prst="rect">
             <a:avLst/>
@@ -24124,7 +23280,7 @@
         <p:spPr>
           <a:xfrm>
             <a:off x="4425840" y="3246120"/>
-            <a:ext cx="1508040" cy="685080"/>
+            <a:ext cx="1507680" cy="684720"/>
           </a:xfrm>
           <a:prstGeom prst="rect">
             <a:avLst/>
@@ -24259,7 +23415,7 @@
         <p:spPr>
           <a:xfrm>
             <a:off x="6163200" y="1828800"/>
-            <a:ext cx="1690920" cy="2193840"/>
+            <a:ext cx="1690560" cy="2193480"/>
           </a:xfrm>
           <a:prstGeom prst="rect">
             <a:avLst/>
@@ -24312,7 +23468,7 @@
         <p:spPr>
           <a:xfrm>
             <a:off x="6163200" y="1828800"/>
-            <a:ext cx="1690920" cy="109080"/>
+            <a:ext cx="1690560" cy="108720"/>
           </a:xfrm>
           <a:prstGeom prst="rect">
             <a:avLst/>
@@ -24355,7 +23511,7 @@
         <p:spPr>
           <a:xfrm>
             <a:off x="6688800" y="2057400"/>
-            <a:ext cx="639360" cy="639360"/>
+            <a:ext cx="639000" cy="639000"/>
           </a:xfrm>
           <a:prstGeom prst="ellipse">
             <a:avLst/>
@@ -24398,7 +23554,7 @@
         <p:spPr>
           <a:xfrm>
             <a:off x="6688800" y="2057400"/>
-            <a:ext cx="639360" cy="639360"/>
+            <a:ext cx="639000" cy="639000"/>
           </a:xfrm>
           <a:prstGeom prst="rect">
             <a:avLst/>
@@ -24459,7 +23615,7 @@
         <p:spPr>
           <a:xfrm>
             <a:off x="6254640" y="2788920"/>
-            <a:ext cx="1508040" cy="456480"/>
+            <a:ext cx="1507680" cy="456120"/>
           </a:xfrm>
           <a:prstGeom prst="rect">
             <a:avLst/>
@@ -24520,7 +23676,7 @@
         <p:spPr>
           <a:xfrm>
             <a:off x="6254640" y="3246120"/>
-            <a:ext cx="1508040" cy="685080"/>
+            <a:ext cx="1507680" cy="684720"/>
           </a:xfrm>
           <a:prstGeom prst="rect">
             <a:avLst/>
@@ -24655,7 +23811,7 @@
         <p:spPr>
           <a:xfrm>
             <a:off x="7992000" y="1828800"/>
-            <a:ext cx="1690920" cy="2193840"/>
+            <a:ext cx="1690560" cy="2193480"/>
           </a:xfrm>
           <a:prstGeom prst="rect">
             <a:avLst/>
@@ -24708,7 +23864,7 @@
         <p:spPr>
           <a:xfrm>
             <a:off x="7992000" y="1828800"/>
-            <a:ext cx="1690920" cy="109080"/>
+            <a:ext cx="1690560" cy="108720"/>
           </a:xfrm>
           <a:prstGeom prst="rect">
             <a:avLst/>
@@ -24751,7 +23907,7 @@
         <p:spPr>
           <a:xfrm>
             <a:off x="8517600" y="2057400"/>
-            <a:ext cx="639360" cy="639360"/>
+            <a:ext cx="639000" cy="639000"/>
           </a:xfrm>
           <a:prstGeom prst="ellipse">
             <a:avLst/>
@@ -24794,7 +23950,7 @@
         <p:spPr>
           <a:xfrm>
             <a:off x="8517600" y="2057400"/>
-            <a:ext cx="639360" cy="639360"/>
+            <a:ext cx="639000" cy="639000"/>
           </a:xfrm>
           <a:prstGeom prst="rect">
             <a:avLst/>
@@ -24855,7 +24011,7 @@
         <p:spPr>
           <a:xfrm>
             <a:off x="8083440" y="2788920"/>
-            <a:ext cx="1508040" cy="456480"/>
+            <a:ext cx="1507680" cy="456120"/>
           </a:xfrm>
           <a:prstGeom prst="rect">
             <a:avLst/>
@@ -24916,7 +24072,7 @@
         <p:spPr>
           <a:xfrm>
             <a:off x="8083440" y="3246120"/>
-            <a:ext cx="1508040" cy="685080"/>
+            <a:ext cx="1507680" cy="684720"/>
           </a:xfrm>
           <a:prstGeom prst="rect">
             <a:avLst/>
@@ -25051,7 +24207,7 @@
         <p:spPr>
           <a:xfrm>
             <a:off x="9820800" y="1828800"/>
-            <a:ext cx="1690920" cy="2193840"/>
+            <a:ext cx="1690560" cy="2193480"/>
           </a:xfrm>
           <a:prstGeom prst="rect">
             <a:avLst/>
@@ -25104,7 +24260,7 @@
         <p:spPr>
           <a:xfrm>
             <a:off x="9820800" y="1828800"/>
-            <a:ext cx="1690920" cy="109080"/>
+            <a:ext cx="1690560" cy="108720"/>
           </a:xfrm>
           <a:prstGeom prst="rect">
             <a:avLst/>
@@ -25147,7 +24303,7 @@
         <p:spPr>
           <a:xfrm>
             <a:off x="10346400" y="2057400"/>
-            <a:ext cx="639360" cy="639360"/>
+            <a:ext cx="639000" cy="639000"/>
           </a:xfrm>
           <a:prstGeom prst="ellipse">
             <a:avLst/>
@@ -25190,7 +24346,7 @@
         <p:spPr>
           <a:xfrm>
             <a:off x="10346400" y="2057400"/>
-            <a:ext cx="639360" cy="639360"/>
+            <a:ext cx="639000" cy="639000"/>
           </a:xfrm>
           <a:prstGeom prst="rect">
             <a:avLst/>
@@ -25251,7 +24407,7 @@
         <p:spPr>
           <a:xfrm>
             <a:off x="9912240" y="2788920"/>
-            <a:ext cx="1508040" cy="456480"/>
+            <a:ext cx="1507680" cy="456120"/>
           </a:xfrm>
           <a:prstGeom prst="rect">
             <a:avLst/>
@@ -25312,7 +24468,7 @@
         <p:spPr>
           <a:xfrm>
             <a:off x="9912240" y="3246120"/>
-            <a:ext cx="1508040" cy="685080"/>
+            <a:ext cx="1507680" cy="684720"/>
           </a:xfrm>
           <a:prstGeom prst="rect">
             <a:avLst/>
@@ -25403,7 +24559,7 @@
         <p:spPr>
           <a:xfrm>
             <a:off x="640080" y="4663440"/>
-            <a:ext cx="10908000" cy="1690920"/>
+            <a:ext cx="10907640" cy="1690560"/>
           </a:xfrm>
           <a:prstGeom prst="rect">
             <a:avLst/>
@@ -25449,7 +24605,7 @@
         <p:spPr>
           <a:xfrm>
             <a:off x="640080" y="4663440"/>
-            <a:ext cx="72360" cy="1690920"/>
+            <a:ext cx="72000" cy="1690560"/>
           </a:xfrm>
           <a:prstGeom prst="rect">
             <a:avLst/>
@@ -25468,7 +24624,7 @@
           <a:fontRef idx="minor"/>
         </p:style>
         <p:txBody>
-          <a:bodyPr lIns="36360" tIns="45000" rIns="36360" bIns="45000" anchor="t">
+          <a:bodyPr lIns="36000" tIns="45000" rIns="36000" bIns="45000" anchor="t">
             <a:noAutofit/>
           </a:bodyPr>
           <a:p>
@@ -25492,7 +24648,7 @@
         <p:spPr>
           <a:xfrm>
             <a:off x="914400" y="4754880"/>
-            <a:ext cx="5485680" cy="273600"/>
+            <a:ext cx="5485320" cy="273240"/>
           </a:xfrm>
           <a:prstGeom prst="rect">
             <a:avLst/>
@@ -25553,7 +24709,7 @@
         <p:spPr>
           <a:xfrm>
             <a:off x="914400" y="5074920"/>
-            <a:ext cx="5211360" cy="1188000"/>
+            <a:ext cx="5211000" cy="1187640"/>
           </a:xfrm>
           <a:prstGeom prst="rect">
             <a:avLst/>
@@ -25646,7 +24802,7 @@
         <p:spPr>
           <a:xfrm>
             <a:off x="6217920" y="5074920"/>
-            <a:ext cx="5211360" cy="1188000"/>
+            <a:ext cx="5211000" cy="1187640"/>
           </a:xfrm>
           <a:prstGeom prst="rect">
             <a:avLst/>
@@ -25739,7 +24895,7 @@
         <p:spPr>
           <a:xfrm>
             <a:off x="0" y="6537960"/>
-            <a:ext cx="12188160" cy="319320"/>
+            <a:ext cx="12187800" cy="318960"/>
           </a:xfrm>
           <a:prstGeom prst="rect">
             <a:avLst/>
@@ -25782,7 +24938,7 @@
         <p:spPr>
           <a:xfrm>
             <a:off x="365760" y="6565320"/>
-            <a:ext cx="8228880" cy="273600"/>
+            <a:ext cx="8228520" cy="273240"/>
           </a:xfrm>
           <a:prstGeom prst="rect">
             <a:avLst/>
@@ -25843,7 +24999,7 @@
         <p:spPr>
           <a:xfrm>
             <a:off x="10908720" y="6565320"/>
-            <a:ext cx="913680" cy="273600"/>
+            <a:ext cx="913320" cy="273240"/>
           </a:xfrm>
           <a:prstGeom prst="rect">
             <a:avLst/>
@@ -25941,7 +25097,7 @@
         <p:spPr>
           <a:xfrm>
             <a:off x="457200" y="411480"/>
-            <a:ext cx="72360" cy="639360"/>
+            <a:ext cx="72000" cy="639000"/>
           </a:xfrm>
           <a:prstGeom prst="rect">
             <a:avLst/>
@@ -25960,7 +25116,7 @@
           <a:fontRef idx="minor"/>
         </p:style>
         <p:txBody>
-          <a:bodyPr lIns="36360" tIns="45000" rIns="36360" bIns="45000" anchor="t">
+          <a:bodyPr lIns="36000" tIns="45000" rIns="36000" bIns="45000" anchor="t">
             <a:noAutofit/>
           </a:bodyPr>
           <a:p>
@@ -25984,7 +25140,7 @@
         <p:spPr>
           <a:xfrm>
             <a:off x="685800" y="365760"/>
-            <a:ext cx="10816560" cy="593640"/>
+            <a:ext cx="10816200" cy="593280"/>
           </a:xfrm>
           <a:prstGeom prst="rect">
             <a:avLst/>
@@ -26045,7 +25201,7 @@
         <p:spPr>
           <a:xfrm>
             <a:off x="685800" y="960120"/>
-            <a:ext cx="10816560" cy="273600"/>
+            <a:ext cx="10816200" cy="273240"/>
           </a:xfrm>
           <a:prstGeom prst="rect">
             <a:avLst/>
@@ -26106,7 +25262,7 @@
         <p:spPr>
           <a:xfrm>
             <a:off x="640080" y="1554480"/>
-            <a:ext cx="5668560" cy="4754160"/>
+            <a:ext cx="5668200" cy="4753800"/>
           </a:xfrm>
           <a:prstGeom prst="rect">
             <a:avLst/>
@@ -26159,7 +25315,7 @@
         <p:spPr>
           <a:xfrm>
             <a:off x="822960" y="1691640"/>
-            <a:ext cx="5302800" cy="273600"/>
+            <a:ext cx="5302440" cy="273240"/>
           </a:xfrm>
           <a:prstGeom prst="rect">
             <a:avLst/>
@@ -26220,7 +25376,7 @@
         <p:spPr>
           <a:xfrm>
             <a:off x="914400" y="2103120"/>
-            <a:ext cx="5119920" cy="639360"/>
+            <a:ext cx="5119560" cy="639000"/>
           </a:xfrm>
           <a:prstGeom prst="rect">
             <a:avLst/>
@@ -26263,7 +25419,7 @@
         <p:spPr>
           <a:xfrm>
             <a:off x="1097280" y="2103120"/>
-            <a:ext cx="3199680" cy="639360"/>
+            <a:ext cx="3199320" cy="639000"/>
           </a:xfrm>
           <a:prstGeom prst="rect">
             <a:avLst/>
@@ -26324,7 +25480,7 @@
         <p:spPr>
           <a:xfrm>
             <a:off x="4297680" y="2103120"/>
-            <a:ext cx="1645200" cy="639360"/>
+            <a:ext cx="1644840" cy="639000"/>
           </a:xfrm>
           <a:prstGeom prst="rect">
             <a:avLst/>
@@ -26429,7 +25585,7 @@
         <p:spPr>
           <a:xfrm>
             <a:off x="914400" y="2834640"/>
-            <a:ext cx="5119920" cy="639360"/>
+            <a:ext cx="5119560" cy="639000"/>
           </a:xfrm>
           <a:prstGeom prst="rect">
             <a:avLst/>
@@ -26472,7 +25628,7 @@
         <p:spPr>
           <a:xfrm>
             <a:off x="1097280" y="2834640"/>
-            <a:ext cx="3199680" cy="639360"/>
+            <a:ext cx="3199320" cy="639000"/>
           </a:xfrm>
           <a:prstGeom prst="rect">
             <a:avLst/>
@@ -26533,7 +25689,7 @@
         <p:spPr>
           <a:xfrm>
             <a:off x="4297680" y="2834640"/>
-            <a:ext cx="1645200" cy="639360"/>
+            <a:ext cx="1644840" cy="639000"/>
           </a:xfrm>
           <a:prstGeom prst="rect">
             <a:avLst/>
@@ -26638,7 +25794,7 @@
         <p:spPr>
           <a:xfrm>
             <a:off x="914400" y="3566160"/>
-            <a:ext cx="5119920" cy="639360"/>
+            <a:ext cx="5119560" cy="639000"/>
           </a:xfrm>
           <a:prstGeom prst="rect">
             <a:avLst/>
@@ -26681,7 +25837,7 @@
         <p:spPr>
           <a:xfrm>
             <a:off x="1097280" y="3566160"/>
-            <a:ext cx="3199680" cy="639360"/>
+            <a:ext cx="3199320" cy="639000"/>
           </a:xfrm>
           <a:prstGeom prst="rect">
             <a:avLst/>
@@ -26742,7 +25898,7 @@
         <p:spPr>
           <a:xfrm>
             <a:off x="4297680" y="3566160"/>
-            <a:ext cx="1645200" cy="639360"/>
+            <a:ext cx="1644840" cy="639000"/>
           </a:xfrm>
           <a:prstGeom prst="rect">
             <a:avLst/>
@@ -26847,7 +26003,7 @@
         <p:spPr>
           <a:xfrm>
             <a:off x="914400" y="4297680"/>
-            <a:ext cx="5119920" cy="639360"/>
+            <a:ext cx="5119560" cy="639000"/>
           </a:xfrm>
           <a:prstGeom prst="rect">
             <a:avLst/>
@@ -26890,7 +26046,7 @@
         <p:spPr>
           <a:xfrm>
             <a:off x="1097280" y="4297680"/>
-            <a:ext cx="3199680" cy="639360"/>
+            <a:ext cx="3199320" cy="639000"/>
           </a:xfrm>
           <a:prstGeom prst="rect">
             <a:avLst/>
@@ -26951,7 +26107,7 @@
         <p:spPr>
           <a:xfrm>
             <a:off x="4297680" y="4297680"/>
-            <a:ext cx="1645200" cy="639360"/>
+            <a:ext cx="1644840" cy="639000"/>
           </a:xfrm>
           <a:prstGeom prst="rect">
             <a:avLst/>
@@ -27056,7 +26212,7 @@
         <p:spPr>
           <a:xfrm>
             <a:off x="914400" y="5029200"/>
-            <a:ext cx="5119920" cy="639360"/>
+            <a:ext cx="5119560" cy="639000"/>
           </a:xfrm>
           <a:prstGeom prst="rect">
             <a:avLst/>
@@ -27099,7 +26255,7 @@
         <p:spPr>
           <a:xfrm>
             <a:off x="1097280" y="5029200"/>
-            <a:ext cx="3199680" cy="639360"/>
+            <a:ext cx="3199320" cy="639000"/>
           </a:xfrm>
           <a:prstGeom prst="rect">
             <a:avLst/>
@@ -27160,7 +26316,7 @@
         <p:spPr>
           <a:xfrm>
             <a:off x="4297680" y="5029200"/>
-            <a:ext cx="1645200" cy="639360"/>
+            <a:ext cx="1644840" cy="639000"/>
           </a:xfrm>
           <a:prstGeom prst="rect">
             <a:avLst/>
@@ -27221,7 +26377,7 @@
         <p:spPr>
           <a:xfrm>
             <a:off x="6675120" y="1554480"/>
-            <a:ext cx="5028480" cy="365040"/>
+            <a:ext cx="5028120" cy="364680"/>
           </a:xfrm>
           <a:prstGeom prst="rect">
             <a:avLst/>
@@ -27282,7 +26438,7 @@
         <p:spPr>
           <a:xfrm>
             <a:off x="6675120" y="2057400"/>
-            <a:ext cx="5028480" cy="502200"/>
+            <a:ext cx="5028120" cy="501840"/>
           </a:xfrm>
           <a:prstGeom prst="rect">
             <a:avLst/>
@@ -27328,7 +26484,7 @@
         <p:spPr>
           <a:xfrm>
             <a:off x="6812280" y="2057400"/>
-            <a:ext cx="2010960" cy="502200"/>
+            <a:ext cx="2010600" cy="501840"/>
           </a:xfrm>
           <a:prstGeom prst="rect">
             <a:avLst/>
@@ -27389,7 +26545,7 @@
         <p:spPr>
           <a:xfrm>
             <a:off x="8823960" y="2057400"/>
-            <a:ext cx="2742480" cy="502200"/>
+            <a:ext cx="2742120" cy="501840"/>
           </a:xfrm>
           <a:prstGeom prst="rect">
             <a:avLst/>
@@ -27450,7 +26606,7 @@
         <p:spPr>
           <a:xfrm>
             <a:off x="6675120" y="2560320"/>
-            <a:ext cx="5028480" cy="502200"/>
+            <a:ext cx="5028120" cy="501840"/>
           </a:xfrm>
           <a:prstGeom prst="rect">
             <a:avLst/>
@@ -27496,7 +26652,7 @@
         <p:spPr>
           <a:xfrm>
             <a:off x="6812280" y="2560320"/>
-            <a:ext cx="2010960" cy="502200"/>
+            <a:ext cx="2010600" cy="501840"/>
           </a:xfrm>
           <a:prstGeom prst="rect">
             <a:avLst/>
@@ -27557,7 +26713,7 @@
         <p:spPr>
           <a:xfrm>
             <a:off x="8823960" y="2560320"/>
-            <a:ext cx="2742480" cy="502200"/>
+            <a:ext cx="2742120" cy="501840"/>
           </a:xfrm>
           <a:prstGeom prst="rect">
             <a:avLst/>
@@ -27618,7 +26774,7 @@
         <p:spPr>
           <a:xfrm>
             <a:off x="6675120" y="3063240"/>
-            <a:ext cx="5028480" cy="502200"/>
+            <a:ext cx="5028120" cy="501840"/>
           </a:xfrm>
           <a:prstGeom prst="rect">
             <a:avLst/>
@@ -27664,7 +26820,7 @@
         <p:spPr>
           <a:xfrm>
             <a:off x="6812280" y="3063240"/>
-            <a:ext cx="2010960" cy="502200"/>
+            <a:ext cx="2010600" cy="501840"/>
           </a:xfrm>
           <a:prstGeom prst="rect">
             <a:avLst/>
@@ -27725,7 +26881,7 @@
         <p:spPr>
           <a:xfrm>
             <a:off x="8823960" y="3063240"/>
-            <a:ext cx="2742480" cy="502200"/>
+            <a:ext cx="2742120" cy="501840"/>
           </a:xfrm>
           <a:prstGeom prst="rect">
             <a:avLst/>
@@ -27786,7 +26942,7 @@
         <p:spPr>
           <a:xfrm>
             <a:off x="6675120" y="3566160"/>
-            <a:ext cx="5028480" cy="502200"/>
+            <a:ext cx="5028120" cy="501840"/>
           </a:xfrm>
           <a:prstGeom prst="rect">
             <a:avLst/>
@@ -27832,7 +26988,7 @@
         <p:spPr>
           <a:xfrm>
             <a:off x="6812280" y="3566160"/>
-            <a:ext cx="2010960" cy="502200"/>
+            <a:ext cx="2010600" cy="501840"/>
           </a:xfrm>
           <a:prstGeom prst="rect">
             <a:avLst/>
@@ -27893,7 +27049,7 @@
         <p:spPr>
           <a:xfrm>
             <a:off x="8823960" y="3566160"/>
-            <a:ext cx="2742480" cy="502200"/>
+            <a:ext cx="2742120" cy="501840"/>
           </a:xfrm>
           <a:prstGeom prst="rect">
             <a:avLst/>
@@ -27954,7 +27110,7 @@
         <p:spPr>
           <a:xfrm>
             <a:off x="6675120" y="4069080"/>
-            <a:ext cx="5028480" cy="502200"/>
+            <a:ext cx="5028120" cy="501840"/>
           </a:xfrm>
           <a:prstGeom prst="rect">
             <a:avLst/>
@@ -28000,7 +27156,7 @@
         <p:spPr>
           <a:xfrm>
             <a:off x="6812280" y="4069080"/>
-            <a:ext cx="2010960" cy="502200"/>
+            <a:ext cx="2010600" cy="501840"/>
           </a:xfrm>
           <a:prstGeom prst="rect">
             <a:avLst/>
@@ -28061,7 +27217,7 @@
         <p:spPr>
           <a:xfrm>
             <a:off x="8823960" y="4069080"/>
-            <a:ext cx="2742480" cy="502200"/>
+            <a:ext cx="2742120" cy="501840"/>
           </a:xfrm>
           <a:prstGeom prst="rect">
             <a:avLst/>
@@ -28122,7 +27278,7 @@
         <p:spPr>
           <a:xfrm>
             <a:off x="6675120" y="4572000"/>
-            <a:ext cx="5028480" cy="502200"/>
+            <a:ext cx="5028120" cy="501840"/>
           </a:xfrm>
           <a:prstGeom prst="rect">
             <a:avLst/>
@@ -28168,7 +27324,7 @@
         <p:spPr>
           <a:xfrm>
             <a:off x="6812280" y="4572000"/>
-            <a:ext cx="2010960" cy="502200"/>
+            <a:ext cx="2010600" cy="501840"/>
           </a:xfrm>
           <a:prstGeom prst="rect">
             <a:avLst/>
@@ -28229,7 +27385,7 @@
         <p:spPr>
           <a:xfrm>
             <a:off x="8823960" y="4572000"/>
-            <a:ext cx="2742480" cy="502200"/>
+            <a:ext cx="2742120" cy="501840"/>
           </a:xfrm>
           <a:prstGeom prst="rect">
             <a:avLst/>
@@ -28290,7 +27446,7 @@
         <p:spPr>
           <a:xfrm>
             <a:off x="6675120" y="5074920"/>
-            <a:ext cx="5028480" cy="502200"/>
+            <a:ext cx="5028120" cy="501840"/>
           </a:xfrm>
           <a:prstGeom prst="rect">
             <a:avLst/>
@@ -28336,7 +27492,7 @@
         <p:spPr>
           <a:xfrm>
             <a:off x="6812280" y="5074920"/>
-            <a:ext cx="2010960" cy="502200"/>
+            <a:ext cx="2010600" cy="501840"/>
           </a:xfrm>
           <a:prstGeom prst="rect">
             <a:avLst/>
@@ -28397,7 +27553,7 @@
         <p:spPr>
           <a:xfrm>
             <a:off x="8823960" y="5074920"/>
-            <a:ext cx="2742480" cy="502200"/>
+            <a:ext cx="2742120" cy="501840"/>
           </a:xfrm>
           <a:prstGeom prst="rect">
             <a:avLst/>
@@ -28458,7 +27614,7 @@
         <p:spPr>
           <a:xfrm>
             <a:off x="6675120" y="5669280"/>
-            <a:ext cx="5028480" cy="639360"/>
+            <a:ext cx="5028120" cy="639000"/>
           </a:xfrm>
           <a:prstGeom prst="rect">
             <a:avLst/>
@@ -28501,7 +27657,7 @@
         <p:spPr>
           <a:xfrm>
             <a:off x="6812280" y="5669280"/>
-            <a:ext cx="4754160" cy="639360"/>
+            <a:ext cx="4753800" cy="639000"/>
           </a:xfrm>
           <a:prstGeom prst="rect">
             <a:avLst/>
@@ -28562,7 +27718,7 @@
         <p:spPr>
           <a:xfrm>
             <a:off x="0" y="6537960"/>
-            <a:ext cx="12188160" cy="319320"/>
+            <a:ext cx="12187800" cy="318960"/>
           </a:xfrm>
           <a:prstGeom prst="rect">
             <a:avLst/>
@@ -28605,7 +27761,7 @@
         <p:spPr>
           <a:xfrm>
             <a:off x="365760" y="6565320"/>
-            <a:ext cx="8228880" cy="273600"/>
+            <a:ext cx="8228520" cy="273240"/>
           </a:xfrm>
           <a:prstGeom prst="rect">
             <a:avLst/>
@@ -28666,7 +27822,7 @@
         <p:spPr>
           <a:xfrm>
             <a:off x="10908720" y="6565320"/>
-            <a:ext cx="913680" cy="273600"/>
+            <a:ext cx="913320" cy="273240"/>
           </a:xfrm>
           <a:prstGeom prst="rect">
             <a:avLst/>
